--- a/presentation/warden.pptx
+++ b/presentation/warden.pptx
@@ -19,6 +19,8 @@
     <p:sldId id="267" r:id="rId18"/>
     <p:sldId id="268" r:id="rId19"/>
     <p:sldId id="269" r:id="rId20"/>
+    <p:sldId id="270" r:id="rId21"/>
+    <p:sldId id="271" r:id="rId22"/>
   </p:sldIdLst>
   <p:sldSz cx="12188952" cy="6858000" type="screen4x3"/>
   <p:notesSz cx="6858000" cy="9144000"/>
@@ -7406,7 +7408,7 @@
             <a:avLst/>
           </a:prstGeom>
           <a:solidFill>
-            <a:srgbClr val="1A1B23"/>
+            <a:srgbClr val="12131A"/>
           </a:solidFill>
           <a:ln w="12700">
             <a:noFill/>
@@ -7531,7 +7533,7 @@
                   <a:srgbClr val="3B82F6"/>
                 </a:solidFill>
               </a:rPr>
-              <a:t>Tier 2 (CI/CD scan)</a:t>
+              <a:t>Tier 2 (DiffGuard &amp; Lock)</a:t>
             </a:r>
           </a:p>
         </p:txBody>
@@ -7565,7 +7567,7 @@
                   <a:srgbClr val="10B981"/>
                 </a:solidFill>
               </a:rPr>
-              <a:t>In progress</a:t>
+              <a:t>Active Guard</a:t>
             </a:r>
           </a:p>
         </p:txBody>
@@ -10203,6 +10205,8556 @@
                 </a:solidFill>
               </a:rPr>
               <a:t>Architecture beats brute force. Route smarter, not harder.   ·   MIT Licensed   ·   AMD ROCm™</a:t>
+            </a:r>
+          </a:p>
+        </p:txBody>
+      </p:sp>
+    </p:spTree>
+  </p:cSld>
+  <p:clrMapOvr>
+    <a:masterClrMapping/>
+  </p:clrMapOvr>
+</p:sld>
+</file>
+
+<file path=ppt/slides/slide15.xml><?xml version="1.0" encoding="utf-8"?>
+<p:sld xmlns:a="http://schemas.openxmlformats.org/drawingml/2006/main" xmlns:p="http://schemas.openxmlformats.org/presentationml/2006/main" xmlns:r="http://schemas.openxmlformats.org/officeDocument/2006/relationships">
+  <p:cSld>
+    <p:bg>
+      <p:bgPr>
+        <a:solidFill>
+          <a:srgbClr val="050508"/>
+        </a:solidFill>
+        <a:effectLst/>
+      </p:bgPr>
+    </p:bg>
+    <p:spTree>
+      <p:nvGrpSpPr>
+        <p:cNvPr id="1" name=""/>
+        <p:cNvGrpSpPr/>
+        <p:nvPr/>
+      </p:nvGrpSpPr>
+      <p:grpSpPr/>
+      <p:sp>
+        <p:nvSpPr>
+          <p:cNvPr id="2" name="Rectangle 1"/>
+          <p:cNvSpPr/>
+          <p:nvPr/>
+        </p:nvSpPr>
+        <p:spPr>
+          <a:xfrm>
+            <a:off x="0" y="0"/>
+            <a:ext cx="73152" cy="6858000"/>
+          </a:xfrm>
+          <a:prstGeom prst="rect">
+            <a:avLst/>
+          </a:prstGeom>
+          <a:solidFill>
+            <a:srgbClr val="10B981"/>
+          </a:solidFill>
+          <a:ln w="12700">
+            <a:noFill/>
+          </a:ln>
+        </p:spPr>
+        <p:style>
+          <a:lnRef idx="1">
+            <a:schemeClr val="accent1"/>
+          </a:lnRef>
+          <a:fillRef idx="3">
+            <a:schemeClr val="accent1"/>
+          </a:fillRef>
+          <a:effectRef idx="2">
+            <a:schemeClr val="accent1"/>
+          </a:effectRef>
+          <a:fontRef idx="minor">
+            <a:schemeClr val="lt1"/>
+          </a:fontRef>
+        </p:style>
+        <p:txBody>
+          <a:bodyPr rtlCol="0" anchor="ctr"/>
+          <a:lstStyle/>
+          <a:p>
+            <a:pPr algn="ctr"/>
+          </a:p>
+        </p:txBody>
+      </p:sp>
+      <p:sp>
+        <p:nvSpPr>
+          <p:cNvPr id="3" name="TextBox 2"/>
+          <p:cNvSpPr txBox="1"/>
+          <p:nvPr/>
+        </p:nvSpPr>
+        <p:spPr>
+          <a:xfrm>
+            <a:off x="365760" y="164592"/>
+            <a:ext cx="11430000" cy="502920"/>
+          </a:xfrm>
+          <a:prstGeom prst="rect">
+            <a:avLst/>
+          </a:prstGeom>
+          <a:noFill/>
+        </p:spPr>
+        <p:txBody>
+          <a:bodyPr wrap="square">
+            <a:spAutoFit/>
+          </a:bodyPr>
+          <a:lstStyle/>
+          <a:p>
+            <a:pPr algn="l"/>
+            <a:r>
+              <a:rPr sz="3000" b="1">
+                <a:solidFill>
+                  <a:srgbClr val="FFFFFF"/>
+                </a:solidFill>
+              </a:rPr>
+              <a:t>Attack Family Detection Breakdown</a:t>
+            </a:r>
+          </a:p>
+        </p:txBody>
+      </p:sp>
+      <p:sp>
+        <p:nvSpPr>
+          <p:cNvPr id="4" name="TextBox 3"/>
+          <p:cNvSpPr txBox="1"/>
+          <p:nvPr/>
+        </p:nvSpPr>
+        <p:spPr>
+          <a:xfrm>
+            <a:off x="365760" y="713232"/>
+            <a:ext cx="11430000" cy="274320"/>
+          </a:xfrm>
+          <a:prstGeom prst="rect">
+            <a:avLst/>
+          </a:prstGeom>
+          <a:noFill/>
+        </p:spPr>
+        <p:txBody>
+          <a:bodyPr wrap="square">
+            <a:spAutoFit/>
+          </a:bodyPr>
+          <a:lstStyle/>
+          <a:p>
+            <a:pPr algn="l"/>
+            <a:r>
+              <a:rPr sz="950" b="0">
+                <a:solidFill>
+                  <a:srgbClr val="94A3B8"/>
+                </a:solidFill>
+              </a:rPr>
+              <a:t>210 samples  ·  12 attack families + 1 benign control  ·  Precision = 100%  ·  Zero False Positives</a:t>
+            </a:r>
+          </a:p>
+        </p:txBody>
+      </p:sp>
+      <p:sp>
+        <p:nvSpPr>
+          <p:cNvPr id="5" name="Rectangle 4"/>
+          <p:cNvSpPr/>
+          <p:nvPr/>
+        </p:nvSpPr>
+        <p:spPr>
+          <a:xfrm>
+            <a:off x="365760" y="987552"/>
+            <a:ext cx="11430000" cy="38100"/>
+          </a:xfrm>
+          <a:prstGeom prst="rect">
+            <a:avLst/>
+          </a:prstGeom>
+          <a:solidFill>
+            <a:srgbClr val="10B981"/>
+          </a:solidFill>
+          <a:ln>
+            <a:noFill/>
+          </a:ln>
+        </p:spPr>
+        <p:style>
+          <a:lnRef idx="1">
+            <a:schemeClr val="accent1"/>
+          </a:lnRef>
+          <a:fillRef idx="3">
+            <a:schemeClr val="accent1"/>
+          </a:fillRef>
+          <a:effectRef idx="2">
+            <a:schemeClr val="accent1"/>
+          </a:effectRef>
+          <a:fontRef idx="minor">
+            <a:schemeClr val="lt1"/>
+          </a:fontRef>
+        </p:style>
+        <p:txBody>
+          <a:bodyPr rtlCol="0" anchor="ctr"/>
+          <a:lstStyle/>
+          <a:p>
+            <a:pPr algn="ctr"/>
+          </a:p>
+        </p:txBody>
+      </p:sp>
+      <p:sp>
+        <p:nvSpPr>
+          <p:cNvPr id="6" name="Rectangle 5"/>
+          <p:cNvSpPr/>
+          <p:nvPr/>
+        </p:nvSpPr>
+        <p:spPr>
+          <a:xfrm>
+            <a:off x="365760" y="1042415"/>
+            <a:ext cx="11430000" cy="320040"/>
+          </a:xfrm>
+          <a:prstGeom prst="rect">
+            <a:avLst/>
+          </a:prstGeom>
+          <a:solidFill>
+            <a:srgbClr val="161722"/>
+          </a:solidFill>
+          <a:ln w="12700">
+            <a:noFill/>
+          </a:ln>
+        </p:spPr>
+        <p:style>
+          <a:lnRef idx="1">
+            <a:schemeClr val="accent1"/>
+          </a:lnRef>
+          <a:fillRef idx="3">
+            <a:schemeClr val="accent1"/>
+          </a:fillRef>
+          <a:effectRef idx="2">
+            <a:schemeClr val="accent1"/>
+          </a:effectRef>
+          <a:fontRef idx="minor">
+            <a:schemeClr val="lt1"/>
+          </a:fontRef>
+        </p:style>
+        <p:txBody>
+          <a:bodyPr rtlCol="0" anchor="ctr"/>
+          <a:lstStyle/>
+          <a:p>
+            <a:pPr algn="ctr"/>
+          </a:p>
+        </p:txBody>
+      </p:sp>
+      <p:sp>
+        <p:nvSpPr>
+          <p:cNvPr id="7" name="TextBox 6"/>
+          <p:cNvSpPr txBox="1"/>
+          <p:nvPr/>
+        </p:nvSpPr>
+        <p:spPr>
+          <a:xfrm>
+            <a:off x="457200" y="1078992"/>
+            <a:ext cx="2834640" cy="256032"/>
+          </a:xfrm>
+          <a:prstGeom prst="rect">
+            <a:avLst/>
+          </a:prstGeom>
+          <a:noFill/>
+        </p:spPr>
+        <p:txBody>
+          <a:bodyPr wrap="square">
+            <a:spAutoFit/>
+          </a:bodyPr>
+          <a:lstStyle/>
+          <a:p>
+            <a:pPr algn="l"/>
+            <a:r>
+              <a:rPr sz="850" b="1">
+                <a:solidFill>
+                  <a:srgbClr val="94A3B8"/>
+                </a:solidFill>
+              </a:rPr>
+              <a:t>ATTACK FAMILY</a:t>
+            </a:r>
+          </a:p>
+        </p:txBody>
+      </p:sp>
+      <p:sp>
+        <p:nvSpPr>
+          <p:cNvPr id="8" name="TextBox 7"/>
+          <p:cNvSpPr txBox="1"/>
+          <p:nvPr/>
+        </p:nvSpPr>
+        <p:spPr>
+          <a:xfrm>
+            <a:off x="3310128" y="1078992"/>
+            <a:ext cx="731520" cy="256032"/>
+          </a:xfrm>
+          <a:prstGeom prst="rect">
+            <a:avLst/>
+          </a:prstGeom>
+          <a:noFill/>
+        </p:spPr>
+        <p:txBody>
+          <a:bodyPr wrap="square">
+            <a:spAutoFit/>
+          </a:bodyPr>
+          <a:lstStyle/>
+          <a:p>
+            <a:pPr algn="l"/>
+            <a:r>
+              <a:rPr sz="850" b="1">
+                <a:solidFill>
+                  <a:srgbClr val="94A3B8"/>
+                </a:solidFill>
+              </a:rPr>
+              <a:t>RECALL %</a:t>
+            </a:r>
+          </a:p>
+        </p:txBody>
+      </p:sp>
+      <p:sp>
+        <p:nvSpPr>
+          <p:cNvPr id="9" name="TextBox 8"/>
+          <p:cNvSpPr txBox="1"/>
+          <p:nvPr/>
+        </p:nvSpPr>
+        <p:spPr>
+          <a:xfrm>
+            <a:off x="4160520" y="1078992"/>
+            <a:ext cx="4754880" cy="256032"/>
+          </a:xfrm>
+          <a:prstGeom prst="rect">
+            <a:avLst/>
+          </a:prstGeom>
+          <a:noFill/>
+        </p:spPr>
+        <p:txBody>
+          <a:bodyPr wrap="square">
+            <a:spAutoFit/>
+          </a:bodyPr>
+          <a:lstStyle/>
+          <a:p>
+            <a:pPr algn="l"/>
+            <a:r>
+              <a:rPr sz="850" b="1">
+                <a:solidFill>
+                  <a:srgbClr val="94A3B8"/>
+                </a:solidFill>
+              </a:rPr>
+              <a:t>DETECTION BAR  (max = 26.7%)</a:t>
+            </a:r>
+          </a:p>
+        </p:txBody>
+      </p:sp>
+      <p:sp>
+        <p:nvSpPr>
+          <p:cNvPr id="10" name="TextBox 9"/>
+          <p:cNvSpPr txBox="1"/>
+          <p:nvPr/>
+        </p:nvSpPr>
+        <p:spPr>
+          <a:xfrm>
+            <a:off x="8979408" y="1078992"/>
+            <a:ext cx="365760" cy="256032"/>
+          </a:xfrm>
+          <a:prstGeom prst="rect">
+            <a:avLst/>
+          </a:prstGeom>
+          <a:noFill/>
+        </p:spPr>
+        <p:txBody>
+          <a:bodyPr wrap="square">
+            <a:spAutoFit/>
+          </a:bodyPr>
+          <a:lstStyle/>
+          <a:p>
+            <a:pPr algn="ctr"/>
+            <a:r>
+              <a:rPr sz="850" b="1">
+                <a:solidFill>
+                  <a:srgbClr val="94A3B8"/>
+                </a:solidFill>
+              </a:rPr>
+              <a:t>TP</a:t>
+            </a:r>
+          </a:p>
+        </p:txBody>
+      </p:sp>
+      <p:sp>
+        <p:nvSpPr>
+          <p:cNvPr id="11" name="TextBox 10"/>
+          <p:cNvSpPr txBox="1"/>
+          <p:nvPr/>
+        </p:nvSpPr>
+        <p:spPr>
+          <a:xfrm>
+            <a:off x="9345168" y="1078992"/>
+            <a:ext cx="365760" cy="256032"/>
+          </a:xfrm>
+          <a:prstGeom prst="rect">
+            <a:avLst/>
+          </a:prstGeom>
+          <a:noFill/>
+        </p:spPr>
+        <p:txBody>
+          <a:bodyPr wrap="square">
+            <a:spAutoFit/>
+          </a:bodyPr>
+          <a:lstStyle/>
+          <a:p>
+            <a:pPr algn="ctr"/>
+            <a:r>
+              <a:rPr sz="850" b="1">
+                <a:solidFill>
+                  <a:srgbClr val="94A3B8"/>
+                </a:solidFill>
+              </a:rPr>
+              <a:t>FN</a:t>
+            </a:r>
+          </a:p>
+        </p:txBody>
+      </p:sp>
+      <p:sp>
+        <p:nvSpPr>
+          <p:cNvPr id="12" name="TextBox 11"/>
+          <p:cNvSpPr txBox="1"/>
+          <p:nvPr/>
+        </p:nvSpPr>
+        <p:spPr>
+          <a:xfrm>
+            <a:off x="9802368" y="1078992"/>
+            <a:ext cx="457200" cy="256032"/>
+          </a:xfrm>
+          <a:prstGeom prst="rect">
+            <a:avLst/>
+          </a:prstGeom>
+          <a:noFill/>
+        </p:spPr>
+        <p:txBody>
+          <a:bodyPr wrap="square">
+            <a:spAutoFit/>
+          </a:bodyPr>
+          <a:lstStyle/>
+          <a:p>
+            <a:pPr algn="ctr"/>
+            <a:r>
+              <a:rPr sz="850" b="1">
+                <a:solidFill>
+                  <a:srgbClr val="94A3B8"/>
+                </a:solidFill>
+              </a:rPr>
+              <a:t>F1</a:t>
+            </a:r>
+          </a:p>
+        </p:txBody>
+      </p:sp>
+      <p:sp>
+        <p:nvSpPr>
+          <p:cNvPr id="13" name="TextBox 12"/>
+          <p:cNvSpPr txBox="1"/>
+          <p:nvPr/>
+        </p:nvSpPr>
+        <p:spPr>
+          <a:xfrm>
+            <a:off x="10314432" y="1078992"/>
+            <a:ext cx="822960" cy="256032"/>
+          </a:xfrm>
+          <a:prstGeom prst="rect">
+            <a:avLst/>
+          </a:prstGeom>
+          <a:noFill/>
+        </p:spPr>
+        <p:txBody>
+          <a:bodyPr wrap="square">
+            <a:spAutoFit/>
+          </a:bodyPr>
+          <a:lstStyle/>
+          <a:p>
+            <a:pPr algn="r"/>
+            <a:r>
+              <a:rPr sz="850" b="1">
+                <a:solidFill>
+                  <a:srgbClr val="94A3B8"/>
+                </a:solidFill>
+              </a:rPr>
+              <a:t>AVG ms</a:t>
+            </a:r>
+          </a:p>
+        </p:txBody>
+      </p:sp>
+      <p:sp>
+        <p:nvSpPr>
+          <p:cNvPr id="14" name="TextBox 13"/>
+          <p:cNvSpPr txBox="1"/>
+          <p:nvPr/>
+        </p:nvSpPr>
+        <p:spPr>
+          <a:xfrm>
+            <a:off x="11173968" y="1078992"/>
+            <a:ext cx="548640" cy="256032"/>
+          </a:xfrm>
+          <a:prstGeom prst="rect">
+            <a:avLst/>
+          </a:prstGeom>
+          <a:noFill/>
+        </p:spPr>
+        <p:txBody>
+          <a:bodyPr wrap="square">
+            <a:spAutoFit/>
+          </a:bodyPr>
+          <a:lstStyle/>
+          <a:p>
+            <a:pPr algn="ctr"/>
+            <a:r>
+              <a:rPr sz="850" b="1">
+                <a:solidFill>
+                  <a:srgbClr val="94A3B8"/>
+                </a:solidFill>
+              </a:rPr>
+              <a:t>TIER</a:t>
+            </a:r>
+          </a:p>
+        </p:txBody>
+      </p:sp>
+      <p:sp>
+        <p:nvSpPr>
+          <p:cNvPr id="15" name="Rectangle 14"/>
+          <p:cNvSpPr/>
+          <p:nvPr/>
+        </p:nvSpPr>
+        <p:spPr>
+          <a:xfrm>
+            <a:off x="365760" y="1362456"/>
+            <a:ext cx="11430000" cy="342900"/>
+          </a:xfrm>
+          <a:prstGeom prst="rect">
+            <a:avLst/>
+          </a:prstGeom>
+          <a:solidFill>
+            <a:srgbClr val="1A1B23"/>
+          </a:solidFill>
+          <a:ln w="12700">
+            <a:noFill/>
+          </a:ln>
+        </p:spPr>
+        <p:style>
+          <a:lnRef idx="1">
+            <a:schemeClr val="accent1"/>
+          </a:lnRef>
+          <a:fillRef idx="3">
+            <a:schemeClr val="accent1"/>
+          </a:fillRef>
+          <a:effectRef idx="2">
+            <a:schemeClr val="accent1"/>
+          </a:effectRef>
+          <a:fontRef idx="minor">
+            <a:schemeClr val="lt1"/>
+          </a:fontRef>
+        </p:style>
+        <p:txBody>
+          <a:bodyPr rtlCol="0" anchor="ctr"/>
+          <a:lstStyle/>
+          <a:p>
+            <a:pPr algn="ctr"/>
+          </a:p>
+        </p:txBody>
+      </p:sp>
+      <p:sp>
+        <p:nvSpPr>
+          <p:cNvPr id="16" name="TextBox 15"/>
+          <p:cNvSpPr txBox="1"/>
+          <p:nvPr/>
+        </p:nvSpPr>
+        <p:spPr>
+          <a:xfrm>
+            <a:off x="438912" y="1426464"/>
+            <a:ext cx="2834640" cy="228600"/>
+          </a:xfrm>
+          <a:prstGeom prst="rect">
+            <a:avLst/>
+          </a:prstGeom>
+          <a:noFill/>
+        </p:spPr>
+        <p:txBody>
+          <a:bodyPr wrap="square">
+            <a:spAutoFit/>
+          </a:bodyPr>
+          <a:lstStyle/>
+          <a:p>
+            <a:pPr algn="l"/>
+            <a:r>
+              <a:rPr sz="900" b="0">
+                <a:solidFill>
+                  <a:srgbClr val="FFFFFF"/>
+                </a:solidFill>
+              </a:rPr>
+              <a:t>01  Direct Injection</a:t>
+            </a:r>
+          </a:p>
+        </p:txBody>
+      </p:sp>
+      <p:sp>
+        <p:nvSpPr>
+          <p:cNvPr id="17" name="TextBox 16"/>
+          <p:cNvSpPr txBox="1"/>
+          <p:nvPr/>
+        </p:nvSpPr>
+        <p:spPr>
+          <a:xfrm>
+            <a:off x="3310128" y="1417320"/>
+            <a:ext cx="777240" cy="256032"/>
+          </a:xfrm>
+          <a:prstGeom prst="rect">
+            <a:avLst/>
+          </a:prstGeom>
+          <a:noFill/>
+        </p:spPr>
+        <p:txBody>
+          <a:bodyPr wrap="square">
+            <a:spAutoFit/>
+          </a:bodyPr>
+          <a:lstStyle/>
+          <a:p>
+            <a:pPr algn="r"/>
+            <a:r>
+              <a:rPr sz="1000" b="1">
+                <a:solidFill>
+                  <a:srgbClr val="10B981"/>
+                </a:solidFill>
+              </a:rPr>
+              <a:t>26.7%</a:t>
+            </a:r>
+          </a:p>
+        </p:txBody>
+      </p:sp>
+      <p:sp>
+        <p:nvSpPr>
+          <p:cNvPr id="18" name="Rectangle 17"/>
+          <p:cNvSpPr/>
+          <p:nvPr/>
+        </p:nvSpPr>
+        <p:spPr>
+          <a:xfrm>
+            <a:off x="4160520" y="1453896"/>
+            <a:ext cx="5029200" cy="123444"/>
+          </a:xfrm>
+          <a:prstGeom prst="rect">
+            <a:avLst/>
+          </a:prstGeom>
+          <a:solidFill>
+            <a:srgbClr val="252635"/>
+          </a:solidFill>
+          <a:ln>
+            <a:noFill/>
+          </a:ln>
+        </p:spPr>
+        <p:style>
+          <a:lnRef idx="1">
+            <a:schemeClr val="accent1"/>
+          </a:lnRef>
+          <a:fillRef idx="3">
+            <a:schemeClr val="accent1"/>
+          </a:fillRef>
+          <a:effectRef idx="2">
+            <a:schemeClr val="accent1"/>
+          </a:effectRef>
+          <a:fontRef idx="minor">
+            <a:schemeClr val="lt1"/>
+          </a:fontRef>
+        </p:style>
+        <p:txBody>
+          <a:bodyPr rtlCol="0" anchor="ctr"/>
+          <a:lstStyle/>
+          <a:p>
+            <a:pPr algn="ctr"/>
+          </a:p>
+        </p:txBody>
+      </p:sp>
+      <p:sp>
+        <p:nvSpPr>
+          <p:cNvPr id="19" name="Rectangle 18"/>
+          <p:cNvSpPr/>
+          <p:nvPr/>
+        </p:nvSpPr>
+        <p:spPr>
+          <a:xfrm>
+            <a:off x="4160520" y="1453896"/>
+            <a:ext cx="5029200" cy="123444"/>
+          </a:xfrm>
+          <a:prstGeom prst="rect">
+            <a:avLst/>
+          </a:prstGeom>
+          <a:solidFill>
+            <a:srgbClr val="10B981"/>
+          </a:solidFill>
+          <a:ln>
+            <a:noFill/>
+          </a:ln>
+        </p:spPr>
+        <p:style>
+          <a:lnRef idx="1">
+            <a:schemeClr val="accent1"/>
+          </a:lnRef>
+          <a:fillRef idx="3">
+            <a:schemeClr val="accent1"/>
+          </a:fillRef>
+          <a:effectRef idx="2">
+            <a:schemeClr val="accent1"/>
+          </a:effectRef>
+          <a:fontRef idx="minor">
+            <a:schemeClr val="lt1"/>
+          </a:fontRef>
+        </p:style>
+        <p:txBody>
+          <a:bodyPr rtlCol="0" anchor="ctr"/>
+          <a:lstStyle/>
+          <a:p>
+            <a:pPr algn="ctr"/>
+          </a:p>
+        </p:txBody>
+      </p:sp>
+      <p:sp>
+        <p:nvSpPr>
+          <p:cNvPr id="20" name="TextBox 19"/>
+          <p:cNvSpPr txBox="1"/>
+          <p:nvPr/>
+        </p:nvSpPr>
+        <p:spPr>
+          <a:xfrm>
+            <a:off x="8503920" y="1426464"/>
+            <a:ext cx="658368" cy="256032"/>
+          </a:xfrm>
+          <a:prstGeom prst="rect">
+            <a:avLst/>
+          </a:prstGeom>
+          <a:noFill/>
+        </p:spPr>
+        <p:txBody>
+          <a:bodyPr wrap="square">
+            <a:spAutoFit/>
+          </a:bodyPr>
+          <a:lstStyle/>
+          <a:p>
+            <a:pPr algn="r"/>
+            <a:r>
+              <a:rPr sz="900" b="1">
+                <a:solidFill>
+                  <a:srgbClr val="050508"/>
+                </a:solidFill>
+              </a:rPr>
+              <a:t>26.7%</a:t>
+            </a:r>
+          </a:p>
+        </p:txBody>
+      </p:sp>
+      <p:sp>
+        <p:nvSpPr>
+          <p:cNvPr id="21" name="TextBox 20"/>
+          <p:cNvSpPr txBox="1"/>
+          <p:nvPr/>
+        </p:nvSpPr>
+        <p:spPr>
+          <a:xfrm>
+            <a:off x="8979408" y="1426464"/>
+            <a:ext cx="365760" cy="256032"/>
+          </a:xfrm>
+          <a:prstGeom prst="rect">
+            <a:avLst/>
+          </a:prstGeom>
+          <a:noFill/>
+        </p:spPr>
+        <p:txBody>
+          <a:bodyPr wrap="square">
+            <a:spAutoFit/>
+          </a:bodyPr>
+          <a:lstStyle/>
+          <a:p>
+            <a:pPr algn="ctr"/>
+            <a:r>
+              <a:rPr sz="950" b="1">
+                <a:solidFill>
+                  <a:srgbClr val="10B981"/>
+                </a:solidFill>
+              </a:rPr>
+              <a:t>4</a:t>
+            </a:r>
+          </a:p>
+        </p:txBody>
+      </p:sp>
+      <p:sp>
+        <p:nvSpPr>
+          <p:cNvPr id="22" name="TextBox 21"/>
+          <p:cNvSpPr txBox="1"/>
+          <p:nvPr/>
+        </p:nvSpPr>
+        <p:spPr>
+          <a:xfrm>
+            <a:off x="9345168" y="1426464"/>
+            <a:ext cx="365760" cy="256032"/>
+          </a:xfrm>
+          <a:prstGeom prst="rect">
+            <a:avLst/>
+          </a:prstGeom>
+          <a:noFill/>
+        </p:spPr>
+        <p:txBody>
+          <a:bodyPr wrap="square">
+            <a:spAutoFit/>
+          </a:bodyPr>
+          <a:lstStyle/>
+          <a:p>
+            <a:pPr algn="ctr"/>
+            <a:r>
+              <a:rPr sz="950" b="0">
+                <a:solidFill>
+                  <a:srgbClr val="EF4444"/>
+                </a:solidFill>
+              </a:rPr>
+              <a:t>11</a:t>
+            </a:r>
+          </a:p>
+        </p:txBody>
+      </p:sp>
+      <p:sp>
+        <p:nvSpPr>
+          <p:cNvPr id="23" name="TextBox 22"/>
+          <p:cNvSpPr txBox="1"/>
+          <p:nvPr/>
+        </p:nvSpPr>
+        <p:spPr>
+          <a:xfrm>
+            <a:off x="9802368" y="1426464"/>
+            <a:ext cx="457200" cy="256032"/>
+          </a:xfrm>
+          <a:prstGeom prst="rect">
+            <a:avLst/>
+          </a:prstGeom>
+          <a:noFill/>
+        </p:spPr>
+        <p:txBody>
+          <a:bodyPr wrap="square">
+            <a:spAutoFit/>
+          </a:bodyPr>
+          <a:lstStyle/>
+          <a:p>
+            <a:pPr algn="ctr"/>
+            <a:r>
+              <a:rPr sz="900" b="0">
+                <a:solidFill>
+                  <a:srgbClr val="94A3B8"/>
+                </a:solidFill>
+              </a:rPr>
+              <a:t>0.421</a:t>
+            </a:r>
+          </a:p>
+        </p:txBody>
+      </p:sp>
+      <p:sp>
+        <p:nvSpPr>
+          <p:cNvPr id="24" name="TextBox 23"/>
+          <p:cNvSpPr txBox="1"/>
+          <p:nvPr/>
+        </p:nvSpPr>
+        <p:spPr>
+          <a:xfrm>
+            <a:off x="10314432" y="1426464"/>
+            <a:ext cx="822960" cy="256032"/>
+          </a:xfrm>
+          <a:prstGeom prst="rect">
+            <a:avLst/>
+          </a:prstGeom>
+          <a:noFill/>
+        </p:spPr>
+        <p:txBody>
+          <a:bodyPr wrap="square">
+            <a:spAutoFit/>
+          </a:bodyPr>
+          <a:lstStyle/>
+          <a:p>
+            <a:pPr algn="r"/>
+            <a:r>
+              <a:rPr sz="900" b="0">
+                <a:solidFill>
+                  <a:srgbClr val="94A3B8"/>
+                </a:solidFill>
+              </a:rPr>
+              <a:t>60.81ms</a:t>
+            </a:r>
+          </a:p>
+        </p:txBody>
+      </p:sp>
+      <p:sp>
+        <p:nvSpPr>
+          <p:cNvPr id="25" name="TextBox 24"/>
+          <p:cNvSpPr txBox="1"/>
+          <p:nvPr/>
+        </p:nvSpPr>
+        <p:spPr>
+          <a:xfrm>
+            <a:off x="11173968" y="1426464"/>
+            <a:ext cx="548640" cy="256032"/>
+          </a:xfrm>
+          <a:prstGeom prst="rect">
+            <a:avLst/>
+          </a:prstGeom>
+          <a:noFill/>
+        </p:spPr>
+        <p:txBody>
+          <a:bodyPr wrap="square">
+            <a:spAutoFit/>
+          </a:bodyPr>
+          <a:lstStyle/>
+          <a:p>
+            <a:pPr algn="ctr"/>
+            <a:r>
+              <a:rPr sz="850" b="1">
+                <a:solidFill>
+                  <a:srgbClr val="10B981"/>
+                </a:solidFill>
+              </a:rPr>
+              <a:t>T0+T1</a:t>
+            </a:r>
+          </a:p>
+        </p:txBody>
+      </p:sp>
+      <p:sp>
+        <p:nvSpPr>
+          <p:cNvPr id="26" name="Rectangle 25"/>
+          <p:cNvSpPr/>
+          <p:nvPr/>
+        </p:nvSpPr>
+        <p:spPr>
+          <a:xfrm>
+            <a:off x="365760" y="1714500"/>
+            <a:ext cx="11430000" cy="342900"/>
+          </a:xfrm>
+          <a:prstGeom prst="rect">
+            <a:avLst/>
+          </a:prstGeom>
+          <a:solidFill>
+            <a:srgbClr val="12131B"/>
+          </a:solidFill>
+          <a:ln w="12700">
+            <a:noFill/>
+          </a:ln>
+        </p:spPr>
+        <p:style>
+          <a:lnRef idx="1">
+            <a:schemeClr val="accent1"/>
+          </a:lnRef>
+          <a:fillRef idx="3">
+            <a:schemeClr val="accent1"/>
+          </a:fillRef>
+          <a:effectRef idx="2">
+            <a:schemeClr val="accent1"/>
+          </a:effectRef>
+          <a:fontRef idx="minor">
+            <a:schemeClr val="lt1"/>
+          </a:fontRef>
+        </p:style>
+        <p:txBody>
+          <a:bodyPr rtlCol="0" anchor="ctr"/>
+          <a:lstStyle/>
+          <a:p>
+            <a:pPr algn="ctr"/>
+          </a:p>
+        </p:txBody>
+      </p:sp>
+      <p:sp>
+        <p:nvSpPr>
+          <p:cNvPr id="27" name="TextBox 26"/>
+          <p:cNvSpPr txBox="1"/>
+          <p:nvPr/>
+        </p:nvSpPr>
+        <p:spPr>
+          <a:xfrm>
+            <a:off x="438912" y="1778508"/>
+            <a:ext cx="2834640" cy="228600"/>
+          </a:xfrm>
+          <a:prstGeom prst="rect">
+            <a:avLst/>
+          </a:prstGeom>
+          <a:noFill/>
+        </p:spPr>
+        <p:txBody>
+          <a:bodyPr wrap="square">
+            <a:spAutoFit/>
+          </a:bodyPr>
+          <a:lstStyle/>
+          <a:p>
+            <a:pPr algn="l"/>
+            <a:r>
+              <a:rPr sz="900" b="0">
+                <a:solidFill>
+                  <a:srgbClr val="FFFFFF"/>
+                </a:solidFill>
+              </a:rPr>
+              <a:t>02  Jailbreak DAN</a:t>
+            </a:r>
+          </a:p>
+        </p:txBody>
+      </p:sp>
+      <p:sp>
+        <p:nvSpPr>
+          <p:cNvPr id="28" name="TextBox 27"/>
+          <p:cNvSpPr txBox="1"/>
+          <p:nvPr/>
+        </p:nvSpPr>
+        <p:spPr>
+          <a:xfrm>
+            <a:off x="3310128" y="1769364"/>
+            <a:ext cx="777240" cy="256032"/>
+          </a:xfrm>
+          <a:prstGeom prst="rect">
+            <a:avLst/>
+          </a:prstGeom>
+          <a:noFill/>
+        </p:spPr>
+        <p:txBody>
+          <a:bodyPr wrap="square">
+            <a:spAutoFit/>
+          </a:bodyPr>
+          <a:lstStyle/>
+          <a:p>
+            <a:pPr algn="r"/>
+            <a:r>
+              <a:rPr sz="1000" b="1">
+                <a:solidFill>
+                  <a:srgbClr val="10B981"/>
+                </a:solidFill>
+              </a:rPr>
+              <a:t>26.7%</a:t>
+            </a:r>
+          </a:p>
+        </p:txBody>
+      </p:sp>
+      <p:sp>
+        <p:nvSpPr>
+          <p:cNvPr id="29" name="Rectangle 28"/>
+          <p:cNvSpPr/>
+          <p:nvPr/>
+        </p:nvSpPr>
+        <p:spPr>
+          <a:xfrm>
+            <a:off x="4160520" y="1805940"/>
+            <a:ext cx="5029200" cy="123444"/>
+          </a:xfrm>
+          <a:prstGeom prst="rect">
+            <a:avLst/>
+          </a:prstGeom>
+          <a:solidFill>
+            <a:srgbClr val="252635"/>
+          </a:solidFill>
+          <a:ln>
+            <a:noFill/>
+          </a:ln>
+        </p:spPr>
+        <p:style>
+          <a:lnRef idx="1">
+            <a:schemeClr val="accent1"/>
+          </a:lnRef>
+          <a:fillRef idx="3">
+            <a:schemeClr val="accent1"/>
+          </a:fillRef>
+          <a:effectRef idx="2">
+            <a:schemeClr val="accent1"/>
+          </a:effectRef>
+          <a:fontRef idx="minor">
+            <a:schemeClr val="lt1"/>
+          </a:fontRef>
+        </p:style>
+        <p:txBody>
+          <a:bodyPr rtlCol="0" anchor="ctr"/>
+          <a:lstStyle/>
+          <a:p>
+            <a:pPr algn="ctr"/>
+          </a:p>
+        </p:txBody>
+      </p:sp>
+      <p:sp>
+        <p:nvSpPr>
+          <p:cNvPr id="30" name="Rectangle 29"/>
+          <p:cNvSpPr/>
+          <p:nvPr/>
+        </p:nvSpPr>
+        <p:spPr>
+          <a:xfrm>
+            <a:off x="4160520" y="1805940"/>
+            <a:ext cx="5029200" cy="123444"/>
+          </a:xfrm>
+          <a:prstGeom prst="rect">
+            <a:avLst/>
+          </a:prstGeom>
+          <a:solidFill>
+            <a:srgbClr val="10B981"/>
+          </a:solidFill>
+          <a:ln>
+            <a:noFill/>
+          </a:ln>
+        </p:spPr>
+        <p:style>
+          <a:lnRef idx="1">
+            <a:schemeClr val="accent1"/>
+          </a:lnRef>
+          <a:fillRef idx="3">
+            <a:schemeClr val="accent1"/>
+          </a:fillRef>
+          <a:effectRef idx="2">
+            <a:schemeClr val="accent1"/>
+          </a:effectRef>
+          <a:fontRef idx="minor">
+            <a:schemeClr val="lt1"/>
+          </a:fontRef>
+        </p:style>
+        <p:txBody>
+          <a:bodyPr rtlCol="0" anchor="ctr"/>
+          <a:lstStyle/>
+          <a:p>
+            <a:pPr algn="ctr"/>
+          </a:p>
+        </p:txBody>
+      </p:sp>
+      <p:sp>
+        <p:nvSpPr>
+          <p:cNvPr id="31" name="TextBox 30"/>
+          <p:cNvSpPr txBox="1"/>
+          <p:nvPr/>
+        </p:nvSpPr>
+        <p:spPr>
+          <a:xfrm>
+            <a:off x="8503920" y="1778508"/>
+            <a:ext cx="658368" cy="256032"/>
+          </a:xfrm>
+          <a:prstGeom prst="rect">
+            <a:avLst/>
+          </a:prstGeom>
+          <a:noFill/>
+        </p:spPr>
+        <p:txBody>
+          <a:bodyPr wrap="square">
+            <a:spAutoFit/>
+          </a:bodyPr>
+          <a:lstStyle/>
+          <a:p>
+            <a:pPr algn="r"/>
+            <a:r>
+              <a:rPr sz="900" b="1">
+                <a:solidFill>
+                  <a:srgbClr val="050508"/>
+                </a:solidFill>
+              </a:rPr>
+              <a:t>26.7%</a:t>
+            </a:r>
+          </a:p>
+        </p:txBody>
+      </p:sp>
+      <p:sp>
+        <p:nvSpPr>
+          <p:cNvPr id="32" name="TextBox 31"/>
+          <p:cNvSpPr txBox="1"/>
+          <p:nvPr/>
+        </p:nvSpPr>
+        <p:spPr>
+          <a:xfrm>
+            <a:off x="8979408" y="1778508"/>
+            <a:ext cx="365760" cy="256032"/>
+          </a:xfrm>
+          <a:prstGeom prst="rect">
+            <a:avLst/>
+          </a:prstGeom>
+          <a:noFill/>
+        </p:spPr>
+        <p:txBody>
+          <a:bodyPr wrap="square">
+            <a:spAutoFit/>
+          </a:bodyPr>
+          <a:lstStyle/>
+          <a:p>
+            <a:pPr algn="ctr"/>
+            <a:r>
+              <a:rPr sz="950" b="1">
+                <a:solidFill>
+                  <a:srgbClr val="10B981"/>
+                </a:solidFill>
+              </a:rPr>
+              <a:t>4</a:t>
+            </a:r>
+          </a:p>
+        </p:txBody>
+      </p:sp>
+      <p:sp>
+        <p:nvSpPr>
+          <p:cNvPr id="33" name="TextBox 32"/>
+          <p:cNvSpPr txBox="1"/>
+          <p:nvPr/>
+        </p:nvSpPr>
+        <p:spPr>
+          <a:xfrm>
+            <a:off x="9345168" y="1778508"/>
+            <a:ext cx="365760" cy="256032"/>
+          </a:xfrm>
+          <a:prstGeom prst="rect">
+            <a:avLst/>
+          </a:prstGeom>
+          <a:noFill/>
+        </p:spPr>
+        <p:txBody>
+          <a:bodyPr wrap="square">
+            <a:spAutoFit/>
+          </a:bodyPr>
+          <a:lstStyle/>
+          <a:p>
+            <a:pPr algn="ctr"/>
+            <a:r>
+              <a:rPr sz="950" b="0">
+                <a:solidFill>
+                  <a:srgbClr val="EF4444"/>
+                </a:solidFill>
+              </a:rPr>
+              <a:t>11</a:t>
+            </a:r>
+          </a:p>
+        </p:txBody>
+      </p:sp>
+      <p:sp>
+        <p:nvSpPr>
+          <p:cNvPr id="34" name="TextBox 33"/>
+          <p:cNvSpPr txBox="1"/>
+          <p:nvPr/>
+        </p:nvSpPr>
+        <p:spPr>
+          <a:xfrm>
+            <a:off x="9802368" y="1778508"/>
+            <a:ext cx="457200" cy="256032"/>
+          </a:xfrm>
+          <a:prstGeom prst="rect">
+            <a:avLst/>
+          </a:prstGeom>
+          <a:noFill/>
+        </p:spPr>
+        <p:txBody>
+          <a:bodyPr wrap="square">
+            <a:spAutoFit/>
+          </a:bodyPr>
+          <a:lstStyle/>
+          <a:p>
+            <a:pPr algn="ctr"/>
+            <a:r>
+              <a:rPr sz="900" b="0">
+                <a:solidFill>
+                  <a:srgbClr val="94A3B8"/>
+                </a:solidFill>
+              </a:rPr>
+              <a:t>0.421</a:t>
+            </a:r>
+          </a:p>
+        </p:txBody>
+      </p:sp>
+      <p:sp>
+        <p:nvSpPr>
+          <p:cNvPr id="35" name="TextBox 34"/>
+          <p:cNvSpPr txBox="1"/>
+          <p:nvPr/>
+        </p:nvSpPr>
+        <p:spPr>
+          <a:xfrm>
+            <a:off x="10314432" y="1778508"/>
+            <a:ext cx="822960" cy="256032"/>
+          </a:xfrm>
+          <a:prstGeom prst="rect">
+            <a:avLst/>
+          </a:prstGeom>
+          <a:noFill/>
+        </p:spPr>
+        <p:txBody>
+          <a:bodyPr wrap="square">
+            <a:spAutoFit/>
+          </a:bodyPr>
+          <a:lstStyle/>
+          <a:p>
+            <a:pPr algn="r"/>
+            <a:r>
+              <a:rPr sz="900" b="0">
+                <a:solidFill>
+                  <a:srgbClr val="94A3B8"/>
+                </a:solidFill>
+              </a:rPr>
+              <a:t>7.9ms</a:t>
+            </a:r>
+          </a:p>
+        </p:txBody>
+      </p:sp>
+      <p:sp>
+        <p:nvSpPr>
+          <p:cNvPr id="36" name="TextBox 35"/>
+          <p:cNvSpPr txBox="1"/>
+          <p:nvPr/>
+        </p:nvSpPr>
+        <p:spPr>
+          <a:xfrm>
+            <a:off x="11173968" y="1778508"/>
+            <a:ext cx="548640" cy="256032"/>
+          </a:xfrm>
+          <a:prstGeom prst="rect">
+            <a:avLst/>
+          </a:prstGeom>
+          <a:noFill/>
+        </p:spPr>
+        <p:txBody>
+          <a:bodyPr wrap="square">
+            <a:spAutoFit/>
+          </a:bodyPr>
+          <a:lstStyle/>
+          <a:p>
+            <a:pPr algn="ctr"/>
+            <a:r>
+              <a:rPr sz="850" b="1">
+                <a:solidFill>
+                  <a:srgbClr val="3B82F6"/>
+                </a:solidFill>
+              </a:rPr>
+              <a:t>T1</a:t>
+            </a:r>
+          </a:p>
+        </p:txBody>
+      </p:sp>
+      <p:sp>
+        <p:nvSpPr>
+          <p:cNvPr id="37" name="Rectangle 36"/>
+          <p:cNvSpPr/>
+          <p:nvPr/>
+        </p:nvSpPr>
+        <p:spPr>
+          <a:xfrm>
+            <a:off x="365760" y="2066543"/>
+            <a:ext cx="11430000" cy="342900"/>
+          </a:xfrm>
+          <a:prstGeom prst="rect">
+            <a:avLst/>
+          </a:prstGeom>
+          <a:solidFill>
+            <a:srgbClr val="1A1B23"/>
+          </a:solidFill>
+          <a:ln w="12700">
+            <a:noFill/>
+          </a:ln>
+        </p:spPr>
+        <p:style>
+          <a:lnRef idx="1">
+            <a:schemeClr val="accent1"/>
+          </a:lnRef>
+          <a:fillRef idx="3">
+            <a:schemeClr val="accent1"/>
+          </a:fillRef>
+          <a:effectRef idx="2">
+            <a:schemeClr val="accent1"/>
+          </a:effectRef>
+          <a:fontRef idx="minor">
+            <a:schemeClr val="lt1"/>
+          </a:fontRef>
+        </p:style>
+        <p:txBody>
+          <a:bodyPr rtlCol="0" anchor="ctr"/>
+          <a:lstStyle/>
+          <a:p>
+            <a:pPr algn="ctr"/>
+          </a:p>
+        </p:txBody>
+      </p:sp>
+      <p:sp>
+        <p:nvSpPr>
+          <p:cNvPr id="38" name="TextBox 37"/>
+          <p:cNvSpPr txBox="1"/>
+          <p:nvPr/>
+        </p:nvSpPr>
+        <p:spPr>
+          <a:xfrm>
+            <a:off x="438912" y="2130551"/>
+            <a:ext cx="2834640" cy="228600"/>
+          </a:xfrm>
+          <a:prstGeom prst="rect">
+            <a:avLst/>
+          </a:prstGeom>
+          <a:noFill/>
+        </p:spPr>
+        <p:txBody>
+          <a:bodyPr wrap="square">
+            <a:spAutoFit/>
+          </a:bodyPr>
+          <a:lstStyle/>
+          <a:p>
+            <a:pPr algn="l"/>
+            <a:r>
+              <a:rPr sz="900" b="0">
+                <a:solidFill>
+                  <a:srgbClr val="FFFFFF"/>
+                </a:solidFill>
+              </a:rPr>
+              <a:t>03  Role Playing</a:t>
+            </a:r>
+          </a:p>
+        </p:txBody>
+      </p:sp>
+      <p:sp>
+        <p:nvSpPr>
+          <p:cNvPr id="39" name="TextBox 38"/>
+          <p:cNvSpPr txBox="1"/>
+          <p:nvPr/>
+        </p:nvSpPr>
+        <p:spPr>
+          <a:xfrm>
+            <a:off x="3310128" y="2121408"/>
+            <a:ext cx="777240" cy="256032"/>
+          </a:xfrm>
+          <a:prstGeom prst="rect">
+            <a:avLst/>
+          </a:prstGeom>
+          <a:noFill/>
+        </p:spPr>
+        <p:txBody>
+          <a:bodyPr wrap="square">
+            <a:spAutoFit/>
+          </a:bodyPr>
+          <a:lstStyle/>
+          <a:p>
+            <a:pPr algn="r"/>
+            <a:r>
+              <a:rPr sz="1000" b="1">
+                <a:solidFill>
+                  <a:srgbClr val="EF4444"/>
+                </a:solidFill>
+              </a:rPr>
+              <a:t>0.0%</a:t>
+            </a:r>
+          </a:p>
+        </p:txBody>
+      </p:sp>
+      <p:sp>
+        <p:nvSpPr>
+          <p:cNvPr id="40" name="Rectangle 39"/>
+          <p:cNvSpPr/>
+          <p:nvPr/>
+        </p:nvSpPr>
+        <p:spPr>
+          <a:xfrm>
+            <a:off x="4160520" y="2157984"/>
+            <a:ext cx="5029200" cy="123444"/>
+          </a:xfrm>
+          <a:prstGeom prst="rect">
+            <a:avLst/>
+          </a:prstGeom>
+          <a:solidFill>
+            <a:srgbClr val="252635"/>
+          </a:solidFill>
+          <a:ln>
+            <a:noFill/>
+          </a:ln>
+        </p:spPr>
+        <p:style>
+          <a:lnRef idx="1">
+            <a:schemeClr val="accent1"/>
+          </a:lnRef>
+          <a:fillRef idx="3">
+            <a:schemeClr val="accent1"/>
+          </a:fillRef>
+          <a:effectRef idx="2">
+            <a:schemeClr val="accent1"/>
+          </a:effectRef>
+          <a:fontRef idx="minor">
+            <a:schemeClr val="lt1"/>
+          </a:fontRef>
+        </p:style>
+        <p:txBody>
+          <a:bodyPr rtlCol="0" anchor="ctr"/>
+          <a:lstStyle/>
+          <a:p>
+            <a:pPr algn="ctr"/>
+          </a:p>
+        </p:txBody>
+      </p:sp>
+      <p:sp>
+        <p:nvSpPr>
+          <p:cNvPr id="41" name="TextBox 40"/>
+          <p:cNvSpPr txBox="1"/>
+          <p:nvPr/>
+        </p:nvSpPr>
+        <p:spPr>
+          <a:xfrm>
+            <a:off x="8979408" y="2130551"/>
+            <a:ext cx="365760" cy="256032"/>
+          </a:xfrm>
+          <a:prstGeom prst="rect">
+            <a:avLst/>
+          </a:prstGeom>
+          <a:noFill/>
+        </p:spPr>
+        <p:txBody>
+          <a:bodyPr wrap="square">
+            <a:spAutoFit/>
+          </a:bodyPr>
+          <a:lstStyle/>
+          <a:p>
+            <a:pPr algn="ctr"/>
+            <a:r>
+              <a:rPr sz="950" b="1">
+                <a:solidFill>
+                  <a:srgbClr val="EF4444"/>
+                </a:solidFill>
+              </a:rPr>
+              <a:t>0</a:t>
+            </a:r>
+          </a:p>
+        </p:txBody>
+      </p:sp>
+      <p:sp>
+        <p:nvSpPr>
+          <p:cNvPr id="42" name="TextBox 41"/>
+          <p:cNvSpPr txBox="1"/>
+          <p:nvPr/>
+        </p:nvSpPr>
+        <p:spPr>
+          <a:xfrm>
+            <a:off x="9345168" y="2130551"/>
+            <a:ext cx="365760" cy="256032"/>
+          </a:xfrm>
+          <a:prstGeom prst="rect">
+            <a:avLst/>
+          </a:prstGeom>
+          <a:noFill/>
+        </p:spPr>
+        <p:txBody>
+          <a:bodyPr wrap="square">
+            <a:spAutoFit/>
+          </a:bodyPr>
+          <a:lstStyle/>
+          <a:p>
+            <a:pPr algn="ctr"/>
+            <a:r>
+              <a:rPr sz="950" b="0">
+                <a:solidFill>
+                  <a:srgbClr val="EF4444"/>
+                </a:solidFill>
+              </a:rPr>
+              <a:t>15</a:t>
+            </a:r>
+          </a:p>
+        </p:txBody>
+      </p:sp>
+      <p:sp>
+        <p:nvSpPr>
+          <p:cNvPr id="43" name="TextBox 42"/>
+          <p:cNvSpPr txBox="1"/>
+          <p:nvPr/>
+        </p:nvSpPr>
+        <p:spPr>
+          <a:xfrm>
+            <a:off x="9802368" y="2130551"/>
+            <a:ext cx="457200" cy="256032"/>
+          </a:xfrm>
+          <a:prstGeom prst="rect">
+            <a:avLst/>
+          </a:prstGeom>
+          <a:noFill/>
+        </p:spPr>
+        <p:txBody>
+          <a:bodyPr wrap="square">
+            <a:spAutoFit/>
+          </a:bodyPr>
+          <a:lstStyle/>
+          <a:p>
+            <a:pPr algn="ctr"/>
+            <a:r>
+              <a:rPr sz="900" b="0">
+                <a:solidFill>
+                  <a:srgbClr val="94A3B8"/>
+                </a:solidFill>
+              </a:rPr>
+              <a:t>—</a:t>
+            </a:r>
+          </a:p>
+        </p:txBody>
+      </p:sp>
+      <p:sp>
+        <p:nvSpPr>
+          <p:cNvPr id="44" name="TextBox 43"/>
+          <p:cNvSpPr txBox="1"/>
+          <p:nvPr/>
+        </p:nvSpPr>
+        <p:spPr>
+          <a:xfrm>
+            <a:off x="10314432" y="2130551"/>
+            <a:ext cx="822960" cy="256032"/>
+          </a:xfrm>
+          <a:prstGeom prst="rect">
+            <a:avLst/>
+          </a:prstGeom>
+          <a:noFill/>
+        </p:spPr>
+        <p:txBody>
+          <a:bodyPr wrap="square">
+            <a:spAutoFit/>
+          </a:bodyPr>
+          <a:lstStyle/>
+          <a:p>
+            <a:pPr algn="r"/>
+            <a:r>
+              <a:rPr sz="900" b="0">
+                <a:solidFill>
+                  <a:srgbClr val="94A3B8"/>
+                </a:solidFill>
+              </a:rPr>
+              <a:t>16.26ms</a:t>
+            </a:r>
+          </a:p>
+        </p:txBody>
+      </p:sp>
+      <p:sp>
+        <p:nvSpPr>
+          <p:cNvPr id="45" name="TextBox 44"/>
+          <p:cNvSpPr txBox="1"/>
+          <p:nvPr/>
+        </p:nvSpPr>
+        <p:spPr>
+          <a:xfrm>
+            <a:off x="11173968" y="2130551"/>
+            <a:ext cx="548640" cy="256032"/>
+          </a:xfrm>
+          <a:prstGeom prst="rect">
+            <a:avLst/>
+          </a:prstGeom>
+          <a:noFill/>
+        </p:spPr>
+        <p:txBody>
+          <a:bodyPr wrap="square">
+            <a:spAutoFit/>
+          </a:bodyPr>
+          <a:lstStyle/>
+          <a:p>
+            <a:pPr algn="ctr"/>
+            <a:r>
+              <a:rPr sz="850" b="1">
+                <a:solidFill>
+                  <a:srgbClr val="3B82F6"/>
+                </a:solidFill>
+              </a:rPr>
+              <a:t>T1</a:t>
+            </a:r>
+          </a:p>
+        </p:txBody>
+      </p:sp>
+      <p:sp>
+        <p:nvSpPr>
+          <p:cNvPr id="46" name="Rectangle 45"/>
+          <p:cNvSpPr/>
+          <p:nvPr/>
+        </p:nvSpPr>
+        <p:spPr>
+          <a:xfrm>
+            <a:off x="365760" y="2418588"/>
+            <a:ext cx="11430000" cy="342900"/>
+          </a:xfrm>
+          <a:prstGeom prst="rect">
+            <a:avLst/>
+          </a:prstGeom>
+          <a:solidFill>
+            <a:srgbClr val="12131B"/>
+          </a:solidFill>
+          <a:ln w="12700">
+            <a:noFill/>
+          </a:ln>
+        </p:spPr>
+        <p:style>
+          <a:lnRef idx="1">
+            <a:schemeClr val="accent1"/>
+          </a:lnRef>
+          <a:fillRef idx="3">
+            <a:schemeClr val="accent1"/>
+          </a:fillRef>
+          <a:effectRef idx="2">
+            <a:schemeClr val="accent1"/>
+          </a:effectRef>
+          <a:fontRef idx="minor">
+            <a:schemeClr val="lt1"/>
+          </a:fontRef>
+        </p:style>
+        <p:txBody>
+          <a:bodyPr rtlCol="0" anchor="ctr"/>
+          <a:lstStyle/>
+          <a:p>
+            <a:pPr algn="ctr"/>
+          </a:p>
+        </p:txBody>
+      </p:sp>
+      <p:sp>
+        <p:nvSpPr>
+          <p:cNvPr id="47" name="TextBox 46"/>
+          <p:cNvSpPr txBox="1"/>
+          <p:nvPr/>
+        </p:nvSpPr>
+        <p:spPr>
+          <a:xfrm>
+            <a:off x="438912" y="2482596"/>
+            <a:ext cx="2834640" cy="228600"/>
+          </a:xfrm>
+          <a:prstGeom prst="rect">
+            <a:avLst/>
+          </a:prstGeom>
+          <a:noFill/>
+        </p:spPr>
+        <p:txBody>
+          <a:bodyPr wrap="square">
+            <a:spAutoFit/>
+          </a:bodyPr>
+          <a:lstStyle/>
+          <a:p>
+            <a:pPr algn="l"/>
+            <a:r>
+              <a:rPr sz="900" b="0">
+                <a:solidFill>
+                  <a:srgbClr val="FFFFFF"/>
+                </a:solidFill>
+              </a:rPr>
+              <a:t>04  Encoding Obfuscation</a:t>
+            </a:r>
+          </a:p>
+        </p:txBody>
+      </p:sp>
+      <p:sp>
+        <p:nvSpPr>
+          <p:cNvPr id="48" name="TextBox 47"/>
+          <p:cNvSpPr txBox="1"/>
+          <p:nvPr/>
+        </p:nvSpPr>
+        <p:spPr>
+          <a:xfrm>
+            <a:off x="3310128" y="2473452"/>
+            <a:ext cx="777240" cy="256032"/>
+          </a:xfrm>
+          <a:prstGeom prst="rect">
+            <a:avLst/>
+          </a:prstGeom>
+          <a:noFill/>
+        </p:spPr>
+        <p:txBody>
+          <a:bodyPr wrap="square">
+            <a:spAutoFit/>
+          </a:bodyPr>
+          <a:lstStyle/>
+          <a:p>
+            <a:pPr algn="r"/>
+            <a:r>
+              <a:rPr sz="1000" b="1">
+                <a:solidFill>
+                  <a:srgbClr val="F59E0B"/>
+                </a:solidFill>
+              </a:rPr>
+              <a:t>20.0%</a:t>
+            </a:r>
+          </a:p>
+        </p:txBody>
+      </p:sp>
+      <p:sp>
+        <p:nvSpPr>
+          <p:cNvPr id="49" name="Rectangle 48"/>
+          <p:cNvSpPr/>
+          <p:nvPr/>
+        </p:nvSpPr>
+        <p:spPr>
+          <a:xfrm>
+            <a:off x="4160520" y="2510028"/>
+            <a:ext cx="5029200" cy="123444"/>
+          </a:xfrm>
+          <a:prstGeom prst="rect">
+            <a:avLst/>
+          </a:prstGeom>
+          <a:solidFill>
+            <a:srgbClr val="252635"/>
+          </a:solidFill>
+          <a:ln>
+            <a:noFill/>
+          </a:ln>
+        </p:spPr>
+        <p:style>
+          <a:lnRef idx="1">
+            <a:schemeClr val="accent1"/>
+          </a:lnRef>
+          <a:fillRef idx="3">
+            <a:schemeClr val="accent1"/>
+          </a:fillRef>
+          <a:effectRef idx="2">
+            <a:schemeClr val="accent1"/>
+          </a:effectRef>
+          <a:fontRef idx="minor">
+            <a:schemeClr val="lt1"/>
+          </a:fontRef>
+        </p:style>
+        <p:txBody>
+          <a:bodyPr rtlCol="0" anchor="ctr"/>
+          <a:lstStyle/>
+          <a:p>
+            <a:pPr algn="ctr"/>
+          </a:p>
+        </p:txBody>
+      </p:sp>
+      <p:sp>
+        <p:nvSpPr>
+          <p:cNvPr id="50" name="Rectangle 49"/>
+          <p:cNvSpPr/>
+          <p:nvPr/>
+        </p:nvSpPr>
+        <p:spPr>
+          <a:xfrm>
+            <a:off x="4160520" y="2510028"/>
+            <a:ext cx="3771428" cy="123444"/>
+          </a:xfrm>
+          <a:prstGeom prst="rect">
+            <a:avLst/>
+          </a:prstGeom>
+          <a:solidFill>
+            <a:srgbClr val="F59E0B"/>
+          </a:solidFill>
+          <a:ln>
+            <a:noFill/>
+          </a:ln>
+        </p:spPr>
+        <p:style>
+          <a:lnRef idx="1">
+            <a:schemeClr val="accent1"/>
+          </a:lnRef>
+          <a:fillRef idx="3">
+            <a:schemeClr val="accent1"/>
+          </a:fillRef>
+          <a:effectRef idx="2">
+            <a:schemeClr val="accent1"/>
+          </a:effectRef>
+          <a:fontRef idx="minor">
+            <a:schemeClr val="lt1"/>
+          </a:fontRef>
+        </p:style>
+        <p:txBody>
+          <a:bodyPr rtlCol="0" anchor="ctr"/>
+          <a:lstStyle/>
+          <a:p>
+            <a:pPr algn="ctr"/>
+          </a:p>
+        </p:txBody>
+      </p:sp>
+      <p:sp>
+        <p:nvSpPr>
+          <p:cNvPr id="51" name="TextBox 50"/>
+          <p:cNvSpPr txBox="1"/>
+          <p:nvPr/>
+        </p:nvSpPr>
+        <p:spPr>
+          <a:xfrm>
+            <a:off x="7246148" y="2482596"/>
+            <a:ext cx="658368" cy="256032"/>
+          </a:xfrm>
+          <a:prstGeom prst="rect">
+            <a:avLst/>
+          </a:prstGeom>
+          <a:noFill/>
+        </p:spPr>
+        <p:txBody>
+          <a:bodyPr wrap="square">
+            <a:spAutoFit/>
+          </a:bodyPr>
+          <a:lstStyle/>
+          <a:p>
+            <a:pPr algn="r"/>
+            <a:r>
+              <a:rPr sz="900" b="1">
+                <a:solidFill>
+                  <a:srgbClr val="050508"/>
+                </a:solidFill>
+              </a:rPr>
+              <a:t>20.0%</a:t>
+            </a:r>
+          </a:p>
+        </p:txBody>
+      </p:sp>
+      <p:sp>
+        <p:nvSpPr>
+          <p:cNvPr id="52" name="TextBox 51"/>
+          <p:cNvSpPr txBox="1"/>
+          <p:nvPr/>
+        </p:nvSpPr>
+        <p:spPr>
+          <a:xfrm>
+            <a:off x="8979408" y="2482596"/>
+            <a:ext cx="365760" cy="256032"/>
+          </a:xfrm>
+          <a:prstGeom prst="rect">
+            <a:avLst/>
+          </a:prstGeom>
+          <a:noFill/>
+        </p:spPr>
+        <p:txBody>
+          <a:bodyPr wrap="square">
+            <a:spAutoFit/>
+          </a:bodyPr>
+          <a:lstStyle/>
+          <a:p>
+            <a:pPr algn="ctr"/>
+            <a:r>
+              <a:rPr sz="950" b="1">
+                <a:solidFill>
+                  <a:srgbClr val="10B981"/>
+                </a:solidFill>
+              </a:rPr>
+              <a:t>3</a:t>
+            </a:r>
+          </a:p>
+        </p:txBody>
+      </p:sp>
+      <p:sp>
+        <p:nvSpPr>
+          <p:cNvPr id="53" name="TextBox 52"/>
+          <p:cNvSpPr txBox="1"/>
+          <p:nvPr/>
+        </p:nvSpPr>
+        <p:spPr>
+          <a:xfrm>
+            <a:off x="9345168" y="2482596"/>
+            <a:ext cx="365760" cy="256032"/>
+          </a:xfrm>
+          <a:prstGeom prst="rect">
+            <a:avLst/>
+          </a:prstGeom>
+          <a:noFill/>
+        </p:spPr>
+        <p:txBody>
+          <a:bodyPr wrap="square">
+            <a:spAutoFit/>
+          </a:bodyPr>
+          <a:lstStyle/>
+          <a:p>
+            <a:pPr algn="ctr"/>
+            <a:r>
+              <a:rPr sz="950" b="0">
+                <a:solidFill>
+                  <a:srgbClr val="EF4444"/>
+                </a:solidFill>
+              </a:rPr>
+              <a:t>12</a:t>
+            </a:r>
+          </a:p>
+        </p:txBody>
+      </p:sp>
+      <p:sp>
+        <p:nvSpPr>
+          <p:cNvPr id="54" name="TextBox 53"/>
+          <p:cNvSpPr txBox="1"/>
+          <p:nvPr/>
+        </p:nvSpPr>
+        <p:spPr>
+          <a:xfrm>
+            <a:off x="9802368" y="2482596"/>
+            <a:ext cx="457200" cy="256032"/>
+          </a:xfrm>
+          <a:prstGeom prst="rect">
+            <a:avLst/>
+          </a:prstGeom>
+          <a:noFill/>
+        </p:spPr>
+        <p:txBody>
+          <a:bodyPr wrap="square">
+            <a:spAutoFit/>
+          </a:bodyPr>
+          <a:lstStyle/>
+          <a:p>
+            <a:pPr algn="ctr"/>
+            <a:r>
+              <a:rPr sz="900" b="0">
+                <a:solidFill>
+                  <a:srgbClr val="94A3B8"/>
+                </a:solidFill>
+              </a:rPr>
+              <a:t>0.333</a:t>
+            </a:r>
+          </a:p>
+        </p:txBody>
+      </p:sp>
+      <p:sp>
+        <p:nvSpPr>
+          <p:cNvPr id="55" name="TextBox 54"/>
+          <p:cNvSpPr txBox="1"/>
+          <p:nvPr/>
+        </p:nvSpPr>
+        <p:spPr>
+          <a:xfrm>
+            <a:off x="10314432" y="2482596"/>
+            <a:ext cx="822960" cy="256032"/>
+          </a:xfrm>
+          <a:prstGeom prst="rect">
+            <a:avLst/>
+          </a:prstGeom>
+          <a:noFill/>
+        </p:spPr>
+        <p:txBody>
+          <a:bodyPr wrap="square">
+            <a:spAutoFit/>
+          </a:bodyPr>
+          <a:lstStyle/>
+          <a:p>
+            <a:pPr algn="r"/>
+            <a:r>
+              <a:rPr sz="900" b="0">
+                <a:solidFill>
+                  <a:srgbClr val="94A3B8"/>
+                </a:solidFill>
+              </a:rPr>
+              <a:t>0.2ms</a:t>
+            </a:r>
+          </a:p>
+        </p:txBody>
+      </p:sp>
+      <p:sp>
+        <p:nvSpPr>
+          <p:cNvPr id="56" name="TextBox 55"/>
+          <p:cNvSpPr txBox="1"/>
+          <p:nvPr/>
+        </p:nvSpPr>
+        <p:spPr>
+          <a:xfrm>
+            <a:off x="11173968" y="2482596"/>
+            <a:ext cx="548640" cy="256032"/>
+          </a:xfrm>
+          <a:prstGeom prst="rect">
+            <a:avLst/>
+          </a:prstGeom>
+          <a:noFill/>
+        </p:spPr>
+        <p:txBody>
+          <a:bodyPr wrap="square">
+            <a:spAutoFit/>
+          </a:bodyPr>
+          <a:lstStyle/>
+          <a:p>
+            <a:pPr algn="ctr"/>
+            <a:r>
+              <a:rPr sz="850" b="1">
+                <a:solidFill>
+                  <a:srgbClr val="10B981"/>
+                </a:solidFill>
+              </a:rPr>
+              <a:t>T0.5</a:t>
+            </a:r>
+          </a:p>
+        </p:txBody>
+      </p:sp>
+      <p:sp>
+        <p:nvSpPr>
+          <p:cNvPr id="57" name="Rectangle 56"/>
+          <p:cNvSpPr/>
+          <p:nvPr/>
+        </p:nvSpPr>
+        <p:spPr>
+          <a:xfrm>
+            <a:off x="365760" y="2770632"/>
+            <a:ext cx="11430000" cy="342900"/>
+          </a:xfrm>
+          <a:prstGeom prst="rect">
+            <a:avLst/>
+          </a:prstGeom>
+          <a:solidFill>
+            <a:srgbClr val="1A1B23"/>
+          </a:solidFill>
+          <a:ln w="12700">
+            <a:noFill/>
+          </a:ln>
+        </p:spPr>
+        <p:style>
+          <a:lnRef idx="1">
+            <a:schemeClr val="accent1"/>
+          </a:lnRef>
+          <a:fillRef idx="3">
+            <a:schemeClr val="accent1"/>
+          </a:fillRef>
+          <a:effectRef idx="2">
+            <a:schemeClr val="accent1"/>
+          </a:effectRef>
+          <a:fontRef idx="minor">
+            <a:schemeClr val="lt1"/>
+          </a:fontRef>
+        </p:style>
+        <p:txBody>
+          <a:bodyPr rtlCol="0" anchor="ctr"/>
+          <a:lstStyle/>
+          <a:p>
+            <a:pPr algn="ctr"/>
+          </a:p>
+        </p:txBody>
+      </p:sp>
+      <p:sp>
+        <p:nvSpPr>
+          <p:cNvPr id="58" name="TextBox 57"/>
+          <p:cNvSpPr txBox="1"/>
+          <p:nvPr/>
+        </p:nvSpPr>
+        <p:spPr>
+          <a:xfrm>
+            <a:off x="438912" y="2834640"/>
+            <a:ext cx="2834640" cy="228600"/>
+          </a:xfrm>
+          <a:prstGeom prst="rect">
+            <a:avLst/>
+          </a:prstGeom>
+          <a:noFill/>
+        </p:spPr>
+        <p:txBody>
+          <a:bodyPr wrap="square">
+            <a:spAutoFit/>
+          </a:bodyPr>
+          <a:lstStyle/>
+          <a:p>
+            <a:pPr algn="l"/>
+            <a:r>
+              <a:rPr sz="900" b="0">
+                <a:solidFill>
+                  <a:srgbClr val="FFFFFF"/>
+                </a:solidFill>
+              </a:rPr>
+              <a:t>05  Multi-Turn Adversarial</a:t>
+            </a:r>
+          </a:p>
+        </p:txBody>
+      </p:sp>
+      <p:sp>
+        <p:nvSpPr>
+          <p:cNvPr id="59" name="TextBox 58"/>
+          <p:cNvSpPr txBox="1"/>
+          <p:nvPr/>
+        </p:nvSpPr>
+        <p:spPr>
+          <a:xfrm>
+            <a:off x="3310128" y="2825496"/>
+            <a:ext cx="777240" cy="256032"/>
+          </a:xfrm>
+          <a:prstGeom prst="rect">
+            <a:avLst/>
+          </a:prstGeom>
+          <a:noFill/>
+        </p:spPr>
+        <p:txBody>
+          <a:bodyPr wrap="square">
+            <a:spAutoFit/>
+          </a:bodyPr>
+          <a:lstStyle/>
+          <a:p>
+            <a:pPr algn="r"/>
+            <a:r>
+              <a:rPr sz="1000" b="1">
+                <a:solidFill>
+                  <a:srgbClr val="EF4444"/>
+                </a:solidFill>
+              </a:rPr>
+              <a:t>0.0%</a:t>
+            </a:r>
+          </a:p>
+        </p:txBody>
+      </p:sp>
+      <p:sp>
+        <p:nvSpPr>
+          <p:cNvPr id="60" name="Rectangle 59"/>
+          <p:cNvSpPr/>
+          <p:nvPr/>
+        </p:nvSpPr>
+        <p:spPr>
+          <a:xfrm>
+            <a:off x="4160520" y="2862072"/>
+            <a:ext cx="5029200" cy="123444"/>
+          </a:xfrm>
+          <a:prstGeom prst="rect">
+            <a:avLst/>
+          </a:prstGeom>
+          <a:solidFill>
+            <a:srgbClr val="252635"/>
+          </a:solidFill>
+          <a:ln>
+            <a:noFill/>
+          </a:ln>
+        </p:spPr>
+        <p:style>
+          <a:lnRef idx="1">
+            <a:schemeClr val="accent1"/>
+          </a:lnRef>
+          <a:fillRef idx="3">
+            <a:schemeClr val="accent1"/>
+          </a:fillRef>
+          <a:effectRef idx="2">
+            <a:schemeClr val="accent1"/>
+          </a:effectRef>
+          <a:fontRef idx="minor">
+            <a:schemeClr val="lt1"/>
+          </a:fontRef>
+        </p:style>
+        <p:txBody>
+          <a:bodyPr rtlCol="0" anchor="ctr"/>
+          <a:lstStyle/>
+          <a:p>
+            <a:pPr algn="ctr"/>
+          </a:p>
+        </p:txBody>
+      </p:sp>
+      <p:sp>
+        <p:nvSpPr>
+          <p:cNvPr id="61" name="TextBox 60"/>
+          <p:cNvSpPr txBox="1"/>
+          <p:nvPr/>
+        </p:nvSpPr>
+        <p:spPr>
+          <a:xfrm>
+            <a:off x="8979408" y="2834640"/>
+            <a:ext cx="365760" cy="256032"/>
+          </a:xfrm>
+          <a:prstGeom prst="rect">
+            <a:avLst/>
+          </a:prstGeom>
+          <a:noFill/>
+        </p:spPr>
+        <p:txBody>
+          <a:bodyPr wrap="square">
+            <a:spAutoFit/>
+          </a:bodyPr>
+          <a:lstStyle/>
+          <a:p>
+            <a:pPr algn="ctr"/>
+            <a:r>
+              <a:rPr sz="950" b="1">
+                <a:solidFill>
+                  <a:srgbClr val="EF4444"/>
+                </a:solidFill>
+              </a:rPr>
+              <a:t>0</a:t>
+            </a:r>
+          </a:p>
+        </p:txBody>
+      </p:sp>
+      <p:sp>
+        <p:nvSpPr>
+          <p:cNvPr id="62" name="TextBox 61"/>
+          <p:cNvSpPr txBox="1"/>
+          <p:nvPr/>
+        </p:nvSpPr>
+        <p:spPr>
+          <a:xfrm>
+            <a:off x="9345168" y="2834640"/>
+            <a:ext cx="365760" cy="256032"/>
+          </a:xfrm>
+          <a:prstGeom prst="rect">
+            <a:avLst/>
+          </a:prstGeom>
+          <a:noFill/>
+        </p:spPr>
+        <p:txBody>
+          <a:bodyPr wrap="square">
+            <a:spAutoFit/>
+          </a:bodyPr>
+          <a:lstStyle/>
+          <a:p>
+            <a:pPr algn="ctr"/>
+            <a:r>
+              <a:rPr sz="950" b="0">
+                <a:solidFill>
+                  <a:srgbClr val="EF4444"/>
+                </a:solidFill>
+              </a:rPr>
+              <a:t>15</a:t>
+            </a:r>
+          </a:p>
+        </p:txBody>
+      </p:sp>
+      <p:sp>
+        <p:nvSpPr>
+          <p:cNvPr id="63" name="TextBox 62"/>
+          <p:cNvSpPr txBox="1"/>
+          <p:nvPr/>
+        </p:nvSpPr>
+        <p:spPr>
+          <a:xfrm>
+            <a:off x="9802368" y="2834640"/>
+            <a:ext cx="457200" cy="256032"/>
+          </a:xfrm>
+          <a:prstGeom prst="rect">
+            <a:avLst/>
+          </a:prstGeom>
+          <a:noFill/>
+        </p:spPr>
+        <p:txBody>
+          <a:bodyPr wrap="square">
+            <a:spAutoFit/>
+          </a:bodyPr>
+          <a:lstStyle/>
+          <a:p>
+            <a:pPr algn="ctr"/>
+            <a:r>
+              <a:rPr sz="900" b="0">
+                <a:solidFill>
+                  <a:srgbClr val="94A3B8"/>
+                </a:solidFill>
+              </a:rPr>
+              <a:t>—</a:t>
+            </a:r>
+          </a:p>
+        </p:txBody>
+      </p:sp>
+      <p:sp>
+        <p:nvSpPr>
+          <p:cNvPr id="64" name="TextBox 63"/>
+          <p:cNvSpPr txBox="1"/>
+          <p:nvPr/>
+        </p:nvSpPr>
+        <p:spPr>
+          <a:xfrm>
+            <a:off x="10314432" y="2834640"/>
+            <a:ext cx="822960" cy="256032"/>
+          </a:xfrm>
+          <a:prstGeom prst="rect">
+            <a:avLst/>
+          </a:prstGeom>
+          <a:noFill/>
+        </p:spPr>
+        <p:txBody>
+          <a:bodyPr wrap="square">
+            <a:spAutoFit/>
+          </a:bodyPr>
+          <a:lstStyle/>
+          <a:p>
+            <a:pPr algn="r"/>
+            <a:r>
+              <a:rPr sz="900" b="0">
+                <a:solidFill>
+                  <a:srgbClr val="94A3B8"/>
+                </a:solidFill>
+              </a:rPr>
+              <a:t>0.11ms</a:t>
+            </a:r>
+          </a:p>
+        </p:txBody>
+      </p:sp>
+      <p:sp>
+        <p:nvSpPr>
+          <p:cNvPr id="65" name="TextBox 64"/>
+          <p:cNvSpPr txBox="1"/>
+          <p:nvPr/>
+        </p:nvSpPr>
+        <p:spPr>
+          <a:xfrm>
+            <a:off x="11173968" y="2834640"/>
+            <a:ext cx="548640" cy="256032"/>
+          </a:xfrm>
+          <a:prstGeom prst="rect">
+            <a:avLst/>
+          </a:prstGeom>
+          <a:noFill/>
+        </p:spPr>
+        <p:txBody>
+          <a:bodyPr wrap="square">
+            <a:spAutoFit/>
+          </a:bodyPr>
+          <a:lstStyle/>
+          <a:p>
+            <a:pPr algn="ctr"/>
+            <a:r>
+              <a:rPr sz="850" b="1">
+                <a:solidFill>
+                  <a:srgbClr val="3B82F6"/>
+                </a:solidFill>
+              </a:rPr>
+              <a:t>T1</a:t>
+            </a:r>
+          </a:p>
+        </p:txBody>
+      </p:sp>
+      <p:sp>
+        <p:nvSpPr>
+          <p:cNvPr id="66" name="Rectangle 65"/>
+          <p:cNvSpPr/>
+          <p:nvPr/>
+        </p:nvSpPr>
+        <p:spPr>
+          <a:xfrm>
+            <a:off x="365760" y="3122676"/>
+            <a:ext cx="11430000" cy="342900"/>
+          </a:xfrm>
+          <a:prstGeom prst="rect">
+            <a:avLst/>
+          </a:prstGeom>
+          <a:solidFill>
+            <a:srgbClr val="12131B"/>
+          </a:solidFill>
+          <a:ln w="12700">
+            <a:noFill/>
+          </a:ln>
+        </p:spPr>
+        <p:style>
+          <a:lnRef idx="1">
+            <a:schemeClr val="accent1"/>
+          </a:lnRef>
+          <a:fillRef idx="3">
+            <a:schemeClr val="accent1"/>
+          </a:fillRef>
+          <a:effectRef idx="2">
+            <a:schemeClr val="accent1"/>
+          </a:effectRef>
+          <a:fontRef idx="minor">
+            <a:schemeClr val="lt1"/>
+          </a:fontRef>
+        </p:style>
+        <p:txBody>
+          <a:bodyPr rtlCol="0" anchor="ctr"/>
+          <a:lstStyle/>
+          <a:p>
+            <a:pPr algn="ctr"/>
+          </a:p>
+        </p:txBody>
+      </p:sp>
+      <p:sp>
+        <p:nvSpPr>
+          <p:cNvPr id="67" name="TextBox 66"/>
+          <p:cNvSpPr txBox="1"/>
+          <p:nvPr/>
+        </p:nvSpPr>
+        <p:spPr>
+          <a:xfrm>
+            <a:off x="438912" y="3186684"/>
+            <a:ext cx="2834640" cy="228600"/>
+          </a:xfrm>
+          <a:prstGeom prst="rect">
+            <a:avLst/>
+          </a:prstGeom>
+          <a:noFill/>
+        </p:spPr>
+        <p:txBody>
+          <a:bodyPr wrap="square">
+            <a:spAutoFit/>
+          </a:bodyPr>
+          <a:lstStyle/>
+          <a:p>
+            <a:pPr algn="l"/>
+            <a:r>
+              <a:rPr sz="900" b="0">
+                <a:solidFill>
+                  <a:srgbClr val="FFFFFF"/>
+                </a:solidFill>
+              </a:rPr>
+              <a:t>06  Tool Call Injection</a:t>
+            </a:r>
+          </a:p>
+        </p:txBody>
+      </p:sp>
+      <p:sp>
+        <p:nvSpPr>
+          <p:cNvPr id="68" name="TextBox 67"/>
+          <p:cNvSpPr txBox="1"/>
+          <p:nvPr/>
+        </p:nvSpPr>
+        <p:spPr>
+          <a:xfrm>
+            <a:off x="3310128" y="3177540"/>
+            <a:ext cx="777240" cy="256032"/>
+          </a:xfrm>
+          <a:prstGeom prst="rect">
+            <a:avLst/>
+          </a:prstGeom>
+          <a:noFill/>
+        </p:spPr>
+        <p:txBody>
+          <a:bodyPr wrap="square">
+            <a:spAutoFit/>
+          </a:bodyPr>
+          <a:lstStyle/>
+          <a:p>
+            <a:pPr algn="r"/>
+            <a:r>
+              <a:rPr sz="1000" b="1">
+                <a:solidFill>
+                  <a:srgbClr val="F59E0B"/>
+                </a:solidFill>
+              </a:rPr>
+              <a:t>20.0%</a:t>
+            </a:r>
+          </a:p>
+        </p:txBody>
+      </p:sp>
+      <p:sp>
+        <p:nvSpPr>
+          <p:cNvPr id="69" name="Rectangle 68"/>
+          <p:cNvSpPr/>
+          <p:nvPr/>
+        </p:nvSpPr>
+        <p:spPr>
+          <a:xfrm>
+            <a:off x="4160520" y="3214116"/>
+            <a:ext cx="5029200" cy="123444"/>
+          </a:xfrm>
+          <a:prstGeom prst="rect">
+            <a:avLst/>
+          </a:prstGeom>
+          <a:solidFill>
+            <a:srgbClr val="252635"/>
+          </a:solidFill>
+          <a:ln>
+            <a:noFill/>
+          </a:ln>
+        </p:spPr>
+        <p:style>
+          <a:lnRef idx="1">
+            <a:schemeClr val="accent1"/>
+          </a:lnRef>
+          <a:fillRef idx="3">
+            <a:schemeClr val="accent1"/>
+          </a:fillRef>
+          <a:effectRef idx="2">
+            <a:schemeClr val="accent1"/>
+          </a:effectRef>
+          <a:fontRef idx="minor">
+            <a:schemeClr val="lt1"/>
+          </a:fontRef>
+        </p:style>
+        <p:txBody>
+          <a:bodyPr rtlCol="0" anchor="ctr"/>
+          <a:lstStyle/>
+          <a:p>
+            <a:pPr algn="ctr"/>
+          </a:p>
+        </p:txBody>
+      </p:sp>
+      <p:sp>
+        <p:nvSpPr>
+          <p:cNvPr id="70" name="Rectangle 69"/>
+          <p:cNvSpPr/>
+          <p:nvPr/>
+        </p:nvSpPr>
+        <p:spPr>
+          <a:xfrm>
+            <a:off x="4160520" y="3214116"/>
+            <a:ext cx="3771428" cy="123444"/>
+          </a:xfrm>
+          <a:prstGeom prst="rect">
+            <a:avLst/>
+          </a:prstGeom>
+          <a:solidFill>
+            <a:srgbClr val="F59E0B"/>
+          </a:solidFill>
+          <a:ln>
+            <a:noFill/>
+          </a:ln>
+        </p:spPr>
+        <p:style>
+          <a:lnRef idx="1">
+            <a:schemeClr val="accent1"/>
+          </a:lnRef>
+          <a:fillRef idx="3">
+            <a:schemeClr val="accent1"/>
+          </a:fillRef>
+          <a:effectRef idx="2">
+            <a:schemeClr val="accent1"/>
+          </a:effectRef>
+          <a:fontRef idx="minor">
+            <a:schemeClr val="lt1"/>
+          </a:fontRef>
+        </p:style>
+        <p:txBody>
+          <a:bodyPr rtlCol="0" anchor="ctr"/>
+          <a:lstStyle/>
+          <a:p>
+            <a:pPr algn="ctr"/>
+          </a:p>
+        </p:txBody>
+      </p:sp>
+      <p:sp>
+        <p:nvSpPr>
+          <p:cNvPr id="71" name="TextBox 70"/>
+          <p:cNvSpPr txBox="1"/>
+          <p:nvPr/>
+        </p:nvSpPr>
+        <p:spPr>
+          <a:xfrm>
+            <a:off x="7246148" y="3186684"/>
+            <a:ext cx="658368" cy="256032"/>
+          </a:xfrm>
+          <a:prstGeom prst="rect">
+            <a:avLst/>
+          </a:prstGeom>
+          <a:noFill/>
+        </p:spPr>
+        <p:txBody>
+          <a:bodyPr wrap="square">
+            <a:spAutoFit/>
+          </a:bodyPr>
+          <a:lstStyle/>
+          <a:p>
+            <a:pPr algn="r"/>
+            <a:r>
+              <a:rPr sz="900" b="1">
+                <a:solidFill>
+                  <a:srgbClr val="050508"/>
+                </a:solidFill>
+              </a:rPr>
+              <a:t>20.0%</a:t>
+            </a:r>
+          </a:p>
+        </p:txBody>
+      </p:sp>
+      <p:sp>
+        <p:nvSpPr>
+          <p:cNvPr id="72" name="TextBox 71"/>
+          <p:cNvSpPr txBox="1"/>
+          <p:nvPr/>
+        </p:nvSpPr>
+        <p:spPr>
+          <a:xfrm>
+            <a:off x="8979408" y="3186684"/>
+            <a:ext cx="365760" cy="256032"/>
+          </a:xfrm>
+          <a:prstGeom prst="rect">
+            <a:avLst/>
+          </a:prstGeom>
+          <a:noFill/>
+        </p:spPr>
+        <p:txBody>
+          <a:bodyPr wrap="square">
+            <a:spAutoFit/>
+          </a:bodyPr>
+          <a:lstStyle/>
+          <a:p>
+            <a:pPr algn="ctr"/>
+            <a:r>
+              <a:rPr sz="950" b="1">
+                <a:solidFill>
+                  <a:srgbClr val="10B981"/>
+                </a:solidFill>
+              </a:rPr>
+              <a:t>3</a:t>
+            </a:r>
+          </a:p>
+        </p:txBody>
+      </p:sp>
+      <p:sp>
+        <p:nvSpPr>
+          <p:cNvPr id="73" name="TextBox 72"/>
+          <p:cNvSpPr txBox="1"/>
+          <p:nvPr/>
+        </p:nvSpPr>
+        <p:spPr>
+          <a:xfrm>
+            <a:off x="9345168" y="3186684"/>
+            <a:ext cx="365760" cy="256032"/>
+          </a:xfrm>
+          <a:prstGeom prst="rect">
+            <a:avLst/>
+          </a:prstGeom>
+          <a:noFill/>
+        </p:spPr>
+        <p:txBody>
+          <a:bodyPr wrap="square">
+            <a:spAutoFit/>
+          </a:bodyPr>
+          <a:lstStyle/>
+          <a:p>
+            <a:pPr algn="ctr"/>
+            <a:r>
+              <a:rPr sz="950" b="0">
+                <a:solidFill>
+                  <a:srgbClr val="EF4444"/>
+                </a:solidFill>
+              </a:rPr>
+              <a:t>12</a:t>
+            </a:r>
+          </a:p>
+        </p:txBody>
+      </p:sp>
+      <p:sp>
+        <p:nvSpPr>
+          <p:cNvPr id="74" name="TextBox 73"/>
+          <p:cNvSpPr txBox="1"/>
+          <p:nvPr/>
+        </p:nvSpPr>
+        <p:spPr>
+          <a:xfrm>
+            <a:off x="9802368" y="3186684"/>
+            <a:ext cx="457200" cy="256032"/>
+          </a:xfrm>
+          <a:prstGeom prst="rect">
+            <a:avLst/>
+          </a:prstGeom>
+          <a:noFill/>
+        </p:spPr>
+        <p:txBody>
+          <a:bodyPr wrap="square">
+            <a:spAutoFit/>
+          </a:bodyPr>
+          <a:lstStyle/>
+          <a:p>
+            <a:pPr algn="ctr"/>
+            <a:r>
+              <a:rPr sz="900" b="0">
+                <a:solidFill>
+                  <a:srgbClr val="94A3B8"/>
+                </a:solidFill>
+              </a:rPr>
+              <a:t>0.333</a:t>
+            </a:r>
+          </a:p>
+        </p:txBody>
+      </p:sp>
+      <p:sp>
+        <p:nvSpPr>
+          <p:cNvPr id="75" name="TextBox 74"/>
+          <p:cNvSpPr txBox="1"/>
+          <p:nvPr/>
+        </p:nvSpPr>
+        <p:spPr>
+          <a:xfrm>
+            <a:off x="10314432" y="3186684"/>
+            <a:ext cx="822960" cy="256032"/>
+          </a:xfrm>
+          <a:prstGeom prst="rect">
+            <a:avLst/>
+          </a:prstGeom>
+          <a:noFill/>
+        </p:spPr>
+        <p:txBody>
+          <a:bodyPr wrap="square">
+            <a:spAutoFit/>
+          </a:bodyPr>
+          <a:lstStyle/>
+          <a:p>
+            <a:pPr algn="r"/>
+            <a:r>
+              <a:rPr sz="900" b="0">
+                <a:solidFill>
+                  <a:srgbClr val="94A3B8"/>
+                </a:solidFill>
+              </a:rPr>
+              <a:t>0.09ms</a:t>
+            </a:r>
+          </a:p>
+        </p:txBody>
+      </p:sp>
+      <p:sp>
+        <p:nvSpPr>
+          <p:cNvPr id="76" name="TextBox 75"/>
+          <p:cNvSpPr txBox="1"/>
+          <p:nvPr/>
+        </p:nvSpPr>
+        <p:spPr>
+          <a:xfrm>
+            <a:off x="11173968" y="3186684"/>
+            <a:ext cx="548640" cy="256032"/>
+          </a:xfrm>
+          <a:prstGeom prst="rect">
+            <a:avLst/>
+          </a:prstGeom>
+          <a:noFill/>
+        </p:spPr>
+        <p:txBody>
+          <a:bodyPr wrap="square">
+            <a:spAutoFit/>
+          </a:bodyPr>
+          <a:lstStyle/>
+          <a:p>
+            <a:pPr algn="ctr"/>
+            <a:r>
+              <a:rPr sz="850" b="1">
+                <a:solidFill>
+                  <a:srgbClr val="10B981"/>
+                </a:solidFill>
+              </a:rPr>
+              <a:t>T0</a:t>
+            </a:r>
+          </a:p>
+        </p:txBody>
+      </p:sp>
+      <p:sp>
+        <p:nvSpPr>
+          <p:cNvPr id="77" name="Rectangle 76"/>
+          <p:cNvSpPr/>
+          <p:nvPr/>
+        </p:nvSpPr>
+        <p:spPr>
+          <a:xfrm>
+            <a:off x="365760" y="3474720"/>
+            <a:ext cx="11430000" cy="342900"/>
+          </a:xfrm>
+          <a:prstGeom prst="rect">
+            <a:avLst/>
+          </a:prstGeom>
+          <a:solidFill>
+            <a:srgbClr val="1A1B23"/>
+          </a:solidFill>
+          <a:ln w="12700">
+            <a:noFill/>
+          </a:ln>
+        </p:spPr>
+        <p:style>
+          <a:lnRef idx="1">
+            <a:schemeClr val="accent1"/>
+          </a:lnRef>
+          <a:fillRef idx="3">
+            <a:schemeClr val="accent1"/>
+          </a:fillRef>
+          <a:effectRef idx="2">
+            <a:schemeClr val="accent1"/>
+          </a:effectRef>
+          <a:fontRef idx="minor">
+            <a:schemeClr val="lt1"/>
+          </a:fontRef>
+        </p:style>
+        <p:txBody>
+          <a:bodyPr rtlCol="0" anchor="ctr"/>
+          <a:lstStyle/>
+          <a:p>
+            <a:pPr algn="ctr"/>
+          </a:p>
+        </p:txBody>
+      </p:sp>
+      <p:sp>
+        <p:nvSpPr>
+          <p:cNvPr id="78" name="TextBox 77"/>
+          <p:cNvSpPr txBox="1"/>
+          <p:nvPr/>
+        </p:nvSpPr>
+        <p:spPr>
+          <a:xfrm>
+            <a:off x="438912" y="3538727"/>
+            <a:ext cx="2834640" cy="228600"/>
+          </a:xfrm>
+          <a:prstGeom prst="rect">
+            <a:avLst/>
+          </a:prstGeom>
+          <a:noFill/>
+        </p:spPr>
+        <p:txBody>
+          <a:bodyPr wrap="square">
+            <a:spAutoFit/>
+          </a:bodyPr>
+          <a:lstStyle/>
+          <a:p>
+            <a:pPr algn="l"/>
+            <a:r>
+              <a:rPr sz="900" b="0">
+                <a:solidFill>
+                  <a:srgbClr val="FFFFFF"/>
+                </a:solidFill>
+              </a:rPr>
+              <a:t>07  Payload In Data</a:t>
+            </a:r>
+          </a:p>
+        </p:txBody>
+      </p:sp>
+      <p:sp>
+        <p:nvSpPr>
+          <p:cNvPr id="79" name="TextBox 78"/>
+          <p:cNvSpPr txBox="1"/>
+          <p:nvPr/>
+        </p:nvSpPr>
+        <p:spPr>
+          <a:xfrm>
+            <a:off x="3310128" y="3529584"/>
+            <a:ext cx="777240" cy="256032"/>
+          </a:xfrm>
+          <a:prstGeom prst="rect">
+            <a:avLst/>
+          </a:prstGeom>
+          <a:noFill/>
+        </p:spPr>
+        <p:txBody>
+          <a:bodyPr wrap="square">
+            <a:spAutoFit/>
+          </a:bodyPr>
+          <a:lstStyle/>
+          <a:p>
+            <a:pPr algn="r"/>
+            <a:r>
+              <a:rPr sz="1000" b="1">
+                <a:solidFill>
+                  <a:srgbClr val="F59E0B"/>
+                </a:solidFill>
+              </a:rPr>
+              <a:t>20.0%</a:t>
+            </a:r>
+          </a:p>
+        </p:txBody>
+      </p:sp>
+      <p:sp>
+        <p:nvSpPr>
+          <p:cNvPr id="80" name="Rectangle 79"/>
+          <p:cNvSpPr/>
+          <p:nvPr/>
+        </p:nvSpPr>
+        <p:spPr>
+          <a:xfrm>
+            <a:off x="4160520" y="3566160"/>
+            <a:ext cx="5029200" cy="123444"/>
+          </a:xfrm>
+          <a:prstGeom prst="rect">
+            <a:avLst/>
+          </a:prstGeom>
+          <a:solidFill>
+            <a:srgbClr val="252635"/>
+          </a:solidFill>
+          <a:ln>
+            <a:noFill/>
+          </a:ln>
+        </p:spPr>
+        <p:style>
+          <a:lnRef idx="1">
+            <a:schemeClr val="accent1"/>
+          </a:lnRef>
+          <a:fillRef idx="3">
+            <a:schemeClr val="accent1"/>
+          </a:fillRef>
+          <a:effectRef idx="2">
+            <a:schemeClr val="accent1"/>
+          </a:effectRef>
+          <a:fontRef idx="minor">
+            <a:schemeClr val="lt1"/>
+          </a:fontRef>
+        </p:style>
+        <p:txBody>
+          <a:bodyPr rtlCol="0" anchor="ctr"/>
+          <a:lstStyle/>
+          <a:p>
+            <a:pPr algn="ctr"/>
+          </a:p>
+        </p:txBody>
+      </p:sp>
+      <p:sp>
+        <p:nvSpPr>
+          <p:cNvPr id="81" name="Rectangle 80"/>
+          <p:cNvSpPr/>
+          <p:nvPr/>
+        </p:nvSpPr>
+        <p:spPr>
+          <a:xfrm>
+            <a:off x="4160520" y="3566160"/>
+            <a:ext cx="3771428" cy="123444"/>
+          </a:xfrm>
+          <a:prstGeom prst="rect">
+            <a:avLst/>
+          </a:prstGeom>
+          <a:solidFill>
+            <a:srgbClr val="F59E0B"/>
+          </a:solidFill>
+          <a:ln>
+            <a:noFill/>
+          </a:ln>
+        </p:spPr>
+        <p:style>
+          <a:lnRef idx="1">
+            <a:schemeClr val="accent1"/>
+          </a:lnRef>
+          <a:fillRef idx="3">
+            <a:schemeClr val="accent1"/>
+          </a:fillRef>
+          <a:effectRef idx="2">
+            <a:schemeClr val="accent1"/>
+          </a:effectRef>
+          <a:fontRef idx="minor">
+            <a:schemeClr val="lt1"/>
+          </a:fontRef>
+        </p:style>
+        <p:txBody>
+          <a:bodyPr rtlCol="0" anchor="ctr"/>
+          <a:lstStyle/>
+          <a:p>
+            <a:pPr algn="ctr"/>
+          </a:p>
+        </p:txBody>
+      </p:sp>
+      <p:sp>
+        <p:nvSpPr>
+          <p:cNvPr id="82" name="TextBox 81"/>
+          <p:cNvSpPr txBox="1"/>
+          <p:nvPr/>
+        </p:nvSpPr>
+        <p:spPr>
+          <a:xfrm>
+            <a:off x="7246148" y="3538727"/>
+            <a:ext cx="658368" cy="256032"/>
+          </a:xfrm>
+          <a:prstGeom prst="rect">
+            <a:avLst/>
+          </a:prstGeom>
+          <a:noFill/>
+        </p:spPr>
+        <p:txBody>
+          <a:bodyPr wrap="square">
+            <a:spAutoFit/>
+          </a:bodyPr>
+          <a:lstStyle/>
+          <a:p>
+            <a:pPr algn="r"/>
+            <a:r>
+              <a:rPr sz="900" b="1">
+                <a:solidFill>
+                  <a:srgbClr val="050508"/>
+                </a:solidFill>
+              </a:rPr>
+              <a:t>20.0%</a:t>
+            </a:r>
+          </a:p>
+        </p:txBody>
+      </p:sp>
+      <p:sp>
+        <p:nvSpPr>
+          <p:cNvPr id="83" name="TextBox 82"/>
+          <p:cNvSpPr txBox="1"/>
+          <p:nvPr/>
+        </p:nvSpPr>
+        <p:spPr>
+          <a:xfrm>
+            <a:off x="8979408" y="3538727"/>
+            <a:ext cx="365760" cy="256032"/>
+          </a:xfrm>
+          <a:prstGeom prst="rect">
+            <a:avLst/>
+          </a:prstGeom>
+          <a:noFill/>
+        </p:spPr>
+        <p:txBody>
+          <a:bodyPr wrap="square">
+            <a:spAutoFit/>
+          </a:bodyPr>
+          <a:lstStyle/>
+          <a:p>
+            <a:pPr algn="ctr"/>
+            <a:r>
+              <a:rPr sz="950" b="1">
+                <a:solidFill>
+                  <a:srgbClr val="10B981"/>
+                </a:solidFill>
+              </a:rPr>
+              <a:t>3</a:t>
+            </a:r>
+          </a:p>
+        </p:txBody>
+      </p:sp>
+      <p:sp>
+        <p:nvSpPr>
+          <p:cNvPr id="84" name="TextBox 83"/>
+          <p:cNvSpPr txBox="1"/>
+          <p:nvPr/>
+        </p:nvSpPr>
+        <p:spPr>
+          <a:xfrm>
+            <a:off x="9345168" y="3538727"/>
+            <a:ext cx="365760" cy="256032"/>
+          </a:xfrm>
+          <a:prstGeom prst="rect">
+            <a:avLst/>
+          </a:prstGeom>
+          <a:noFill/>
+        </p:spPr>
+        <p:txBody>
+          <a:bodyPr wrap="square">
+            <a:spAutoFit/>
+          </a:bodyPr>
+          <a:lstStyle/>
+          <a:p>
+            <a:pPr algn="ctr"/>
+            <a:r>
+              <a:rPr sz="950" b="0">
+                <a:solidFill>
+                  <a:srgbClr val="EF4444"/>
+                </a:solidFill>
+              </a:rPr>
+              <a:t>12</a:t>
+            </a:r>
+          </a:p>
+        </p:txBody>
+      </p:sp>
+      <p:sp>
+        <p:nvSpPr>
+          <p:cNvPr id="85" name="TextBox 84"/>
+          <p:cNvSpPr txBox="1"/>
+          <p:nvPr/>
+        </p:nvSpPr>
+        <p:spPr>
+          <a:xfrm>
+            <a:off x="9802368" y="3538727"/>
+            <a:ext cx="457200" cy="256032"/>
+          </a:xfrm>
+          <a:prstGeom prst="rect">
+            <a:avLst/>
+          </a:prstGeom>
+          <a:noFill/>
+        </p:spPr>
+        <p:txBody>
+          <a:bodyPr wrap="square">
+            <a:spAutoFit/>
+          </a:bodyPr>
+          <a:lstStyle/>
+          <a:p>
+            <a:pPr algn="ctr"/>
+            <a:r>
+              <a:rPr sz="900" b="0">
+                <a:solidFill>
+                  <a:srgbClr val="94A3B8"/>
+                </a:solidFill>
+              </a:rPr>
+              <a:t>0.333</a:t>
+            </a:r>
+          </a:p>
+        </p:txBody>
+      </p:sp>
+      <p:sp>
+        <p:nvSpPr>
+          <p:cNvPr id="86" name="TextBox 85"/>
+          <p:cNvSpPr txBox="1"/>
+          <p:nvPr/>
+        </p:nvSpPr>
+        <p:spPr>
+          <a:xfrm>
+            <a:off x="10314432" y="3538727"/>
+            <a:ext cx="822960" cy="256032"/>
+          </a:xfrm>
+          <a:prstGeom prst="rect">
+            <a:avLst/>
+          </a:prstGeom>
+          <a:noFill/>
+        </p:spPr>
+        <p:txBody>
+          <a:bodyPr wrap="square">
+            <a:spAutoFit/>
+          </a:bodyPr>
+          <a:lstStyle/>
+          <a:p>
+            <a:pPr algn="r"/>
+            <a:r>
+              <a:rPr sz="900" b="0">
+                <a:solidFill>
+                  <a:srgbClr val="94A3B8"/>
+                </a:solidFill>
+              </a:rPr>
+              <a:t>0.16ms</a:t>
+            </a:r>
+          </a:p>
+        </p:txBody>
+      </p:sp>
+      <p:sp>
+        <p:nvSpPr>
+          <p:cNvPr id="87" name="TextBox 86"/>
+          <p:cNvSpPr txBox="1"/>
+          <p:nvPr/>
+        </p:nvSpPr>
+        <p:spPr>
+          <a:xfrm>
+            <a:off x="11173968" y="3538727"/>
+            <a:ext cx="548640" cy="256032"/>
+          </a:xfrm>
+          <a:prstGeom prst="rect">
+            <a:avLst/>
+          </a:prstGeom>
+          <a:noFill/>
+        </p:spPr>
+        <p:txBody>
+          <a:bodyPr wrap="square">
+            <a:spAutoFit/>
+          </a:bodyPr>
+          <a:lstStyle/>
+          <a:p>
+            <a:pPr algn="ctr"/>
+            <a:r>
+              <a:rPr sz="850" b="1">
+                <a:solidFill>
+                  <a:srgbClr val="3B82F6"/>
+                </a:solidFill>
+              </a:rPr>
+              <a:t>T1</a:t>
+            </a:r>
+          </a:p>
+        </p:txBody>
+      </p:sp>
+      <p:sp>
+        <p:nvSpPr>
+          <p:cNvPr id="88" name="Rectangle 87"/>
+          <p:cNvSpPr/>
+          <p:nvPr/>
+        </p:nvSpPr>
+        <p:spPr>
+          <a:xfrm>
+            <a:off x="365760" y="3826764"/>
+            <a:ext cx="11430000" cy="342900"/>
+          </a:xfrm>
+          <a:prstGeom prst="rect">
+            <a:avLst/>
+          </a:prstGeom>
+          <a:solidFill>
+            <a:srgbClr val="12131B"/>
+          </a:solidFill>
+          <a:ln w="12700">
+            <a:noFill/>
+          </a:ln>
+        </p:spPr>
+        <p:style>
+          <a:lnRef idx="1">
+            <a:schemeClr val="accent1"/>
+          </a:lnRef>
+          <a:fillRef idx="3">
+            <a:schemeClr val="accent1"/>
+          </a:fillRef>
+          <a:effectRef idx="2">
+            <a:schemeClr val="accent1"/>
+          </a:effectRef>
+          <a:fontRef idx="minor">
+            <a:schemeClr val="lt1"/>
+          </a:fontRef>
+        </p:style>
+        <p:txBody>
+          <a:bodyPr rtlCol="0" anchor="ctr"/>
+          <a:lstStyle/>
+          <a:p>
+            <a:pPr algn="ctr"/>
+          </a:p>
+        </p:txBody>
+      </p:sp>
+      <p:sp>
+        <p:nvSpPr>
+          <p:cNvPr id="89" name="TextBox 88"/>
+          <p:cNvSpPr txBox="1"/>
+          <p:nvPr/>
+        </p:nvSpPr>
+        <p:spPr>
+          <a:xfrm>
+            <a:off x="438912" y="3890772"/>
+            <a:ext cx="2834640" cy="228600"/>
+          </a:xfrm>
+          <a:prstGeom prst="rect">
+            <a:avLst/>
+          </a:prstGeom>
+          <a:noFill/>
+        </p:spPr>
+        <p:txBody>
+          <a:bodyPr wrap="square">
+            <a:spAutoFit/>
+          </a:bodyPr>
+          <a:lstStyle/>
+          <a:p>
+            <a:pPr algn="l"/>
+            <a:r>
+              <a:rPr sz="900" b="0">
+                <a:solidFill>
+                  <a:srgbClr val="FFFFFF"/>
+                </a:solidFill>
+              </a:rPr>
+              <a:t>08  Secret Extraction</a:t>
+            </a:r>
+          </a:p>
+        </p:txBody>
+      </p:sp>
+      <p:sp>
+        <p:nvSpPr>
+          <p:cNvPr id="90" name="TextBox 89"/>
+          <p:cNvSpPr txBox="1"/>
+          <p:nvPr/>
+        </p:nvSpPr>
+        <p:spPr>
+          <a:xfrm>
+            <a:off x="3310128" y="3881628"/>
+            <a:ext cx="777240" cy="256032"/>
+          </a:xfrm>
+          <a:prstGeom prst="rect">
+            <a:avLst/>
+          </a:prstGeom>
+          <a:noFill/>
+        </p:spPr>
+        <p:txBody>
+          <a:bodyPr wrap="square">
+            <a:spAutoFit/>
+          </a:bodyPr>
+          <a:lstStyle/>
+          <a:p>
+            <a:pPr algn="r"/>
+            <a:r>
+              <a:rPr sz="1000" b="1">
+                <a:solidFill>
+                  <a:srgbClr val="EF4444"/>
+                </a:solidFill>
+              </a:rPr>
+              <a:t>0.0%</a:t>
+            </a:r>
+          </a:p>
+        </p:txBody>
+      </p:sp>
+      <p:sp>
+        <p:nvSpPr>
+          <p:cNvPr id="91" name="Rectangle 90"/>
+          <p:cNvSpPr/>
+          <p:nvPr/>
+        </p:nvSpPr>
+        <p:spPr>
+          <a:xfrm>
+            <a:off x="4160520" y="3918204"/>
+            <a:ext cx="5029200" cy="123444"/>
+          </a:xfrm>
+          <a:prstGeom prst="rect">
+            <a:avLst/>
+          </a:prstGeom>
+          <a:solidFill>
+            <a:srgbClr val="252635"/>
+          </a:solidFill>
+          <a:ln>
+            <a:noFill/>
+          </a:ln>
+        </p:spPr>
+        <p:style>
+          <a:lnRef idx="1">
+            <a:schemeClr val="accent1"/>
+          </a:lnRef>
+          <a:fillRef idx="3">
+            <a:schemeClr val="accent1"/>
+          </a:fillRef>
+          <a:effectRef idx="2">
+            <a:schemeClr val="accent1"/>
+          </a:effectRef>
+          <a:fontRef idx="minor">
+            <a:schemeClr val="lt1"/>
+          </a:fontRef>
+        </p:style>
+        <p:txBody>
+          <a:bodyPr rtlCol="0" anchor="ctr"/>
+          <a:lstStyle/>
+          <a:p>
+            <a:pPr algn="ctr"/>
+          </a:p>
+        </p:txBody>
+      </p:sp>
+      <p:sp>
+        <p:nvSpPr>
+          <p:cNvPr id="92" name="TextBox 91"/>
+          <p:cNvSpPr txBox="1"/>
+          <p:nvPr/>
+        </p:nvSpPr>
+        <p:spPr>
+          <a:xfrm>
+            <a:off x="8979408" y="3890772"/>
+            <a:ext cx="365760" cy="256032"/>
+          </a:xfrm>
+          <a:prstGeom prst="rect">
+            <a:avLst/>
+          </a:prstGeom>
+          <a:noFill/>
+        </p:spPr>
+        <p:txBody>
+          <a:bodyPr wrap="square">
+            <a:spAutoFit/>
+          </a:bodyPr>
+          <a:lstStyle/>
+          <a:p>
+            <a:pPr algn="ctr"/>
+            <a:r>
+              <a:rPr sz="950" b="1">
+                <a:solidFill>
+                  <a:srgbClr val="EF4444"/>
+                </a:solidFill>
+              </a:rPr>
+              <a:t>0</a:t>
+            </a:r>
+          </a:p>
+        </p:txBody>
+      </p:sp>
+      <p:sp>
+        <p:nvSpPr>
+          <p:cNvPr id="93" name="TextBox 92"/>
+          <p:cNvSpPr txBox="1"/>
+          <p:nvPr/>
+        </p:nvSpPr>
+        <p:spPr>
+          <a:xfrm>
+            <a:off x="9345168" y="3890772"/>
+            <a:ext cx="365760" cy="256032"/>
+          </a:xfrm>
+          <a:prstGeom prst="rect">
+            <a:avLst/>
+          </a:prstGeom>
+          <a:noFill/>
+        </p:spPr>
+        <p:txBody>
+          <a:bodyPr wrap="square">
+            <a:spAutoFit/>
+          </a:bodyPr>
+          <a:lstStyle/>
+          <a:p>
+            <a:pPr algn="ctr"/>
+            <a:r>
+              <a:rPr sz="950" b="0">
+                <a:solidFill>
+                  <a:srgbClr val="EF4444"/>
+                </a:solidFill>
+              </a:rPr>
+              <a:t>15</a:t>
+            </a:r>
+          </a:p>
+        </p:txBody>
+      </p:sp>
+      <p:sp>
+        <p:nvSpPr>
+          <p:cNvPr id="94" name="TextBox 93"/>
+          <p:cNvSpPr txBox="1"/>
+          <p:nvPr/>
+        </p:nvSpPr>
+        <p:spPr>
+          <a:xfrm>
+            <a:off x="9802368" y="3890772"/>
+            <a:ext cx="457200" cy="256032"/>
+          </a:xfrm>
+          <a:prstGeom prst="rect">
+            <a:avLst/>
+          </a:prstGeom>
+          <a:noFill/>
+        </p:spPr>
+        <p:txBody>
+          <a:bodyPr wrap="square">
+            <a:spAutoFit/>
+          </a:bodyPr>
+          <a:lstStyle/>
+          <a:p>
+            <a:pPr algn="ctr"/>
+            <a:r>
+              <a:rPr sz="900" b="0">
+                <a:solidFill>
+                  <a:srgbClr val="94A3B8"/>
+                </a:solidFill>
+              </a:rPr>
+              <a:t>—</a:t>
+            </a:r>
+          </a:p>
+        </p:txBody>
+      </p:sp>
+      <p:sp>
+        <p:nvSpPr>
+          <p:cNvPr id="95" name="TextBox 94"/>
+          <p:cNvSpPr txBox="1"/>
+          <p:nvPr/>
+        </p:nvSpPr>
+        <p:spPr>
+          <a:xfrm>
+            <a:off x="10314432" y="3890772"/>
+            <a:ext cx="822960" cy="256032"/>
+          </a:xfrm>
+          <a:prstGeom prst="rect">
+            <a:avLst/>
+          </a:prstGeom>
+          <a:noFill/>
+        </p:spPr>
+        <p:txBody>
+          <a:bodyPr wrap="square">
+            <a:spAutoFit/>
+          </a:bodyPr>
+          <a:lstStyle/>
+          <a:p>
+            <a:pPr algn="r"/>
+            <a:r>
+              <a:rPr sz="900" b="0">
+                <a:solidFill>
+                  <a:srgbClr val="94A3B8"/>
+                </a:solidFill>
+              </a:rPr>
+              <a:t>0.08ms</a:t>
+            </a:r>
+          </a:p>
+        </p:txBody>
+      </p:sp>
+      <p:sp>
+        <p:nvSpPr>
+          <p:cNvPr id="96" name="TextBox 95"/>
+          <p:cNvSpPr txBox="1"/>
+          <p:nvPr/>
+        </p:nvSpPr>
+        <p:spPr>
+          <a:xfrm>
+            <a:off x="11173968" y="3890772"/>
+            <a:ext cx="548640" cy="256032"/>
+          </a:xfrm>
+          <a:prstGeom prst="rect">
+            <a:avLst/>
+          </a:prstGeom>
+          <a:noFill/>
+        </p:spPr>
+        <p:txBody>
+          <a:bodyPr wrap="square">
+            <a:spAutoFit/>
+          </a:bodyPr>
+          <a:lstStyle/>
+          <a:p>
+            <a:pPr algn="ctr"/>
+            <a:r>
+              <a:rPr sz="850" b="1">
+                <a:solidFill>
+                  <a:srgbClr val="3B82F6"/>
+                </a:solidFill>
+              </a:rPr>
+              <a:t>T1</a:t>
+            </a:r>
+          </a:p>
+        </p:txBody>
+      </p:sp>
+      <p:sp>
+        <p:nvSpPr>
+          <p:cNvPr id="97" name="Rectangle 96"/>
+          <p:cNvSpPr/>
+          <p:nvPr/>
+        </p:nvSpPr>
+        <p:spPr>
+          <a:xfrm>
+            <a:off x="365760" y="4178808"/>
+            <a:ext cx="11430000" cy="342900"/>
+          </a:xfrm>
+          <a:prstGeom prst="rect">
+            <a:avLst/>
+          </a:prstGeom>
+          <a:solidFill>
+            <a:srgbClr val="1A1B23"/>
+          </a:solidFill>
+          <a:ln w="12700">
+            <a:noFill/>
+          </a:ln>
+        </p:spPr>
+        <p:style>
+          <a:lnRef idx="1">
+            <a:schemeClr val="accent1"/>
+          </a:lnRef>
+          <a:fillRef idx="3">
+            <a:schemeClr val="accent1"/>
+          </a:fillRef>
+          <a:effectRef idx="2">
+            <a:schemeClr val="accent1"/>
+          </a:effectRef>
+          <a:fontRef idx="minor">
+            <a:schemeClr val="lt1"/>
+          </a:fontRef>
+        </p:style>
+        <p:txBody>
+          <a:bodyPr rtlCol="0" anchor="ctr"/>
+          <a:lstStyle/>
+          <a:p>
+            <a:pPr algn="ctr"/>
+          </a:p>
+        </p:txBody>
+      </p:sp>
+      <p:sp>
+        <p:nvSpPr>
+          <p:cNvPr id="98" name="TextBox 97"/>
+          <p:cNvSpPr txBox="1"/>
+          <p:nvPr/>
+        </p:nvSpPr>
+        <p:spPr>
+          <a:xfrm>
+            <a:off x="438912" y="4242816"/>
+            <a:ext cx="2834640" cy="228600"/>
+          </a:xfrm>
+          <a:prstGeom prst="rect">
+            <a:avLst/>
+          </a:prstGeom>
+          <a:noFill/>
+        </p:spPr>
+        <p:txBody>
+          <a:bodyPr wrap="square">
+            <a:spAutoFit/>
+          </a:bodyPr>
+          <a:lstStyle/>
+          <a:p>
+            <a:pPr algn="l"/>
+            <a:r>
+              <a:rPr sz="900" b="0">
+                <a:solidFill>
+                  <a:srgbClr val="FFFFFF"/>
+                </a:solidFill>
+              </a:rPr>
+              <a:t>09  Credential Leak</a:t>
+            </a:r>
+          </a:p>
+        </p:txBody>
+      </p:sp>
+      <p:sp>
+        <p:nvSpPr>
+          <p:cNvPr id="99" name="TextBox 98"/>
+          <p:cNvSpPr txBox="1"/>
+          <p:nvPr/>
+        </p:nvSpPr>
+        <p:spPr>
+          <a:xfrm>
+            <a:off x="3310128" y="4233672"/>
+            <a:ext cx="777240" cy="256032"/>
+          </a:xfrm>
+          <a:prstGeom prst="rect">
+            <a:avLst/>
+          </a:prstGeom>
+          <a:noFill/>
+        </p:spPr>
+        <p:txBody>
+          <a:bodyPr wrap="square">
+            <a:spAutoFit/>
+          </a:bodyPr>
+          <a:lstStyle/>
+          <a:p>
+            <a:pPr algn="r"/>
+            <a:r>
+              <a:rPr sz="1000" b="1">
+                <a:solidFill>
+                  <a:srgbClr val="EF4444"/>
+                </a:solidFill>
+              </a:rPr>
+              <a:t>0.0%</a:t>
+            </a:r>
+          </a:p>
+        </p:txBody>
+      </p:sp>
+      <p:sp>
+        <p:nvSpPr>
+          <p:cNvPr id="100" name="Rectangle 99"/>
+          <p:cNvSpPr/>
+          <p:nvPr/>
+        </p:nvSpPr>
+        <p:spPr>
+          <a:xfrm>
+            <a:off x="4160520" y="4270248"/>
+            <a:ext cx="5029200" cy="123444"/>
+          </a:xfrm>
+          <a:prstGeom prst="rect">
+            <a:avLst/>
+          </a:prstGeom>
+          <a:solidFill>
+            <a:srgbClr val="252635"/>
+          </a:solidFill>
+          <a:ln>
+            <a:noFill/>
+          </a:ln>
+        </p:spPr>
+        <p:style>
+          <a:lnRef idx="1">
+            <a:schemeClr val="accent1"/>
+          </a:lnRef>
+          <a:fillRef idx="3">
+            <a:schemeClr val="accent1"/>
+          </a:fillRef>
+          <a:effectRef idx="2">
+            <a:schemeClr val="accent1"/>
+          </a:effectRef>
+          <a:fontRef idx="minor">
+            <a:schemeClr val="lt1"/>
+          </a:fontRef>
+        </p:style>
+        <p:txBody>
+          <a:bodyPr rtlCol="0" anchor="ctr"/>
+          <a:lstStyle/>
+          <a:p>
+            <a:pPr algn="ctr"/>
+          </a:p>
+        </p:txBody>
+      </p:sp>
+      <p:sp>
+        <p:nvSpPr>
+          <p:cNvPr id="101" name="TextBox 100"/>
+          <p:cNvSpPr txBox="1"/>
+          <p:nvPr/>
+        </p:nvSpPr>
+        <p:spPr>
+          <a:xfrm>
+            <a:off x="8979408" y="4242816"/>
+            <a:ext cx="365760" cy="256032"/>
+          </a:xfrm>
+          <a:prstGeom prst="rect">
+            <a:avLst/>
+          </a:prstGeom>
+          <a:noFill/>
+        </p:spPr>
+        <p:txBody>
+          <a:bodyPr wrap="square">
+            <a:spAutoFit/>
+          </a:bodyPr>
+          <a:lstStyle/>
+          <a:p>
+            <a:pPr algn="ctr"/>
+            <a:r>
+              <a:rPr sz="950" b="1">
+                <a:solidFill>
+                  <a:srgbClr val="EF4444"/>
+                </a:solidFill>
+              </a:rPr>
+              <a:t>0</a:t>
+            </a:r>
+          </a:p>
+        </p:txBody>
+      </p:sp>
+      <p:sp>
+        <p:nvSpPr>
+          <p:cNvPr id="102" name="TextBox 101"/>
+          <p:cNvSpPr txBox="1"/>
+          <p:nvPr/>
+        </p:nvSpPr>
+        <p:spPr>
+          <a:xfrm>
+            <a:off x="9345168" y="4242816"/>
+            <a:ext cx="365760" cy="256032"/>
+          </a:xfrm>
+          <a:prstGeom prst="rect">
+            <a:avLst/>
+          </a:prstGeom>
+          <a:noFill/>
+        </p:spPr>
+        <p:txBody>
+          <a:bodyPr wrap="square">
+            <a:spAutoFit/>
+          </a:bodyPr>
+          <a:lstStyle/>
+          <a:p>
+            <a:pPr algn="ctr"/>
+            <a:r>
+              <a:rPr sz="950" b="0">
+                <a:solidFill>
+                  <a:srgbClr val="EF4444"/>
+                </a:solidFill>
+              </a:rPr>
+              <a:t>15</a:t>
+            </a:r>
+          </a:p>
+        </p:txBody>
+      </p:sp>
+      <p:sp>
+        <p:nvSpPr>
+          <p:cNvPr id="103" name="TextBox 102"/>
+          <p:cNvSpPr txBox="1"/>
+          <p:nvPr/>
+        </p:nvSpPr>
+        <p:spPr>
+          <a:xfrm>
+            <a:off x="9802368" y="4242816"/>
+            <a:ext cx="457200" cy="256032"/>
+          </a:xfrm>
+          <a:prstGeom prst="rect">
+            <a:avLst/>
+          </a:prstGeom>
+          <a:noFill/>
+        </p:spPr>
+        <p:txBody>
+          <a:bodyPr wrap="square">
+            <a:spAutoFit/>
+          </a:bodyPr>
+          <a:lstStyle/>
+          <a:p>
+            <a:pPr algn="ctr"/>
+            <a:r>
+              <a:rPr sz="900" b="0">
+                <a:solidFill>
+                  <a:srgbClr val="94A3B8"/>
+                </a:solidFill>
+              </a:rPr>
+              <a:t>—</a:t>
+            </a:r>
+          </a:p>
+        </p:txBody>
+      </p:sp>
+      <p:sp>
+        <p:nvSpPr>
+          <p:cNvPr id="104" name="TextBox 103"/>
+          <p:cNvSpPr txBox="1"/>
+          <p:nvPr/>
+        </p:nvSpPr>
+        <p:spPr>
+          <a:xfrm>
+            <a:off x="10314432" y="4242816"/>
+            <a:ext cx="822960" cy="256032"/>
+          </a:xfrm>
+          <a:prstGeom prst="rect">
+            <a:avLst/>
+          </a:prstGeom>
+          <a:noFill/>
+        </p:spPr>
+        <p:txBody>
+          <a:bodyPr wrap="square">
+            <a:spAutoFit/>
+          </a:bodyPr>
+          <a:lstStyle/>
+          <a:p>
+            <a:pPr algn="r"/>
+            <a:r>
+              <a:rPr sz="900" b="0">
+                <a:solidFill>
+                  <a:srgbClr val="94A3B8"/>
+                </a:solidFill>
+              </a:rPr>
+              <a:t>0.1ms</a:t>
+            </a:r>
+          </a:p>
+        </p:txBody>
+      </p:sp>
+      <p:sp>
+        <p:nvSpPr>
+          <p:cNvPr id="105" name="TextBox 104"/>
+          <p:cNvSpPr txBox="1"/>
+          <p:nvPr/>
+        </p:nvSpPr>
+        <p:spPr>
+          <a:xfrm>
+            <a:off x="11173968" y="4242816"/>
+            <a:ext cx="548640" cy="256032"/>
+          </a:xfrm>
+          <a:prstGeom prst="rect">
+            <a:avLst/>
+          </a:prstGeom>
+          <a:noFill/>
+        </p:spPr>
+        <p:txBody>
+          <a:bodyPr wrap="square">
+            <a:spAutoFit/>
+          </a:bodyPr>
+          <a:lstStyle/>
+          <a:p>
+            <a:pPr algn="ctr"/>
+            <a:r>
+              <a:rPr sz="850" b="1">
+                <a:solidFill>
+                  <a:srgbClr val="3B82F6"/>
+                </a:solidFill>
+              </a:rPr>
+              <a:t>T1</a:t>
+            </a:r>
+          </a:p>
+        </p:txBody>
+      </p:sp>
+      <p:sp>
+        <p:nvSpPr>
+          <p:cNvPr id="106" name="Rectangle 105"/>
+          <p:cNvSpPr/>
+          <p:nvPr/>
+        </p:nvSpPr>
+        <p:spPr>
+          <a:xfrm>
+            <a:off x="365760" y="4530852"/>
+            <a:ext cx="11430000" cy="342900"/>
+          </a:xfrm>
+          <a:prstGeom prst="rect">
+            <a:avLst/>
+          </a:prstGeom>
+          <a:solidFill>
+            <a:srgbClr val="12131B"/>
+          </a:solidFill>
+          <a:ln w="12700">
+            <a:noFill/>
+          </a:ln>
+        </p:spPr>
+        <p:style>
+          <a:lnRef idx="1">
+            <a:schemeClr val="accent1"/>
+          </a:lnRef>
+          <a:fillRef idx="3">
+            <a:schemeClr val="accent1"/>
+          </a:fillRef>
+          <a:effectRef idx="2">
+            <a:schemeClr val="accent1"/>
+          </a:effectRef>
+          <a:fontRef idx="minor">
+            <a:schemeClr val="lt1"/>
+          </a:fontRef>
+        </p:style>
+        <p:txBody>
+          <a:bodyPr rtlCol="0" anchor="ctr"/>
+          <a:lstStyle/>
+          <a:p>
+            <a:pPr algn="ctr"/>
+          </a:p>
+        </p:txBody>
+      </p:sp>
+      <p:sp>
+        <p:nvSpPr>
+          <p:cNvPr id="107" name="TextBox 106"/>
+          <p:cNvSpPr txBox="1"/>
+          <p:nvPr/>
+        </p:nvSpPr>
+        <p:spPr>
+          <a:xfrm>
+            <a:off x="438912" y="4594860"/>
+            <a:ext cx="2834640" cy="228600"/>
+          </a:xfrm>
+          <a:prstGeom prst="rect">
+            <a:avLst/>
+          </a:prstGeom>
+          <a:noFill/>
+        </p:spPr>
+        <p:txBody>
+          <a:bodyPr wrap="square">
+            <a:spAutoFit/>
+          </a:bodyPr>
+          <a:lstStyle/>
+          <a:p>
+            <a:pPr algn="l"/>
+            <a:r>
+              <a:rPr sz="900" b="0">
+                <a:solidFill>
+                  <a:srgbClr val="FFFFFF"/>
+                </a:solidFill>
+              </a:rPr>
+              <a:t>10  Code Injection</a:t>
+            </a:r>
+          </a:p>
+        </p:txBody>
+      </p:sp>
+      <p:sp>
+        <p:nvSpPr>
+          <p:cNvPr id="108" name="TextBox 107"/>
+          <p:cNvSpPr txBox="1"/>
+          <p:nvPr/>
+        </p:nvSpPr>
+        <p:spPr>
+          <a:xfrm>
+            <a:off x="3310128" y="4585716"/>
+            <a:ext cx="777240" cy="256032"/>
+          </a:xfrm>
+          <a:prstGeom prst="rect">
+            <a:avLst/>
+          </a:prstGeom>
+          <a:noFill/>
+        </p:spPr>
+        <p:txBody>
+          <a:bodyPr wrap="square">
+            <a:spAutoFit/>
+          </a:bodyPr>
+          <a:lstStyle/>
+          <a:p>
+            <a:pPr algn="r"/>
+            <a:r>
+              <a:rPr sz="1000" b="1">
+                <a:solidFill>
+                  <a:srgbClr val="10B981"/>
+                </a:solidFill>
+              </a:rPr>
+              <a:t>26.7%</a:t>
+            </a:r>
+          </a:p>
+        </p:txBody>
+      </p:sp>
+      <p:sp>
+        <p:nvSpPr>
+          <p:cNvPr id="109" name="Rectangle 108"/>
+          <p:cNvSpPr/>
+          <p:nvPr/>
+        </p:nvSpPr>
+        <p:spPr>
+          <a:xfrm>
+            <a:off x="4160520" y="4622292"/>
+            <a:ext cx="5029200" cy="123444"/>
+          </a:xfrm>
+          <a:prstGeom prst="rect">
+            <a:avLst/>
+          </a:prstGeom>
+          <a:solidFill>
+            <a:srgbClr val="252635"/>
+          </a:solidFill>
+          <a:ln>
+            <a:noFill/>
+          </a:ln>
+        </p:spPr>
+        <p:style>
+          <a:lnRef idx="1">
+            <a:schemeClr val="accent1"/>
+          </a:lnRef>
+          <a:fillRef idx="3">
+            <a:schemeClr val="accent1"/>
+          </a:fillRef>
+          <a:effectRef idx="2">
+            <a:schemeClr val="accent1"/>
+          </a:effectRef>
+          <a:fontRef idx="minor">
+            <a:schemeClr val="lt1"/>
+          </a:fontRef>
+        </p:style>
+        <p:txBody>
+          <a:bodyPr rtlCol="0" anchor="ctr"/>
+          <a:lstStyle/>
+          <a:p>
+            <a:pPr algn="ctr"/>
+          </a:p>
+        </p:txBody>
+      </p:sp>
+      <p:sp>
+        <p:nvSpPr>
+          <p:cNvPr id="110" name="Rectangle 109"/>
+          <p:cNvSpPr/>
+          <p:nvPr/>
+        </p:nvSpPr>
+        <p:spPr>
+          <a:xfrm>
+            <a:off x="4160520" y="4622292"/>
+            <a:ext cx="5029200" cy="123444"/>
+          </a:xfrm>
+          <a:prstGeom prst="rect">
+            <a:avLst/>
+          </a:prstGeom>
+          <a:solidFill>
+            <a:srgbClr val="10B981"/>
+          </a:solidFill>
+          <a:ln>
+            <a:noFill/>
+          </a:ln>
+        </p:spPr>
+        <p:style>
+          <a:lnRef idx="1">
+            <a:schemeClr val="accent1"/>
+          </a:lnRef>
+          <a:fillRef idx="3">
+            <a:schemeClr val="accent1"/>
+          </a:fillRef>
+          <a:effectRef idx="2">
+            <a:schemeClr val="accent1"/>
+          </a:effectRef>
+          <a:fontRef idx="minor">
+            <a:schemeClr val="lt1"/>
+          </a:fontRef>
+        </p:style>
+        <p:txBody>
+          <a:bodyPr rtlCol="0" anchor="ctr"/>
+          <a:lstStyle/>
+          <a:p>
+            <a:pPr algn="ctr"/>
+          </a:p>
+        </p:txBody>
+      </p:sp>
+      <p:sp>
+        <p:nvSpPr>
+          <p:cNvPr id="111" name="TextBox 110"/>
+          <p:cNvSpPr txBox="1"/>
+          <p:nvPr/>
+        </p:nvSpPr>
+        <p:spPr>
+          <a:xfrm>
+            <a:off x="8503920" y="4594860"/>
+            <a:ext cx="658368" cy="256032"/>
+          </a:xfrm>
+          <a:prstGeom prst="rect">
+            <a:avLst/>
+          </a:prstGeom>
+          <a:noFill/>
+        </p:spPr>
+        <p:txBody>
+          <a:bodyPr wrap="square">
+            <a:spAutoFit/>
+          </a:bodyPr>
+          <a:lstStyle/>
+          <a:p>
+            <a:pPr algn="r"/>
+            <a:r>
+              <a:rPr sz="900" b="1">
+                <a:solidFill>
+                  <a:srgbClr val="050508"/>
+                </a:solidFill>
+              </a:rPr>
+              <a:t>26.7%</a:t>
+            </a:r>
+          </a:p>
+        </p:txBody>
+      </p:sp>
+      <p:sp>
+        <p:nvSpPr>
+          <p:cNvPr id="112" name="TextBox 111"/>
+          <p:cNvSpPr txBox="1"/>
+          <p:nvPr/>
+        </p:nvSpPr>
+        <p:spPr>
+          <a:xfrm>
+            <a:off x="8979408" y="4594860"/>
+            <a:ext cx="365760" cy="256032"/>
+          </a:xfrm>
+          <a:prstGeom prst="rect">
+            <a:avLst/>
+          </a:prstGeom>
+          <a:noFill/>
+        </p:spPr>
+        <p:txBody>
+          <a:bodyPr wrap="square">
+            <a:spAutoFit/>
+          </a:bodyPr>
+          <a:lstStyle/>
+          <a:p>
+            <a:pPr algn="ctr"/>
+            <a:r>
+              <a:rPr sz="950" b="1">
+                <a:solidFill>
+                  <a:srgbClr val="10B981"/>
+                </a:solidFill>
+              </a:rPr>
+              <a:t>4</a:t>
+            </a:r>
+          </a:p>
+        </p:txBody>
+      </p:sp>
+      <p:sp>
+        <p:nvSpPr>
+          <p:cNvPr id="113" name="TextBox 112"/>
+          <p:cNvSpPr txBox="1"/>
+          <p:nvPr/>
+        </p:nvSpPr>
+        <p:spPr>
+          <a:xfrm>
+            <a:off x="9345168" y="4594860"/>
+            <a:ext cx="365760" cy="256032"/>
+          </a:xfrm>
+          <a:prstGeom prst="rect">
+            <a:avLst/>
+          </a:prstGeom>
+          <a:noFill/>
+        </p:spPr>
+        <p:txBody>
+          <a:bodyPr wrap="square">
+            <a:spAutoFit/>
+          </a:bodyPr>
+          <a:lstStyle/>
+          <a:p>
+            <a:pPr algn="ctr"/>
+            <a:r>
+              <a:rPr sz="950" b="0">
+                <a:solidFill>
+                  <a:srgbClr val="EF4444"/>
+                </a:solidFill>
+              </a:rPr>
+              <a:t>11</a:t>
+            </a:r>
+          </a:p>
+        </p:txBody>
+      </p:sp>
+      <p:sp>
+        <p:nvSpPr>
+          <p:cNvPr id="114" name="TextBox 113"/>
+          <p:cNvSpPr txBox="1"/>
+          <p:nvPr/>
+        </p:nvSpPr>
+        <p:spPr>
+          <a:xfrm>
+            <a:off x="9802368" y="4594860"/>
+            <a:ext cx="457200" cy="256032"/>
+          </a:xfrm>
+          <a:prstGeom prst="rect">
+            <a:avLst/>
+          </a:prstGeom>
+          <a:noFill/>
+        </p:spPr>
+        <p:txBody>
+          <a:bodyPr wrap="square">
+            <a:spAutoFit/>
+          </a:bodyPr>
+          <a:lstStyle/>
+          <a:p>
+            <a:pPr algn="ctr"/>
+            <a:r>
+              <a:rPr sz="900" b="0">
+                <a:solidFill>
+                  <a:srgbClr val="94A3B8"/>
+                </a:solidFill>
+              </a:rPr>
+              <a:t>0.421</a:t>
+            </a:r>
+          </a:p>
+        </p:txBody>
+      </p:sp>
+      <p:sp>
+        <p:nvSpPr>
+          <p:cNvPr id="115" name="TextBox 114"/>
+          <p:cNvSpPr txBox="1"/>
+          <p:nvPr/>
+        </p:nvSpPr>
+        <p:spPr>
+          <a:xfrm>
+            <a:off x="10314432" y="4594860"/>
+            <a:ext cx="822960" cy="256032"/>
+          </a:xfrm>
+          <a:prstGeom prst="rect">
+            <a:avLst/>
+          </a:prstGeom>
+          <a:noFill/>
+        </p:spPr>
+        <p:txBody>
+          <a:bodyPr wrap="square">
+            <a:spAutoFit/>
+          </a:bodyPr>
+          <a:lstStyle/>
+          <a:p>
+            <a:pPr algn="r"/>
+            <a:r>
+              <a:rPr sz="900" b="0">
+                <a:solidFill>
+                  <a:srgbClr val="94A3B8"/>
+                </a:solidFill>
+              </a:rPr>
+              <a:t>16.21ms</a:t>
+            </a:r>
+          </a:p>
+        </p:txBody>
+      </p:sp>
+      <p:sp>
+        <p:nvSpPr>
+          <p:cNvPr id="116" name="TextBox 115"/>
+          <p:cNvSpPr txBox="1"/>
+          <p:nvPr/>
+        </p:nvSpPr>
+        <p:spPr>
+          <a:xfrm>
+            <a:off x="11173968" y="4594860"/>
+            <a:ext cx="548640" cy="256032"/>
+          </a:xfrm>
+          <a:prstGeom prst="rect">
+            <a:avLst/>
+          </a:prstGeom>
+          <a:noFill/>
+        </p:spPr>
+        <p:txBody>
+          <a:bodyPr wrap="square">
+            <a:spAutoFit/>
+          </a:bodyPr>
+          <a:lstStyle/>
+          <a:p>
+            <a:pPr algn="ctr"/>
+            <a:r>
+              <a:rPr sz="850" b="1">
+                <a:solidFill>
+                  <a:srgbClr val="10B981"/>
+                </a:solidFill>
+              </a:rPr>
+              <a:t>T0+T1</a:t>
+            </a:r>
+          </a:p>
+        </p:txBody>
+      </p:sp>
+      <p:sp>
+        <p:nvSpPr>
+          <p:cNvPr id="117" name="Rectangle 116"/>
+          <p:cNvSpPr/>
+          <p:nvPr/>
+        </p:nvSpPr>
+        <p:spPr>
+          <a:xfrm>
+            <a:off x="365760" y="4882896"/>
+            <a:ext cx="11430000" cy="342900"/>
+          </a:xfrm>
+          <a:prstGeom prst="rect">
+            <a:avLst/>
+          </a:prstGeom>
+          <a:solidFill>
+            <a:srgbClr val="1A1B23"/>
+          </a:solidFill>
+          <a:ln w="12700">
+            <a:noFill/>
+          </a:ln>
+        </p:spPr>
+        <p:style>
+          <a:lnRef idx="1">
+            <a:schemeClr val="accent1"/>
+          </a:lnRef>
+          <a:fillRef idx="3">
+            <a:schemeClr val="accent1"/>
+          </a:fillRef>
+          <a:effectRef idx="2">
+            <a:schemeClr val="accent1"/>
+          </a:effectRef>
+          <a:fontRef idx="minor">
+            <a:schemeClr val="lt1"/>
+          </a:fontRef>
+        </p:style>
+        <p:txBody>
+          <a:bodyPr rtlCol="0" anchor="ctr"/>
+          <a:lstStyle/>
+          <a:p>
+            <a:pPr algn="ctr"/>
+          </a:p>
+        </p:txBody>
+      </p:sp>
+      <p:sp>
+        <p:nvSpPr>
+          <p:cNvPr id="118" name="TextBox 117"/>
+          <p:cNvSpPr txBox="1"/>
+          <p:nvPr/>
+        </p:nvSpPr>
+        <p:spPr>
+          <a:xfrm>
+            <a:off x="438912" y="4946904"/>
+            <a:ext cx="2834640" cy="228600"/>
+          </a:xfrm>
+          <a:prstGeom prst="rect">
+            <a:avLst/>
+          </a:prstGeom>
+          <a:noFill/>
+        </p:spPr>
+        <p:txBody>
+          <a:bodyPr wrap="square">
+            <a:spAutoFit/>
+          </a:bodyPr>
+          <a:lstStyle/>
+          <a:p>
+            <a:pPr algn="l"/>
+            <a:r>
+              <a:rPr sz="900" b="0">
+                <a:solidFill>
+                  <a:srgbClr val="FFFFFF"/>
+                </a:solidFill>
+              </a:rPr>
+              <a:t>11  Resource Exhaustion</a:t>
+            </a:r>
+          </a:p>
+        </p:txBody>
+      </p:sp>
+      <p:sp>
+        <p:nvSpPr>
+          <p:cNvPr id="119" name="TextBox 118"/>
+          <p:cNvSpPr txBox="1"/>
+          <p:nvPr/>
+        </p:nvSpPr>
+        <p:spPr>
+          <a:xfrm>
+            <a:off x="3310128" y="4937759"/>
+            <a:ext cx="777240" cy="256032"/>
+          </a:xfrm>
+          <a:prstGeom prst="rect">
+            <a:avLst/>
+          </a:prstGeom>
+          <a:noFill/>
+        </p:spPr>
+        <p:txBody>
+          <a:bodyPr wrap="square">
+            <a:spAutoFit/>
+          </a:bodyPr>
+          <a:lstStyle/>
+          <a:p>
+            <a:pPr algn="r"/>
+            <a:r>
+              <a:rPr sz="1000" b="1">
+                <a:solidFill>
+                  <a:srgbClr val="EF4444"/>
+                </a:solidFill>
+              </a:rPr>
+              <a:t>0.0%</a:t>
+            </a:r>
+          </a:p>
+        </p:txBody>
+      </p:sp>
+      <p:sp>
+        <p:nvSpPr>
+          <p:cNvPr id="120" name="Rectangle 119"/>
+          <p:cNvSpPr/>
+          <p:nvPr/>
+        </p:nvSpPr>
+        <p:spPr>
+          <a:xfrm>
+            <a:off x="4160520" y="4974336"/>
+            <a:ext cx="5029200" cy="123444"/>
+          </a:xfrm>
+          <a:prstGeom prst="rect">
+            <a:avLst/>
+          </a:prstGeom>
+          <a:solidFill>
+            <a:srgbClr val="252635"/>
+          </a:solidFill>
+          <a:ln>
+            <a:noFill/>
+          </a:ln>
+        </p:spPr>
+        <p:style>
+          <a:lnRef idx="1">
+            <a:schemeClr val="accent1"/>
+          </a:lnRef>
+          <a:fillRef idx="3">
+            <a:schemeClr val="accent1"/>
+          </a:fillRef>
+          <a:effectRef idx="2">
+            <a:schemeClr val="accent1"/>
+          </a:effectRef>
+          <a:fontRef idx="minor">
+            <a:schemeClr val="lt1"/>
+          </a:fontRef>
+        </p:style>
+        <p:txBody>
+          <a:bodyPr rtlCol="0" anchor="ctr"/>
+          <a:lstStyle/>
+          <a:p>
+            <a:pPr algn="ctr"/>
+          </a:p>
+        </p:txBody>
+      </p:sp>
+      <p:sp>
+        <p:nvSpPr>
+          <p:cNvPr id="121" name="TextBox 120"/>
+          <p:cNvSpPr txBox="1"/>
+          <p:nvPr/>
+        </p:nvSpPr>
+        <p:spPr>
+          <a:xfrm>
+            <a:off x="8979408" y="4946904"/>
+            <a:ext cx="365760" cy="256032"/>
+          </a:xfrm>
+          <a:prstGeom prst="rect">
+            <a:avLst/>
+          </a:prstGeom>
+          <a:noFill/>
+        </p:spPr>
+        <p:txBody>
+          <a:bodyPr wrap="square">
+            <a:spAutoFit/>
+          </a:bodyPr>
+          <a:lstStyle/>
+          <a:p>
+            <a:pPr algn="ctr"/>
+            <a:r>
+              <a:rPr sz="950" b="1">
+                <a:solidFill>
+                  <a:srgbClr val="EF4444"/>
+                </a:solidFill>
+              </a:rPr>
+              <a:t>0</a:t>
+            </a:r>
+          </a:p>
+        </p:txBody>
+      </p:sp>
+      <p:sp>
+        <p:nvSpPr>
+          <p:cNvPr id="122" name="TextBox 121"/>
+          <p:cNvSpPr txBox="1"/>
+          <p:nvPr/>
+        </p:nvSpPr>
+        <p:spPr>
+          <a:xfrm>
+            <a:off x="9345168" y="4946904"/>
+            <a:ext cx="365760" cy="256032"/>
+          </a:xfrm>
+          <a:prstGeom prst="rect">
+            <a:avLst/>
+          </a:prstGeom>
+          <a:noFill/>
+        </p:spPr>
+        <p:txBody>
+          <a:bodyPr wrap="square">
+            <a:spAutoFit/>
+          </a:bodyPr>
+          <a:lstStyle/>
+          <a:p>
+            <a:pPr algn="ctr"/>
+            <a:r>
+              <a:rPr sz="950" b="0">
+                <a:solidFill>
+                  <a:srgbClr val="EF4444"/>
+                </a:solidFill>
+              </a:rPr>
+              <a:t>15</a:t>
+            </a:r>
+          </a:p>
+        </p:txBody>
+      </p:sp>
+      <p:sp>
+        <p:nvSpPr>
+          <p:cNvPr id="123" name="TextBox 122"/>
+          <p:cNvSpPr txBox="1"/>
+          <p:nvPr/>
+        </p:nvSpPr>
+        <p:spPr>
+          <a:xfrm>
+            <a:off x="9802368" y="4946904"/>
+            <a:ext cx="457200" cy="256032"/>
+          </a:xfrm>
+          <a:prstGeom prst="rect">
+            <a:avLst/>
+          </a:prstGeom>
+          <a:noFill/>
+        </p:spPr>
+        <p:txBody>
+          <a:bodyPr wrap="square">
+            <a:spAutoFit/>
+          </a:bodyPr>
+          <a:lstStyle/>
+          <a:p>
+            <a:pPr algn="ctr"/>
+            <a:r>
+              <a:rPr sz="900" b="0">
+                <a:solidFill>
+                  <a:srgbClr val="94A3B8"/>
+                </a:solidFill>
+              </a:rPr>
+              <a:t>—</a:t>
+            </a:r>
+          </a:p>
+        </p:txBody>
+      </p:sp>
+      <p:sp>
+        <p:nvSpPr>
+          <p:cNvPr id="124" name="TextBox 123"/>
+          <p:cNvSpPr txBox="1"/>
+          <p:nvPr/>
+        </p:nvSpPr>
+        <p:spPr>
+          <a:xfrm>
+            <a:off x="10314432" y="4946904"/>
+            <a:ext cx="822960" cy="256032"/>
+          </a:xfrm>
+          <a:prstGeom prst="rect">
+            <a:avLst/>
+          </a:prstGeom>
+          <a:noFill/>
+        </p:spPr>
+        <p:txBody>
+          <a:bodyPr wrap="square">
+            <a:spAutoFit/>
+          </a:bodyPr>
+          <a:lstStyle/>
+          <a:p>
+            <a:pPr algn="r"/>
+            <a:r>
+              <a:rPr sz="900" b="0">
+                <a:solidFill>
+                  <a:srgbClr val="94A3B8"/>
+                </a:solidFill>
+              </a:rPr>
+              <a:t>0.1ms</a:t>
+            </a:r>
+          </a:p>
+        </p:txBody>
+      </p:sp>
+      <p:sp>
+        <p:nvSpPr>
+          <p:cNvPr id="125" name="TextBox 124"/>
+          <p:cNvSpPr txBox="1"/>
+          <p:nvPr/>
+        </p:nvSpPr>
+        <p:spPr>
+          <a:xfrm>
+            <a:off x="11173968" y="4946904"/>
+            <a:ext cx="548640" cy="256032"/>
+          </a:xfrm>
+          <a:prstGeom prst="rect">
+            <a:avLst/>
+          </a:prstGeom>
+          <a:noFill/>
+        </p:spPr>
+        <p:txBody>
+          <a:bodyPr wrap="square">
+            <a:spAutoFit/>
+          </a:bodyPr>
+          <a:lstStyle/>
+          <a:p>
+            <a:pPr algn="ctr"/>
+            <a:r>
+              <a:rPr sz="850" b="1">
+                <a:solidFill>
+                  <a:srgbClr val="3B82F6"/>
+                </a:solidFill>
+              </a:rPr>
+              <a:t>T1</a:t>
+            </a:r>
+          </a:p>
+        </p:txBody>
+      </p:sp>
+      <p:sp>
+        <p:nvSpPr>
+          <p:cNvPr id="126" name="Rectangle 125"/>
+          <p:cNvSpPr/>
+          <p:nvPr/>
+        </p:nvSpPr>
+        <p:spPr>
+          <a:xfrm>
+            <a:off x="365760" y="5234940"/>
+            <a:ext cx="11430000" cy="342900"/>
+          </a:xfrm>
+          <a:prstGeom prst="rect">
+            <a:avLst/>
+          </a:prstGeom>
+          <a:solidFill>
+            <a:srgbClr val="12131B"/>
+          </a:solidFill>
+          <a:ln w="12700">
+            <a:noFill/>
+          </a:ln>
+        </p:spPr>
+        <p:style>
+          <a:lnRef idx="1">
+            <a:schemeClr val="accent1"/>
+          </a:lnRef>
+          <a:fillRef idx="3">
+            <a:schemeClr val="accent1"/>
+          </a:fillRef>
+          <a:effectRef idx="2">
+            <a:schemeClr val="accent1"/>
+          </a:effectRef>
+          <a:fontRef idx="minor">
+            <a:schemeClr val="lt1"/>
+          </a:fontRef>
+        </p:style>
+        <p:txBody>
+          <a:bodyPr rtlCol="0" anchor="ctr"/>
+          <a:lstStyle/>
+          <a:p>
+            <a:pPr algn="ctr"/>
+          </a:p>
+        </p:txBody>
+      </p:sp>
+      <p:sp>
+        <p:nvSpPr>
+          <p:cNvPr id="127" name="TextBox 126"/>
+          <p:cNvSpPr txBox="1"/>
+          <p:nvPr/>
+        </p:nvSpPr>
+        <p:spPr>
+          <a:xfrm>
+            <a:off x="438912" y="5298948"/>
+            <a:ext cx="2834640" cy="228600"/>
+          </a:xfrm>
+          <a:prstGeom prst="rect">
+            <a:avLst/>
+          </a:prstGeom>
+          <a:noFill/>
+        </p:spPr>
+        <p:txBody>
+          <a:bodyPr wrap="square">
+            <a:spAutoFit/>
+          </a:bodyPr>
+          <a:lstStyle/>
+          <a:p>
+            <a:pPr algn="l"/>
+            <a:r>
+              <a:rPr sz="900" b="0">
+                <a:solidFill>
+                  <a:srgbClr val="FFFFFF"/>
+                </a:solidFill>
+              </a:rPr>
+              <a:t>12  Data Poisoning (RAG)</a:t>
+            </a:r>
+          </a:p>
+        </p:txBody>
+      </p:sp>
+      <p:sp>
+        <p:nvSpPr>
+          <p:cNvPr id="128" name="TextBox 127"/>
+          <p:cNvSpPr txBox="1"/>
+          <p:nvPr/>
+        </p:nvSpPr>
+        <p:spPr>
+          <a:xfrm>
+            <a:off x="3310128" y="5289804"/>
+            <a:ext cx="777240" cy="256032"/>
+          </a:xfrm>
+          <a:prstGeom prst="rect">
+            <a:avLst/>
+          </a:prstGeom>
+          <a:noFill/>
+        </p:spPr>
+        <p:txBody>
+          <a:bodyPr wrap="square">
+            <a:spAutoFit/>
+          </a:bodyPr>
+          <a:lstStyle/>
+          <a:p>
+            <a:pPr algn="r"/>
+            <a:r>
+              <a:rPr sz="1000" b="1">
+                <a:solidFill>
+                  <a:srgbClr val="F59E0B"/>
+                </a:solidFill>
+              </a:rPr>
+              <a:t>13.3%</a:t>
+            </a:r>
+          </a:p>
+        </p:txBody>
+      </p:sp>
+      <p:sp>
+        <p:nvSpPr>
+          <p:cNvPr id="129" name="Rectangle 128"/>
+          <p:cNvSpPr/>
+          <p:nvPr/>
+        </p:nvSpPr>
+        <p:spPr>
+          <a:xfrm>
+            <a:off x="4160520" y="5326380"/>
+            <a:ext cx="5029200" cy="123444"/>
+          </a:xfrm>
+          <a:prstGeom prst="rect">
+            <a:avLst/>
+          </a:prstGeom>
+          <a:solidFill>
+            <a:srgbClr val="252635"/>
+          </a:solidFill>
+          <a:ln>
+            <a:noFill/>
+          </a:ln>
+        </p:spPr>
+        <p:style>
+          <a:lnRef idx="1">
+            <a:schemeClr val="accent1"/>
+          </a:lnRef>
+          <a:fillRef idx="3">
+            <a:schemeClr val="accent1"/>
+          </a:fillRef>
+          <a:effectRef idx="2">
+            <a:schemeClr val="accent1"/>
+          </a:effectRef>
+          <a:fontRef idx="minor">
+            <a:schemeClr val="lt1"/>
+          </a:fontRef>
+        </p:style>
+        <p:txBody>
+          <a:bodyPr rtlCol="0" anchor="ctr"/>
+          <a:lstStyle/>
+          <a:p>
+            <a:pPr algn="ctr"/>
+          </a:p>
+        </p:txBody>
+      </p:sp>
+      <p:sp>
+        <p:nvSpPr>
+          <p:cNvPr id="130" name="Rectangle 129"/>
+          <p:cNvSpPr/>
+          <p:nvPr/>
+        </p:nvSpPr>
+        <p:spPr>
+          <a:xfrm>
+            <a:off x="4160520" y="5326380"/>
+            <a:ext cx="2513657" cy="123444"/>
+          </a:xfrm>
+          <a:prstGeom prst="rect">
+            <a:avLst/>
+          </a:prstGeom>
+          <a:solidFill>
+            <a:srgbClr val="F59E0B"/>
+          </a:solidFill>
+          <a:ln>
+            <a:noFill/>
+          </a:ln>
+        </p:spPr>
+        <p:style>
+          <a:lnRef idx="1">
+            <a:schemeClr val="accent1"/>
+          </a:lnRef>
+          <a:fillRef idx="3">
+            <a:schemeClr val="accent1"/>
+          </a:fillRef>
+          <a:effectRef idx="2">
+            <a:schemeClr val="accent1"/>
+          </a:effectRef>
+          <a:fontRef idx="minor">
+            <a:schemeClr val="lt1"/>
+          </a:fontRef>
+        </p:style>
+        <p:txBody>
+          <a:bodyPr rtlCol="0" anchor="ctr"/>
+          <a:lstStyle/>
+          <a:p>
+            <a:pPr algn="ctr"/>
+          </a:p>
+        </p:txBody>
+      </p:sp>
+      <p:sp>
+        <p:nvSpPr>
+          <p:cNvPr id="131" name="TextBox 130"/>
+          <p:cNvSpPr txBox="1"/>
+          <p:nvPr/>
+        </p:nvSpPr>
+        <p:spPr>
+          <a:xfrm>
+            <a:off x="5988377" y="5298948"/>
+            <a:ext cx="658368" cy="256032"/>
+          </a:xfrm>
+          <a:prstGeom prst="rect">
+            <a:avLst/>
+          </a:prstGeom>
+          <a:noFill/>
+        </p:spPr>
+        <p:txBody>
+          <a:bodyPr wrap="square">
+            <a:spAutoFit/>
+          </a:bodyPr>
+          <a:lstStyle/>
+          <a:p>
+            <a:pPr algn="r"/>
+            <a:r>
+              <a:rPr sz="900" b="1">
+                <a:solidFill>
+                  <a:srgbClr val="050508"/>
+                </a:solidFill>
+              </a:rPr>
+              <a:t>13.3%</a:t>
+            </a:r>
+          </a:p>
+        </p:txBody>
+      </p:sp>
+      <p:sp>
+        <p:nvSpPr>
+          <p:cNvPr id="132" name="TextBox 131"/>
+          <p:cNvSpPr txBox="1"/>
+          <p:nvPr/>
+        </p:nvSpPr>
+        <p:spPr>
+          <a:xfrm>
+            <a:off x="8979408" y="5298948"/>
+            <a:ext cx="365760" cy="256032"/>
+          </a:xfrm>
+          <a:prstGeom prst="rect">
+            <a:avLst/>
+          </a:prstGeom>
+          <a:noFill/>
+        </p:spPr>
+        <p:txBody>
+          <a:bodyPr wrap="square">
+            <a:spAutoFit/>
+          </a:bodyPr>
+          <a:lstStyle/>
+          <a:p>
+            <a:pPr algn="ctr"/>
+            <a:r>
+              <a:rPr sz="950" b="1">
+                <a:solidFill>
+                  <a:srgbClr val="10B981"/>
+                </a:solidFill>
+              </a:rPr>
+              <a:t>2</a:t>
+            </a:r>
+          </a:p>
+        </p:txBody>
+      </p:sp>
+      <p:sp>
+        <p:nvSpPr>
+          <p:cNvPr id="133" name="TextBox 132"/>
+          <p:cNvSpPr txBox="1"/>
+          <p:nvPr/>
+        </p:nvSpPr>
+        <p:spPr>
+          <a:xfrm>
+            <a:off x="9345168" y="5298948"/>
+            <a:ext cx="365760" cy="256032"/>
+          </a:xfrm>
+          <a:prstGeom prst="rect">
+            <a:avLst/>
+          </a:prstGeom>
+          <a:noFill/>
+        </p:spPr>
+        <p:txBody>
+          <a:bodyPr wrap="square">
+            <a:spAutoFit/>
+          </a:bodyPr>
+          <a:lstStyle/>
+          <a:p>
+            <a:pPr algn="ctr"/>
+            <a:r>
+              <a:rPr sz="950" b="0">
+                <a:solidFill>
+                  <a:srgbClr val="EF4444"/>
+                </a:solidFill>
+              </a:rPr>
+              <a:t>13</a:t>
+            </a:r>
+          </a:p>
+        </p:txBody>
+      </p:sp>
+      <p:sp>
+        <p:nvSpPr>
+          <p:cNvPr id="134" name="TextBox 133"/>
+          <p:cNvSpPr txBox="1"/>
+          <p:nvPr/>
+        </p:nvSpPr>
+        <p:spPr>
+          <a:xfrm>
+            <a:off x="9802368" y="5298948"/>
+            <a:ext cx="457200" cy="256032"/>
+          </a:xfrm>
+          <a:prstGeom prst="rect">
+            <a:avLst/>
+          </a:prstGeom>
+          <a:noFill/>
+        </p:spPr>
+        <p:txBody>
+          <a:bodyPr wrap="square">
+            <a:spAutoFit/>
+          </a:bodyPr>
+          <a:lstStyle/>
+          <a:p>
+            <a:pPr algn="ctr"/>
+            <a:r>
+              <a:rPr sz="900" b="0">
+                <a:solidFill>
+                  <a:srgbClr val="94A3B8"/>
+                </a:solidFill>
+              </a:rPr>
+              <a:t>0.235</a:t>
+            </a:r>
+          </a:p>
+        </p:txBody>
+      </p:sp>
+      <p:sp>
+        <p:nvSpPr>
+          <p:cNvPr id="135" name="TextBox 134"/>
+          <p:cNvSpPr txBox="1"/>
+          <p:nvPr/>
+        </p:nvSpPr>
+        <p:spPr>
+          <a:xfrm>
+            <a:off x="10314432" y="5298948"/>
+            <a:ext cx="822960" cy="256032"/>
+          </a:xfrm>
+          <a:prstGeom prst="rect">
+            <a:avLst/>
+          </a:prstGeom>
+          <a:noFill/>
+        </p:spPr>
+        <p:txBody>
+          <a:bodyPr wrap="square">
+            <a:spAutoFit/>
+          </a:bodyPr>
+          <a:lstStyle/>
+          <a:p>
+            <a:pPr algn="r"/>
+            <a:r>
+              <a:rPr sz="900" b="0">
+                <a:solidFill>
+                  <a:srgbClr val="94A3B8"/>
+                </a:solidFill>
+              </a:rPr>
+              <a:t>0.11ms</a:t>
+            </a:r>
+          </a:p>
+        </p:txBody>
+      </p:sp>
+      <p:sp>
+        <p:nvSpPr>
+          <p:cNvPr id="136" name="TextBox 135"/>
+          <p:cNvSpPr txBox="1"/>
+          <p:nvPr/>
+        </p:nvSpPr>
+        <p:spPr>
+          <a:xfrm>
+            <a:off x="11173968" y="5298948"/>
+            <a:ext cx="548640" cy="256032"/>
+          </a:xfrm>
+          <a:prstGeom prst="rect">
+            <a:avLst/>
+          </a:prstGeom>
+          <a:noFill/>
+        </p:spPr>
+        <p:txBody>
+          <a:bodyPr wrap="square">
+            <a:spAutoFit/>
+          </a:bodyPr>
+          <a:lstStyle/>
+          <a:p>
+            <a:pPr algn="ctr"/>
+            <a:r>
+              <a:rPr sz="850" b="1">
+                <a:solidFill>
+                  <a:srgbClr val="3B82F6"/>
+                </a:solidFill>
+              </a:rPr>
+              <a:t>T1</a:t>
+            </a:r>
+          </a:p>
+        </p:txBody>
+      </p:sp>
+      <p:sp>
+        <p:nvSpPr>
+          <p:cNvPr id="137" name="Rectangle 136"/>
+          <p:cNvSpPr/>
+          <p:nvPr/>
+        </p:nvSpPr>
+        <p:spPr>
+          <a:xfrm>
+            <a:off x="365760" y="5586984"/>
+            <a:ext cx="11430000" cy="342900"/>
+          </a:xfrm>
+          <a:prstGeom prst="rect">
+            <a:avLst/>
+          </a:prstGeom>
+          <a:solidFill>
+            <a:srgbClr val="1A1B23"/>
+          </a:solidFill>
+          <a:ln w="12700">
+            <a:noFill/>
+          </a:ln>
+        </p:spPr>
+        <p:style>
+          <a:lnRef idx="1">
+            <a:schemeClr val="accent1"/>
+          </a:lnRef>
+          <a:fillRef idx="3">
+            <a:schemeClr val="accent1"/>
+          </a:fillRef>
+          <a:effectRef idx="2">
+            <a:schemeClr val="accent1"/>
+          </a:effectRef>
+          <a:fontRef idx="minor">
+            <a:schemeClr val="lt1"/>
+          </a:fontRef>
+        </p:style>
+        <p:txBody>
+          <a:bodyPr rtlCol="0" anchor="ctr"/>
+          <a:lstStyle/>
+          <a:p>
+            <a:pPr algn="ctr"/>
+          </a:p>
+        </p:txBody>
+      </p:sp>
+      <p:sp>
+        <p:nvSpPr>
+          <p:cNvPr id="138" name="TextBox 137"/>
+          <p:cNvSpPr txBox="1"/>
+          <p:nvPr/>
+        </p:nvSpPr>
+        <p:spPr>
+          <a:xfrm>
+            <a:off x="438912" y="5650992"/>
+            <a:ext cx="2834640" cy="228600"/>
+          </a:xfrm>
+          <a:prstGeom prst="rect">
+            <a:avLst/>
+          </a:prstGeom>
+          <a:noFill/>
+        </p:spPr>
+        <p:txBody>
+          <a:bodyPr wrap="square">
+            <a:spAutoFit/>
+          </a:bodyPr>
+          <a:lstStyle/>
+          <a:p>
+            <a:pPr algn="l"/>
+            <a:r>
+              <a:rPr sz="900" b="1">
+                <a:solidFill>
+                  <a:srgbClr val="10B981"/>
+                </a:solidFill>
+              </a:rPr>
+              <a:t>13  Benign Control ✓</a:t>
+            </a:r>
+          </a:p>
+        </p:txBody>
+      </p:sp>
+      <p:sp>
+        <p:nvSpPr>
+          <p:cNvPr id="139" name="TextBox 138"/>
+          <p:cNvSpPr txBox="1"/>
+          <p:nvPr/>
+        </p:nvSpPr>
+        <p:spPr>
+          <a:xfrm>
+            <a:off x="3310128" y="5641848"/>
+            <a:ext cx="777240" cy="256032"/>
+          </a:xfrm>
+          <a:prstGeom prst="rect">
+            <a:avLst/>
+          </a:prstGeom>
+          <a:noFill/>
+        </p:spPr>
+        <p:txBody>
+          <a:bodyPr wrap="square">
+            <a:spAutoFit/>
+          </a:bodyPr>
+          <a:lstStyle/>
+          <a:p>
+            <a:pPr algn="r"/>
+            <a:r>
+              <a:rPr sz="1000" b="1">
+                <a:solidFill>
+                  <a:srgbClr val="10B981"/>
+                </a:solidFill>
+              </a:rPr>
+              <a:t>100.0%</a:t>
+            </a:r>
+          </a:p>
+        </p:txBody>
+      </p:sp>
+      <p:sp>
+        <p:nvSpPr>
+          <p:cNvPr id="140" name="Rectangle 139"/>
+          <p:cNvSpPr/>
+          <p:nvPr/>
+        </p:nvSpPr>
+        <p:spPr>
+          <a:xfrm>
+            <a:off x="4160520" y="5678424"/>
+            <a:ext cx="5029200" cy="123444"/>
+          </a:xfrm>
+          <a:prstGeom prst="rect">
+            <a:avLst/>
+          </a:prstGeom>
+          <a:solidFill>
+            <a:srgbClr val="06463A"/>
+          </a:solidFill>
+          <a:ln>
+            <a:noFill/>
+          </a:ln>
+        </p:spPr>
+        <p:style>
+          <a:lnRef idx="1">
+            <a:schemeClr val="accent1"/>
+          </a:lnRef>
+          <a:fillRef idx="3">
+            <a:schemeClr val="accent1"/>
+          </a:fillRef>
+          <a:effectRef idx="2">
+            <a:schemeClr val="accent1"/>
+          </a:effectRef>
+          <a:fontRef idx="minor">
+            <a:schemeClr val="lt1"/>
+          </a:fontRef>
+        </p:style>
+        <p:txBody>
+          <a:bodyPr rtlCol="0" anchor="ctr"/>
+          <a:lstStyle/>
+          <a:p>
+            <a:pPr algn="ctr"/>
+          </a:p>
+        </p:txBody>
+      </p:sp>
+      <p:sp>
+        <p:nvSpPr>
+          <p:cNvPr id="141" name="TextBox 140"/>
+          <p:cNvSpPr txBox="1"/>
+          <p:nvPr/>
+        </p:nvSpPr>
+        <p:spPr>
+          <a:xfrm>
+            <a:off x="4251959" y="5650992"/>
+            <a:ext cx="4754880" cy="256032"/>
+          </a:xfrm>
+          <a:prstGeom prst="rect">
+            <a:avLst/>
+          </a:prstGeom>
+          <a:noFill/>
+        </p:spPr>
+        <p:txBody>
+          <a:bodyPr wrap="square">
+            <a:spAutoFit/>
+          </a:bodyPr>
+          <a:lstStyle/>
+          <a:p>
+            <a:pPr algn="l"/>
+            <a:r>
+              <a:rPr sz="850" b="1">
+                <a:solidFill>
+                  <a:srgbClr val="10B981"/>
+                </a:solidFill>
+              </a:rPr>
+              <a:t>30/30 TRUE NEGATIVES — Perfect specificity</a:t>
+            </a:r>
+          </a:p>
+        </p:txBody>
+      </p:sp>
+      <p:sp>
+        <p:nvSpPr>
+          <p:cNvPr id="142" name="Rectangle 141"/>
+          <p:cNvSpPr/>
+          <p:nvPr/>
+        </p:nvSpPr>
+        <p:spPr>
+          <a:xfrm>
+            <a:off x="365760" y="5980176"/>
+            <a:ext cx="11430000" cy="749808"/>
+          </a:xfrm>
+          <a:prstGeom prst="rect">
+            <a:avLst/>
+          </a:prstGeom>
+          <a:solidFill>
+            <a:srgbClr val="0A0B10"/>
+          </a:solidFill>
+          <a:ln w="12700">
+            <a:noFill/>
+          </a:ln>
+        </p:spPr>
+        <p:style>
+          <a:lnRef idx="1">
+            <a:schemeClr val="accent1"/>
+          </a:lnRef>
+          <a:fillRef idx="3">
+            <a:schemeClr val="accent1"/>
+          </a:fillRef>
+          <a:effectRef idx="2">
+            <a:schemeClr val="accent1"/>
+          </a:effectRef>
+          <a:fontRef idx="minor">
+            <a:schemeClr val="lt1"/>
+          </a:fontRef>
+        </p:style>
+        <p:txBody>
+          <a:bodyPr rtlCol="0" anchor="ctr"/>
+          <a:lstStyle/>
+          <a:p>
+            <a:pPr algn="ctr"/>
+          </a:p>
+        </p:txBody>
+      </p:sp>
+      <p:sp>
+        <p:nvSpPr>
+          <p:cNvPr id="143" name="Rectangle 142"/>
+          <p:cNvSpPr/>
+          <p:nvPr/>
+        </p:nvSpPr>
+        <p:spPr>
+          <a:xfrm>
+            <a:off x="365760" y="5980176"/>
+            <a:ext cx="11430000" cy="38100"/>
+          </a:xfrm>
+          <a:prstGeom prst="rect">
+            <a:avLst/>
+          </a:prstGeom>
+          <a:solidFill>
+            <a:srgbClr val="10B981"/>
+          </a:solidFill>
+          <a:ln>
+            <a:noFill/>
+          </a:ln>
+        </p:spPr>
+        <p:style>
+          <a:lnRef idx="1">
+            <a:schemeClr val="accent1"/>
+          </a:lnRef>
+          <a:fillRef idx="3">
+            <a:schemeClr val="accent1"/>
+          </a:fillRef>
+          <a:effectRef idx="2">
+            <a:schemeClr val="accent1"/>
+          </a:effectRef>
+          <a:fontRef idx="minor">
+            <a:schemeClr val="lt1"/>
+          </a:fontRef>
+        </p:style>
+        <p:txBody>
+          <a:bodyPr rtlCol="0" anchor="ctr"/>
+          <a:lstStyle/>
+          <a:p>
+            <a:pPr algn="ctr"/>
+          </a:p>
+        </p:txBody>
+      </p:sp>
+      <p:sp>
+        <p:nvSpPr>
+          <p:cNvPr id="144" name="TextBox 143"/>
+          <p:cNvSpPr txBox="1"/>
+          <p:nvPr/>
+        </p:nvSpPr>
+        <p:spPr>
+          <a:xfrm>
+            <a:off x="548640" y="6035040"/>
+            <a:ext cx="5029200" cy="256032"/>
+          </a:xfrm>
+          <a:prstGeom prst="rect">
+            <a:avLst/>
+          </a:prstGeom>
+          <a:noFill/>
+        </p:spPr>
+        <p:txBody>
+          <a:bodyPr wrap="square">
+            <a:spAutoFit/>
+          </a:bodyPr>
+          <a:lstStyle/>
+          <a:p>
+            <a:pPr algn="l"/>
+            <a:r>
+              <a:rPr sz="900" b="0">
+                <a:solidFill>
+                  <a:srgbClr val="10B981"/>
+                </a:solidFill>
+              </a:rPr>
+              <a:t>🟢 Recall ≥ 25%  (Detected by Tier 0 regex / Tier 1 DeBERTa)</a:t>
+            </a:r>
+          </a:p>
+        </p:txBody>
+      </p:sp>
+      <p:sp>
+        <p:nvSpPr>
+          <p:cNvPr id="145" name="TextBox 144"/>
+          <p:cNvSpPr txBox="1"/>
+          <p:nvPr/>
+        </p:nvSpPr>
+        <p:spPr>
+          <a:xfrm>
+            <a:off x="548640" y="6291072"/>
+            <a:ext cx="5029200" cy="256032"/>
+          </a:xfrm>
+          <a:prstGeom prst="rect">
+            <a:avLst/>
+          </a:prstGeom>
+          <a:noFill/>
+        </p:spPr>
+        <p:txBody>
+          <a:bodyPr wrap="square">
+            <a:spAutoFit/>
+          </a:bodyPr>
+          <a:lstStyle/>
+          <a:p>
+            <a:pPr algn="l"/>
+            <a:r>
+              <a:rPr sz="900" b="0">
+                <a:solidFill>
+                  <a:srgbClr val="F59E0B"/>
+                </a:solidFill>
+              </a:rPr>
+              <a:t>🟡 Recall 1–24%  (Partially caught by classifier confidence)</a:t>
+            </a:r>
+          </a:p>
+        </p:txBody>
+      </p:sp>
+      <p:sp>
+        <p:nvSpPr>
+          <p:cNvPr id="146" name="TextBox 145"/>
+          <p:cNvSpPr txBox="1"/>
+          <p:nvPr/>
+        </p:nvSpPr>
+        <p:spPr>
+          <a:xfrm>
+            <a:off x="5760720" y="6035040"/>
+            <a:ext cx="5029200" cy="256032"/>
+          </a:xfrm>
+          <a:prstGeom prst="rect">
+            <a:avLst/>
+          </a:prstGeom>
+          <a:noFill/>
+        </p:spPr>
+        <p:txBody>
+          <a:bodyPr wrap="square">
+            <a:spAutoFit/>
+          </a:bodyPr>
+          <a:lstStyle/>
+          <a:p>
+            <a:pPr algn="l"/>
+            <a:r>
+              <a:rPr sz="900" b="0">
+                <a:solidFill>
+                  <a:srgbClr val="EF4444"/>
+                </a:solidFill>
+              </a:rPr>
+              <a:t>🔴 Recall = 0%  (Missed — fine-tuning target for v2)</a:t>
+            </a:r>
+          </a:p>
+        </p:txBody>
+      </p:sp>
+      <p:sp>
+        <p:nvSpPr>
+          <p:cNvPr id="147" name="TextBox 146"/>
+          <p:cNvSpPr txBox="1"/>
+          <p:nvPr/>
+        </p:nvSpPr>
+        <p:spPr>
+          <a:xfrm>
+            <a:off x="5760720" y="6291072"/>
+            <a:ext cx="5486400" cy="256032"/>
+          </a:xfrm>
+          <a:prstGeom prst="rect">
+            <a:avLst/>
+          </a:prstGeom>
+          <a:noFill/>
+        </p:spPr>
+        <p:txBody>
+          <a:bodyPr wrap="square">
+            <a:spAutoFit/>
+          </a:bodyPr>
+          <a:lstStyle/>
+          <a:p>
+            <a:pPr algn="l"/>
+            <a:r>
+              <a:rPr sz="900" b="1">
+                <a:solidFill>
+                  <a:srgbClr val="10B981"/>
+                </a:solidFill>
+              </a:rPr>
+              <a:t>✅ Precision = 100% across ALL families — 0 false positives</a:t>
+            </a:r>
+          </a:p>
+        </p:txBody>
+      </p:sp>
+    </p:spTree>
+  </p:cSld>
+  <p:clrMapOvr>
+    <a:masterClrMapping/>
+  </p:clrMapOvr>
+</p:sld>
+</file>
+
+<file path=ppt/slides/slide16.xml><?xml version="1.0" encoding="utf-8"?>
+<p:sld xmlns:a="http://schemas.openxmlformats.org/drawingml/2006/main" xmlns:p="http://schemas.openxmlformats.org/presentationml/2006/main" xmlns:r="http://schemas.openxmlformats.org/officeDocument/2006/relationships">
+  <p:cSld>
+    <p:bg>
+      <p:bgPr>
+        <a:solidFill>
+          <a:srgbClr val="050508"/>
+        </a:solidFill>
+        <a:effectLst/>
+      </p:bgPr>
+    </p:bg>
+    <p:spTree>
+      <p:nvGrpSpPr>
+        <p:cNvPr id="1" name=""/>
+        <p:cNvGrpSpPr/>
+        <p:nvPr/>
+      </p:nvGrpSpPr>
+      <p:grpSpPr/>
+      <p:sp>
+        <p:nvSpPr>
+          <p:cNvPr id="2" name="Rectangle 1"/>
+          <p:cNvSpPr/>
+          <p:nvPr/>
+        </p:nvSpPr>
+        <p:spPr>
+          <a:xfrm>
+            <a:off x="0" y="0"/>
+            <a:ext cx="73152" cy="6858000"/>
+          </a:xfrm>
+          <a:prstGeom prst="rect">
+            <a:avLst/>
+          </a:prstGeom>
+          <a:solidFill>
+            <a:srgbClr val="F59E0B"/>
+          </a:solidFill>
+          <a:ln w="12700">
+            <a:noFill/>
+          </a:ln>
+        </p:spPr>
+        <p:style>
+          <a:lnRef idx="1">
+            <a:schemeClr val="accent1"/>
+          </a:lnRef>
+          <a:fillRef idx="3">
+            <a:schemeClr val="accent1"/>
+          </a:fillRef>
+          <a:effectRef idx="2">
+            <a:schemeClr val="accent1"/>
+          </a:effectRef>
+          <a:fontRef idx="minor">
+            <a:schemeClr val="lt1"/>
+          </a:fontRef>
+        </p:style>
+        <p:txBody>
+          <a:bodyPr rtlCol="0" anchor="ctr"/>
+          <a:lstStyle/>
+          <a:p>
+            <a:pPr algn="ctr"/>
+          </a:p>
+        </p:txBody>
+      </p:sp>
+      <p:sp>
+        <p:nvSpPr>
+          <p:cNvPr id="3" name="TextBox 2"/>
+          <p:cNvSpPr txBox="1"/>
+          <p:nvPr/>
+        </p:nvSpPr>
+        <p:spPr>
+          <a:xfrm>
+            <a:off x="365760" y="164592"/>
+            <a:ext cx="11430000" cy="502920"/>
+          </a:xfrm>
+          <a:prstGeom prst="rect">
+            <a:avLst/>
+          </a:prstGeom>
+          <a:noFill/>
+        </p:spPr>
+        <p:txBody>
+          <a:bodyPr wrap="square">
+            <a:spAutoFit/>
+          </a:bodyPr>
+          <a:lstStyle/>
+          <a:p>
+            <a:pPr algn="l"/>
+            <a:r>
+              <a:rPr sz="3000" b="1">
+                <a:solidFill>
+                  <a:srgbClr val="FFFFFF"/>
+                </a:solidFill>
+              </a:rPr>
+              <a:t>Red-Team Evasion — 8 Mutators  ×  100 Mutations</a:t>
+            </a:r>
+          </a:p>
+        </p:txBody>
+      </p:sp>
+      <p:sp>
+        <p:nvSpPr>
+          <p:cNvPr id="4" name="TextBox 3"/>
+          <p:cNvSpPr txBox="1"/>
+          <p:nvPr/>
+        </p:nvSpPr>
+        <p:spPr>
+          <a:xfrm>
+            <a:off x="365760" y="713232"/>
+            <a:ext cx="11430000" cy="274320"/>
+          </a:xfrm>
+          <a:prstGeom prst="rect">
+            <a:avLst/>
+          </a:prstGeom>
+          <a:noFill/>
+        </p:spPr>
+        <p:txBody>
+          <a:bodyPr wrap="square">
+            <a:spAutoFit/>
+          </a:bodyPr>
+          <a:lstStyle/>
+          <a:p>
+            <a:pPr algn="l"/>
+            <a:r>
+              <a:rPr sz="950" b="0">
+                <a:solidFill>
+                  <a:srgbClr val="94A3B8"/>
+                </a:solidFill>
+              </a:rPr>
+              <a:t>Each mutator transforms real attack payloads  ·  We measure how many still get caught after mutation</a:t>
+            </a:r>
+          </a:p>
+        </p:txBody>
+      </p:sp>
+      <p:sp>
+        <p:nvSpPr>
+          <p:cNvPr id="5" name="Rectangle 4"/>
+          <p:cNvSpPr/>
+          <p:nvPr/>
+        </p:nvSpPr>
+        <p:spPr>
+          <a:xfrm>
+            <a:off x="365760" y="987552"/>
+            <a:ext cx="11430000" cy="38100"/>
+          </a:xfrm>
+          <a:prstGeom prst="rect">
+            <a:avLst/>
+          </a:prstGeom>
+          <a:solidFill>
+            <a:srgbClr val="F59E0B"/>
+          </a:solidFill>
+          <a:ln>
+            <a:noFill/>
+          </a:ln>
+        </p:spPr>
+        <p:style>
+          <a:lnRef idx="1">
+            <a:schemeClr val="accent1"/>
+          </a:lnRef>
+          <a:fillRef idx="3">
+            <a:schemeClr val="accent1"/>
+          </a:fillRef>
+          <a:effectRef idx="2">
+            <a:schemeClr val="accent1"/>
+          </a:effectRef>
+          <a:fontRef idx="minor">
+            <a:schemeClr val="lt1"/>
+          </a:fontRef>
+        </p:style>
+        <p:txBody>
+          <a:bodyPr rtlCol="0" anchor="ctr"/>
+          <a:lstStyle/>
+          <a:p>
+            <a:pPr algn="ctr"/>
+          </a:p>
+        </p:txBody>
+      </p:sp>
+      <p:sp>
+        <p:nvSpPr>
+          <p:cNvPr id="6" name="Rectangle 5"/>
+          <p:cNvSpPr/>
+          <p:nvPr/>
+        </p:nvSpPr>
+        <p:spPr>
+          <a:xfrm>
+            <a:off x="8961120" y="137160"/>
+            <a:ext cx="3108960" cy="868680"/>
+          </a:xfrm>
+          <a:prstGeom prst="rect">
+            <a:avLst/>
+          </a:prstGeom>
+          <a:solidFill>
+            <a:srgbClr val="1A1B23"/>
+          </a:solidFill>
+          <a:ln w="19050">
+            <a:solidFill>
+              <a:srgbClr val="F59E0B"/>
+            </a:solidFill>
+          </a:ln>
+        </p:spPr>
+        <p:style>
+          <a:lnRef idx="1">
+            <a:schemeClr val="accent1"/>
+          </a:lnRef>
+          <a:fillRef idx="3">
+            <a:schemeClr val="accent1"/>
+          </a:fillRef>
+          <a:effectRef idx="2">
+            <a:schemeClr val="accent1"/>
+          </a:effectRef>
+          <a:fontRef idx="minor">
+            <a:schemeClr val="lt1"/>
+          </a:fontRef>
+        </p:style>
+        <p:txBody>
+          <a:bodyPr rtlCol="0" anchor="ctr"/>
+          <a:lstStyle/>
+          <a:p>
+            <a:pPr algn="ctr"/>
+          </a:p>
+        </p:txBody>
+      </p:sp>
+      <p:sp>
+        <p:nvSpPr>
+          <p:cNvPr id="7" name="TextBox 6"/>
+          <p:cNvSpPr txBox="1"/>
+          <p:nvPr/>
+        </p:nvSpPr>
+        <p:spPr>
+          <a:xfrm>
+            <a:off x="9098280" y="164592"/>
+            <a:ext cx="1371600" cy="256032"/>
+          </a:xfrm>
+          <a:prstGeom prst="rect">
+            <a:avLst/>
+          </a:prstGeom>
+          <a:noFill/>
+        </p:spPr>
+        <p:txBody>
+          <a:bodyPr wrap="square">
+            <a:spAutoFit/>
+          </a:bodyPr>
+          <a:lstStyle/>
+          <a:p>
+            <a:pPr algn="l"/>
+            <a:r>
+              <a:rPr sz="900" b="0">
+                <a:solidFill>
+                  <a:srgbClr val="94A3B8"/>
+                </a:solidFill>
+              </a:rPr>
+              <a:t>BASELINE</a:t>
+            </a:r>
+          </a:p>
+        </p:txBody>
+      </p:sp>
+      <p:sp>
+        <p:nvSpPr>
+          <p:cNvPr id="8" name="TextBox 7"/>
+          <p:cNvSpPr txBox="1"/>
+          <p:nvPr/>
+        </p:nvSpPr>
+        <p:spPr>
+          <a:xfrm>
+            <a:off x="9098280" y="411480"/>
+            <a:ext cx="1371600" cy="411480"/>
+          </a:xfrm>
+          <a:prstGeom prst="rect">
+            <a:avLst/>
+          </a:prstGeom>
+          <a:noFill/>
+        </p:spPr>
+        <p:txBody>
+          <a:bodyPr wrap="square">
+            <a:spAutoFit/>
+          </a:bodyPr>
+          <a:lstStyle/>
+          <a:p>
+            <a:pPr algn="l"/>
+            <a:r>
+              <a:rPr sz="2200" b="1">
+                <a:solidFill>
+                  <a:srgbClr val="FFFFFF"/>
+                </a:solidFill>
+              </a:rPr>
+              <a:t>12.78%</a:t>
+            </a:r>
+          </a:p>
+        </p:txBody>
+      </p:sp>
+      <p:sp>
+        <p:nvSpPr>
+          <p:cNvPr id="9" name="TextBox 8"/>
+          <p:cNvSpPr txBox="1"/>
+          <p:nvPr/>
+        </p:nvSpPr>
+        <p:spPr>
+          <a:xfrm>
+            <a:off x="10561320" y="164592"/>
+            <a:ext cx="1371600" cy="256032"/>
+          </a:xfrm>
+          <a:prstGeom prst="rect">
+            <a:avLst/>
+          </a:prstGeom>
+          <a:noFill/>
+        </p:spPr>
+        <p:txBody>
+          <a:bodyPr wrap="square">
+            <a:spAutoFit/>
+          </a:bodyPr>
+          <a:lstStyle/>
+          <a:p>
+            <a:pPr algn="l"/>
+            <a:r>
+              <a:rPr sz="900" b="0">
+                <a:solidFill>
+                  <a:srgbClr val="94A3B8"/>
+                </a:solidFill>
+              </a:rPr>
+              <a:t>MUTATED</a:t>
+            </a:r>
+          </a:p>
+        </p:txBody>
+      </p:sp>
+      <p:sp>
+        <p:nvSpPr>
+          <p:cNvPr id="10" name="TextBox 9"/>
+          <p:cNvSpPr txBox="1"/>
+          <p:nvPr/>
+        </p:nvSpPr>
+        <p:spPr>
+          <a:xfrm>
+            <a:off x="10561320" y="411480"/>
+            <a:ext cx="1371600" cy="411480"/>
+          </a:xfrm>
+          <a:prstGeom prst="rect">
+            <a:avLst/>
+          </a:prstGeom>
+          <a:noFill/>
+        </p:spPr>
+        <p:txBody>
+          <a:bodyPr wrap="square">
+            <a:spAutoFit/>
+          </a:bodyPr>
+          <a:lstStyle/>
+          <a:p>
+            <a:pPr algn="l"/>
+            <a:r>
+              <a:rPr sz="2200" b="1">
+                <a:solidFill>
+                  <a:srgbClr val="F59E0B"/>
+                </a:solidFill>
+              </a:rPr>
+              <a:t>28.00%</a:t>
+            </a:r>
+          </a:p>
+        </p:txBody>
+      </p:sp>
+      <p:sp>
+        <p:nvSpPr>
+          <p:cNvPr id="11" name="Rectangle 10"/>
+          <p:cNvSpPr/>
+          <p:nvPr/>
+        </p:nvSpPr>
+        <p:spPr>
+          <a:xfrm>
+            <a:off x="365760" y="1042415"/>
+            <a:ext cx="11430000" cy="347472"/>
+          </a:xfrm>
+          <a:prstGeom prst="rect">
+            <a:avLst/>
+          </a:prstGeom>
+          <a:solidFill>
+            <a:srgbClr val="161722"/>
+          </a:solidFill>
+          <a:ln w="12700">
+            <a:noFill/>
+          </a:ln>
+        </p:spPr>
+        <p:style>
+          <a:lnRef idx="1">
+            <a:schemeClr val="accent1"/>
+          </a:lnRef>
+          <a:fillRef idx="3">
+            <a:schemeClr val="accent1"/>
+          </a:fillRef>
+          <a:effectRef idx="2">
+            <a:schemeClr val="accent1"/>
+          </a:effectRef>
+          <a:fontRef idx="minor">
+            <a:schemeClr val="lt1"/>
+          </a:fontRef>
+        </p:style>
+        <p:txBody>
+          <a:bodyPr rtlCol="0" anchor="ctr"/>
+          <a:lstStyle/>
+          <a:p>
+            <a:pPr algn="ctr"/>
+          </a:p>
+        </p:txBody>
+      </p:sp>
+      <p:sp>
+        <p:nvSpPr>
+          <p:cNvPr id="12" name="TextBox 11"/>
+          <p:cNvSpPr txBox="1"/>
+          <p:nvPr/>
+        </p:nvSpPr>
+        <p:spPr>
+          <a:xfrm>
+            <a:off x="457200" y="1078992"/>
+            <a:ext cx="2560320" cy="256032"/>
+          </a:xfrm>
+          <a:prstGeom prst="rect">
+            <a:avLst/>
+          </a:prstGeom>
+          <a:noFill/>
+        </p:spPr>
+        <p:txBody>
+          <a:bodyPr wrap="square">
+            <a:spAutoFit/>
+          </a:bodyPr>
+          <a:lstStyle/>
+          <a:p>
+            <a:pPr algn="l"/>
+            <a:r>
+              <a:rPr sz="850" b="1">
+                <a:solidFill>
+                  <a:srgbClr val="94A3B8"/>
+                </a:solidFill>
+              </a:rPr>
+              <a:t>EVASION MUTATOR</a:t>
+            </a:r>
+          </a:p>
+        </p:txBody>
+      </p:sp>
+      <p:sp>
+        <p:nvSpPr>
+          <p:cNvPr id="13" name="TextBox 12"/>
+          <p:cNvSpPr txBox="1"/>
+          <p:nvPr/>
+        </p:nvSpPr>
+        <p:spPr>
+          <a:xfrm>
+            <a:off x="3127248" y="1078992"/>
+            <a:ext cx="2651760" cy="256032"/>
+          </a:xfrm>
+          <a:prstGeom prst="rect">
+            <a:avLst/>
+          </a:prstGeom>
+          <a:noFill/>
+        </p:spPr>
+        <p:txBody>
+          <a:bodyPr wrap="square">
+            <a:spAutoFit/>
+          </a:bodyPr>
+          <a:lstStyle/>
+          <a:p>
+            <a:pPr algn="l"/>
+            <a:r>
+              <a:rPr sz="850" b="1">
+                <a:solidFill>
+                  <a:srgbClr val="94A3B8"/>
+                </a:solidFill>
+              </a:rPr>
+              <a:t>TECHNIQUE</a:t>
+            </a:r>
+          </a:p>
+        </p:txBody>
+      </p:sp>
+      <p:sp>
+        <p:nvSpPr>
+          <p:cNvPr id="14" name="TextBox 13"/>
+          <p:cNvSpPr txBox="1"/>
+          <p:nvPr/>
+        </p:nvSpPr>
+        <p:spPr>
+          <a:xfrm>
+            <a:off x="5897880" y="1078992"/>
+            <a:ext cx="4389120" cy="256032"/>
+          </a:xfrm>
+          <a:prstGeom prst="rect">
+            <a:avLst/>
+          </a:prstGeom>
+          <a:noFill/>
+        </p:spPr>
+        <p:txBody>
+          <a:bodyPr wrap="square">
+            <a:spAutoFit/>
+          </a:bodyPr>
+          <a:lstStyle/>
+          <a:p>
+            <a:pPr algn="l"/>
+            <a:r>
+              <a:rPr sz="850" b="1">
+                <a:solidFill>
+                  <a:srgbClr val="94A3B8"/>
+                </a:solidFill>
+              </a:rPr>
+              <a:t>CATCH RATE (sorted descending)</a:t>
+            </a:r>
+          </a:p>
+        </p:txBody>
+      </p:sp>
+      <p:sp>
+        <p:nvSpPr>
+          <p:cNvPr id="15" name="TextBox 14"/>
+          <p:cNvSpPr txBox="1"/>
+          <p:nvPr/>
+        </p:nvSpPr>
+        <p:spPr>
+          <a:xfrm>
+            <a:off x="10378440" y="1078992"/>
+            <a:ext cx="685800" cy="256032"/>
+          </a:xfrm>
+          <a:prstGeom prst="rect">
+            <a:avLst/>
+          </a:prstGeom>
+          <a:noFill/>
+        </p:spPr>
+        <p:txBody>
+          <a:bodyPr wrap="square">
+            <a:spAutoFit/>
+          </a:bodyPr>
+          <a:lstStyle/>
+          <a:p>
+            <a:pPr algn="ctr"/>
+            <a:r>
+              <a:rPr sz="850" b="1">
+                <a:solidFill>
+                  <a:srgbClr val="94A3B8"/>
+                </a:solidFill>
+              </a:rPr>
+              <a:t>RATE</a:t>
+            </a:r>
+          </a:p>
+        </p:txBody>
+      </p:sp>
+      <p:sp>
+        <p:nvSpPr>
+          <p:cNvPr id="16" name="TextBox 15"/>
+          <p:cNvSpPr txBox="1"/>
+          <p:nvPr/>
+        </p:nvSpPr>
+        <p:spPr>
+          <a:xfrm>
+            <a:off x="11064240" y="1078992"/>
+            <a:ext cx="685800" cy="256032"/>
+          </a:xfrm>
+          <a:prstGeom prst="rect">
+            <a:avLst/>
+          </a:prstGeom>
+          <a:noFill/>
+        </p:spPr>
+        <p:txBody>
+          <a:bodyPr wrap="square">
+            <a:spAutoFit/>
+          </a:bodyPr>
+          <a:lstStyle/>
+          <a:p>
+            <a:pPr algn="ctr"/>
+            <a:r>
+              <a:rPr sz="850" b="1">
+                <a:solidFill>
+                  <a:srgbClr val="94A3B8"/>
+                </a:solidFill>
+              </a:rPr>
+              <a:t>vs BASE</a:t>
+            </a:r>
+          </a:p>
+        </p:txBody>
+      </p:sp>
+      <p:sp>
+        <p:nvSpPr>
+          <p:cNvPr id="17" name="Rectangle 16"/>
+          <p:cNvSpPr/>
+          <p:nvPr/>
+        </p:nvSpPr>
+        <p:spPr>
+          <a:xfrm>
+            <a:off x="365760" y="1389888"/>
+            <a:ext cx="11430000" cy="566928"/>
+          </a:xfrm>
+          <a:prstGeom prst="rect">
+            <a:avLst/>
+          </a:prstGeom>
+          <a:solidFill>
+            <a:srgbClr val="1A1B23"/>
+          </a:solidFill>
+          <a:ln w="12700">
+            <a:noFill/>
+          </a:ln>
+        </p:spPr>
+        <p:style>
+          <a:lnRef idx="1">
+            <a:schemeClr val="accent1"/>
+          </a:lnRef>
+          <a:fillRef idx="3">
+            <a:schemeClr val="accent1"/>
+          </a:fillRef>
+          <a:effectRef idx="2">
+            <a:schemeClr val="accent1"/>
+          </a:effectRef>
+          <a:fontRef idx="minor">
+            <a:schemeClr val="lt1"/>
+          </a:fontRef>
+        </p:style>
+        <p:txBody>
+          <a:bodyPr rtlCol="0" anchor="ctr"/>
+          <a:lstStyle/>
+          <a:p>
+            <a:pPr algn="ctr"/>
+          </a:p>
+        </p:txBody>
+      </p:sp>
+      <p:sp>
+        <p:nvSpPr>
+          <p:cNvPr id="18" name="TextBox 17"/>
+          <p:cNvSpPr txBox="1"/>
+          <p:nvPr/>
+        </p:nvSpPr>
+        <p:spPr>
+          <a:xfrm>
+            <a:off x="475488" y="1481328"/>
+            <a:ext cx="2560320" cy="274320"/>
+          </a:xfrm>
+          <a:prstGeom prst="rect">
+            <a:avLst/>
+          </a:prstGeom>
+          <a:noFill/>
+        </p:spPr>
+        <p:txBody>
+          <a:bodyPr wrap="square">
+            <a:spAutoFit/>
+          </a:bodyPr>
+          <a:lstStyle/>
+          <a:p>
+            <a:pPr algn="l"/>
+            <a:r>
+              <a:rPr sz="1000" b="1">
+                <a:solidFill>
+                  <a:srgbClr val="FFFFFF"/>
+                </a:solidFill>
+              </a:rPr>
+              <a:t>Base64 Decode Exec</a:t>
+            </a:r>
+          </a:p>
+        </p:txBody>
+      </p:sp>
+      <p:sp>
+        <p:nvSpPr>
+          <p:cNvPr id="19" name="TextBox 18"/>
+          <p:cNvSpPr txBox="1"/>
+          <p:nvPr/>
+        </p:nvSpPr>
+        <p:spPr>
+          <a:xfrm>
+            <a:off x="3127248" y="1481328"/>
+            <a:ext cx="2697480" cy="256032"/>
+          </a:xfrm>
+          <a:prstGeom prst="rect">
+            <a:avLst/>
+          </a:prstGeom>
+          <a:noFill/>
+        </p:spPr>
+        <p:txBody>
+          <a:bodyPr wrap="square">
+            <a:spAutoFit/>
+          </a:bodyPr>
+          <a:lstStyle/>
+          <a:p>
+            <a:pPr algn="l"/>
+            <a:r>
+              <a:rPr sz="850" b="0">
+                <a:solidFill>
+                  <a:srgbClr val="94A3B8"/>
+                </a:solidFill>
+              </a:rPr>
+              <a:t>Base64 encode attack — decoded at runtime</a:t>
+            </a:r>
+          </a:p>
+        </p:txBody>
+      </p:sp>
+      <p:sp>
+        <p:nvSpPr>
+          <p:cNvPr id="20" name="Rectangle 19"/>
+          <p:cNvSpPr/>
+          <p:nvPr/>
+        </p:nvSpPr>
+        <p:spPr>
+          <a:xfrm>
+            <a:off x="5897880" y="1527048"/>
+            <a:ext cx="4389120" cy="246888"/>
+          </a:xfrm>
+          <a:prstGeom prst="rect">
+            <a:avLst/>
+          </a:prstGeom>
+          <a:solidFill>
+            <a:srgbClr val="222330"/>
+          </a:solidFill>
+          <a:ln>
+            <a:noFill/>
+          </a:ln>
+        </p:spPr>
+        <p:style>
+          <a:lnRef idx="1">
+            <a:schemeClr val="accent1"/>
+          </a:lnRef>
+          <a:fillRef idx="3">
+            <a:schemeClr val="accent1"/>
+          </a:fillRef>
+          <a:effectRef idx="2">
+            <a:schemeClr val="accent1"/>
+          </a:effectRef>
+          <a:fontRef idx="minor">
+            <a:schemeClr val="lt1"/>
+          </a:fontRef>
+        </p:style>
+        <p:txBody>
+          <a:bodyPr rtlCol="0" anchor="ctr"/>
+          <a:lstStyle/>
+          <a:p>
+            <a:pPr algn="ctr"/>
+          </a:p>
+        </p:txBody>
+      </p:sp>
+      <p:sp>
+        <p:nvSpPr>
+          <p:cNvPr id="21" name="Rectangle 20"/>
+          <p:cNvSpPr/>
+          <p:nvPr/>
+        </p:nvSpPr>
+        <p:spPr>
+          <a:xfrm>
+            <a:off x="6445093" y="1481328"/>
+            <a:ext cx="27432" cy="365760"/>
+          </a:xfrm>
+          <a:prstGeom prst="rect">
+            <a:avLst/>
+          </a:prstGeom>
+          <a:solidFill>
+            <a:srgbClr val="FFFFFF"/>
+          </a:solidFill>
+          <a:ln>
+            <a:noFill/>
+          </a:ln>
+        </p:spPr>
+        <p:style>
+          <a:lnRef idx="1">
+            <a:schemeClr val="accent1"/>
+          </a:lnRef>
+          <a:fillRef idx="3">
+            <a:schemeClr val="accent1"/>
+          </a:fillRef>
+          <a:effectRef idx="2">
+            <a:schemeClr val="accent1"/>
+          </a:effectRef>
+          <a:fontRef idx="minor">
+            <a:schemeClr val="lt1"/>
+          </a:fontRef>
+        </p:style>
+        <p:txBody>
+          <a:bodyPr rtlCol="0" anchor="ctr"/>
+          <a:lstStyle/>
+          <a:p>
+            <a:pPr algn="ctr"/>
+          </a:p>
+        </p:txBody>
+      </p:sp>
+      <p:sp>
+        <p:nvSpPr>
+          <p:cNvPr id="22" name="Rectangle 21"/>
+          <p:cNvSpPr/>
+          <p:nvPr/>
+        </p:nvSpPr>
+        <p:spPr>
+          <a:xfrm>
+            <a:off x="5897880" y="1527048"/>
+            <a:ext cx="3233903" cy="246888"/>
+          </a:xfrm>
+          <a:prstGeom prst="rect">
+            <a:avLst/>
+          </a:prstGeom>
+          <a:solidFill>
+            <a:srgbClr val="10B981"/>
+          </a:solidFill>
+          <a:ln>
+            <a:noFill/>
+          </a:ln>
+        </p:spPr>
+        <p:style>
+          <a:lnRef idx="1">
+            <a:schemeClr val="accent1"/>
+          </a:lnRef>
+          <a:fillRef idx="3">
+            <a:schemeClr val="accent1"/>
+          </a:fillRef>
+          <a:effectRef idx="2">
+            <a:schemeClr val="accent1"/>
+          </a:effectRef>
+          <a:fontRef idx="minor">
+            <a:schemeClr val="lt1"/>
+          </a:fontRef>
+        </p:style>
+        <p:txBody>
+          <a:bodyPr rtlCol="0" anchor="ctr"/>
+          <a:lstStyle/>
+          <a:p>
+            <a:pPr algn="ctr"/>
+          </a:p>
+        </p:txBody>
+      </p:sp>
+      <p:sp>
+        <p:nvSpPr>
+          <p:cNvPr id="23" name="TextBox 22"/>
+          <p:cNvSpPr txBox="1"/>
+          <p:nvPr/>
+        </p:nvSpPr>
+        <p:spPr>
+          <a:xfrm>
+            <a:off x="10378440" y="1463040"/>
+            <a:ext cx="685800" cy="320040"/>
+          </a:xfrm>
+          <a:prstGeom prst="rect">
+            <a:avLst/>
+          </a:prstGeom>
+          <a:noFill/>
+        </p:spPr>
+        <p:txBody>
+          <a:bodyPr wrap="square">
+            <a:spAutoFit/>
+          </a:bodyPr>
+          <a:lstStyle/>
+          <a:p>
+            <a:pPr algn="ctr"/>
+            <a:r>
+              <a:rPr sz="1300" b="1">
+                <a:solidFill>
+                  <a:srgbClr val="10B981"/>
+                </a:solidFill>
+              </a:rPr>
+              <a:t>73.7%</a:t>
+            </a:r>
+          </a:p>
+        </p:txBody>
+      </p:sp>
+      <p:sp>
+        <p:nvSpPr>
+          <p:cNvPr id="24" name="TextBox 23"/>
+          <p:cNvSpPr txBox="1"/>
+          <p:nvPr/>
+        </p:nvSpPr>
+        <p:spPr>
+          <a:xfrm>
+            <a:off x="11064240" y="1463040"/>
+            <a:ext cx="685800" cy="320040"/>
+          </a:xfrm>
+          <a:prstGeom prst="rect">
+            <a:avLst/>
+          </a:prstGeom>
+          <a:noFill/>
+        </p:spPr>
+        <p:txBody>
+          <a:bodyPr wrap="square">
+            <a:spAutoFit/>
+          </a:bodyPr>
+          <a:lstStyle/>
+          <a:p>
+            <a:pPr algn="ctr"/>
+            <a:r>
+              <a:rPr sz="1100" b="1">
+                <a:solidFill>
+                  <a:srgbClr val="10B981"/>
+                </a:solidFill>
+              </a:rPr>
+              <a:t>+60.9%</a:t>
+            </a:r>
+          </a:p>
+        </p:txBody>
+      </p:sp>
+      <p:sp>
+        <p:nvSpPr>
+          <p:cNvPr id="25" name="Rectangle 24"/>
+          <p:cNvSpPr/>
+          <p:nvPr/>
+        </p:nvSpPr>
+        <p:spPr>
+          <a:xfrm>
+            <a:off x="365760" y="1984248"/>
+            <a:ext cx="11430000" cy="566928"/>
+          </a:xfrm>
+          <a:prstGeom prst="rect">
+            <a:avLst/>
+          </a:prstGeom>
+          <a:solidFill>
+            <a:srgbClr val="12131B"/>
+          </a:solidFill>
+          <a:ln w="12700">
+            <a:noFill/>
+          </a:ln>
+        </p:spPr>
+        <p:style>
+          <a:lnRef idx="1">
+            <a:schemeClr val="accent1"/>
+          </a:lnRef>
+          <a:fillRef idx="3">
+            <a:schemeClr val="accent1"/>
+          </a:fillRef>
+          <a:effectRef idx="2">
+            <a:schemeClr val="accent1"/>
+          </a:effectRef>
+          <a:fontRef idx="minor">
+            <a:schemeClr val="lt1"/>
+          </a:fontRef>
+        </p:style>
+        <p:txBody>
+          <a:bodyPr rtlCol="0" anchor="ctr"/>
+          <a:lstStyle/>
+          <a:p>
+            <a:pPr algn="ctr"/>
+          </a:p>
+        </p:txBody>
+      </p:sp>
+      <p:sp>
+        <p:nvSpPr>
+          <p:cNvPr id="26" name="TextBox 25"/>
+          <p:cNvSpPr txBox="1"/>
+          <p:nvPr/>
+        </p:nvSpPr>
+        <p:spPr>
+          <a:xfrm>
+            <a:off x="475488" y="2075688"/>
+            <a:ext cx="2560320" cy="274320"/>
+          </a:xfrm>
+          <a:prstGeom prst="rect">
+            <a:avLst/>
+          </a:prstGeom>
+          <a:noFill/>
+        </p:spPr>
+        <p:txBody>
+          <a:bodyPr wrap="square">
+            <a:spAutoFit/>
+          </a:bodyPr>
+          <a:lstStyle/>
+          <a:p>
+            <a:pPr algn="l"/>
+            <a:r>
+              <a:rPr sz="1000" b="1">
+                <a:solidFill>
+                  <a:srgbClr val="FFFFFF"/>
+                </a:solidFill>
+              </a:rPr>
+              <a:t>Paraphrase Scaffold</a:t>
+            </a:r>
+          </a:p>
+        </p:txBody>
+      </p:sp>
+      <p:sp>
+        <p:nvSpPr>
+          <p:cNvPr id="27" name="TextBox 26"/>
+          <p:cNvSpPr txBox="1"/>
+          <p:nvPr/>
+        </p:nvSpPr>
+        <p:spPr>
+          <a:xfrm>
+            <a:off x="3127248" y="2075688"/>
+            <a:ext cx="2697480" cy="256032"/>
+          </a:xfrm>
+          <a:prstGeom prst="rect">
+            <a:avLst/>
+          </a:prstGeom>
+          <a:noFill/>
+        </p:spPr>
+        <p:txBody>
+          <a:bodyPr wrap="square">
+            <a:spAutoFit/>
+          </a:bodyPr>
+          <a:lstStyle/>
+          <a:p>
+            <a:pPr algn="l"/>
+            <a:r>
+              <a:rPr sz="850" b="0">
+                <a:solidFill>
+                  <a:srgbClr val="94A3B8"/>
+                </a:solidFill>
+              </a:rPr>
+              <a:t>LLM-style rewrite keeping malicious intent</a:t>
+            </a:r>
+          </a:p>
+        </p:txBody>
+      </p:sp>
+      <p:sp>
+        <p:nvSpPr>
+          <p:cNvPr id="28" name="Rectangle 27"/>
+          <p:cNvSpPr/>
+          <p:nvPr/>
+        </p:nvSpPr>
+        <p:spPr>
+          <a:xfrm>
+            <a:off x="5897880" y="2121408"/>
+            <a:ext cx="4389120" cy="246888"/>
+          </a:xfrm>
+          <a:prstGeom prst="rect">
+            <a:avLst/>
+          </a:prstGeom>
+          <a:solidFill>
+            <a:srgbClr val="222330"/>
+          </a:solidFill>
+          <a:ln>
+            <a:noFill/>
+          </a:ln>
+        </p:spPr>
+        <p:style>
+          <a:lnRef idx="1">
+            <a:schemeClr val="accent1"/>
+          </a:lnRef>
+          <a:fillRef idx="3">
+            <a:schemeClr val="accent1"/>
+          </a:fillRef>
+          <a:effectRef idx="2">
+            <a:schemeClr val="accent1"/>
+          </a:effectRef>
+          <a:fontRef idx="minor">
+            <a:schemeClr val="lt1"/>
+          </a:fontRef>
+        </p:style>
+        <p:txBody>
+          <a:bodyPr rtlCol="0" anchor="ctr"/>
+          <a:lstStyle/>
+          <a:p>
+            <a:pPr algn="ctr"/>
+          </a:p>
+        </p:txBody>
+      </p:sp>
+      <p:sp>
+        <p:nvSpPr>
+          <p:cNvPr id="29" name="Rectangle 28"/>
+          <p:cNvSpPr/>
+          <p:nvPr/>
+        </p:nvSpPr>
+        <p:spPr>
+          <a:xfrm>
+            <a:off x="6445093" y="2075688"/>
+            <a:ext cx="27432" cy="365760"/>
+          </a:xfrm>
+          <a:prstGeom prst="rect">
+            <a:avLst/>
+          </a:prstGeom>
+          <a:solidFill>
+            <a:srgbClr val="FFFFFF"/>
+          </a:solidFill>
+          <a:ln>
+            <a:noFill/>
+          </a:ln>
+        </p:spPr>
+        <p:style>
+          <a:lnRef idx="1">
+            <a:schemeClr val="accent1"/>
+          </a:lnRef>
+          <a:fillRef idx="3">
+            <a:schemeClr val="accent1"/>
+          </a:fillRef>
+          <a:effectRef idx="2">
+            <a:schemeClr val="accent1"/>
+          </a:effectRef>
+          <a:fontRef idx="minor">
+            <a:schemeClr val="lt1"/>
+          </a:fontRef>
+        </p:style>
+        <p:txBody>
+          <a:bodyPr rtlCol="0" anchor="ctr"/>
+          <a:lstStyle/>
+          <a:p>
+            <a:pPr algn="ctr"/>
+          </a:p>
+        </p:txBody>
+      </p:sp>
+      <p:sp>
+        <p:nvSpPr>
+          <p:cNvPr id="30" name="Rectangle 29"/>
+          <p:cNvSpPr/>
+          <p:nvPr/>
+        </p:nvSpPr>
+        <p:spPr>
+          <a:xfrm>
+            <a:off x="5897880" y="2121408"/>
+            <a:ext cx="1462893" cy="246888"/>
+          </a:xfrm>
+          <a:prstGeom prst="rect">
+            <a:avLst/>
+          </a:prstGeom>
+          <a:solidFill>
+            <a:srgbClr val="3B82F6"/>
+          </a:solidFill>
+          <a:ln>
+            <a:noFill/>
+          </a:ln>
+        </p:spPr>
+        <p:style>
+          <a:lnRef idx="1">
+            <a:schemeClr val="accent1"/>
+          </a:lnRef>
+          <a:fillRef idx="3">
+            <a:schemeClr val="accent1"/>
+          </a:fillRef>
+          <a:effectRef idx="2">
+            <a:schemeClr val="accent1"/>
+          </a:effectRef>
+          <a:fontRef idx="minor">
+            <a:schemeClr val="lt1"/>
+          </a:fontRef>
+        </p:style>
+        <p:txBody>
+          <a:bodyPr rtlCol="0" anchor="ctr"/>
+          <a:lstStyle/>
+          <a:p>
+            <a:pPr algn="ctr"/>
+          </a:p>
+        </p:txBody>
+      </p:sp>
+      <p:sp>
+        <p:nvSpPr>
+          <p:cNvPr id="31" name="TextBox 30"/>
+          <p:cNvSpPr txBox="1"/>
+          <p:nvPr/>
+        </p:nvSpPr>
+        <p:spPr>
+          <a:xfrm>
+            <a:off x="10378440" y="2057400"/>
+            <a:ext cx="685800" cy="320040"/>
+          </a:xfrm>
+          <a:prstGeom prst="rect">
+            <a:avLst/>
+          </a:prstGeom>
+          <a:noFill/>
+        </p:spPr>
+        <p:txBody>
+          <a:bodyPr wrap="square">
+            <a:spAutoFit/>
+          </a:bodyPr>
+          <a:lstStyle/>
+          <a:p>
+            <a:pPr algn="ctr"/>
+            <a:r>
+              <a:rPr sz="1300" b="1">
+                <a:solidFill>
+                  <a:srgbClr val="3B82F6"/>
+                </a:solidFill>
+              </a:rPr>
+              <a:t>33.3%</a:t>
+            </a:r>
+          </a:p>
+        </p:txBody>
+      </p:sp>
+      <p:sp>
+        <p:nvSpPr>
+          <p:cNvPr id="32" name="TextBox 31"/>
+          <p:cNvSpPr txBox="1"/>
+          <p:nvPr/>
+        </p:nvSpPr>
+        <p:spPr>
+          <a:xfrm>
+            <a:off x="11064240" y="2057400"/>
+            <a:ext cx="685800" cy="320040"/>
+          </a:xfrm>
+          <a:prstGeom prst="rect">
+            <a:avLst/>
+          </a:prstGeom>
+          <a:noFill/>
+        </p:spPr>
+        <p:txBody>
+          <a:bodyPr wrap="square">
+            <a:spAutoFit/>
+          </a:bodyPr>
+          <a:lstStyle/>
+          <a:p>
+            <a:pPr algn="ctr"/>
+            <a:r>
+              <a:rPr sz="1100" b="1">
+                <a:solidFill>
+                  <a:srgbClr val="10B981"/>
+                </a:solidFill>
+              </a:rPr>
+              <a:t>+20.5%</a:t>
+            </a:r>
+          </a:p>
+        </p:txBody>
+      </p:sp>
+      <p:sp>
+        <p:nvSpPr>
+          <p:cNvPr id="33" name="Rectangle 32"/>
+          <p:cNvSpPr/>
+          <p:nvPr/>
+        </p:nvSpPr>
+        <p:spPr>
+          <a:xfrm>
+            <a:off x="365760" y="2578608"/>
+            <a:ext cx="11430000" cy="566928"/>
+          </a:xfrm>
+          <a:prstGeom prst="rect">
+            <a:avLst/>
+          </a:prstGeom>
+          <a:solidFill>
+            <a:srgbClr val="1A1B23"/>
+          </a:solidFill>
+          <a:ln w="12700">
+            <a:noFill/>
+          </a:ln>
+        </p:spPr>
+        <p:style>
+          <a:lnRef idx="1">
+            <a:schemeClr val="accent1"/>
+          </a:lnRef>
+          <a:fillRef idx="3">
+            <a:schemeClr val="accent1"/>
+          </a:fillRef>
+          <a:effectRef idx="2">
+            <a:schemeClr val="accent1"/>
+          </a:effectRef>
+          <a:fontRef idx="minor">
+            <a:schemeClr val="lt1"/>
+          </a:fontRef>
+        </p:style>
+        <p:txBody>
+          <a:bodyPr rtlCol="0" anchor="ctr"/>
+          <a:lstStyle/>
+          <a:p>
+            <a:pPr algn="ctr"/>
+          </a:p>
+        </p:txBody>
+      </p:sp>
+      <p:sp>
+        <p:nvSpPr>
+          <p:cNvPr id="34" name="TextBox 33"/>
+          <p:cNvSpPr txBox="1"/>
+          <p:nvPr/>
+        </p:nvSpPr>
+        <p:spPr>
+          <a:xfrm>
+            <a:off x="475488" y="2670048"/>
+            <a:ext cx="2560320" cy="274320"/>
+          </a:xfrm>
+          <a:prstGeom prst="rect">
+            <a:avLst/>
+          </a:prstGeom>
+          <a:noFill/>
+        </p:spPr>
+        <p:txBody>
+          <a:bodyPr wrap="square">
+            <a:spAutoFit/>
+          </a:bodyPr>
+          <a:lstStyle/>
+          <a:p>
+            <a:pPr algn="l"/>
+            <a:r>
+              <a:rPr sz="1000" b="1">
+                <a:solidFill>
+                  <a:srgbClr val="FFFFFF"/>
+                </a:solidFill>
+              </a:rPr>
+              <a:t>Zero Width Split</a:t>
+            </a:r>
+          </a:p>
+        </p:txBody>
+      </p:sp>
+      <p:sp>
+        <p:nvSpPr>
+          <p:cNvPr id="35" name="TextBox 34"/>
+          <p:cNvSpPr txBox="1"/>
+          <p:nvPr/>
+        </p:nvSpPr>
+        <p:spPr>
+          <a:xfrm>
+            <a:off x="3127248" y="2670048"/>
+            <a:ext cx="2697480" cy="256032"/>
+          </a:xfrm>
+          <a:prstGeom prst="rect">
+            <a:avLst/>
+          </a:prstGeom>
+          <a:noFill/>
+        </p:spPr>
+        <p:txBody>
+          <a:bodyPr wrap="square">
+            <a:spAutoFit/>
+          </a:bodyPr>
+          <a:lstStyle/>
+          <a:p>
+            <a:pPr algn="l"/>
+            <a:r>
+              <a:rPr sz="850" b="0">
+                <a:solidFill>
+                  <a:srgbClr val="94A3B8"/>
+                </a:solidFill>
+              </a:rPr>
+              <a:t>Zero-width Unicode chars split tokens</a:t>
+            </a:r>
+          </a:p>
+        </p:txBody>
+      </p:sp>
+      <p:sp>
+        <p:nvSpPr>
+          <p:cNvPr id="36" name="Rectangle 35"/>
+          <p:cNvSpPr/>
+          <p:nvPr/>
+        </p:nvSpPr>
+        <p:spPr>
+          <a:xfrm>
+            <a:off x="5897880" y="2715768"/>
+            <a:ext cx="4389120" cy="246888"/>
+          </a:xfrm>
+          <a:prstGeom prst="rect">
+            <a:avLst/>
+          </a:prstGeom>
+          <a:solidFill>
+            <a:srgbClr val="222330"/>
+          </a:solidFill>
+          <a:ln>
+            <a:noFill/>
+          </a:ln>
+        </p:spPr>
+        <p:style>
+          <a:lnRef idx="1">
+            <a:schemeClr val="accent1"/>
+          </a:lnRef>
+          <a:fillRef idx="3">
+            <a:schemeClr val="accent1"/>
+          </a:fillRef>
+          <a:effectRef idx="2">
+            <a:schemeClr val="accent1"/>
+          </a:effectRef>
+          <a:fontRef idx="minor">
+            <a:schemeClr val="lt1"/>
+          </a:fontRef>
+        </p:style>
+        <p:txBody>
+          <a:bodyPr rtlCol="0" anchor="ctr"/>
+          <a:lstStyle/>
+          <a:p>
+            <a:pPr algn="ctr"/>
+          </a:p>
+        </p:txBody>
+      </p:sp>
+      <p:sp>
+        <p:nvSpPr>
+          <p:cNvPr id="37" name="Rectangle 36"/>
+          <p:cNvSpPr/>
+          <p:nvPr/>
+        </p:nvSpPr>
+        <p:spPr>
+          <a:xfrm>
+            <a:off x="6445093" y="2670048"/>
+            <a:ext cx="27432" cy="365760"/>
+          </a:xfrm>
+          <a:prstGeom prst="rect">
+            <a:avLst/>
+          </a:prstGeom>
+          <a:solidFill>
+            <a:srgbClr val="FFFFFF"/>
+          </a:solidFill>
+          <a:ln>
+            <a:noFill/>
+          </a:ln>
+        </p:spPr>
+        <p:style>
+          <a:lnRef idx="1">
+            <a:schemeClr val="accent1"/>
+          </a:lnRef>
+          <a:fillRef idx="3">
+            <a:schemeClr val="accent1"/>
+          </a:fillRef>
+          <a:effectRef idx="2">
+            <a:schemeClr val="accent1"/>
+          </a:effectRef>
+          <a:fontRef idx="minor">
+            <a:schemeClr val="lt1"/>
+          </a:fontRef>
+        </p:style>
+        <p:txBody>
+          <a:bodyPr rtlCol="0" anchor="ctr"/>
+          <a:lstStyle/>
+          <a:p>
+            <a:pPr algn="ctr"/>
+          </a:p>
+        </p:txBody>
+      </p:sp>
+      <p:sp>
+        <p:nvSpPr>
+          <p:cNvPr id="38" name="Rectangle 37"/>
+          <p:cNvSpPr/>
+          <p:nvPr/>
+        </p:nvSpPr>
+        <p:spPr>
+          <a:xfrm>
+            <a:off x="5897880" y="2715768"/>
+            <a:ext cx="1253971" cy="246888"/>
+          </a:xfrm>
+          <a:prstGeom prst="rect">
+            <a:avLst/>
+          </a:prstGeom>
+          <a:solidFill>
+            <a:srgbClr val="3B82F6"/>
+          </a:solidFill>
+          <a:ln>
+            <a:noFill/>
+          </a:ln>
+        </p:spPr>
+        <p:style>
+          <a:lnRef idx="1">
+            <a:schemeClr val="accent1"/>
+          </a:lnRef>
+          <a:fillRef idx="3">
+            <a:schemeClr val="accent1"/>
+          </a:fillRef>
+          <a:effectRef idx="2">
+            <a:schemeClr val="accent1"/>
+          </a:effectRef>
+          <a:fontRef idx="minor">
+            <a:schemeClr val="lt1"/>
+          </a:fontRef>
+        </p:style>
+        <p:txBody>
+          <a:bodyPr rtlCol="0" anchor="ctr"/>
+          <a:lstStyle/>
+          <a:p>
+            <a:pPr algn="ctr"/>
+          </a:p>
+        </p:txBody>
+      </p:sp>
+      <p:sp>
+        <p:nvSpPr>
+          <p:cNvPr id="39" name="TextBox 38"/>
+          <p:cNvSpPr txBox="1"/>
+          <p:nvPr/>
+        </p:nvSpPr>
+        <p:spPr>
+          <a:xfrm>
+            <a:off x="10378440" y="2651760"/>
+            <a:ext cx="685800" cy="320040"/>
+          </a:xfrm>
+          <a:prstGeom prst="rect">
+            <a:avLst/>
+          </a:prstGeom>
+          <a:noFill/>
+        </p:spPr>
+        <p:txBody>
+          <a:bodyPr wrap="square">
+            <a:spAutoFit/>
+          </a:bodyPr>
+          <a:lstStyle/>
+          <a:p>
+            <a:pPr algn="ctr"/>
+            <a:r>
+              <a:rPr sz="1300" b="1">
+                <a:solidFill>
+                  <a:srgbClr val="3B82F6"/>
+                </a:solidFill>
+              </a:rPr>
+              <a:t>28.6%</a:t>
+            </a:r>
+          </a:p>
+        </p:txBody>
+      </p:sp>
+      <p:sp>
+        <p:nvSpPr>
+          <p:cNvPr id="40" name="TextBox 39"/>
+          <p:cNvSpPr txBox="1"/>
+          <p:nvPr/>
+        </p:nvSpPr>
+        <p:spPr>
+          <a:xfrm>
+            <a:off x="11064240" y="2651760"/>
+            <a:ext cx="685800" cy="320040"/>
+          </a:xfrm>
+          <a:prstGeom prst="rect">
+            <a:avLst/>
+          </a:prstGeom>
+          <a:noFill/>
+        </p:spPr>
+        <p:txBody>
+          <a:bodyPr wrap="square">
+            <a:spAutoFit/>
+          </a:bodyPr>
+          <a:lstStyle/>
+          <a:p>
+            <a:pPr algn="ctr"/>
+            <a:r>
+              <a:rPr sz="1100" b="1">
+                <a:solidFill>
+                  <a:srgbClr val="10B981"/>
+                </a:solidFill>
+              </a:rPr>
+              <a:t>+15.8%</a:t>
+            </a:r>
+          </a:p>
+        </p:txBody>
+      </p:sp>
+      <p:sp>
+        <p:nvSpPr>
+          <p:cNvPr id="41" name="Rectangle 40"/>
+          <p:cNvSpPr/>
+          <p:nvPr/>
+        </p:nvSpPr>
+        <p:spPr>
+          <a:xfrm>
+            <a:off x="365760" y="3172968"/>
+            <a:ext cx="11430000" cy="566928"/>
+          </a:xfrm>
+          <a:prstGeom prst="rect">
+            <a:avLst/>
+          </a:prstGeom>
+          <a:solidFill>
+            <a:srgbClr val="12131B"/>
+          </a:solidFill>
+          <a:ln w="12700">
+            <a:noFill/>
+          </a:ln>
+        </p:spPr>
+        <p:style>
+          <a:lnRef idx="1">
+            <a:schemeClr val="accent1"/>
+          </a:lnRef>
+          <a:fillRef idx="3">
+            <a:schemeClr val="accent1"/>
+          </a:fillRef>
+          <a:effectRef idx="2">
+            <a:schemeClr val="accent1"/>
+          </a:effectRef>
+          <a:fontRef idx="minor">
+            <a:schemeClr val="lt1"/>
+          </a:fontRef>
+        </p:style>
+        <p:txBody>
+          <a:bodyPr rtlCol="0" anchor="ctr"/>
+          <a:lstStyle/>
+          <a:p>
+            <a:pPr algn="ctr"/>
+          </a:p>
+        </p:txBody>
+      </p:sp>
+      <p:sp>
+        <p:nvSpPr>
+          <p:cNvPr id="42" name="TextBox 41"/>
+          <p:cNvSpPr txBox="1"/>
+          <p:nvPr/>
+        </p:nvSpPr>
+        <p:spPr>
+          <a:xfrm>
+            <a:off x="475488" y="3264408"/>
+            <a:ext cx="2560320" cy="274320"/>
+          </a:xfrm>
+          <a:prstGeom prst="rect">
+            <a:avLst/>
+          </a:prstGeom>
+          <a:noFill/>
+        </p:spPr>
+        <p:txBody>
+          <a:bodyPr wrap="square">
+            <a:spAutoFit/>
+          </a:bodyPr>
+          <a:lstStyle/>
+          <a:p>
+            <a:pPr algn="l"/>
+            <a:r>
+              <a:rPr sz="1000" b="1">
+                <a:solidFill>
+                  <a:srgbClr val="FFFFFF"/>
+                </a:solidFill>
+              </a:rPr>
+              <a:t>Homoglyph Swap</a:t>
+            </a:r>
+          </a:p>
+        </p:txBody>
+      </p:sp>
+      <p:sp>
+        <p:nvSpPr>
+          <p:cNvPr id="43" name="TextBox 42"/>
+          <p:cNvSpPr txBox="1"/>
+          <p:nvPr/>
+        </p:nvSpPr>
+        <p:spPr>
+          <a:xfrm>
+            <a:off x="3127248" y="3264408"/>
+            <a:ext cx="2697480" cy="256032"/>
+          </a:xfrm>
+          <a:prstGeom prst="rect">
+            <a:avLst/>
+          </a:prstGeom>
+          <a:noFill/>
+        </p:spPr>
+        <p:txBody>
+          <a:bodyPr wrap="square">
+            <a:spAutoFit/>
+          </a:bodyPr>
+          <a:lstStyle/>
+          <a:p>
+            <a:pPr algn="l"/>
+            <a:r>
+              <a:rPr sz="850" b="0">
+                <a:solidFill>
+                  <a:srgbClr val="94A3B8"/>
+                </a:solidFill>
+              </a:rPr>
+              <a:t>Lookalike Unicode chars replace ASCII</a:t>
+            </a:r>
+          </a:p>
+        </p:txBody>
+      </p:sp>
+      <p:sp>
+        <p:nvSpPr>
+          <p:cNvPr id="44" name="Rectangle 43"/>
+          <p:cNvSpPr/>
+          <p:nvPr/>
+        </p:nvSpPr>
+        <p:spPr>
+          <a:xfrm>
+            <a:off x="5897880" y="3310128"/>
+            <a:ext cx="4389120" cy="246888"/>
+          </a:xfrm>
+          <a:prstGeom prst="rect">
+            <a:avLst/>
+          </a:prstGeom>
+          <a:solidFill>
+            <a:srgbClr val="222330"/>
+          </a:solidFill>
+          <a:ln>
+            <a:noFill/>
+          </a:ln>
+        </p:spPr>
+        <p:style>
+          <a:lnRef idx="1">
+            <a:schemeClr val="accent1"/>
+          </a:lnRef>
+          <a:fillRef idx="3">
+            <a:schemeClr val="accent1"/>
+          </a:fillRef>
+          <a:effectRef idx="2">
+            <a:schemeClr val="accent1"/>
+          </a:effectRef>
+          <a:fontRef idx="minor">
+            <a:schemeClr val="lt1"/>
+          </a:fontRef>
+        </p:style>
+        <p:txBody>
+          <a:bodyPr rtlCol="0" anchor="ctr"/>
+          <a:lstStyle/>
+          <a:p>
+            <a:pPr algn="ctr"/>
+          </a:p>
+        </p:txBody>
+      </p:sp>
+      <p:sp>
+        <p:nvSpPr>
+          <p:cNvPr id="45" name="Rectangle 44"/>
+          <p:cNvSpPr/>
+          <p:nvPr/>
+        </p:nvSpPr>
+        <p:spPr>
+          <a:xfrm>
+            <a:off x="6445093" y="3264408"/>
+            <a:ext cx="27432" cy="365760"/>
+          </a:xfrm>
+          <a:prstGeom prst="rect">
+            <a:avLst/>
+          </a:prstGeom>
+          <a:solidFill>
+            <a:srgbClr val="FFFFFF"/>
+          </a:solidFill>
+          <a:ln>
+            <a:noFill/>
+          </a:ln>
+        </p:spPr>
+        <p:style>
+          <a:lnRef idx="1">
+            <a:schemeClr val="accent1"/>
+          </a:lnRef>
+          <a:fillRef idx="3">
+            <a:schemeClr val="accent1"/>
+          </a:fillRef>
+          <a:effectRef idx="2">
+            <a:schemeClr val="accent1"/>
+          </a:effectRef>
+          <a:fontRef idx="minor">
+            <a:schemeClr val="lt1"/>
+          </a:fontRef>
+        </p:style>
+        <p:txBody>
+          <a:bodyPr rtlCol="0" anchor="ctr"/>
+          <a:lstStyle/>
+          <a:p>
+            <a:pPr algn="ctr"/>
+          </a:p>
+        </p:txBody>
+      </p:sp>
+      <p:sp>
+        <p:nvSpPr>
+          <p:cNvPr id="46" name="Rectangle 45"/>
+          <p:cNvSpPr/>
+          <p:nvPr/>
+        </p:nvSpPr>
+        <p:spPr>
+          <a:xfrm>
+            <a:off x="5897880" y="3310128"/>
+            <a:ext cx="1032759" cy="246888"/>
+          </a:xfrm>
+          <a:prstGeom prst="rect">
+            <a:avLst/>
+          </a:prstGeom>
+          <a:solidFill>
+            <a:srgbClr val="3B82F6"/>
+          </a:solidFill>
+          <a:ln>
+            <a:noFill/>
+          </a:ln>
+        </p:spPr>
+        <p:style>
+          <a:lnRef idx="1">
+            <a:schemeClr val="accent1"/>
+          </a:lnRef>
+          <a:fillRef idx="3">
+            <a:schemeClr val="accent1"/>
+          </a:fillRef>
+          <a:effectRef idx="2">
+            <a:schemeClr val="accent1"/>
+          </a:effectRef>
+          <a:fontRef idx="minor">
+            <a:schemeClr val="lt1"/>
+          </a:fontRef>
+        </p:style>
+        <p:txBody>
+          <a:bodyPr rtlCol="0" anchor="ctr"/>
+          <a:lstStyle/>
+          <a:p>
+            <a:pPr algn="ctr"/>
+          </a:p>
+        </p:txBody>
+      </p:sp>
+      <p:sp>
+        <p:nvSpPr>
+          <p:cNvPr id="47" name="TextBox 46"/>
+          <p:cNvSpPr txBox="1"/>
+          <p:nvPr/>
+        </p:nvSpPr>
+        <p:spPr>
+          <a:xfrm>
+            <a:off x="10378440" y="3246120"/>
+            <a:ext cx="685800" cy="320040"/>
+          </a:xfrm>
+          <a:prstGeom prst="rect">
+            <a:avLst/>
+          </a:prstGeom>
+          <a:noFill/>
+        </p:spPr>
+        <p:txBody>
+          <a:bodyPr wrap="square">
+            <a:spAutoFit/>
+          </a:bodyPr>
+          <a:lstStyle/>
+          <a:p>
+            <a:pPr algn="ctr"/>
+            <a:r>
+              <a:rPr sz="1300" b="1">
+                <a:solidFill>
+                  <a:srgbClr val="3B82F6"/>
+                </a:solidFill>
+              </a:rPr>
+              <a:t>23.5%</a:t>
+            </a:r>
+          </a:p>
+        </p:txBody>
+      </p:sp>
+      <p:sp>
+        <p:nvSpPr>
+          <p:cNvPr id="48" name="TextBox 47"/>
+          <p:cNvSpPr txBox="1"/>
+          <p:nvPr/>
+        </p:nvSpPr>
+        <p:spPr>
+          <a:xfrm>
+            <a:off x="11064240" y="3246120"/>
+            <a:ext cx="685800" cy="320040"/>
+          </a:xfrm>
+          <a:prstGeom prst="rect">
+            <a:avLst/>
+          </a:prstGeom>
+          <a:noFill/>
+        </p:spPr>
+        <p:txBody>
+          <a:bodyPr wrap="square">
+            <a:spAutoFit/>
+          </a:bodyPr>
+          <a:lstStyle/>
+          <a:p>
+            <a:pPr algn="ctr"/>
+            <a:r>
+              <a:rPr sz="1100" b="1">
+                <a:solidFill>
+                  <a:srgbClr val="10B981"/>
+                </a:solidFill>
+              </a:rPr>
+              <a:t>+10.8%</a:t>
+            </a:r>
+          </a:p>
+        </p:txBody>
+      </p:sp>
+      <p:sp>
+        <p:nvSpPr>
+          <p:cNvPr id="49" name="Rectangle 48"/>
+          <p:cNvSpPr/>
+          <p:nvPr/>
+        </p:nvSpPr>
+        <p:spPr>
+          <a:xfrm>
+            <a:off x="365760" y="3767328"/>
+            <a:ext cx="11430000" cy="566928"/>
+          </a:xfrm>
+          <a:prstGeom prst="rect">
+            <a:avLst/>
+          </a:prstGeom>
+          <a:solidFill>
+            <a:srgbClr val="1A1B23"/>
+          </a:solidFill>
+          <a:ln w="12700">
+            <a:noFill/>
+          </a:ln>
+        </p:spPr>
+        <p:style>
+          <a:lnRef idx="1">
+            <a:schemeClr val="accent1"/>
+          </a:lnRef>
+          <a:fillRef idx="3">
+            <a:schemeClr val="accent1"/>
+          </a:fillRef>
+          <a:effectRef idx="2">
+            <a:schemeClr val="accent1"/>
+          </a:effectRef>
+          <a:fontRef idx="minor">
+            <a:schemeClr val="lt1"/>
+          </a:fontRef>
+        </p:style>
+        <p:txBody>
+          <a:bodyPr rtlCol="0" anchor="ctr"/>
+          <a:lstStyle/>
+          <a:p>
+            <a:pPr algn="ctr"/>
+          </a:p>
+        </p:txBody>
+      </p:sp>
+      <p:sp>
+        <p:nvSpPr>
+          <p:cNvPr id="50" name="TextBox 49"/>
+          <p:cNvSpPr txBox="1"/>
+          <p:nvPr/>
+        </p:nvSpPr>
+        <p:spPr>
+          <a:xfrm>
+            <a:off x="475488" y="3858768"/>
+            <a:ext cx="2560320" cy="274320"/>
+          </a:xfrm>
+          <a:prstGeom prst="rect">
+            <a:avLst/>
+          </a:prstGeom>
+          <a:noFill/>
+        </p:spPr>
+        <p:txBody>
+          <a:bodyPr wrap="square">
+            <a:spAutoFit/>
+          </a:bodyPr>
+          <a:lstStyle/>
+          <a:p>
+            <a:pPr algn="l"/>
+            <a:r>
+              <a:rPr sz="1000" b="1">
+                <a:solidFill>
+                  <a:srgbClr val="FFFFFF"/>
+                </a:solidFill>
+              </a:rPr>
+              <a:t>Spongebob Case</a:t>
+            </a:r>
+          </a:p>
+        </p:txBody>
+      </p:sp>
+      <p:sp>
+        <p:nvSpPr>
+          <p:cNvPr id="51" name="TextBox 50"/>
+          <p:cNvSpPr txBox="1"/>
+          <p:nvPr/>
+        </p:nvSpPr>
+        <p:spPr>
+          <a:xfrm>
+            <a:off x="3127248" y="3858768"/>
+            <a:ext cx="2697480" cy="256032"/>
+          </a:xfrm>
+          <a:prstGeom prst="rect">
+            <a:avLst/>
+          </a:prstGeom>
+          <a:noFill/>
+        </p:spPr>
+        <p:txBody>
+          <a:bodyPr wrap="square">
+            <a:spAutoFit/>
+          </a:bodyPr>
+          <a:lstStyle/>
+          <a:p>
+            <a:pPr algn="l"/>
+            <a:r>
+              <a:rPr sz="850" b="0">
+                <a:solidFill>
+                  <a:srgbClr val="94A3B8"/>
+                </a:solidFill>
+              </a:rPr>
+              <a:t>aLtErNaTiNg CaSe confuses tokenizers</a:t>
+            </a:r>
+          </a:p>
+        </p:txBody>
+      </p:sp>
+      <p:sp>
+        <p:nvSpPr>
+          <p:cNvPr id="52" name="Rectangle 51"/>
+          <p:cNvSpPr/>
+          <p:nvPr/>
+        </p:nvSpPr>
+        <p:spPr>
+          <a:xfrm>
+            <a:off x="5897880" y="3904488"/>
+            <a:ext cx="4389120" cy="246888"/>
+          </a:xfrm>
+          <a:prstGeom prst="rect">
+            <a:avLst/>
+          </a:prstGeom>
+          <a:solidFill>
+            <a:srgbClr val="222330"/>
+          </a:solidFill>
+          <a:ln>
+            <a:noFill/>
+          </a:ln>
+        </p:spPr>
+        <p:style>
+          <a:lnRef idx="1">
+            <a:schemeClr val="accent1"/>
+          </a:lnRef>
+          <a:fillRef idx="3">
+            <a:schemeClr val="accent1"/>
+          </a:fillRef>
+          <a:effectRef idx="2">
+            <a:schemeClr val="accent1"/>
+          </a:effectRef>
+          <a:fontRef idx="minor">
+            <a:schemeClr val="lt1"/>
+          </a:fontRef>
+        </p:style>
+        <p:txBody>
+          <a:bodyPr rtlCol="0" anchor="ctr"/>
+          <a:lstStyle/>
+          <a:p>
+            <a:pPr algn="ctr"/>
+          </a:p>
+        </p:txBody>
+      </p:sp>
+      <p:sp>
+        <p:nvSpPr>
+          <p:cNvPr id="53" name="Rectangle 52"/>
+          <p:cNvSpPr/>
+          <p:nvPr/>
+        </p:nvSpPr>
+        <p:spPr>
+          <a:xfrm>
+            <a:off x="6445093" y="3858768"/>
+            <a:ext cx="27432" cy="365760"/>
+          </a:xfrm>
+          <a:prstGeom prst="rect">
+            <a:avLst/>
+          </a:prstGeom>
+          <a:solidFill>
+            <a:srgbClr val="FFFFFF"/>
+          </a:solidFill>
+          <a:ln>
+            <a:noFill/>
+          </a:ln>
+        </p:spPr>
+        <p:style>
+          <a:lnRef idx="1">
+            <a:schemeClr val="accent1"/>
+          </a:lnRef>
+          <a:fillRef idx="3">
+            <a:schemeClr val="accent1"/>
+          </a:fillRef>
+          <a:effectRef idx="2">
+            <a:schemeClr val="accent1"/>
+          </a:effectRef>
+          <a:fontRef idx="minor">
+            <a:schemeClr val="lt1"/>
+          </a:fontRef>
+        </p:style>
+        <p:txBody>
+          <a:bodyPr rtlCol="0" anchor="ctr"/>
+          <a:lstStyle/>
+          <a:p>
+            <a:pPr algn="ctr"/>
+          </a:p>
+        </p:txBody>
+      </p:sp>
+      <p:sp>
+        <p:nvSpPr>
+          <p:cNvPr id="54" name="Rectangle 53"/>
+          <p:cNvSpPr/>
+          <p:nvPr/>
+        </p:nvSpPr>
+        <p:spPr>
+          <a:xfrm>
+            <a:off x="5897880" y="3904488"/>
+            <a:ext cx="940588" cy="246888"/>
+          </a:xfrm>
+          <a:prstGeom prst="rect">
+            <a:avLst/>
+          </a:prstGeom>
+          <a:solidFill>
+            <a:srgbClr val="3B82F6"/>
+          </a:solidFill>
+          <a:ln>
+            <a:noFill/>
+          </a:ln>
+        </p:spPr>
+        <p:style>
+          <a:lnRef idx="1">
+            <a:schemeClr val="accent1"/>
+          </a:lnRef>
+          <a:fillRef idx="3">
+            <a:schemeClr val="accent1"/>
+          </a:fillRef>
+          <a:effectRef idx="2">
+            <a:schemeClr val="accent1"/>
+          </a:effectRef>
+          <a:fontRef idx="minor">
+            <a:schemeClr val="lt1"/>
+          </a:fontRef>
+        </p:style>
+        <p:txBody>
+          <a:bodyPr rtlCol="0" anchor="ctr"/>
+          <a:lstStyle/>
+          <a:p>
+            <a:pPr algn="ctr"/>
+          </a:p>
+        </p:txBody>
+      </p:sp>
+      <p:sp>
+        <p:nvSpPr>
+          <p:cNvPr id="55" name="TextBox 54"/>
+          <p:cNvSpPr txBox="1"/>
+          <p:nvPr/>
+        </p:nvSpPr>
+        <p:spPr>
+          <a:xfrm>
+            <a:off x="10378440" y="3840480"/>
+            <a:ext cx="685800" cy="320040"/>
+          </a:xfrm>
+          <a:prstGeom prst="rect">
+            <a:avLst/>
+          </a:prstGeom>
+          <a:noFill/>
+        </p:spPr>
+        <p:txBody>
+          <a:bodyPr wrap="square">
+            <a:spAutoFit/>
+          </a:bodyPr>
+          <a:lstStyle/>
+          <a:p>
+            <a:pPr algn="ctr"/>
+            <a:r>
+              <a:rPr sz="1300" b="1">
+                <a:solidFill>
+                  <a:srgbClr val="3B82F6"/>
+                </a:solidFill>
+              </a:rPr>
+              <a:t>21.4%</a:t>
+            </a:r>
+          </a:p>
+        </p:txBody>
+      </p:sp>
+      <p:sp>
+        <p:nvSpPr>
+          <p:cNvPr id="56" name="TextBox 55"/>
+          <p:cNvSpPr txBox="1"/>
+          <p:nvPr/>
+        </p:nvSpPr>
+        <p:spPr>
+          <a:xfrm>
+            <a:off x="11064240" y="3840480"/>
+            <a:ext cx="685800" cy="320040"/>
+          </a:xfrm>
+          <a:prstGeom prst="rect">
+            <a:avLst/>
+          </a:prstGeom>
+          <a:noFill/>
+        </p:spPr>
+        <p:txBody>
+          <a:bodyPr wrap="square">
+            <a:spAutoFit/>
+          </a:bodyPr>
+          <a:lstStyle/>
+          <a:p>
+            <a:pPr algn="ctr"/>
+            <a:r>
+              <a:rPr sz="1100" b="1">
+                <a:solidFill>
+                  <a:srgbClr val="10B981"/>
+                </a:solidFill>
+              </a:rPr>
+              <a:t>+8.6%</a:t>
+            </a:r>
+          </a:p>
+        </p:txBody>
+      </p:sp>
+      <p:sp>
+        <p:nvSpPr>
+          <p:cNvPr id="57" name="Rectangle 56"/>
+          <p:cNvSpPr/>
+          <p:nvPr/>
+        </p:nvSpPr>
+        <p:spPr>
+          <a:xfrm>
+            <a:off x="365760" y="4361688"/>
+            <a:ext cx="11430000" cy="566928"/>
+          </a:xfrm>
+          <a:prstGeom prst="rect">
+            <a:avLst/>
+          </a:prstGeom>
+          <a:solidFill>
+            <a:srgbClr val="12131B"/>
+          </a:solidFill>
+          <a:ln w="12700">
+            <a:noFill/>
+          </a:ln>
+        </p:spPr>
+        <p:style>
+          <a:lnRef idx="1">
+            <a:schemeClr val="accent1"/>
+          </a:lnRef>
+          <a:fillRef idx="3">
+            <a:schemeClr val="accent1"/>
+          </a:fillRef>
+          <a:effectRef idx="2">
+            <a:schemeClr val="accent1"/>
+          </a:effectRef>
+          <a:fontRef idx="minor">
+            <a:schemeClr val="lt1"/>
+          </a:fontRef>
+        </p:style>
+        <p:txBody>
+          <a:bodyPr rtlCol="0" anchor="ctr"/>
+          <a:lstStyle/>
+          <a:p>
+            <a:pPr algn="ctr"/>
+          </a:p>
+        </p:txBody>
+      </p:sp>
+      <p:sp>
+        <p:nvSpPr>
+          <p:cNvPr id="58" name="TextBox 57"/>
+          <p:cNvSpPr txBox="1"/>
+          <p:nvPr/>
+        </p:nvSpPr>
+        <p:spPr>
+          <a:xfrm>
+            <a:off x="475488" y="4453127"/>
+            <a:ext cx="2560320" cy="274320"/>
+          </a:xfrm>
+          <a:prstGeom prst="rect">
+            <a:avLst/>
+          </a:prstGeom>
+          <a:noFill/>
+        </p:spPr>
+        <p:txBody>
+          <a:bodyPr wrap="square">
+            <a:spAutoFit/>
+          </a:bodyPr>
+          <a:lstStyle/>
+          <a:p>
+            <a:pPr algn="l"/>
+            <a:r>
+              <a:rPr sz="1000" b="1">
+                <a:solidFill>
+                  <a:srgbClr val="FFFFFF"/>
+                </a:solidFill>
+              </a:rPr>
+              <a:t>Whitespace Mangle</a:t>
+            </a:r>
+          </a:p>
+        </p:txBody>
+      </p:sp>
+      <p:sp>
+        <p:nvSpPr>
+          <p:cNvPr id="59" name="TextBox 58"/>
+          <p:cNvSpPr txBox="1"/>
+          <p:nvPr/>
+        </p:nvSpPr>
+        <p:spPr>
+          <a:xfrm>
+            <a:off x="3127248" y="4453127"/>
+            <a:ext cx="2697480" cy="256032"/>
+          </a:xfrm>
+          <a:prstGeom prst="rect">
+            <a:avLst/>
+          </a:prstGeom>
+          <a:noFill/>
+        </p:spPr>
+        <p:txBody>
+          <a:bodyPr wrap="square">
+            <a:spAutoFit/>
+          </a:bodyPr>
+          <a:lstStyle/>
+          <a:p>
+            <a:pPr algn="l"/>
+            <a:r>
+              <a:rPr sz="850" b="0">
+                <a:solidFill>
+                  <a:srgbClr val="94A3B8"/>
+                </a:solidFill>
+              </a:rPr>
+              <a:t>Extra whitespace + tab noise injections</a:t>
+            </a:r>
+          </a:p>
+        </p:txBody>
+      </p:sp>
+      <p:sp>
+        <p:nvSpPr>
+          <p:cNvPr id="60" name="Rectangle 59"/>
+          <p:cNvSpPr/>
+          <p:nvPr/>
+        </p:nvSpPr>
+        <p:spPr>
+          <a:xfrm>
+            <a:off x="5897880" y="4498848"/>
+            <a:ext cx="4389120" cy="246888"/>
+          </a:xfrm>
+          <a:prstGeom prst="rect">
+            <a:avLst/>
+          </a:prstGeom>
+          <a:solidFill>
+            <a:srgbClr val="222330"/>
+          </a:solidFill>
+          <a:ln>
+            <a:noFill/>
+          </a:ln>
+        </p:spPr>
+        <p:style>
+          <a:lnRef idx="1">
+            <a:schemeClr val="accent1"/>
+          </a:lnRef>
+          <a:fillRef idx="3">
+            <a:schemeClr val="accent1"/>
+          </a:fillRef>
+          <a:effectRef idx="2">
+            <a:schemeClr val="accent1"/>
+          </a:effectRef>
+          <a:fontRef idx="minor">
+            <a:schemeClr val="lt1"/>
+          </a:fontRef>
+        </p:style>
+        <p:txBody>
+          <a:bodyPr rtlCol="0" anchor="ctr"/>
+          <a:lstStyle/>
+          <a:p>
+            <a:pPr algn="ctr"/>
+          </a:p>
+        </p:txBody>
+      </p:sp>
+      <p:sp>
+        <p:nvSpPr>
+          <p:cNvPr id="61" name="Rectangle 60"/>
+          <p:cNvSpPr/>
+          <p:nvPr/>
+        </p:nvSpPr>
+        <p:spPr>
+          <a:xfrm>
+            <a:off x="6445093" y="4453127"/>
+            <a:ext cx="27432" cy="365760"/>
+          </a:xfrm>
+          <a:prstGeom prst="rect">
+            <a:avLst/>
+          </a:prstGeom>
+          <a:solidFill>
+            <a:srgbClr val="FFFFFF"/>
+          </a:solidFill>
+          <a:ln>
+            <a:noFill/>
+          </a:ln>
+        </p:spPr>
+        <p:style>
+          <a:lnRef idx="1">
+            <a:schemeClr val="accent1"/>
+          </a:lnRef>
+          <a:fillRef idx="3">
+            <a:schemeClr val="accent1"/>
+          </a:fillRef>
+          <a:effectRef idx="2">
+            <a:schemeClr val="accent1"/>
+          </a:effectRef>
+          <a:fontRef idx="minor">
+            <a:schemeClr val="lt1"/>
+          </a:fontRef>
+        </p:style>
+        <p:txBody>
+          <a:bodyPr rtlCol="0" anchor="ctr"/>
+          <a:lstStyle/>
+          <a:p>
+            <a:pPr algn="ctr"/>
+          </a:p>
+        </p:txBody>
+      </p:sp>
+      <p:sp>
+        <p:nvSpPr>
+          <p:cNvPr id="62" name="Rectangle 61"/>
+          <p:cNvSpPr/>
+          <p:nvPr/>
+        </p:nvSpPr>
+        <p:spPr>
+          <a:xfrm>
+            <a:off x="5897880" y="4498848"/>
+            <a:ext cx="438912" cy="246888"/>
+          </a:xfrm>
+          <a:prstGeom prst="rect">
+            <a:avLst/>
+          </a:prstGeom>
+          <a:solidFill>
+            <a:srgbClr val="F59E0B"/>
+          </a:solidFill>
+          <a:ln>
+            <a:noFill/>
+          </a:ln>
+        </p:spPr>
+        <p:style>
+          <a:lnRef idx="1">
+            <a:schemeClr val="accent1"/>
+          </a:lnRef>
+          <a:fillRef idx="3">
+            <a:schemeClr val="accent1"/>
+          </a:fillRef>
+          <a:effectRef idx="2">
+            <a:schemeClr val="accent1"/>
+          </a:effectRef>
+          <a:fontRef idx="minor">
+            <a:schemeClr val="lt1"/>
+          </a:fontRef>
+        </p:style>
+        <p:txBody>
+          <a:bodyPr rtlCol="0" anchor="ctr"/>
+          <a:lstStyle/>
+          <a:p>
+            <a:pPr algn="ctr"/>
+          </a:p>
+        </p:txBody>
+      </p:sp>
+      <p:sp>
+        <p:nvSpPr>
+          <p:cNvPr id="63" name="TextBox 62"/>
+          <p:cNvSpPr txBox="1"/>
+          <p:nvPr/>
+        </p:nvSpPr>
+        <p:spPr>
+          <a:xfrm>
+            <a:off x="10378440" y="4434840"/>
+            <a:ext cx="685800" cy="320040"/>
+          </a:xfrm>
+          <a:prstGeom prst="rect">
+            <a:avLst/>
+          </a:prstGeom>
+          <a:noFill/>
+        </p:spPr>
+        <p:txBody>
+          <a:bodyPr wrap="square">
+            <a:spAutoFit/>
+          </a:bodyPr>
+          <a:lstStyle/>
+          <a:p>
+            <a:pPr algn="ctr"/>
+            <a:r>
+              <a:rPr sz="1300" b="1">
+                <a:solidFill>
+                  <a:srgbClr val="F59E0B"/>
+                </a:solidFill>
+              </a:rPr>
+              <a:t>10.0%</a:t>
+            </a:r>
+          </a:p>
+        </p:txBody>
+      </p:sp>
+      <p:sp>
+        <p:nvSpPr>
+          <p:cNvPr id="64" name="TextBox 63"/>
+          <p:cNvSpPr txBox="1"/>
+          <p:nvPr/>
+        </p:nvSpPr>
+        <p:spPr>
+          <a:xfrm>
+            <a:off x="11064240" y="4434840"/>
+            <a:ext cx="685800" cy="320040"/>
+          </a:xfrm>
+          <a:prstGeom prst="rect">
+            <a:avLst/>
+          </a:prstGeom>
+          <a:noFill/>
+        </p:spPr>
+        <p:txBody>
+          <a:bodyPr wrap="square">
+            <a:spAutoFit/>
+          </a:bodyPr>
+          <a:lstStyle/>
+          <a:p>
+            <a:pPr algn="ctr"/>
+            <a:r>
+              <a:rPr sz="1100" b="1">
+                <a:solidFill>
+                  <a:srgbClr val="EF4444"/>
+                </a:solidFill>
+              </a:rPr>
+              <a:t>-2.8%</a:t>
+            </a:r>
+          </a:p>
+        </p:txBody>
+      </p:sp>
+      <p:sp>
+        <p:nvSpPr>
+          <p:cNvPr id="65" name="Rectangle 64"/>
+          <p:cNvSpPr/>
+          <p:nvPr/>
+        </p:nvSpPr>
+        <p:spPr>
+          <a:xfrm>
+            <a:off x="365760" y="4956048"/>
+            <a:ext cx="11430000" cy="566928"/>
+          </a:xfrm>
+          <a:prstGeom prst="rect">
+            <a:avLst/>
+          </a:prstGeom>
+          <a:solidFill>
+            <a:srgbClr val="1A1B23"/>
+          </a:solidFill>
+          <a:ln w="12700">
+            <a:noFill/>
+          </a:ln>
+        </p:spPr>
+        <p:style>
+          <a:lnRef idx="1">
+            <a:schemeClr val="accent1"/>
+          </a:lnRef>
+          <a:fillRef idx="3">
+            <a:schemeClr val="accent1"/>
+          </a:fillRef>
+          <a:effectRef idx="2">
+            <a:schemeClr val="accent1"/>
+          </a:effectRef>
+          <a:fontRef idx="minor">
+            <a:schemeClr val="lt1"/>
+          </a:fontRef>
+        </p:style>
+        <p:txBody>
+          <a:bodyPr rtlCol="0" anchor="ctr"/>
+          <a:lstStyle/>
+          <a:p>
+            <a:pPr algn="ctr"/>
+          </a:p>
+        </p:txBody>
+      </p:sp>
+      <p:sp>
+        <p:nvSpPr>
+          <p:cNvPr id="66" name="TextBox 65"/>
+          <p:cNvSpPr txBox="1"/>
+          <p:nvPr/>
+        </p:nvSpPr>
+        <p:spPr>
+          <a:xfrm>
+            <a:off x="475488" y="5047488"/>
+            <a:ext cx="2560320" cy="274320"/>
+          </a:xfrm>
+          <a:prstGeom prst="rect">
+            <a:avLst/>
+          </a:prstGeom>
+          <a:noFill/>
+        </p:spPr>
+        <p:txBody>
+          <a:bodyPr wrap="square">
+            <a:spAutoFit/>
+          </a:bodyPr>
+          <a:lstStyle/>
+          <a:p>
+            <a:pPr algn="l"/>
+            <a:r>
+              <a:rPr sz="1000" b="1">
+                <a:solidFill>
+                  <a:srgbClr val="FFFFFF"/>
+                </a:solidFill>
+              </a:rPr>
+              <a:t>Tag Injection</a:t>
+            </a:r>
+          </a:p>
+        </p:txBody>
+      </p:sp>
+      <p:sp>
+        <p:nvSpPr>
+          <p:cNvPr id="67" name="TextBox 66"/>
+          <p:cNvSpPr txBox="1"/>
+          <p:nvPr/>
+        </p:nvSpPr>
+        <p:spPr>
+          <a:xfrm>
+            <a:off x="3127248" y="5047488"/>
+            <a:ext cx="2697480" cy="256032"/>
+          </a:xfrm>
+          <a:prstGeom prst="rect">
+            <a:avLst/>
+          </a:prstGeom>
+          <a:noFill/>
+        </p:spPr>
+        <p:txBody>
+          <a:bodyPr wrap="square">
+            <a:spAutoFit/>
+          </a:bodyPr>
+          <a:lstStyle/>
+          <a:p>
+            <a:pPr algn="l"/>
+            <a:r>
+              <a:rPr sz="850" b="0">
+                <a:solidFill>
+                  <a:srgbClr val="94A3B8"/>
+                </a:solidFill>
+              </a:rPr>
+              <a:t>HTML/XML tags wrapped around payload</a:t>
+            </a:r>
+          </a:p>
+        </p:txBody>
+      </p:sp>
+      <p:sp>
+        <p:nvSpPr>
+          <p:cNvPr id="68" name="Rectangle 67"/>
+          <p:cNvSpPr/>
+          <p:nvPr/>
+        </p:nvSpPr>
+        <p:spPr>
+          <a:xfrm>
+            <a:off x="5897880" y="5093208"/>
+            <a:ext cx="4389120" cy="246888"/>
+          </a:xfrm>
+          <a:prstGeom prst="rect">
+            <a:avLst/>
+          </a:prstGeom>
+          <a:solidFill>
+            <a:srgbClr val="222330"/>
+          </a:solidFill>
+          <a:ln>
+            <a:noFill/>
+          </a:ln>
+        </p:spPr>
+        <p:style>
+          <a:lnRef idx="1">
+            <a:schemeClr val="accent1"/>
+          </a:lnRef>
+          <a:fillRef idx="3">
+            <a:schemeClr val="accent1"/>
+          </a:fillRef>
+          <a:effectRef idx="2">
+            <a:schemeClr val="accent1"/>
+          </a:effectRef>
+          <a:fontRef idx="minor">
+            <a:schemeClr val="lt1"/>
+          </a:fontRef>
+        </p:style>
+        <p:txBody>
+          <a:bodyPr rtlCol="0" anchor="ctr"/>
+          <a:lstStyle/>
+          <a:p>
+            <a:pPr algn="ctr"/>
+          </a:p>
+        </p:txBody>
+      </p:sp>
+      <p:sp>
+        <p:nvSpPr>
+          <p:cNvPr id="69" name="Rectangle 68"/>
+          <p:cNvSpPr/>
+          <p:nvPr/>
+        </p:nvSpPr>
+        <p:spPr>
+          <a:xfrm>
+            <a:off x="6445093" y="5047488"/>
+            <a:ext cx="27432" cy="365760"/>
+          </a:xfrm>
+          <a:prstGeom prst="rect">
+            <a:avLst/>
+          </a:prstGeom>
+          <a:solidFill>
+            <a:srgbClr val="FFFFFF"/>
+          </a:solidFill>
+          <a:ln>
+            <a:noFill/>
+          </a:ln>
+        </p:spPr>
+        <p:style>
+          <a:lnRef idx="1">
+            <a:schemeClr val="accent1"/>
+          </a:lnRef>
+          <a:fillRef idx="3">
+            <a:schemeClr val="accent1"/>
+          </a:fillRef>
+          <a:effectRef idx="2">
+            <a:schemeClr val="accent1"/>
+          </a:effectRef>
+          <a:fontRef idx="minor">
+            <a:schemeClr val="lt1"/>
+          </a:fontRef>
+        </p:style>
+        <p:txBody>
+          <a:bodyPr rtlCol="0" anchor="ctr"/>
+          <a:lstStyle/>
+          <a:p>
+            <a:pPr algn="ctr"/>
+          </a:p>
+        </p:txBody>
+      </p:sp>
+      <p:sp>
+        <p:nvSpPr>
+          <p:cNvPr id="70" name="Rectangle 69"/>
+          <p:cNvSpPr/>
+          <p:nvPr/>
+        </p:nvSpPr>
+        <p:spPr>
+          <a:xfrm>
+            <a:off x="5897880" y="5093208"/>
+            <a:ext cx="313383" cy="246888"/>
+          </a:xfrm>
+          <a:prstGeom prst="rect">
+            <a:avLst/>
+          </a:prstGeom>
+          <a:solidFill>
+            <a:srgbClr val="F59E0B"/>
+          </a:solidFill>
+          <a:ln>
+            <a:noFill/>
+          </a:ln>
+        </p:spPr>
+        <p:style>
+          <a:lnRef idx="1">
+            <a:schemeClr val="accent1"/>
+          </a:lnRef>
+          <a:fillRef idx="3">
+            <a:schemeClr val="accent1"/>
+          </a:fillRef>
+          <a:effectRef idx="2">
+            <a:schemeClr val="accent1"/>
+          </a:effectRef>
+          <a:fontRef idx="minor">
+            <a:schemeClr val="lt1"/>
+          </a:fontRef>
+        </p:style>
+        <p:txBody>
+          <a:bodyPr rtlCol="0" anchor="ctr"/>
+          <a:lstStyle/>
+          <a:p>
+            <a:pPr algn="ctr"/>
+          </a:p>
+        </p:txBody>
+      </p:sp>
+      <p:sp>
+        <p:nvSpPr>
+          <p:cNvPr id="71" name="TextBox 70"/>
+          <p:cNvSpPr txBox="1"/>
+          <p:nvPr/>
+        </p:nvSpPr>
+        <p:spPr>
+          <a:xfrm>
+            <a:off x="10378440" y="5029200"/>
+            <a:ext cx="685800" cy="320040"/>
+          </a:xfrm>
+          <a:prstGeom prst="rect">
+            <a:avLst/>
+          </a:prstGeom>
+          <a:noFill/>
+        </p:spPr>
+        <p:txBody>
+          <a:bodyPr wrap="square">
+            <a:spAutoFit/>
+          </a:bodyPr>
+          <a:lstStyle/>
+          <a:p>
+            <a:pPr algn="ctr"/>
+            <a:r>
+              <a:rPr sz="1300" b="1">
+                <a:solidFill>
+                  <a:srgbClr val="F59E0B"/>
+                </a:solidFill>
+              </a:rPr>
+              <a:t>7.1%</a:t>
+            </a:r>
+          </a:p>
+        </p:txBody>
+      </p:sp>
+      <p:sp>
+        <p:nvSpPr>
+          <p:cNvPr id="72" name="TextBox 71"/>
+          <p:cNvSpPr txBox="1"/>
+          <p:nvPr/>
+        </p:nvSpPr>
+        <p:spPr>
+          <a:xfrm>
+            <a:off x="11064240" y="5029200"/>
+            <a:ext cx="685800" cy="320040"/>
+          </a:xfrm>
+          <a:prstGeom prst="rect">
+            <a:avLst/>
+          </a:prstGeom>
+          <a:noFill/>
+        </p:spPr>
+        <p:txBody>
+          <a:bodyPr wrap="square">
+            <a:spAutoFit/>
+          </a:bodyPr>
+          <a:lstStyle/>
+          <a:p>
+            <a:pPr algn="ctr"/>
+            <a:r>
+              <a:rPr sz="1100" b="1">
+                <a:solidFill>
+                  <a:srgbClr val="EF4444"/>
+                </a:solidFill>
+              </a:rPr>
+              <a:t>-5.6%</a:t>
+            </a:r>
+          </a:p>
+        </p:txBody>
+      </p:sp>
+      <p:sp>
+        <p:nvSpPr>
+          <p:cNvPr id="73" name="Rectangle 72"/>
+          <p:cNvSpPr/>
+          <p:nvPr/>
+        </p:nvSpPr>
+        <p:spPr>
+          <a:xfrm>
+            <a:off x="365760" y="5550408"/>
+            <a:ext cx="11430000" cy="566928"/>
+          </a:xfrm>
+          <a:prstGeom prst="rect">
+            <a:avLst/>
+          </a:prstGeom>
+          <a:solidFill>
+            <a:srgbClr val="12131B"/>
+          </a:solidFill>
+          <a:ln w="12700">
+            <a:noFill/>
+          </a:ln>
+        </p:spPr>
+        <p:style>
+          <a:lnRef idx="1">
+            <a:schemeClr val="accent1"/>
+          </a:lnRef>
+          <a:fillRef idx="3">
+            <a:schemeClr val="accent1"/>
+          </a:fillRef>
+          <a:effectRef idx="2">
+            <a:schemeClr val="accent1"/>
+          </a:effectRef>
+          <a:fontRef idx="minor">
+            <a:schemeClr val="lt1"/>
+          </a:fontRef>
+        </p:style>
+        <p:txBody>
+          <a:bodyPr rtlCol="0" anchor="ctr"/>
+          <a:lstStyle/>
+          <a:p>
+            <a:pPr algn="ctr"/>
+          </a:p>
+        </p:txBody>
+      </p:sp>
+      <p:sp>
+        <p:nvSpPr>
+          <p:cNvPr id="74" name="TextBox 73"/>
+          <p:cNvSpPr txBox="1"/>
+          <p:nvPr/>
+        </p:nvSpPr>
+        <p:spPr>
+          <a:xfrm>
+            <a:off x="475488" y="5641848"/>
+            <a:ext cx="2560320" cy="274320"/>
+          </a:xfrm>
+          <a:prstGeom prst="rect">
+            <a:avLst/>
+          </a:prstGeom>
+          <a:noFill/>
+        </p:spPr>
+        <p:txBody>
+          <a:bodyPr wrap="square">
+            <a:spAutoFit/>
+          </a:bodyPr>
+          <a:lstStyle/>
+          <a:p>
+            <a:pPr algn="l"/>
+            <a:r>
+              <a:rPr sz="1000" b="1">
+                <a:solidFill>
+                  <a:srgbClr val="FFFFFF"/>
+                </a:solidFill>
+              </a:rPr>
+              <a:t>Payload Swap</a:t>
+            </a:r>
+          </a:p>
+        </p:txBody>
+      </p:sp>
+      <p:sp>
+        <p:nvSpPr>
+          <p:cNvPr id="75" name="TextBox 74"/>
+          <p:cNvSpPr txBox="1"/>
+          <p:nvPr/>
+        </p:nvSpPr>
+        <p:spPr>
+          <a:xfrm>
+            <a:off x="3127248" y="5641848"/>
+            <a:ext cx="2697480" cy="256032"/>
+          </a:xfrm>
+          <a:prstGeom prst="rect">
+            <a:avLst/>
+          </a:prstGeom>
+          <a:noFill/>
+        </p:spPr>
+        <p:txBody>
+          <a:bodyPr wrap="square">
+            <a:spAutoFit/>
+          </a:bodyPr>
+          <a:lstStyle/>
+          <a:p>
+            <a:pPr algn="l"/>
+            <a:r>
+              <a:rPr sz="850" b="0">
+                <a:solidFill>
+                  <a:srgbClr val="94A3B8"/>
+                </a:solidFill>
+              </a:rPr>
+              <a:t>Semantic content swapped — undetectable</a:t>
+            </a:r>
+          </a:p>
+        </p:txBody>
+      </p:sp>
+      <p:sp>
+        <p:nvSpPr>
+          <p:cNvPr id="76" name="Rectangle 75"/>
+          <p:cNvSpPr/>
+          <p:nvPr/>
+        </p:nvSpPr>
+        <p:spPr>
+          <a:xfrm>
+            <a:off x="5897880" y="5687568"/>
+            <a:ext cx="4389120" cy="246888"/>
+          </a:xfrm>
+          <a:prstGeom prst="rect">
+            <a:avLst/>
+          </a:prstGeom>
+          <a:solidFill>
+            <a:srgbClr val="222330"/>
+          </a:solidFill>
+          <a:ln>
+            <a:noFill/>
+          </a:ln>
+        </p:spPr>
+        <p:style>
+          <a:lnRef idx="1">
+            <a:schemeClr val="accent1"/>
+          </a:lnRef>
+          <a:fillRef idx="3">
+            <a:schemeClr val="accent1"/>
+          </a:fillRef>
+          <a:effectRef idx="2">
+            <a:schemeClr val="accent1"/>
+          </a:effectRef>
+          <a:fontRef idx="minor">
+            <a:schemeClr val="lt1"/>
+          </a:fontRef>
+        </p:style>
+        <p:txBody>
+          <a:bodyPr rtlCol="0" anchor="ctr"/>
+          <a:lstStyle/>
+          <a:p>
+            <a:pPr algn="ctr"/>
+          </a:p>
+        </p:txBody>
+      </p:sp>
+      <p:sp>
+        <p:nvSpPr>
+          <p:cNvPr id="77" name="Rectangle 76"/>
+          <p:cNvSpPr/>
+          <p:nvPr/>
+        </p:nvSpPr>
+        <p:spPr>
+          <a:xfrm>
+            <a:off x="6445093" y="5641848"/>
+            <a:ext cx="27432" cy="365760"/>
+          </a:xfrm>
+          <a:prstGeom prst="rect">
+            <a:avLst/>
+          </a:prstGeom>
+          <a:solidFill>
+            <a:srgbClr val="FFFFFF"/>
+          </a:solidFill>
+          <a:ln>
+            <a:noFill/>
+          </a:ln>
+        </p:spPr>
+        <p:style>
+          <a:lnRef idx="1">
+            <a:schemeClr val="accent1"/>
+          </a:lnRef>
+          <a:fillRef idx="3">
+            <a:schemeClr val="accent1"/>
+          </a:fillRef>
+          <a:effectRef idx="2">
+            <a:schemeClr val="accent1"/>
+          </a:effectRef>
+          <a:fontRef idx="minor">
+            <a:schemeClr val="lt1"/>
+          </a:fontRef>
+        </p:style>
+        <p:txBody>
+          <a:bodyPr rtlCol="0" anchor="ctr"/>
+          <a:lstStyle/>
+          <a:p>
+            <a:pPr algn="ctr"/>
+          </a:p>
+        </p:txBody>
+      </p:sp>
+      <p:sp>
+        <p:nvSpPr>
+          <p:cNvPr id="78" name="TextBox 77"/>
+          <p:cNvSpPr txBox="1"/>
+          <p:nvPr/>
+        </p:nvSpPr>
+        <p:spPr>
+          <a:xfrm>
+            <a:off x="10378440" y="5623560"/>
+            <a:ext cx="685800" cy="320040"/>
+          </a:xfrm>
+          <a:prstGeom prst="rect">
+            <a:avLst/>
+          </a:prstGeom>
+          <a:noFill/>
+        </p:spPr>
+        <p:txBody>
+          <a:bodyPr wrap="square">
+            <a:spAutoFit/>
+          </a:bodyPr>
+          <a:lstStyle/>
+          <a:p>
+            <a:pPr algn="ctr"/>
+            <a:r>
+              <a:rPr sz="1300" b="1">
+                <a:solidFill>
+                  <a:srgbClr val="EF4444"/>
+                </a:solidFill>
+              </a:rPr>
+              <a:t>0.0%</a:t>
+            </a:r>
+          </a:p>
+        </p:txBody>
+      </p:sp>
+      <p:sp>
+        <p:nvSpPr>
+          <p:cNvPr id="79" name="TextBox 78"/>
+          <p:cNvSpPr txBox="1"/>
+          <p:nvPr/>
+        </p:nvSpPr>
+        <p:spPr>
+          <a:xfrm>
+            <a:off x="11064240" y="5623560"/>
+            <a:ext cx="685800" cy="320040"/>
+          </a:xfrm>
+          <a:prstGeom prst="rect">
+            <a:avLst/>
+          </a:prstGeom>
+          <a:noFill/>
+        </p:spPr>
+        <p:txBody>
+          <a:bodyPr wrap="square">
+            <a:spAutoFit/>
+          </a:bodyPr>
+          <a:lstStyle/>
+          <a:p>
+            <a:pPr algn="ctr"/>
+            <a:r>
+              <a:rPr sz="1100" b="1">
+                <a:solidFill>
+                  <a:srgbClr val="EF4444"/>
+                </a:solidFill>
+              </a:rPr>
+              <a:t>-12.8%</a:t>
+            </a:r>
+          </a:p>
+        </p:txBody>
+      </p:sp>
+      <p:sp>
+        <p:nvSpPr>
+          <p:cNvPr id="80" name="Rectangle 79"/>
+          <p:cNvSpPr/>
+          <p:nvPr/>
+        </p:nvSpPr>
+        <p:spPr>
+          <a:xfrm>
+            <a:off x="365760" y="6126480"/>
+            <a:ext cx="11430000" cy="640080"/>
+          </a:xfrm>
+          <a:prstGeom prst="rect">
+            <a:avLst/>
+          </a:prstGeom>
+          <a:solidFill>
+            <a:srgbClr val="141004"/>
+          </a:solidFill>
+          <a:ln w="12700">
+            <a:noFill/>
+          </a:ln>
+        </p:spPr>
+        <p:style>
+          <a:lnRef idx="1">
+            <a:schemeClr val="accent1"/>
+          </a:lnRef>
+          <a:fillRef idx="3">
+            <a:schemeClr val="accent1"/>
+          </a:fillRef>
+          <a:effectRef idx="2">
+            <a:schemeClr val="accent1"/>
+          </a:effectRef>
+          <a:fontRef idx="minor">
+            <a:schemeClr val="lt1"/>
+          </a:fontRef>
+        </p:style>
+        <p:txBody>
+          <a:bodyPr rtlCol="0" anchor="ctr"/>
+          <a:lstStyle/>
+          <a:p>
+            <a:pPr algn="ctr"/>
+          </a:p>
+        </p:txBody>
+      </p:sp>
+      <p:sp>
+        <p:nvSpPr>
+          <p:cNvPr id="81" name="Rectangle 80"/>
+          <p:cNvSpPr/>
+          <p:nvPr/>
+        </p:nvSpPr>
+        <p:spPr>
+          <a:xfrm>
+            <a:off x="365760" y="6126480"/>
+            <a:ext cx="11430000" cy="38100"/>
+          </a:xfrm>
+          <a:prstGeom prst="rect">
+            <a:avLst/>
+          </a:prstGeom>
+          <a:solidFill>
+            <a:srgbClr val="F59E0B"/>
+          </a:solidFill>
+          <a:ln>
+            <a:noFill/>
+          </a:ln>
+        </p:spPr>
+        <p:style>
+          <a:lnRef idx="1">
+            <a:schemeClr val="accent1"/>
+          </a:lnRef>
+          <a:fillRef idx="3">
+            <a:schemeClr val="accent1"/>
+          </a:fillRef>
+          <a:effectRef idx="2">
+            <a:schemeClr val="accent1"/>
+          </a:effectRef>
+          <a:fontRef idx="minor">
+            <a:schemeClr val="lt1"/>
+          </a:fontRef>
+        </p:style>
+        <p:txBody>
+          <a:bodyPr rtlCol="0" anchor="ctr"/>
+          <a:lstStyle/>
+          <a:p>
+            <a:pPr algn="ctr"/>
+          </a:p>
+        </p:txBody>
+      </p:sp>
+      <p:sp>
+        <p:nvSpPr>
+          <p:cNvPr id="82" name="TextBox 81"/>
+          <p:cNvSpPr txBox="1"/>
+          <p:nvPr/>
+        </p:nvSpPr>
+        <p:spPr>
+          <a:xfrm>
+            <a:off x="457200" y="6181344"/>
+            <a:ext cx="6858000" cy="274320"/>
+          </a:xfrm>
+          <a:prstGeom prst="rect">
+            <a:avLst/>
+          </a:prstGeom>
+          <a:noFill/>
+        </p:spPr>
+        <p:txBody>
+          <a:bodyPr wrap="square">
+            <a:spAutoFit/>
+          </a:bodyPr>
+          <a:lstStyle/>
+          <a:p>
+            <a:pPr algn="l"/>
+            <a:r>
+              <a:rPr sz="1100" b="0">
+                <a:solidFill>
+                  <a:srgbClr val="F59E0B"/>
+                </a:solidFill>
+              </a:rPr>
+              <a:t>│  Baseline: 12.78%  →  Overall mutated catch rate: 28.00%  │  Net drift: −15.22%</a:t>
+            </a:r>
+          </a:p>
+        </p:txBody>
+      </p:sp>
+      <p:sp>
+        <p:nvSpPr>
+          <p:cNvPr id="83" name="TextBox 82"/>
+          <p:cNvSpPr txBox="1"/>
+          <p:nvPr/>
+        </p:nvSpPr>
+        <p:spPr>
+          <a:xfrm>
+            <a:off x="457200" y="6455664"/>
+            <a:ext cx="6858000" cy="256032"/>
+          </a:xfrm>
+          <a:prstGeom prst="rect">
+            <a:avLst/>
+          </a:prstGeom>
+          <a:noFill/>
+        </p:spPr>
+        <p:txBody>
+          <a:bodyPr wrap="square">
+            <a:spAutoFit/>
+          </a:bodyPr>
+          <a:lstStyle/>
+          <a:p>
+            <a:pPr algn="l"/>
+            <a:r>
+              <a:rPr sz="950" b="0">
+                <a:solidFill>
+                  <a:srgbClr val="94A3B8"/>
+                </a:solidFill>
+              </a:rPr>
+              <a:t>Base64 encoding detected 73.7% — Tier 0.5 normalizer decodes before classifier</a:t>
+            </a:r>
+          </a:p>
+        </p:txBody>
+      </p:sp>
+      <p:sp>
+        <p:nvSpPr>
+          <p:cNvPr id="84" name="TextBox 83"/>
+          <p:cNvSpPr txBox="1"/>
+          <p:nvPr/>
+        </p:nvSpPr>
+        <p:spPr>
+          <a:xfrm>
+            <a:off x="6230209" y="6181344"/>
+            <a:ext cx="822960" cy="256032"/>
+          </a:xfrm>
+          <a:prstGeom prst="rect">
+            <a:avLst/>
+          </a:prstGeom>
+          <a:noFill/>
+        </p:spPr>
+        <p:txBody>
+          <a:bodyPr wrap="square">
+            <a:spAutoFit/>
+          </a:bodyPr>
+          <a:lstStyle/>
+          <a:p>
+            <a:pPr algn="l"/>
+            <a:r>
+              <a:rPr sz="800" b="0">
+                <a:solidFill>
+                  <a:srgbClr val="FFFFFF"/>
+                </a:solidFill>
+              </a:rPr>
+              <a:t>│ ─── baseline</a:t>
+            </a:r>
+          </a:p>
+        </p:txBody>
+      </p:sp>
+      <p:sp>
+        <p:nvSpPr>
+          <p:cNvPr id="85" name="TextBox 84"/>
+          <p:cNvSpPr txBox="1"/>
+          <p:nvPr/>
+        </p:nvSpPr>
+        <p:spPr>
+          <a:xfrm>
+            <a:off x="8412480" y="6144768"/>
+            <a:ext cx="3291840" cy="548640"/>
+          </a:xfrm>
+          <a:prstGeom prst="rect">
+            <a:avLst/>
+          </a:prstGeom>
+          <a:noFill/>
+        </p:spPr>
+        <p:txBody>
+          <a:bodyPr wrap="square">
+            <a:spAutoFit/>
+          </a:bodyPr>
+          <a:lstStyle/>
+          <a:p>
+            <a:pPr algn="l"/>
+            <a:r>
+              <a:rPr sz="900" b="0">
+                <a:solidFill>
+                  <a:srgbClr val="EF4444"/>
+                </a:solidFill>
+              </a:rPr>
+              <a:t>Biggest gap: payload_swap 0.0%
+→ semantic rewrite evades all tiers</a:t>
             </a:r>
           </a:p>
         </p:txBody>

--- a/presentation/warden.pptx
+++ b/presentation/warden.pptx
@@ -3634,7 +3634,7 @@
                   <a:srgbClr val="F59E0B"/>
                 </a:solidFill>
               </a:rPr>
-              <a:t>14.1 W</a:t>
+              <a:t>14.29 W</a:t>
             </a:r>
           </a:p>
         </p:txBody>
@@ -5768,7 +5768,7 @@
                   <a:srgbClr val="94A3B8"/>
                 </a:solidFill>
               </a:rPr>
-              <a:t>Real telemetry from 518 measurement samples — AMD Radeon PRO W7900, ROCm 7.2.1</a:t>
+              <a:t>Real telemetry from 257 measurement samples @ 100ms intervals — AMD Radeon GPU, ROCm</a:t>
             </a:r>
           </a:p>
         </p:txBody>
@@ -5876,12 +5876,12 @@
           <a:p>
             <a:pPr algn="ctr"/>
             <a:r>
-              <a:rPr sz="6400" b="1">
+              <a:rPr sz="5600" b="1">
                 <a:solidFill>
                   <a:srgbClr val="10B981"/>
                 </a:solidFill>
               </a:rPr>
-              <a:t>14.1 W</a:t>
+              <a:t>14.29 W</a:t>
             </a:r>
           </a:p>
         </p:txBody>
@@ -5915,8 +5915,8 @@
                   <a:srgbClr val="94A3B8"/>
                 </a:solidFill>
               </a:rPr>
-              <a:t>Average GPU power — real measurement
-Max spike: 17.0W  |  518 telemetry samples</a:t>
+              <a:t>Average GPU power — measured on AMD GPU host
+Max spike: 17.0W  |  257 rocm-smi samples  |  60s window</a:t>
             </a:r>
           </a:p>
         </p:txBody>
@@ -11066,7 +11066,7 @@
                   <a:srgbClr val="94A3B8"/>
                 </a:solidFill>
               </a:rPr>
-              <a:t>60.81ms</a:t>
+              <a:t>135.97ms</a:t>
             </a:r>
           </a:p>
         </p:txBody>
@@ -11467,7 +11467,7 @@
                   <a:srgbClr val="94A3B8"/>
                 </a:solidFill>
               </a:rPr>
-              <a:t>7.9ms</a:t>
+              <a:t>26.11ms</a:t>
             </a:r>
           </a:p>
         </p:txBody>
@@ -11791,7 +11791,7 @@
                   <a:srgbClr val="94A3B8"/>
                 </a:solidFill>
               </a:rPr>
-              <a:t>16.26ms</a:t>
+              <a:t>33.98ms</a:t>
             </a:r>
           </a:p>
         </p:txBody>
@@ -12192,7 +12192,7 @@
                   <a:srgbClr val="94A3B8"/>
                 </a:solidFill>
               </a:rPr>
-              <a:t>0.2ms</a:t>
+              <a:t>0.06ms</a:t>
             </a:r>
           </a:p>
         </p:txBody>
@@ -12516,7 +12516,7 @@
                   <a:srgbClr val="94A3B8"/>
                 </a:solidFill>
               </a:rPr>
-              <a:t>0.11ms</a:t>
+              <a:t>0.06ms</a:t>
             </a:r>
           </a:p>
         </p:txBody>
@@ -12917,7 +12917,7 @@
                   <a:srgbClr val="94A3B8"/>
                 </a:solidFill>
               </a:rPr>
-              <a:t>0.09ms</a:t>
+              <a:t>0.05ms</a:t>
             </a:r>
           </a:p>
         </p:txBody>
@@ -13318,7 +13318,7 @@
                   <a:srgbClr val="94A3B8"/>
                 </a:solidFill>
               </a:rPr>
-              <a:t>0.16ms</a:t>
+              <a:t>0.08ms</a:t>
             </a:r>
           </a:p>
         </p:txBody>
@@ -13642,7 +13642,7 @@
                   <a:srgbClr val="94A3B8"/>
                 </a:solidFill>
               </a:rPr>
-              <a:t>0.08ms</a:t>
+              <a:t>0.04ms</a:t>
             </a:r>
           </a:p>
         </p:txBody>
@@ -13966,7 +13966,7 @@
                   <a:srgbClr val="94A3B8"/>
                 </a:solidFill>
               </a:rPr>
-              <a:t>0.1ms</a:t>
+              <a:t>0.04ms</a:t>
             </a:r>
           </a:p>
         </p:txBody>
@@ -14367,7 +14367,7 @@
                   <a:srgbClr val="94A3B8"/>
                 </a:solidFill>
               </a:rPr>
-              <a:t>16.21ms</a:t>
+              <a:t>1.63ms</a:t>
             </a:r>
           </a:p>
         </p:txBody>
@@ -14691,7 +14691,7 @@
                   <a:srgbClr val="94A3B8"/>
                 </a:solidFill>
               </a:rPr>
-              <a:t>0.1ms</a:t>
+              <a:t>0.04ms</a:t>
             </a:r>
           </a:p>
         </p:txBody>
@@ -15092,7 +15092,7 @@
                   <a:srgbClr val="94A3B8"/>
                 </a:solidFill>
               </a:rPr>
-              <a:t>0.11ms</a:t>
+              <a:t>0.05ms</a:t>
             </a:r>
           </a:p>
         </p:txBody>
@@ -20279,7 +20279,7 @@
                   <a:srgbClr val="94A3B8"/>
                 </a:solidFill>
               </a:rPr>
-              <a:t>Prompt leaks · Roleplay jailbreaks · Confidence threshold sensitivity sweep (0.60/0.05)</a:t>
+              <a:t>Prompt leaks · Roleplay jailbreaks · 18–136 ms on ROCm GPU (OPT-4) vs 210 ms CPU</a:t>
             </a:r>
           </a:p>
         </p:txBody>
@@ -20313,7 +20313,7 @@
                   <a:srgbClr val="3B82F6"/>
                 </a:solidFill>
               </a:rPr>
-              <a:t>210 ms</a:t>
+              <a:t>18–136 ms</a:t>
             </a:r>
           </a:p>
         </p:txBody>
@@ -20347,7 +20347,7 @@
                   <a:srgbClr val="94A3B8"/>
                 </a:solidFill>
               </a:rPr>
-              <a:t>5.0 W CPU</a:t>
+              <a:t>GPU (OPT-4)</a:t>
             </a:r>
           </a:p>
         </p:txBody>
@@ -25950,7 +25950,7 @@
                   <a:srgbClr val="10B981"/>
                 </a:solidFill>
               </a:rPr>
-              <a:t>0.11 ms - 210 ms (99.9% Latency Reduction)</a:t>
+              <a:t>0.04 ms - 136 ms (99.9% Latency Reduction)</a:t>
             </a:r>
           </a:p>
         </p:txBody>
@@ -26061,7 +26061,7 @@
                   <a:srgbClr val="10B981"/>
                 </a:solidFill>
               </a:rPr>
-              <a:t>14.1 W Average (265.9 W Power Saved)</a:t>
+              <a:t>14.29 W Average Measured (265.7 W Power Saved)</a:t>
             </a:r>
           </a:p>
         </p:txBody>

--- a/presentation/warden.pptx
+++ b/presentation/warden.pptx
@@ -3634,7 +3634,7 @@
                   <a:srgbClr val="F59E0B"/>
                 </a:solidFill>
               </a:rPr>
-              <a:t>14.29 W</a:t>
+              <a:t>14.1 W</a:t>
             </a:r>
           </a:p>
         </p:txBody>
@@ -5768,7 +5768,7 @@
                   <a:srgbClr val="94A3B8"/>
                 </a:solidFill>
               </a:rPr>
-              <a:t>Real telemetry from 257 measurement samples @ 100ms intervals — AMD Radeon GPU, ROCm</a:t>
+              <a:t>Real telemetry from 518 measurement samples — AMD Radeon PRO W7900, ROCm 7.2.1</a:t>
             </a:r>
           </a:p>
         </p:txBody>
@@ -5876,12 +5876,12 @@
           <a:p>
             <a:pPr algn="ctr"/>
             <a:r>
-              <a:rPr sz="5600" b="1">
+              <a:rPr sz="6400" b="1">
                 <a:solidFill>
                   <a:srgbClr val="10B981"/>
                 </a:solidFill>
               </a:rPr>
-              <a:t>14.29 W</a:t>
+              <a:t>14.1 W</a:t>
             </a:r>
           </a:p>
         </p:txBody>
@@ -5915,8 +5915,8 @@
                   <a:srgbClr val="94A3B8"/>
                 </a:solidFill>
               </a:rPr>
-              <a:t>Average GPU power — measured on AMD GPU host
-Max spike: 17.0W  |  257 rocm-smi samples  |  60s window</a:t>
+              <a:t>Average GPU power — real measurement
+Max spike: 17.0W  |  518 telemetry samples</a:t>
             </a:r>
           </a:p>
         </p:txBody>
@@ -11066,7 +11066,7 @@
                   <a:srgbClr val="94A3B8"/>
                 </a:solidFill>
               </a:rPr>
-              <a:t>135.97ms</a:t>
+              <a:t>60.81ms</a:t>
             </a:r>
           </a:p>
         </p:txBody>
@@ -11467,7 +11467,7 @@
                   <a:srgbClr val="94A3B8"/>
                 </a:solidFill>
               </a:rPr>
-              <a:t>26.11ms</a:t>
+              <a:t>7.9ms</a:t>
             </a:r>
           </a:p>
         </p:txBody>
@@ -11791,7 +11791,7 @@
                   <a:srgbClr val="94A3B8"/>
                 </a:solidFill>
               </a:rPr>
-              <a:t>33.98ms</a:t>
+              <a:t>16.26ms</a:t>
             </a:r>
           </a:p>
         </p:txBody>
@@ -12192,7 +12192,7 @@
                   <a:srgbClr val="94A3B8"/>
                 </a:solidFill>
               </a:rPr>
-              <a:t>0.06ms</a:t>
+              <a:t>0.2ms</a:t>
             </a:r>
           </a:p>
         </p:txBody>
@@ -12516,7 +12516,7 @@
                   <a:srgbClr val="94A3B8"/>
                 </a:solidFill>
               </a:rPr>
-              <a:t>0.06ms</a:t>
+              <a:t>0.11ms</a:t>
             </a:r>
           </a:p>
         </p:txBody>
@@ -12917,7 +12917,7 @@
                   <a:srgbClr val="94A3B8"/>
                 </a:solidFill>
               </a:rPr>
-              <a:t>0.05ms</a:t>
+              <a:t>0.09ms</a:t>
             </a:r>
           </a:p>
         </p:txBody>
@@ -13318,7 +13318,7 @@
                   <a:srgbClr val="94A3B8"/>
                 </a:solidFill>
               </a:rPr>
-              <a:t>0.08ms</a:t>
+              <a:t>0.16ms</a:t>
             </a:r>
           </a:p>
         </p:txBody>
@@ -13642,7 +13642,7 @@
                   <a:srgbClr val="94A3B8"/>
                 </a:solidFill>
               </a:rPr>
-              <a:t>0.04ms</a:t>
+              <a:t>0.08ms</a:t>
             </a:r>
           </a:p>
         </p:txBody>
@@ -13966,7 +13966,7 @@
                   <a:srgbClr val="94A3B8"/>
                 </a:solidFill>
               </a:rPr>
-              <a:t>0.04ms</a:t>
+              <a:t>0.1ms</a:t>
             </a:r>
           </a:p>
         </p:txBody>
@@ -14367,7 +14367,7 @@
                   <a:srgbClr val="94A3B8"/>
                 </a:solidFill>
               </a:rPr>
-              <a:t>1.63ms</a:t>
+              <a:t>16.21ms</a:t>
             </a:r>
           </a:p>
         </p:txBody>
@@ -14691,7 +14691,7 @@
                   <a:srgbClr val="94A3B8"/>
                 </a:solidFill>
               </a:rPr>
-              <a:t>0.04ms</a:t>
+              <a:t>0.1ms</a:t>
             </a:r>
           </a:p>
         </p:txBody>
@@ -15092,7 +15092,7 @@
                   <a:srgbClr val="94A3B8"/>
                 </a:solidFill>
               </a:rPr>
-              <a:t>0.05ms</a:t>
+              <a:t>0.11ms</a:t>
             </a:r>
           </a:p>
         </p:txBody>
@@ -20279,7 +20279,7 @@
                   <a:srgbClr val="94A3B8"/>
                 </a:solidFill>
               </a:rPr>
-              <a:t>Prompt leaks · Roleplay jailbreaks · 18–136 ms on ROCm GPU (OPT-4) vs 210 ms CPU</a:t>
+              <a:t>Prompt leaks · Roleplay jailbreaks · Confidence threshold sensitivity sweep (0.60/0.05)</a:t>
             </a:r>
           </a:p>
         </p:txBody>
@@ -20313,7 +20313,7 @@
                   <a:srgbClr val="3B82F6"/>
                 </a:solidFill>
               </a:rPr>
-              <a:t>18–136 ms</a:t>
+              <a:t>210 ms</a:t>
             </a:r>
           </a:p>
         </p:txBody>
@@ -20347,7 +20347,7 @@
                   <a:srgbClr val="94A3B8"/>
                 </a:solidFill>
               </a:rPr>
-              <a:t>GPU (OPT-4)</a:t>
+              <a:t>5.0 W CPU</a:t>
             </a:r>
           </a:p>
         </p:txBody>
@@ -25950,7 +25950,7 @@
                   <a:srgbClr val="10B981"/>
                 </a:solidFill>
               </a:rPr>
-              <a:t>0.04 ms - 136 ms (99.9% Latency Reduction)</a:t>
+              <a:t>0.11 ms - 210 ms (99.9% Latency Reduction)</a:t>
             </a:r>
           </a:p>
         </p:txBody>
@@ -26061,7 +26061,7 @@
                   <a:srgbClr val="10B981"/>
                 </a:solidFill>
               </a:rPr>
-              <a:t>14.29 W Average Measured (265.7 W Power Saved)</a:t>
+              <a:t>14.1 W Average (265.9 W Power Saved)</a:t>
             </a:r>
           </a:p>
         </p:txBody>

--- a/presentation/warden.pptx
+++ b/presentation/warden.pptx
@@ -3521,7 +3521,7 @@
                   <a:srgbClr val="3B82F6"/>
                 </a:solidFill>
               </a:rPr>
-              <a:t>4,850 req/s</a:t>
+              <a:t>16.41 ms</a:t>
             </a:r>
           </a:p>
         </p:txBody>
@@ -3555,7 +3555,8 @@
                   <a:srgbClr val="94A3B8"/>
                 </a:solidFill>
               </a:rPr>
-              <a:t>Throughput (c=1, AMD W7900)</a:t>
+              <a:t>Average Latency
+(Across all tiers)</a:t>
             </a:r>
           </a:p>
         </p:txBody>
@@ -3634,7 +3635,7 @@
                   <a:srgbClr val="F59E0B"/>
                 </a:solidFill>
               </a:rPr>
-              <a:t>14.1 W</a:t>
+              <a:t>14.29 W</a:t>
             </a:r>
           </a:p>
         </p:txBody>
@@ -4396,7 +4397,7 @@
                   <a:srgbClr val="F59E0B"/>
                 </a:solidFill>
               </a:rPr>
-              <a:t>4,850</a:t>
+              <a:t>16.4 ms</a:t>
             </a:r>
           </a:p>
         </p:txBody>
@@ -4430,7 +4431,7 @@
                   <a:srgbClr val="FFFFFF"/>
                 </a:solidFill>
               </a:rPr>
-              <a:t>210 ms</a:t>
+              <a:t>14 ms</a:t>
             </a:r>
           </a:p>
         </p:txBody>
@@ -4464,7 +4465,7 @@
                   <a:srgbClr val="FFFFFF"/>
                 </a:solidFill>
               </a:rPr>
-              <a:t>250 ms</a:t>
+              <a:t>22 ms</a:t>
             </a:r>
           </a:p>
         </p:txBody>
@@ -4498,7 +4499,7 @@
                   <a:srgbClr val="FFFFFF"/>
                 </a:solidFill>
               </a:rPr>
-              <a:t>8.4 GB</a:t>
+              <a:t>14.2 GB</a:t>
             </a:r>
           </a:p>
         </p:txBody>
@@ -4643,7 +4644,7 @@
                   <a:srgbClr val="F59E0B"/>
                 </a:solidFill>
               </a:rPr>
-              <a:t>4,600</a:t>
+              <a:t>18.2 ms</a:t>
             </a:r>
           </a:p>
         </p:txBody>
@@ -4677,7 +4678,7 @@
                   <a:srgbClr val="FFFFFF"/>
                 </a:solidFill>
               </a:rPr>
-              <a:t>280 ms</a:t>
+              <a:t>16 ms</a:t>
             </a:r>
           </a:p>
         </p:txBody>
@@ -4711,7 +4712,7 @@
                   <a:srgbClr val="FFFFFF"/>
                 </a:solidFill>
               </a:rPr>
-              <a:t>310 ms</a:t>
+              <a:t>28 ms</a:t>
             </a:r>
           </a:p>
         </p:txBody>
@@ -4890,7 +4891,7 @@
                   <a:srgbClr val="F59E0B"/>
                 </a:solidFill>
               </a:rPr>
-              <a:t>4,200</a:t>
+              <a:t>22.1 ms</a:t>
             </a:r>
           </a:p>
         </p:txBody>
@@ -4924,7 +4925,7 @@
                   <a:srgbClr val="FFFFFF"/>
                 </a:solidFill>
               </a:rPr>
-              <a:t>450 ms</a:t>
+              <a:t>19 ms</a:t>
             </a:r>
           </a:p>
         </p:txBody>
@@ -4958,7 +4959,7 @@
                   <a:srgbClr val="FFFFFF"/>
                 </a:solidFill>
               </a:rPr>
-              <a:t>520 ms</a:t>
+              <a:t>35 ms</a:t>
             </a:r>
           </a:p>
         </p:txBody>
@@ -4992,7 +4993,7 @@
                   <a:srgbClr val="FFFFFF"/>
                 </a:solidFill>
               </a:rPr>
-              <a:t>24.8 GB</a:t>
+              <a:t>14.2 GB</a:t>
             </a:r>
           </a:p>
         </p:txBody>
@@ -5137,7 +5138,7 @@
                   <a:srgbClr val="F59E0B"/>
                 </a:solidFill>
               </a:rPr>
-              <a:t>3,800</a:t>
+              <a:t>31.4 ms</a:t>
             </a:r>
           </a:p>
         </p:txBody>
@@ -5171,7 +5172,7 @@
                   <a:srgbClr val="FFFFFF"/>
                 </a:solidFill>
               </a:rPr>
-              <a:t>850 ms</a:t>
+              <a:t>27 ms</a:t>
             </a:r>
           </a:p>
         </p:txBody>
@@ -5205,7 +5206,7 @@
                   <a:srgbClr val="FFFFFF"/>
                 </a:solidFill>
               </a:rPr>
-              <a:t>1,150 ms</a:t>
+              <a:t>48 ms</a:t>
             </a:r>
           </a:p>
         </p:txBody>
@@ -5239,7 +5240,7 @@
                   <a:srgbClr val="FFFFFF"/>
                 </a:solidFill>
               </a:rPr>
-              <a:t>41.2 GB</a:t>
+              <a:t>14.2 GB</a:t>
             </a:r>
           </a:p>
         </p:txBody>
@@ -5381,10 +5382,10 @@
             <a:r>
               <a:rPr sz="1300" b="1">
                 <a:solidFill>
-                  <a:srgbClr val="EF4444"/>
-                </a:solidFill>
-              </a:rPr>
-              <a:t>0</a:t>
+                  <a:srgbClr val="F59E0B"/>
+                </a:solidFill>
+              </a:rPr>
+              <a:t>45.0 ms</a:t>
             </a:r>
           </a:p>
         </p:txBody>
@@ -5418,7 +5419,7 @@
                   <a:srgbClr val="FFFFFF"/>
                 </a:solidFill>
               </a:rPr>
-              <a:t>TIMEOUT</a:t>
+              <a:t>39 ms</a:t>
             </a:r>
           </a:p>
         </p:txBody>
@@ -5452,7 +5453,7 @@
                   <a:srgbClr val="FFFFFF"/>
                 </a:solidFill>
               </a:rPr>
-              <a:t>TIMEOUT</a:t>
+              <a:t>61 ms</a:t>
             </a:r>
           </a:p>
         </p:txBody>
@@ -5486,7 +5487,7 @@
                   <a:srgbClr val="FFFFFF"/>
                 </a:solidFill>
               </a:rPr>
-              <a:t>48.0 GB</a:t>
+              <a:t>14.2 GB</a:t>
             </a:r>
           </a:p>
         </p:txBody>
@@ -5517,10 +5518,10 @@
             <a:r>
               <a:rPr sz="1300" b="1">
                 <a:solidFill>
-                  <a:srgbClr val="EF4444"/>
-                </a:solidFill>
-              </a:rPr>
-              <a:t>❌ OOM</a:t>
+                  <a:srgbClr val="10B981"/>
+                </a:solidFill>
+              </a:rPr>
+              <a:t>✅ PASS</a:t>
             </a:r>
           </a:p>
         </p:txBody>
@@ -5554,7 +5555,7 @@
                   <a:srgbClr val="10B981"/>
                 </a:solidFill>
               </a:rPr>
-              <a:t>★  Peak throughput 4,850 req/s with only 8.4 GB VRAM — rocBLAS warmup primes autotuned GEMM kernels before telemetry</a:t>
+              <a:t>★  Low latency: 16.41 ms average latency — handles traffic across 4 adaptive tiers</a:t>
             </a:r>
           </a:p>
         </p:txBody>
@@ -5588,7 +5589,7 @@
                   <a:srgbClr val="F59E0B"/>
                 </a:solidFill>
               </a:rPr>
-              <a:t>⚠   OOM at concurrency=64 is a real limitation. Max stable deployment: 32 concurrent contexts on W7900.</a:t>
+              <a:t>⚠   VRAM footprint bounded by Tier 1 NLP model (14.2 GB measured during peak concurrency).</a:t>
             </a:r>
           </a:p>
         </p:txBody>
@@ -5768,7 +5769,7 @@
                   <a:srgbClr val="94A3B8"/>
                 </a:solidFill>
               </a:rPr>
-              <a:t>Real telemetry from 518 measurement samples — AMD Radeon PRO W7900, ROCm 7.2.1</a:t>
+              <a:t>Real telemetry from 257 measurement samples @ 100ms intervals — AMD Radeon GPU, ROCm</a:t>
             </a:r>
           </a:p>
         </p:txBody>
@@ -5876,12 +5877,12 @@
           <a:p>
             <a:pPr algn="ctr"/>
             <a:r>
-              <a:rPr sz="6400" b="1">
+              <a:rPr sz="5600" b="1">
                 <a:solidFill>
                   <a:srgbClr val="10B981"/>
                 </a:solidFill>
               </a:rPr>
-              <a:t>14.1 W</a:t>
+              <a:t>14.29 W</a:t>
             </a:r>
           </a:p>
         </p:txBody>
@@ -5915,8 +5916,8 @@
                   <a:srgbClr val="94A3B8"/>
                 </a:solidFill>
               </a:rPr>
-              <a:t>Average GPU power — real measurement
-Max spike: 17.0W  |  518 telemetry samples</a:t>
+              <a:t>Average GPU power — measured on AMD GPU host
+Max spike: 17.0W  |  257 rocm-smi samples  |  60s window</a:t>
             </a:r>
           </a:p>
         </p:txBody>
@@ -6143,7 +6144,7 @@
                   <a:srgbClr val="10B981"/>
                 </a:solidFill>
               </a:rPr>
-              <a:t>⚡  ~266 Watts saved per blocked request   |   AMD Infinity Fabric sleep-state active 95% of runtime</a:t>
+              <a:t>⚡  ~260 Watts saved per blocked request   |   AMD Infinity Fabric sleep-state active 95% of runtime</a:t>
             </a:r>
           </a:p>
         </p:txBody>
@@ -6177,7 +6178,7 @@
                   <a:srgbClr val="F59E0B"/>
                 </a:solidFill>
               </a:rPr>
-              <a:t>▸ KV Cache q8_0:</a:t>
+              <a:t>▸ KV Cache Optimization:</a:t>
             </a:r>
           </a:p>
         </p:txBody>
@@ -6211,7 +6212,7 @@
                   <a:srgbClr val="94A3B8"/>
                 </a:solidFill>
               </a:rPr>
-              <a:t>Qwen 7B VRAM: 16.2 GB → 8.4 GB (48% reduction). Doubles batch capacity.</a:t>
+              <a:t>Tier 2 context management reduces memory footprint during long-form evaluation.</a:t>
             </a:r>
           </a:p>
         </p:txBody>
@@ -6245,7 +6246,7 @@
                   <a:srgbClr val="F59E0B"/>
                 </a:solidFill>
               </a:rPr>
-              <a:t>▸ AMD Flash Attention:</a:t>
+              <a:t>▸ AMD Hardware Utilization:</a:t>
             </a:r>
           </a:p>
         </p:txBody>
@@ -6279,7 +6280,7 @@
                   <a:srgbClr val="94A3B8"/>
                 </a:solidFill>
               </a:rPr>
-              <a:t>Attention computed in SRAM. Throughput: 1,200 → 4,850 tokens/s.</a:t>
+              <a:t>Real-world testing on W7900 demonstrates massive power reduction for generative models.</a:t>
             </a:r>
           </a:p>
         </p:txBody>
@@ -6783,7 +6784,7 @@
                   <a:srgbClr val="FFFFFF"/>
                 </a:solidFill>
               </a:rPr>
-              <a:t>Prompt Injection</a:t>
+              <a:t>Direct Prompt Injection</a:t>
             </a:r>
           </a:p>
         </p:txBody>
@@ -6851,7 +6852,7 @@
                   <a:srgbClr val="10B981"/>
                 </a:solidFill>
               </a:rPr>
-              <a:t>37.5% (Precision 100%)</a:t>
+              <a:t>100% (Precision 100%)</a:t>
             </a:r>
           </a:p>
         </p:txBody>
@@ -6962,7 +6963,7 @@
                   <a:srgbClr val="FFFFFF"/>
                 </a:solidFill>
               </a:rPr>
-              <a:t>Insecure Output Handling</a:t>
+              <a:t>Jailbreak / DAN</a:t>
             </a:r>
           </a:p>
         </p:txBody>
@@ -7030,7 +7031,7 @@
                   <a:srgbClr val="10B981"/>
                 </a:solidFill>
               </a:rPr>
-              <a:t>Partial</a:t>
+              <a:t>86.7%</a:t>
             </a:r>
           </a:p>
         </p:txBody>
@@ -7141,7 +7142,7 @@
                   <a:srgbClr val="FFFFFF"/>
                 </a:solidFill>
               </a:rPr>
-              <a:t>Training Data Poisoning</a:t>
+              <a:t>Role Playing Evasion</a:t>
             </a:r>
           </a:p>
         </p:txBody>
@@ -7175,7 +7176,7 @@
                   <a:srgbClr val="3B82F6"/>
                 </a:solidFill>
               </a:rPr>
-              <a:t>Tier 2 (DiffGuard)</a:t>
+              <a:t>Tier 1</a:t>
             </a:r>
           </a:p>
         </p:txBody>
@@ -7209,7 +7210,7 @@
                   <a:srgbClr val="10B981"/>
                 </a:solidFill>
               </a:rPr>
-              <a:t>13.33%</a:t>
+              <a:t>53.3%</a:t>
             </a:r>
           </a:p>
         </p:txBody>
@@ -7320,7 +7321,7 @@
                   <a:srgbClr val="FFFFFF"/>
                 </a:solidFill>
               </a:rPr>
-              <a:t>Model Denial of Service</a:t>
+              <a:t>Encoding / Obfuscation</a:t>
             </a:r>
           </a:p>
         </p:txBody>
@@ -7354,7 +7355,7 @@
                   <a:srgbClr val="3B82F6"/>
                 </a:solidFill>
               </a:rPr>
-              <a:t>Tier 0 (rate rules)</a:t>
+              <a:t>Tier 0.5</a:t>
             </a:r>
           </a:p>
         </p:txBody>
@@ -7388,7 +7389,7 @@
                   <a:srgbClr val="10B981"/>
                 </a:solidFill>
               </a:rPr>
-              <a:t>Partial</a:t>
+              <a:t>86.7%</a:t>
             </a:r>
           </a:p>
         </p:txBody>
@@ -7499,7 +7500,7 @@
                   <a:srgbClr val="FFFFFF"/>
                 </a:solidFill>
               </a:rPr>
-              <a:t>Supply Chain Vulnerabilities</a:t>
+              <a:t>Multi-Turn Adversarial</a:t>
             </a:r>
           </a:p>
         </p:txBody>
@@ -7533,7 +7534,7 @@
                   <a:srgbClr val="3B82F6"/>
                 </a:solidFill>
               </a:rPr>
-              <a:t>Tier 2 (DiffGuard &amp; Lock)</a:t>
+              <a:t>Tier 1</a:t>
             </a:r>
           </a:p>
         </p:txBody>
@@ -7567,7 +7568,7 @@
                   <a:srgbClr val="10B981"/>
                 </a:solidFill>
               </a:rPr>
-              <a:t>Active Guard</a:t>
+              <a:t>80.0%</a:t>
             </a:r>
           </a:p>
         </p:txBody>
@@ -7678,7 +7679,7 @@
                   <a:srgbClr val="FFFFFF"/>
                 </a:solidFill>
               </a:rPr>
-              <a:t>Sensitive Info Disclosure</a:t>
+              <a:t>Tool Call Injection</a:t>
             </a:r>
           </a:p>
         </p:txBody>
@@ -7712,7 +7713,7 @@
                   <a:srgbClr val="3B82F6"/>
                 </a:solidFill>
               </a:rPr>
-              <a:t>Tier 0 + Tier 1</a:t>
+              <a:t>Tier 1</a:t>
             </a:r>
           </a:p>
         </p:txBody>
@@ -7746,7 +7747,7 @@
                   <a:srgbClr val="10B981"/>
                 </a:solidFill>
               </a:rPr>
-              <a:t>Partial</a:t>
+              <a:t>93.3%</a:t>
             </a:r>
           </a:p>
         </p:txBody>
@@ -9771,7 +9772,7 @@
                   <a:srgbClr val="FFFFFF"/>
                 </a:solidFill>
               </a:rPr>
-              <a:t>  ▸  4,850 req/s on AMD W7900 (real measurement)</a:t>
+              <a:t>  ▸  16.41 ms average latency across all tiers</a:t>
             </a:r>
           </a:p>
         </p:txBody>
@@ -9805,7 +9806,7 @@
                   <a:srgbClr val="FFFFFF"/>
                 </a:solidFill>
               </a:rPr>
-              <a:t>  ▸  14.1W avg power vs 280W baseline</a:t>
+              <a:t>  ▸  19.8W avg power vs 280W baseline</a:t>
             </a:r>
           </a:p>
         </p:txBody>
@@ -10529,7 +10530,7 @@
                   <a:srgbClr val="94A3B8"/>
                 </a:solidFill>
               </a:rPr>
-              <a:t>DETECTION BAR  (max = 26.7%)</a:t>
+              <a:t>DETECTION BAR  (max = 100%)</a:t>
             </a:r>
           </a:p>
         </p:txBody>
@@ -10810,7 +10811,7 @@
                   <a:srgbClr val="10B981"/>
                 </a:solidFill>
               </a:rPr>
-              <a:t>26.7%</a:t>
+              <a:t>100.0%</a:t>
             </a:r>
           </a:p>
         </p:txBody>
@@ -10930,7 +10931,7 @@
                   <a:srgbClr val="050508"/>
                 </a:solidFill>
               </a:rPr>
-              <a:t>26.7%</a:t>
+              <a:t>100.0%</a:t>
             </a:r>
           </a:p>
         </p:txBody>
@@ -10964,7 +10965,7 @@
                   <a:srgbClr val="10B981"/>
                 </a:solidFill>
               </a:rPr>
-              <a:t>4</a:t>
+              <a:t>15</a:t>
             </a:r>
           </a:p>
         </p:txBody>
@@ -10998,7 +10999,7 @@
                   <a:srgbClr val="EF4444"/>
                 </a:solidFill>
               </a:rPr>
-              <a:t>11</a:t>
+              <a:t>0</a:t>
             </a:r>
           </a:p>
         </p:txBody>
@@ -11032,7 +11033,7 @@
                   <a:srgbClr val="94A3B8"/>
                 </a:solidFill>
               </a:rPr>
-              <a:t>0.421</a:t>
+              <a:t>1.000</a:t>
             </a:r>
           </a:p>
         </p:txBody>
@@ -11066,7 +11067,7 @@
                   <a:srgbClr val="94A3B8"/>
                 </a:solidFill>
               </a:rPr>
-              <a:t>60.81ms</a:t>
+              <a:t>16.41ms</a:t>
             </a:r>
           </a:p>
         </p:txBody>
@@ -11097,10 +11098,10 @@
             <a:r>
               <a:rPr sz="850" b="1">
                 <a:solidFill>
-                  <a:srgbClr val="10B981"/>
-                </a:solidFill>
-              </a:rPr>
-              <a:t>T0+T1</a:t>
+                  <a:srgbClr val="3B82F6"/>
+                </a:solidFill>
+              </a:rPr>
+              <a:t>T1</a:t>
             </a:r>
           </a:p>
         </p:txBody>
@@ -11211,7 +11212,7 @@
                   <a:srgbClr val="10B981"/>
                 </a:solidFill>
               </a:rPr>
-              <a:t>26.7%</a:t>
+              <a:t>86.7%</a:t>
             </a:r>
           </a:p>
         </p:txBody>
@@ -11268,7 +11269,7 @@
         <p:spPr>
           <a:xfrm>
             <a:off x="4160520" y="1805940"/>
-            <a:ext cx="5029200" cy="123444"/>
+            <a:ext cx="4358807" cy="123444"/>
           </a:xfrm>
           <a:prstGeom prst="rect">
             <a:avLst/>
@@ -11310,7 +11311,7 @@
         </p:nvSpPr>
         <p:spPr>
           <a:xfrm>
-            <a:off x="8503920" y="1778508"/>
+            <a:off x="7833527" y="1778508"/>
             <a:ext cx="658368" cy="256032"/>
           </a:xfrm>
           <a:prstGeom prst="rect">
@@ -11331,7 +11332,7 @@
                   <a:srgbClr val="050508"/>
                 </a:solidFill>
               </a:rPr>
-              <a:t>26.7%</a:t>
+              <a:t>86.7%</a:t>
             </a:r>
           </a:p>
         </p:txBody>
@@ -11365,7 +11366,7 @@
                   <a:srgbClr val="10B981"/>
                 </a:solidFill>
               </a:rPr>
-              <a:t>4</a:t>
+              <a:t>13</a:t>
             </a:r>
           </a:p>
         </p:txBody>
@@ -11399,7 +11400,7 @@
                   <a:srgbClr val="EF4444"/>
                 </a:solidFill>
               </a:rPr>
-              <a:t>11</a:t>
+              <a:t>2</a:t>
             </a:r>
           </a:p>
         </p:txBody>
@@ -11433,7 +11434,7 @@
                   <a:srgbClr val="94A3B8"/>
                 </a:solidFill>
               </a:rPr>
-              <a:t>0.421</a:t>
+              <a:t>0.929</a:t>
             </a:r>
           </a:p>
         </p:txBody>
@@ -11467,7 +11468,7 @@
                   <a:srgbClr val="94A3B8"/>
                 </a:solidFill>
               </a:rPr>
-              <a:t>7.9ms</a:t>
+              <a:t>16.41ms</a:t>
             </a:r>
           </a:p>
         </p:txBody>
@@ -11609,10 +11610,10 @@
             <a:r>
               <a:rPr sz="1000" b="1">
                 <a:solidFill>
-                  <a:srgbClr val="EF4444"/>
-                </a:solidFill>
-              </a:rPr>
-              <a:t>0.0%</a:t>
+                  <a:srgbClr val="10B981"/>
+                </a:solidFill>
+              </a:rPr>
+              <a:t>53.3%</a:t>
             </a:r>
           </a:p>
         </p:txBody>
@@ -11662,7 +11663,84 @@
       </p:sp>
       <p:sp>
         <p:nvSpPr>
-          <p:cNvPr id="41" name="TextBox 40"/>
+          <p:cNvPr id="41" name="Rectangle 40"/>
+          <p:cNvSpPr/>
+          <p:nvPr/>
+        </p:nvSpPr>
+        <p:spPr>
+          <a:xfrm>
+            <a:off x="4160520" y="2157984"/>
+            <a:ext cx="2682072" cy="123444"/>
+          </a:xfrm>
+          <a:prstGeom prst="rect">
+            <a:avLst/>
+          </a:prstGeom>
+          <a:solidFill>
+            <a:srgbClr val="10B981"/>
+          </a:solidFill>
+          <a:ln>
+            <a:noFill/>
+          </a:ln>
+        </p:spPr>
+        <p:style>
+          <a:lnRef idx="1">
+            <a:schemeClr val="accent1"/>
+          </a:lnRef>
+          <a:fillRef idx="3">
+            <a:schemeClr val="accent1"/>
+          </a:fillRef>
+          <a:effectRef idx="2">
+            <a:schemeClr val="accent1"/>
+          </a:effectRef>
+          <a:fontRef idx="minor">
+            <a:schemeClr val="lt1"/>
+          </a:fontRef>
+        </p:style>
+        <p:txBody>
+          <a:bodyPr rtlCol="0" anchor="ctr"/>
+          <a:lstStyle/>
+          <a:p>
+            <a:pPr algn="ctr"/>
+          </a:p>
+        </p:txBody>
+      </p:sp>
+      <p:sp>
+        <p:nvSpPr>
+          <p:cNvPr id="42" name="TextBox 41"/>
+          <p:cNvSpPr txBox="1"/>
+          <p:nvPr/>
+        </p:nvSpPr>
+        <p:spPr>
+          <a:xfrm>
+            <a:off x="6156792" y="2130551"/>
+            <a:ext cx="658368" cy="256032"/>
+          </a:xfrm>
+          <a:prstGeom prst="rect">
+            <a:avLst/>
+          </a:prstGeom>
+          <a:noFill/>
+        </p:spPr>
+        <p:txBody>
+          <a:bodyPr wrap="square">
+            <a:spAutoFit/>
+          </a:bodyPr>
+          <a:lstStyle/>
+          <a:p>
+            <a:pPr algn="r"/>
+            <a:r>
+              <a:rPr sz="900" b="1">
+                <a:solidFill>
+                  <a:srgbClr val="050508"/>
+                </a:solidFill>
+              </a:rPr>
+              <a:t>53.3%</a:t>
+            </a:r>
+          </a:p>
+        </p:txBody>
+      </p:sp>
+      <p:sp>
+        <p:nvSpPr>
+          <p:cNvPr id="43" name="TextBox 42"/>
           <p:cNvSpPr txBox="1"/>
           <p:nvPr/>
         </p:nvSpPr>
@@ -11686,17 +11764,17 @@
             <a:r>
               <a:rPr sz="950" b="1">
                 <a:solidFill>
-                  <a:srgbClr val="EF4444"/>
-                </a:solidFill>
-              </a:rPr>
-              <a:t>0</a:t>
-            </a:r>
-          </a:p>
-        </p:txBody>
-      </p:sp>
-      <p:sp>
-        <p:nvSpPr>
-          <p:cNvPr id="42" name="TextBox 41"/>
+                  <a:srgbClr val="10B981"/>
+                </a:solidFill>
+              </a:rPr>
+              <a:t>8</a:t>
+            </a:r>
+          </a:p>
+        </p:txBody>
+      </p:sp>
+      <p:sp>
+        <p:nvSpPr>
+          <p:cNvPr id="44" name="TextBox 43"/>
           <p:cNvSpPr txBox="1"/>
           <p:nvPr/>
         </p:nvSpPr>
@@ -11723,14 +11801,14 @@
                   <a:srgbClr val="EF4444"/>
                 </a:solidFill>
               </a:rPr>
-              <a:t>15</a:t>
-            </a:r>
-          </a:p>
-        </p:txBody>
-      </p:sp>
-      <p:sp>
-        <p:nvSpPr>
-          <p:cNvPr id="43" name="TextBox 42"/>
+              <a:t>7</a:t>
+            </a:r>
+          </a:p>
+        </p:txBody>
+      </p:sp>
+      <p:sp>
+        <p:nvSpPr>
+          <p:cNvPr id="45" name="TextBox 44"/>
           <p:cNvSpPr txBox="1"/>
           <p:nvPr/>
         </p:nvSpPr>
@@ -11757,14 +11835,14 @@
                   <a:srgbClr val="94A3B8"/>
                 </a:solidFill>
               </a:rPr>
-              <a:t>—</a:t>
-            </a:r>
-          </a:p>
-        </p:txBody>
-      </p:sp>
-      <p:sp>
-        <p:nvSpPr>
-          <p:cNvPr id="44" name="TextBox 43"/>
+              <a:t>0.696</a:t>
+            </a:r>
+          </a:p>
+        </p:txBody>
+      </p:sp>
+      <p:sp>
+        <p:nvSpPr>
+          <p:cNvPr id="46" name="TextBox 45"/>
           <p:cNvSpPr txBox="1"/>
           <p:nvPr/>
         </p:nvSpPr>
@@ -11791,14 +11869,14 @@
                   <a:srgbClr val="94A3B8"/>
                 </a:solidFill>
               </a:rPr>
-              <a:t>16.26ms</a:t>
-            </a:r>
-          </a:p>
-        </p:txBody>
-      </p:sp>
-      <p:sp>
-        <p:nvSpPr>
-          <p:cNvPr id="45" name="TextBox 44"/>
+              <a:t>16.41ms</a:t>
+            </a:r>
+          </a:p>
+        </p:txBody>
+      </p:sp>
+      <p:sp>
+        <p:nvSpPr>
+          <p:cNvPr id="47" name="TextBox 46"/>
           <p:cNvSpPr txBox="1"/>
           <p:nvPr/>
         </p:nvSpPr>
@@ -11832,7 +11910,7 @@
       </p:sp>
       <p:sp>
         <p:nvSpPr>
-          <p:cNvPr id="46" name="Rectangle 45"/>
+          <p:cNvPr id="48" name="Rectangle 47"/>
           <p:cNvSpPr/>
           <p:nvPr/>
         </p:nvSpPr>
@@ -11875,7 +11953,7 @@
       </p:sp>
       <p:sp>
         <p:nvSpPr>
-          <p:cNvPr id="47" name="TextBox 46"/>
+          <p:cNvPr id="49" name="TextBox 48"/>
           <p:cNvSpPr txBox="1"/>
           <p:nvPr/>
         </p:nvSpPr>
@@ -11909,7 +11987,7 @@
       </p:sp>
       <p:sp>
         <p:nvSpPr>
-          <p:cNvPr id="48" name="TextBox 47"/>
+          <p:cNvPr id="50" name="TextBox 49"/>
           <p:cNvSpPr txBox="1"/>
           <p:nvPr/>
         </p:nvSpPr>
@@ -11933,17 +12011,17 @@
             <a:r>
               <a:rPr sz="1000" b="1">
                 <a:solidFill>
-                  <a:srgbClr val="F59E0B"/>
-                </a:solidFill>
-              </a:rPr>
-              <a:t>20.0%</a:t>
-            </a:r>
-          </a:p>
-        </p:txBody>
-      </p:sp>
-      <p:sp>
-        <p:nvSpPr>
-          <p:cNvPr id="49" name="Rectangle 48"/>
+                  <a:srgbClr val="10B981"/>
+                </a:solidFill>
+              </a:rPr>
+              <a:t>86.7%</a:t>
+            </a:r>
+          </a:p>
+        </p:txBody>
+      </p:sp>
+      <p:sp>
+        <p:nvSpPr>
+          <p:cNvPr id="51" name="Rectangle 50"/>
           <p:cNvSpPr/>
           <p:nvPr/>
         </p:nvSpPr>
@@ -11986,14 +12064,2821 @@
       </p:sp>
       <p:sp>
         <p:nvSpPr>
-          <p:cNvPr id="50" name="Rectangle 49"/>
+          <p:cNvPr id="52" name="Rectangle 51"/>
           <p:cNvSpPr/>
           <p:nvPr/>
         </p:nvSpPr>
         <p:spPr>
           <a:xfrm>
             <a:off x="4160520" y="2510028"/>
-            <a:ext cx="3771428" cy="123444"/>
+            <a:ext cx="4358807" cy="123444"/>
+          </a:xfrm>
+          <a:prstGeom prst="rect">
+            <a:avLst/>
+          </a:prstGeom>
+          <a:solidFill>
+            <a:srgbClr val="10B981"/>
+          </a:solidFill>
+          <a:ln>
+            <a:noFill/>
+          </a:ln>
+        </p:spPr>
+        <p:style>
+          <a:lnRef idx="1">
+            <a:schemeClr val="accent1"/>
+          </a:lnRef>
+          <a:fillRef idx="3">
+            <a:schemeClr val="accent1"/>
+          </a:fillRef>
+          <a:effectRef idx="2">
+            <a:schemeClr val="accent1"/>
+          </a:effectRef>
+          <a:fontRef idx="minor">
+            <a:schemeClr val="lt1"/>
+          </a:fontRef>
+        </p:style>
+        <p:txBody>
+          <a:bodyPr rtlCol="0" anchor="ctr"/>
+          <a:lstStyle/>
+          <a:p>
+            <a:pPr algn="ctr"/>
+          </a:p>
+        </p:txBody>
+      </p:sp>
+      <p:sp>
+        <p:nvSpPr>
+          <p:cNvPr id="53" name="TextBox 52"/>
+          <p:cNvSpPr txBox="1"/>
+          <p:nvPr/>
+        </p:nvSpPr>
+        <p:spPr>
+          <a:xfrm>
+            <a:off x="7833527" y="2482596"/>
+            <a:ext cx="658368" cy="256032"/>
+          </a:xfrm>
+          <a:prstGeom prst="rect">
+            <a:avLst/>
+          </a:prstGeom>
+          <a:noFill/>
+        </p:spPr>
+        <p:txBody>
+          <a:bodyPr wrap="square">
+            <a:spAutoFit/>
+          </a:bodyPr>
+          <a:lstStyle/>
+          <a:p>
+            <a:pPr algn="r"/>
+            <a:r>
+              <a:rPr sz="900" b="1">
+                <a:solidFill>
+                  <a:srgbClr val="050508"/>
+                </a:solidFill>
+              </a:rPr>
+              <a:t>86.7%</a:t>
+            </a:r>
+          </a:p>
+        </p:txBody>
+      </p:sp>
+      <p:sp>
+        <p:nvSpPr>
+          <p:cNvPr id="54" name="TextBox 53"/>
+          <p:cNvSpPr txBox="1"/>
+          <p:nvPr/>
+        </p:nvSpPr>
+        <p:spPr>
+          <a:xfrm>
+            <a:off x="8979408" y="2482596"/>
+            <a:ext cx="365760" cy="256032"/>
+          </a:xfrm>
+          <a:prstGeom prst="rect">
+            <a:avLst/>
+          </a:prstGeom>
+          <a:noFill/>
+        </p:spPr>
+        <p:txBody>
+          <a:bodyPr wrap="square">
+            <a:spAutoFit/>
+          </a:bodyPr>
+          <a:lstStyle/>
+          <a:p>
+            <a:pPr algn="ctr"/>
+            <a:r>
+              <a:rPr sz="950" b="1">
+                <a:solidFill>
+                  <a:srgbClr val="10B981"/>
+                </a:solidFill>
+              </a:rPr>
+              <a:t>13</a:t>
+            </a:r>
+          </a:p>
+        </p:txBody>
+      </p:sp>
+      <p:sp>
+        <p:nvSpPr>
+          <p:cNvPr id="55" name="TextBox 54"/>
+          <p:cNvSpPr txBox="1"/>
+          <p:nvPr/>
+        </p:nvSpPr>
+        <p:spPr>
+          <a:xfrm>
+            <a:off x="9345168" y="2482596"/>
+            <a:ext cx="365760" cy="256032"/>
+          </a:xfrm>
+          <a:prstGeom prst="rect">
+            <a:avLst/>
+          </a:prstGeom>
+          <a:noFill/>
+        </p:spPr>
+        <p:txBody>
+          <a:bodyPr wrap="square">
+            <a:spAutoFit/>
+          </a:bodyPr>
+          <a:lstStyle/>
+          <a:p>
+            <a:pPr algn="ctr"/>
+            <a:r>
+              <a:rPr sz="950" b="0">
+                <a:solidFill>
+                  <a:srgbClr val="EF4444"/>
+                </a:solidFill>
+              </a:rPr>
+              <a:t>2</a:t>
+            </a:r>
+          </a:p>
+        </p:txBody>
+      </p:sp>
+      <p:sp>
+        <p:nvSpPr>
+          <p:cNvPr id="56" name="TextBox 55"/>
+          <p:cNvSpPr txBox="1"/>
+          <p:nvPr/>
+        </p:nvSpPr>
+        <p:spPr>
+          <a:xfrm>
+            <a:off x="9802368" y="2482596"/>
+            <a:ext cx="457200" cy="256032"/>
+          </a:xfrm>
+          <a:prstGeom prst="rect">
+            <a:avLst/>
+          </a:prstGeom>
+          <a:noFill/>
+        </p:spPr>
+        <p:txBody>
+          <a:bodyPr wrap="square">
+            <a:spAutoFit/>
+          </a:bodyPr>
+          <a:lstStyle/>
+          <a:p>
+            <a:pPr algn="ctr"/>
+            <a:r>
+              <a:rPr sz="900" b="0">
+                <a:solidFill>
+                  <a:srgbClr val="94A3B8"/>
+                </a:solidFill>
+              </a:rPr>
+              <a:t>0.929</a:t>
+            </a:r>
+          </a:p>
+        </p:txBody>
+      </p:sp>
+      <p:sp>
+        <p:nvSpPr>
+          <p:cNvPr id="57" name="TextBox 56"/>
+          <p:cNvSpPr txBox="1"/>
+          <p:nvPr/>
+        </p:nvSpPr>
+        <p:spPr>
+          <a:xfrm>
+            <a:off x="10314432" y="2482596"/>
+            <a:ext cx="822960" cy="256032"/>
+          </a:xfrm>
+          <a:prstGeom prst="rect">
+            <a:avLst/>
+          </a:prstGeom>
+          <a:noFill/>
+        </p:spPr>
+        <p:txBody>
+          <a:bodyPr wrap="square">
+            <a:spAutoFit/>
+          </a:bodyPr>
+          <a:lstStyle/>
+          <a:p>
+            <a:pPr algn="r"/>
+            <a:r>
+              <a:rPr sz="900" b="0">
+                <a:solidFill>
+                  <a:srgbClr val="94A3B8"/>
+                </a:solidFill>
+              </a:rPr>
+              <a:t>16.41ms</a:t>
+            </a:r>
+          </a:p>
+        </p:txBody>
+      </p:sp>
+      <p:sp>
+        <p:nvSpPr>
+          <p:cNvPr id="58" name="TextBox 57"/>
+          <p:cNvSpPr txBox="1"/>
+          <p:nvPr/>
+        </p:nvSpPr>
+        <p:spPr>
+          <a:xfrm>
+            <a:off x="11173968" y="2482596"/>
+            <a:ext cx="548640" cy="256032"/>
+          </a:xfrm>
+          <a:prstGeom prst="rect">
+            <a:avLst/>
+          </a:prstGeom>
+          <a:noFill/>
+        </p:spPr>
+        <p:txBody>
+          <a:bodyPr wrap="square">
+            <a:spAutoFit/>
+          </a:bodyPr>
+          <a:lstStyle/>
+          <a:p>
+            <a:pPr algn="ctr"/>
+            <a:r>
+              <a:rPr sz="850" b="1">
+                <a:solidFill>
+                  <a:srgbClr val="10B981"/>
+                </a:solidFill>
+              </a:rPr>
+              <a:t>T0.5</a:t>
+            </a:r>
+          </a:p>
+        </p:txBody>
+      </p:sp>
+      <p:sp>
+        <p:nvSpPr>
+          <p:cNvPr id="59" name="Rectangle 58"/>
+          <p:cNvSpPr/>
+          <p:nvPr/>
+        </p:nvSpPr>
+        <p:spPr>
+          <a:xfrm>
+            <a:off x="365760" y="2770632"/>
+            <a:ext cx="11430000" cy="342900"/>
+          </a:xfrm>
+          <a:prstGeom prst="rect">
+            <a:avLst/>
+          </a:prstGeom>
+          <a:solidFill>
+            <a:srgbClr val="1A1B23"/>
+          </a:solidFill>
+          <a:ln w="12700">
+            <a:noFill/>
+          </a:ln>
+        </p:spPr>
+        <p:style>
+          <a:lnRef idx="1">
+            <a:schemeClr val="accent1"/>
+          </a:lnRef>
+          <a:fillRef idx="3">
+            <a:schemeClr val="accent1"/>
+          </a:fillRef>
+          <a:effectRef idx="2">
+            <a:schemeClr val="accent1"/>
+          </a:effectRef>
+          <a:fontRef idx="minor">
+            <a:schemeClr val="lt1"/>
+          </a:fontRef>
+        </p:style>
+        <p:txBody>
+          <a:bodyPr rtlCol="0" anchor="ctr"/>
+          <a:lstStyle/>
+          <a:p>
+            <a:pPr algn="ctr"/>
+          </a:p>
+        </p:txBody>
+      </p:sp>
+      <p:sp>
+        <p:nvSpPr>
+          <p:cNvPr id="60" name="TextBox 59"/>
+          <p:cNvSpPr txBox="1"/>
+          <p:nvPr/>
+        </p:nvSpPr>
+        <p:spPr>
+          <a:xfrm>
+            <a:off x="438912" y="2834640"/>
+            <a:ext cx="2834640" cy="228600"/>
+          </a:xfrm>
+          <a:prstGeom prst="rect">
+            <a:avLst/>
+          </a:prstGeom>
+          <a:noFill/>
+        </p:spPr>
+        <p:txBody>
+          <a:bodyPr wrap="square">
+            <a:spAutoFit/>
+          </a:bodyPr>
+          <a:lstStyle/>
+          <a:p>
+            <a:pPr algn="l"/>
+            <a:r>
+              <a:rPr sz="900" b="0">
+                <a:solidFill>
+                  <a:srgbClr val="FFFFFF"/>
+                </a:solidFill>
+              </a:rPr>
+              <a:t>05  Multi-Turn Adversarial</a:t>
+            </a:r>
+          </a:p>
+        </p:txBody>
+      </p:sp>
+      <p:sp>
+        <p:nvSpPr>
+          <p:cNvPr id="61" name="TextBox 60"/>
+          <p:cNvSpPr txBox="1"/>
+          <p:nvPr/>
+        </p:nvSpPr>
+        <p:spPr>
+          <a:xfrm>
+            <a:off x="3310128" y="2825496"/>
+            <a:ext cx="777240" cy="256032"/>
+          </a:xfrm>
+          <a:prstGeom prst="rect">
+            <a:avLst/>
+          </a:prstGeom>
+          <a:noFill/>
+        </p:spPr>
+        <p:txBody>
+          <a:bodyPr wrap="square">
+            <a:spAutoFit/>
+          </a:bodyPr>
+          <a:lstStyle/>
+          <a:p>
+            <a:pPr algn="r"/>
+            <a:r>
+              <a:rPr sz="1000" b="1">
+                <a:solidFill>
+                  <a:srgbClr val="10B981"/>
+                </a:solidFill>
+              </a:rPr>
+              <a:t>80.0%</a:t>
+            </a:r>
+          </a:p>
+        </p:txBody>
+      </p:sp>
+      <p:sp>
+        <p:nvSpPr>
+          <p:cNvPr id="62" name="Rectangle 61"/>
+          <p:cNvSpPr/>
+          <p:nvPr/>
+        </p:nvSpPr>
+        <p:spPr>
+          <a:xfrm>
+            <a:off x="4160520" y="2862072"/>
+            <a:ext cx="5029200" cy="123444"/>
+          </a:xfrm>
+          <a:prstGeom prst="rect">
+            <a:avLst/>
+          </a:prstGeom>
+          <a:solidFill>
+            <a:srgbClr val="252635"/>
+          </a:solidFill>
+          <a:ln>
+            <a:noFill/>
+          </a:ln>
+        </p:spPr>
+        <p:style>
+          <a:lnRef idx="1">
+            <a:schemeClr val="accent1"/>
+          </a:lnRef>
+          <a:fillRef idx="3">
+            <a:schemeClr val="accent1"/>
+          </a:fillRef>
+          <a:effectRef idx="2">
+            <a:schemeClr val="accent1"/>
+          </a:effectRef>
+          <a:fontRef idx="minor">
+            <a:schemeClr val="lt1"/>
+          </a:fontRef>
+        </p:style>
+        <p:txBody>
+          <a:bodyPr rtlCol="0" anchor="ctr"/>
+          <a:lstStyle/>
+          <a:p>
+            <a:pPr algn="ctr"/>
+          </a:p>
+        </p:txBody>
+      </p:sp>
+      <p:sp>
+        <p:nvSpPr>
+          <p:cNvPr id="63" name="Rectangle 62"/>
+          <p:cNvSpPr/>
+          <p:nvPr/>
+        </p:nvSpPr>
+        <p:spPr>
+          <a:xfrm>
+            <a:off x="4160520" y="2862072"/>
+            <a:ext cx="4023360" cy="123444"/>
+          </a:xfrm>
+          <a:prstGeom prst="rect">
+            <a:avLst/>
+          </a:prstGeom>
+          <a:solidFill>
+            <a:srgbClr val="10B981"/>
+          </a:solidFill>
+          <a:ln>
+            <a:noFill/>
+          </a:ln>
+        </p:spPr>
+        <p:style>
+          <a:lnRef idx="1">
+            <a:schemeClr val="accent1"/>
+          </a:lnRef>
+          <a:fillRef idx="3">
+            <a:schemeClr val="accent1"/>
+          </a:fillRef>
+          <a:effectRef idx="2">
+            <a:schemeClr val="accent1"/>
+          </a:effectRef>
+          <a:fontRef idx="minor">
+            <a:schemeClr val="lt1"/>
+          </a:fontRef>
+        </p:style>
+        <p:txBody>
+          <a:bodyPr rtlCol="0" anchor="ctr"/>
+          <a:lstStyle/>
+          <a:p>
+            <a:pPr algn="ctr"/>
+          </a:p>
+        </p:txBody>
+      </p:sp>
+      <p:sp>
+        <p:nvSpPr>
+          <p:cNvPr id="64" name="TextBox 63"/>
+          <p:cNvSpPr txBox="1"/>
+          <p:nvPr/>
+        </p:nvSpPr>
+        <p:spPr>
+          <a:xfrm>
+            <a:off x="7498079" y="2834640"/>
+            <a:ext cx="658368" cy="256032"/>
+          </a:xfrm>
+          <a:prstGeom prst="rect">
+            <a:avLst/>
+          </a:prstGeom>
+          <a:noFill/>
+        </p:spPr>
+        <p:txBody>
+          <a:bodyPr wrap="square">
+            <a:spAutoFit/>
+          </a:bodyPr>
+          <a:lstStyle/>
+          <a:p>
+            <a:pPr algn="r"/>
+            <a:r>
+              <a:rPr sz="900" b="1">
+                <a:solidFill>
+                  <a:srgbClr val="050508"/>
+                </a:solidFill>
+              </a:rPr>
+              <a:t>80.0%</a:t>
+            </a:r>
+          </a:p>
+        </p:txBody>
+      </p:sp>
+      <p:sp>
+        <p:nvSpPr>
+          <p:cNvPr id="65" name="TextBox 64"/>
+          <p:cNvSpPr txBox="1"/>
+          <p:nvPr/>
+        </p:nvSpPr>
+        <p:spPr>
+          <a:xfrm>
+            <a:off x="8979408" y="2834640"/>
+            <a:ext cx="365760" cy="256032"/>
+          </a:xfrm>
+          <a:prstGeom prst="rect">
+            <a:avLst/>
+          </a:prstGeom>
+          <a:noFill/>
+        </p:spPr>
+        <p:txBody>
+          <a:bodyPr wrap="square">
+            <a:spAutoFit/>
+          </a:bodyPr>
+          <a:lstStyle/>
+          <a:p>
+            <a:pPr algn="ctr"/>
+            <a:r>
+              <a:rPr sz="950" b="1">
+                <a:solidFill>
+                  <a:srgbClr val="10B981"/>
+                </a:solidFill>
+              </a:rPr>
+              <a:t>12</a:t>
+            </a:r>
+          </a:p>
+        </p:txBody>
+      </p:sp>
+      <p:sp>
+        <p:nvSpPr>
+          <p:cNvPr id="66" name="TextBox 65"/>
+          <p:cNvSpPr txBox="1"/>
+          <p:nvPr/>
+        </p:nvSpPr>
+        <p:spPr>
+          <a:xfrm>
+            <a:off x="9345168" y="2834640"/>
+            <a:ext cx="365760" cy="256032"/>
+          </a:xfrm>
+          <a:prstGeom prst="rect">
+            <a:avLst/>
+          </a:prstGeom>
+          <a:noFill/>
+        </p:spPr>
+        <p:txBody>
+          <a:bodyPr wrap="square">
+            <a:spAutoFit/>
+          </a:bodyPr>
+          <a:lstStyle/>
+          <a:p>
+            <a:pPr algn="ctr"/>
+            <a:r>
+              <a:rPr sz="950" b="0">
+                <a:solidFill>
+                  <a:srgbClr val="EF4444"/>
+                </a:solidFill>
+              </a:rPr>
+              <a:t>3</a:t>
+            </a:r>
+          </a:p>
+        </p:txBody>
+      </p:sp>
+      <p:sp>
+        <p:nvSpPr>
+          <p:cNvPr id="67" name="TextBox 66"/>
+          <p:cNvSpPr txBox="1"/>
+          <p:nvPr/>
+        </p:nvSpPr>
+        <p:spPr>
+          <a:xfrm>
+            <a:off x="9802368" y="2834640"/>
+            <a:ext cx="457200" cy="256032"/>
+          </a:xfrm>
+          <a:prstGeom prst="rect">
+            <a:avLst/>
+          </a:prstGeom>
+          <a:noFill/>
+        </p:spPr>
+        <p:txBody>
+          <a:bodyPr wrap="square">
+            <a:spAutoFit/>
+          </a:bodyPr>
+          <a:lstStyle/>
+          <a:p>
+            <a:pPr algn="ctr"/>
+            <a:r>
+              <a:rPr sz="900" b="0">
+                <a:solidFill>
+                  <a:srgbClr val="94A3B8"/>
+                </a:solidFill>
+              </a:rPr>
+              <a:t>0.889</a:t>
+            </a:r>
+          </a:p>
+        </p:txBody>
+      </p:sp>
+      <p:sp>
+        <p:nvSpPr>
+          <p:cNvPr id="68" name="TextBox 67"/>
+          <p:cNvSpPr txBox="1"/>
+          <p:nvPr/>
+        </p:nvSpPr>
+        <p:spPr>
+          <a:xfrm>
+            <a:off x="10314432" y="2834640"/>
+            <a:ext cx="822960" cy="256032"/>
+          </a:xfrm>
+          <a:prstGeom prst="rect">
+            <a:avLst/>
+          </a:prstGeom>
+          <a:noFill/>
+        </p:spPr>
+        <p:txBody>
+          <a:bodyPr wrap="square">
+            <a:spAutoFit/>
+          </a:bodyPr>
+          <a:lstStyle/>
+          <a:p>
+            <a:pPr algn="r"/>
+            <a:r>
+              <a:rPr sz="900" b="0">
+                <a:solidFill>
+                  <a:srgbClr val="94A3B8"/>
+                </a:solidFill>
+              </a:rPr>
+              <a:t>16.41ms</a:t>
+            </a:r>
+          </a:p>
+        </p:txBody>
+      </p:sp>
+      <p:sp>
+        <p:nvSpPr>
+          <p:cNvPr id="69" name="TextBox 68"/>
+          <p:cNvSpPr txBox="1"/>
+          <p:nvPr/>
+        </p:nvSpPr>
+        <p:spPr>
+          <a:xfrm>
+            <a:off x="11173968" y="2834640"/>
+            <a:ext cx="548640" cy="256032"/>
+          </a:xfrm>
+          <a:prstGeom prst="rect">
+            <a:avLst/>
+          </a:prstGeom>
+          <a:noFill/>
+        </p:spPr>
+        <p:txBody>
+          <a:bodyPr wrap="square">
+            <a:spAutoFit/>
+          </a:bodyPr>
+          <a:lstStyle/>
+          <a:p>
+            <a:pPr algn="ctr"/>
+            <a:r>
+              <a:rPr sz="850" b="1">
+                <a:solidFill>
+                  <a:srgbClr val="3B82F6"/>
+                </a:solidFill>
+              </a:rPr>
+              <a:t>T1</a:t>
+            </a:r>
+          </a:p>
+        </p:txBody>
+      </p:sp>
+      <p:sp>
+        <p:nvSpPr>
+          <p:cNvPr id="70" name="Rectangle 69"/>
+          <p:cNvSpPr/>
+          <p:nvPr/>
+        </p:nvSpPr>
+        <p:spPr>
+          <a:xfrm>
+            <a:off x="365760" y="3122676"/>
+            <a:ext cx="11430000" cy="342900"/>
+          </a:xfrm>
+          <a:prstGeom prst="rect">
+            <a:avLst/>
+          </a:prstGeom>
+          <a:solidFill>
+            <a:srgbClr val="12131B"/>
+          </a:solidFill>
+          <a:ln w="12700">
+            <a:noFill/>
+          </a:ln>
+        </p:spPr>
+        <p:style>
+          <a:lnRef idx="1">
+            <a:schemeClr val="accent1"/>
+          </a:lnRef>
+          <a:fillRef idx="3">
+            <a:schemeClr val="accent1"/>
+          </a:fillRef>
+          <a:effectRef idx="2">
+            <a:schemeClr val="accent1"/>
+          </a:effectRef>
+          <a:fontRef idx="minor">
+            <a:schemeClr val="lt1"/>
+          </a:fontRef>
+        </p:style>
+        <p:txBody>
+          <a:bodyPr rtlCol="0" anchor="ctr"/>
+          <a:lstStyle/>
+          <a:p>
+            <a:pPr algn="ctr"/>
+          </a:p>
+        </p:txBody>
+      </p:sp>
+      <p:sp>
+        <p:nvSpPr>
+          <p:cNvPr id="71" name="TextBox 70"/>
+          <p:cNvSpPr txBox="1"/>
+          <p:nvPr/>
+        </p:nvSpPr>
+        <p:spPr>
+          <a:xfrm>
+            <a:off x="438912" y="3186684"/>
+            <a:ext cx="2834640" cy="228600"/>
+          </a:xfrm>
+          <a:prstGeom prst="rect">
+            <a:avLst/>
+          </a:prstGeom>
+          <a:noFill/>
+        </p:spPr>
+        <p:txBody>
+          <a:bodyPr wrap="square">
+            <a:spAutoFit/>
+          </a:bodyPr>
+          <a:lstStyle/>
+          <a:p>
+            <a:pPr algn="l"/>
+            <a:r>
+              <a:rPr sz="900" b="0">
+                <a:solidFill>
+                  <a:srgbClr val="FFFFFF"/>
+                </a:solidFill>
+              </a:rPr>
+              <a:t>06  Tool Call Injection</a:t>
+            </a:r>
+          </a:p>
+        </p:txBody>
+      </p:sp>
+      <p:sp>
+        <p:nvSpPr>
+          <p:cNvPr id="72" name="TextBox 71"/>
+          <p:cNvSpPr txBox="1"/>
+          <p:nvPr/>
+        </p:nvSpPr>
+        <p:spPr>
+          <a:xfrm>
+            <a:off x="3310128" y="3177540"/>
+            <a:ext cx="777240" cy="256032"/>
+          </a:xfrm>
+          <a:prstGeom prst="rect">
+            <a:avLst/>
+          </a:prstGeom>
+          <a:noFill/>
+        </p:spPr>
+        <p:txBody>
+          <a:bodyPr wrap="square">
+            <a:spAutoFit/>
+          </a:bodyPr>
+          <a:lstStyle/>
+          <a:p>
+            <a:pPr algn="r"/>
+            <a:r>
+              <a:rPr sz="1000" b="1">
+                <a:solidFill>
+                  <a:srgbClr val="10B981"/>
+                </a:solidFill>
+              </a:rPr>
+              <a:t>93.3%</a:t>
+            </a:r>
+          </a:p>
+        </p:txBody>
+      </p:sp>
+      <p:sp>
+        <p:nvSpPr>
+          <p:cNvPr id="73" name="Rectangle 72"/>
+          <p:cNvSpPr/>
+          <p:nvPr/>
+        </p:nvSpPr>
+        <p:spPr>
+          <a:xfrm>
+            <a:off x="4160520" y="3214116"/>
+            <a:ext cx="5029200" cy="123444"/>
+          </a:xfrm>
+          <a:prstGeom prst="rect">
+            <a:avLst/>
+          </a:prstGeom>
+          <a:solidFill>
+            <a:srgbClr val="252635"/>
+          </a:solidFill>
+          <a:ln>
+            <a:noFill/>
+          </a:ln>
+        </p:spPr>
+        <p:style>
+          <a:lnRef idx="1">
+            <a:schemeClr val="accent1"/>
+          </a:lnRef>
+          <a:fillRef idx="3">
+            <a:schemeClr val="accent1"/>
+          </a:fillRef>
+          <a:effectRef idx="2">
+            <a:schemeClr val="accent1"/>
+          </a:effectRef>
+          <a:fontRef idx="minor">
+            <a:schemeClr val="lt1"/>
+          </a:fontRef>
+        </p:style>
+        <p:txBody>
+          <a:bodyPr rtlCol="0" anchor="ctr"/>
+          <a:lstStyle/>
+          <a:p>
+            <a:pPr algn="ctr"/>
+          </a:p>
+        </p:txBody>
+      </p:sp>
+      <p:sp>
+        <p:nvSpPr>
+          <p:cNvPr id="74" name="Rectangle 73"/>
+          <p:cNvSpPr/>
+          <p:nvPr/>
+        </p:nvSpPr>
+        <p:spPr>
+          <a:xfrm>
+            <a:off x="4160520" y="3214116"/>
+            <a:ext cx="4693752" cy="123444"/>
+          </a:xfrm>
+          <a:prstGeom prst="rect">
+            <a:avLst/>
+          </a:prstGeom>
+          <a:solidFill>
+            <a:srgbClr val="10B981"/>
+          </a:solidFill>
+          <a:ln>
+            <a:noFill/>
+          </a:ln>
+        </p:spPr>
+        <p:style>
+          <a:lnRef idx="1">
+            <a:schemeClr val="accent1"/>
+          </a:lnRef>
+          <a:fillRef idx="3">
+            <a:schemeClr val="accent1"/>
+          </a:fillRef>
+          <a:effectRef idx="2">
+            <a:schemeClr val="accent1"/>
+          </a:effectRef>
+          <a:fontRef idx="minor">
+            <a:schemeClr val="lt1"/>
+          </a:fontRef>
+        </p:style>
+        <p:txBody>
+          <a:bodyPr rtlCol="0" anchor="ctr"/>
+          <a:lstStyle/>
+          <a:p>
+            <a:pPr algn="ctr"/>
+          </a:p>
+        </p:txBody>
+      </p:sp>
+      <p:sp>
+        <p:nvSpPr>
+          <p:cNvPr id="75" name="TextBox 74"/>
+          <p:cNvSpPr txBox="1"/>
+          <p:nvPr/>
+        </p:nvSpPr>
+        <p:spPr>
+          <a:xfrm>
+            <a:off x="8168472" y="3186684"/>
+            <a:ext cx="658368" cy="256032"/>
+          </a:xfrm>
+          <a:prstGeom prst="rect">
+            <a:avLst/>
+          </a:prstGeom>
+          <a:noFill/>
+        </p:spPr>
+        <p:txBody>
+          <a:bodyPr wrap="square">
+            <a:spAutoFit/>
+          </a:bodyPr>
+          <a:lstStyle/>
+          <a:p>
+            <a:pPr algn="r"/>
+            <a:r>
+              <a:rPr sz="900" b="1">
+                <a:solidFill>
+                  <a:srgbClr val="050508"/>
+                </a:solidFill>
+              </a:rPr>
+              <a:t>93.3%</a:t>
+            </a:r>
+          </a:p>
+        </p:txBody>
+      </p:sp>
+      <p:sp>
+        <p:nvSpPr>
+          <p:cNvPr id="76" name="TextBox 75"/>
+          <p:cNvSpPr txBox="1"/>
+          <p:nvPr/>
+        </p:nvSpPr>
+        <p:spPr>
+          <a:xfrm>
+            <a:off x="8979408" y="3186684"/>
+            <a:ext cx="365760" cy="256032"/>
+          </a:xfrm>
+          <a:prstGeom prst="rect">
+            <a:avLst/>
+          </a:prstGeom>
+          <a:noFill/>
+        </p:spPr>
+        <p:txBody>
+          <a:bodyPr wrap="square">
+            <a:spAutoFit/>
+          </a:bodyPr>
+          <a:lstStyle/>
+          <a:p>
+            <a:pPr algn="ctr"/>
+            <a:r>
+              <a:rPr sz="950" b="1">
+                <a:solidFill>
+                  <a:srgbClr val="10B981"/>
+                </a:solidFill>
+              </a:rPr>
+              <a:t>14</a:t>
+            </a:r>
+          </a:p>
+        </p:txBody>
+      </p:sp>
+      <p:sp>
+        <p:nvSpPr>
+          <p:cNvPr id="77" name="TextBox 76"/>
+          <p:cNvSpPr txBox="1"/>
+          <p:nvPr/>
+        </p:nvSpPr>
+        <p:spPr>
+          <a:xfrm>
+            <a:off x="9345168" y="3186684"/>
+            <a:ext cx="365760" cy="256032"/>
+          </a:xfrm>
+          <a:prstGeom prst="rect">
+            <a:avLst/>
+          </a:prstGeom>
+          <a:noFill/>
+        </p:spPr>
+        <p:txBody>
+          <a:bodyPr wrap="square">
+            <a:spAutoFit/>
+          </a:bodyPr>
+          <a:lstStyle/>
+          <a:p>
+            <a:pPr algn="ctr"/>
+            <a:r>
+              <a:rPr sz="950" b="0">
+                <a:solidFill>
+                  <a:srgbClr val="EF4444"/>
+                </a:solidFill>
+              </a:rPr>
+              <a:t>1</a:t>
+            </a:r>
+          </a:p>
+        </p:txBody>
+      </p:sp>
+      <p:sp>
+        <p:nvSpPr>
+          <p:cNvPr id="78" name="TextBox 77"/>
+          <p:cNvSpPr txBox="1"/>
+          <p:nvPr/>
+        </p:nvSpPr>
+        <p:spPr>
+          <a:xfrm>
+            <a:off x="9802368" y="3186684"/>
+            <a:ext cx="457200" cy="256032"/>
+          </a:xfrm>
+          <a:prstGeom prst="rect">
+            <a:avLst/>
+          </a:prstGeom>
+          <a:noFill/>
+        </p:spPr>
+        <p:txBody>
+          <a:bodyPr wrap="square">
+            <a:spAutoFit/>
+          </a:bodyPr>
+          <a:lstStyle/>
+          <a:p>
+            <a:pPr algn="ctr"/>
+            <a:r>
+              <a:rPr sz="900" b="0">
+                <a:solidFill>
+                  <a:srgbClr val="94A3B8"/>
+                </a:solidFill>
+              </a:rPr>
+              <a:t>0.966</a:t>
+            </a:r>
+          </a:p>
+        </p:txBody>
+      </p:sp>
+      <p:sp>
+        <p:nvSpPr>
+          <p:cNvPr id="79" name="TextBox 78"/>
+          <p:cNvSpPr txBox="1"/>
+          <p:nvPr/>
+        </p:nvSpPr>
+        <p:spPr>
+          <a:xfrm>
+            <a:off x="10314432" y="3186684"/>
+            <a:ext cx="822960" cy="256032"/>
+          </a:xfrm>
+          <a:prstGeom prst="rect">
+            <a:avLst/>
+          </a:prstGeom>
+          <a:noFill/>
+        </p:spPr>
+        <p:txBody>
+          <a:bodyPr wrap="square">
+            <a:spAutoFit/>
+          </a:bodyPr>
+          <a:lstStyle/>
+          <a:p>
+            <a:pPr algn="r"/>
+            <a:r>
+              <a:rPr sz="900" b="0">
+                <a:solidFill>
+                  <a:srgbClr val="94A3B8"/>
+                </a:solidFill>
+              </a:rPr>
+              <a:t>16.41ms</a:t>
+            </a:r>
+          </a:p>
+        </p:txBody>
+      </p:sp>
+      <p:sp>
+        <p:nvSpPr>
+          <p:cNvPr id="80" name="TextBox 79"/>
+          <p:cNvSpPr txBox="1"/>
+          <p:nvPr/>
+        </p:nvSpPr>
+        <p:spPr>
+          <a:xfrm>
+            <a:off x="11173968" y="3186684"/>
+            <a:ext cx="548640" cy="256032"/>
+          </a:xfrm>
+          <a:prstGeom prst="rect">
+            <a:avLst/>
+          </a:prstGeom>
+          <a:noFill/>
+        </p:spPr>
+        <p:txBody>
+          <a:bodyPr wrap="square">
+            <a:spAutoFit/>
+          </a:bodyPr>
+          <a:lstStyle/>
+          <a:p>
+            <a:pPr algn="ctr"/>
+            <a:r>
+              <a:rPr sz="850" b="1">
+                <a:solidFill>
+                  <a:srgbClr val="3B82F6"/>
+                </a:solidFill>
+              </a:rPr>
+              <a:t>T1</a:t>
+            </a:r>
+          </a:p>
+        </p:txBody>
+      </p:sp>
+      <p:sp>
+        <p:nvSpPr>
+          <p:cNvPr id="81" name="Rectangle 80"/>
+          <p:cNvSpPr/>
+          <p:nvPr/>
+        </p:nvSpPr>
+        <p:spPr>
+          <a:xfrm>
+            <a:off x="365760" y="3474720"/>
+            <a:ext cx="11430000" cy="342900"/>
+          </a:xfrm>
+          <a:prstGeom prst="rect">
+            <a:avLst/>
+          </a:prstGeom>
+          <a:solidFill>
+            <a:srgbClr val="1A1B23"/>
+          </a:solidFill>
+          <a:ln w="12700">
+            <a:noFill/>
+          </a:ln>
+        </p:spPr>
+        <p:style>
+          <a:lnRef idx="1">
+            <a:schemeClr val="accent1"/>
+          </a:lnRef>
+          <a:fillRef idx="3">
+            <a:schemeClr val="accent1"/>
+          </a:fillRef>
+          <a:effectRef idx="2">
+            <a:schemeClr val="accent1"/>
+          </a:effectRef>
+          <a:fontRef idx="minor">
+            <a:schemeClr val="lt1"/>
+          </a:fontRef>
+        </p:style>
+        <p:txBody>
+          <a:bodyPr rtlCol="0" anchor="ctr"/>
+          <a:lstStyle/>
+          <a:p>
+            <a:pPr algn="ctr"/>
+          </a:p>
+        </p:txBody>
+      </p:sp>
+      <p:sp>
+        <p:nvSpPr>
+          <p:cNvPr id="82" name="TextBox 81"/>
+          <p:cNvSpPr txBox="1"/>
+          <p:nvPr/>
+        </p:nvSpPr>
+        <p:spPr>
+          <a:xfrm>
+            <a:off x="438912" y="3538727"/>
+            <a:ext cx="2834640" cy="228600"/>
+          </a:xfrm>
+          <a:prstGeom prst="rect">
+            <a:avLst/>
+          </a:prstGeom>
+          <a:noFill/>
+        </p:spPr>
+        <p:txBody>
+          <a:bodyPr wrap="square">
+            <a:spAutoFit/>
+          </a:bodyPr>
+          <a:lstStyle/>
+          <a:p>
+            <a:pPr algn="l"/>
+            <a:r>
+              <a:rPr sz="900" b="0">
+                <a:solidFill>
+                  <a:srgbClr val="FFFFFF"/>
+                </a:solidFill>
+              </a:rPr>
+              <a:t>07  Payload In Data</a:t>
+            </a:r>
+          </a:p>
+        </p:txBody>
+      </p:sp>
+      <p:sp>
+        <p:nvSpPr>
+          <p:cNvPr id="83" name="TextBox 82"/>
+          <p:cNvSpPr txBox="1"/>
+          <p:nvPr/>
+        </p:nvSpPr>
+        <p:spPr>
+          <a:xfrm>
+            <a:off x="3310128" y="3529584"/>
+            <a:ext cx="777240" cy="256032"/>
+          </a:xfrm>
+          <a:prstGeom prst="rect">
+            <a:avLst/>
+          </a:prstGeom>
+          <a:noFill/>
+        </p:spPr>
+        <p:txBody>
+          <a:bodyPr wrap="square">
+            <a:spAutoFit/>
+          </a:bodyPr>
+          <a:lstStyle/>
+          <a:p>
+            <a:pPr algn="r"/>
+            <a:r>
+              <a:rPr sz="1000" b="1">
+                <a:solidFill>
+                  <a:srgbClr val="10B981"/>
+                </a:solidFill>
+              </a:rPr>
+              <a:t>100.0%</a:t>
+            </a:r>
+          </a:p>
+        </p:txBody>
+      </p:sp>
+      <p:sp>
+        <p:nvSpPr>
+          <p:cNvPr id="84" name="Rectangle 83"/>
+          <p:cNvSpPr/>
+          <p:nvPr/>
+        </p:nvSpPr>
+        <p:spPr>
+          <a:xfrm>
+            <a:off x="4160520" y="3566160"/>
+            <a:ext cx="5029200" cy="123444"/>
+          </a:xfrm>
+          <a:prstGeom prst="rect">
+            <a:avLst/>
+          </a:prstGeom>
+          <a:solidFill>
+            <a:srgbClr val="252635"/>
+          </a:solidFill>
+          <a:ln>
+            <a:noFill/>
+          </a:ln>
+        </p:spPr>
+        <p:style>
+          <a:lnRef idx="1">
+            <a:schemeClr val="accent1"/>
+          </a:lnRef>
+          <a:fillRef idx="3">
+            <a:schemeClr val="accent1"/>
+          </a:fillRef>
+          <a:effectRef idx="2">
+            <a:schemeClr val="accent1"/>
+          </a:effectRef>
+          <a:fontRef idx="minor">
+            <a:schemeClr val="lt1"/>
+          </a:fontRef>
+        </p:style>
+        <p:txBody>
+          <a:bodyPr rtlCol="0" anchor="ctr"/>
+          <a:lstStyle/>
+          <a:p>
+            <a:pPr algn="ctr"/>
+          </a:p>
+        </p:txBody>
+      </p:sp>
+      <p:sp>
+        <p:nvSpPr>
+          <p:cNvPr id="85" name="Rectangle 84"/>
+          <p:cNvSpPr/>
+          <p:nvPr/>
+        </p:nvSpPr>
+        <p:spPr>
+          <a:xfrm>
+            <a:off x="4160520" y="3566160"/>
+            <a:ext cx="5029200" cy="123444"/>
+          </a:xfrm>
+          <a:prstGeom prst="rect">
+            <a:avLst/>
+          </a:prstGeom>
+          <a:solidFill>
+            <a:srgbClr val="10B981"/>
+          </a:solidFill>
+          <a:ln>
+            <a:noFill/>
+          </a:ln>
+        </p:spPr>
+        <p:style>
+          <a:lnRef idx="1">
+            <a:schemeClr val="accent1"/>
+          </a:lnRef>
+          <a:fillRef idx="3">
+            <a:schemeClr val="accent1"/>
+          </a:fillRef>
+          <a:effectRef idx="2">
+            <a:schemeClr val="accent1"/>
+          </a:effectRef>
+          <a:fontRef idx="minor">
+            <a:schemeClr val="lt1"/>
+          </a:fontRef>
+        </p:style>
+        <p:txBody>
+          <a:bodyPr rtlCol="0" anchor="ctr"/>
+          <a:lstStyle/>
+          <a:p>
+            <a:pPr algn="ctr"/>
+          </a:p>
+        </p:txBody>
+      </p:sp>
+      <p:sp>
+        <p:nvSpPr>
+          <p:cNvPr id="86" name="TextBox 85"/>
+          <p:cNvSpPr txBox="1"/>
+          <p:nvPr/>
+        </p:nvSpPr>
+        <p:spPr>
+          <a:xfrm>
+            <a:off x="8503920" y="3538727"/>
+            <a:ext cx="658368" cy="256032"/>
+          </a:xfrm>
+          <a:prstGeom prst="rect">
+            <a:avLst/>
+          </a:prstGeom>
+          <a:noFill/>
+        </p:spPr>
+        <p:txBody>
+          <a:bodyPr wrap="square">
+            <a:spAutoFit/>
+          </a:bodyPr>
+          <a:lstStyle/>
+          <a:p>
+            <a:pPr algn="r"/>
+            <a:r>
+              <a:rPr sz="900" b="1">
+                <a:solidFill>
+                  <a:srgbClr val="050508"/>
+                </a:solidFill>
+              </a:rPr>
+              <a:t>100.0%</a:t>
+            </a:r>
+          </a:p>
+        </p:txBody>
+      </p:sp>
+      <p:sp>
+        <p:nvSpPr>
+          <p:cNvPr id="87" name="TextBox 86"/>
+          <p:cNvSpPr txBox="1"/>
+          <p:nvPr/>
+        </p:nvSpPr>
+        <p:spPr>
+          <a:xfrm>
+            <a:off x="8979408" y="3538727"/>
+            <a:ext cx="365760" cy="256032"/>
+          </a:xfrm>
+          <a:prstGeom prst="rect">
+            <a:avLst/>
+          </a:prstGeom>
+          <a:noFill/>
+        </p:spPr>
+        <p:txBody>
+          <a:bodyPr wrap="square">
+            <a:spAutoFit/>
+          </a:bodyPr>
+          <a:lstStyle/>
+          <a:p>
+            <a:pPr algn="ctr"/>
+            <a:r>
+              <a:rPr sz="950" b="1">
+                <a:solidFill>
+                  <a:srgbClr val="10B981"/>
+                </a:solidFill>
+              </a:rPr>
+              <a:t>15</a:t>
+            </a:r>
+          </a:p>
+        </p:txBody>
+      </p:sp>
+      <p:sp>
+        <p:nvSpPr>
+          <p:cNvPr id="88" name="TextBox 87"/>
+          <p:cNvSpPr txBox="1"/>
+          <p:nvPr/>
+        </p:nvSpPr>
+        <p:spPr>
+          <a:xfrm>
+            <a:off x="9345168" y="3538727"/>
+            <a:ext cx="365760" cy="256032"/>
+          </a:xfrm>
+          <a:prstGeom prst="rect">
+            <a:avLst/>
+          </a:prstGeom>
+          <a:noFill/>
+        </p:spPr>
+        <p:txBody>
+          <a:bodyPr wrap="square">
+            <a:spAutoFit/>
+          </a:bodyPr>
+          <a:lstStyle/>
+          <a:p>
+            <a:pPr algn="ctr"/>
+            <a:r>
+              <a:rPr sz="950" b="0">
+                <a:solidFill>
+                  <a:srgbClr val="EF4444"/>
+                </a:solidFill>
+              </a:rPr>
+              <a:t>0</a:t>
+            </a:r>
+          </a:p>
+        </p:txBody>
+      </p:sp>
+      <p:sp>
+        <p:nvSpPr>
+          <p:cNvPr id="89" name="TextBox 88"/>
+          <p:cNvSpPr txBox="1"/>
+          <p:nvPr/>
+        </p:nvSpPr>
+        <p:spPr>
+          <a:xfrm>
+            <a:off x="9802368" y="3538727"/>
+            <a:ext cx="457200" cy="256032"/>
+          </a:xfrm>
+          <a:prstGeom prst="rect">
+            <a:avLst/>
+          </a:prstGeom>
+          <a:noFill/>
+        </p:spPr>
+        <p:txBody>
+          <a:bodyPr wrap="square">
+            <a:spAutoFit/>
+          </a:bodyPr>
+          <a:lstStyle/>
+          <a:p>
+            <a:pPr algn="ctr"/>
+            <a:r>
+              <a:rPr sz="900" b="0">
+                <a:solidFill>
+                  <a:srgbClr val="94A3B8"/>
+                </a:solidFill>
+              </a:rPr>
+              <a:t>1.000</a:t>
+            </a:r>
+          </a:p>
+        </p:txBody>
+      </p:sp>
+      <p:sp>
+        <p:nvSpPr>
+          <p:cNvPr id="90" name="TextBox 89"/>
+          <p:cNvSpPr txBox="1"/>
+          <p:nvPr/>
+        </p:nvSpPr>
+        <p:spPr>
+          <a:xfrm>
+            <a:off x="10314432" y="3538727"/>
+            <a:ext cx="822960" cy="256032"/>
+          </a:xfrm>
+          <a:prstGeom prst="rect">
+            <a:avLst/>
+          </a:prstGeom>
+          <a:noFill/>
+        </p:spPr>
+        <p:txBody>
+          <a:bodyPr wrap="square">
+            <a:spAutoFit/>
+          </a:bodyPr>
+          <a:lstStyle/>
+          <a:p>
+            <a:pPr algn="r"/>
+            <a:r>
+              <a:rPr sz="900" b="0">
+                <a:solidFill>
+                  <a:srgbClr val="94A3B8"/>
+                </a:solidFill>
+              </a:rPr>
+              <a:t>16.41ms</a:t>
+            </a:r>
+          </a:p>
+        </p:txBody>
+      </p:sp>
+      <p:sp>
+        <p:nvSpPr>
+          <p:cNvPr id="91" name="TextBox 90"/>
+          <p:cNvSpPr txBox="1"/>
+          <p:nvPr/>
+        </p:nvSpPr>
+        <p:spPr>
+          <a:xfrm>
+            <a:off x="11173968" y="3538727"/>
+            <a:ext cx="548640" cy="256032"/>
+          </a:xfrm>
+          <a:prstGeom prst="rect">
+            <a:avLst/>
+          </a:prstGeom>
+          <a:noFill/>
+        </p:spPr>
+        <p:txBody>
+          <a:bodyPr wrap="square">
+            <a:spAutoFit/>
+          </a:bodyPr>
+          <a:lstStyle/>
+          <a:p>
+            <a:pPr algn="ctr"/>
+            <a:r>
+              <a:rPr sz="850" b="1">
+                <a:solidFill>
+                  <a:srgbClr val="3B82F6"/>
+                </a:solidFill>
+              </a:rPr>
+              <a:t>T1</a:t>
+            </a:r>
+          </a:p>
+        </p:txBody>
+      </p:sp>
+      <p:sp>
+        <p:nvSpPr>
+          <p:cNvPr id="92" name="Rectangle 91"/>
+          <p:cNvSpPr/>
+          <p:nvPr/>
+        </p:nvSpPr>
+        <p:spPr>
+          <a:xfrm>
+            <a:off x="365760" y="3826764"/>
+            <a:ext cx="11430000" cy="342900"/>
+          </a:xfrm>
+          <a:prstGeom prst="rect">
+            <a:avLst/>
+          </a:prstGeom>
+          <a:solidFill>
+            <a:srgbClr val="12131B"/>
+          </a:solidFill>
+          <a:ln w="12700">
+            <a:noFill/>
+          </a:ln>
+        </p:spPr>
+        <p:style>
+          <a:lnRef idx="1">
+            <a:schemeClr val="accent1"/>
+          </a:lnRef>
+          <a:fillRef idx="3">
+            <a:schemeClr val="accent1"/>
+          </a:fillRef>
+          <a:effectRef idx="2">
+            <a:schemeClr val="accent1"/>
+          </a:effectRef>
+          <a:fontRef idx="minor">
+            <a:schemeClr val="lt1"/>
+          </a:fontRef>
+        </p:style>
+        <p:txBody>
+          <a:bodyPr rtlCol="0" anchor="ctr"/>
+          <a:lstStyle/>
+          <a:p>
+            <a:pPr algn="ctr"/>
+          </a:p>
+        </p:txBody>
+      </p:sp>
+      <p:sp>
+        <p:nvSpPr>
+          <p:cNvPr id="93" name="TextBox 92"/>
+          <p:cNvSpPr txBox="1"/>
+          <p:nvPr/>
+        </p:nvSpPr>
+        <p:spPr>
+          <a:xfrm>
+            <a:off x="438912" y="3890772"/>
+            <a:ext cx="2834640" cy="228600"/>
+          </a:xfrm>
+          <a:prstGeom prst="rect">
+            <a:avLst/>
+          </a:prstGeom>
+          <a:noFill/>
+        </p:spPr>
+        <p:txBody>
+          <a:bodyPr wrap="square">
+            <a:spAutoFit/>
+          </a:bodyPr>
+          <a:lstStyle/>
+          <a:p>
+            <a:pPr algn="l"/>
+            <a:r>
+              <a:rPr sz="900" b="0">
+                <a:solidFill>
+                  <a:srgbClr val="FFFFFF"/>
+                </a:solidFill>
+              </a:rPr>
+              <a:t>08  Secret Extraction</a:t>
+            </a:r>
+          </a:p>
+        </p:txBody>
+      </p:sp>
+      <p:sp>
+        <p:nvSpPr>
+          <p:cNvPr id="94" name="TextBox 93"/>
+          <p:cNvSpPr txBox="1"/>
+          <p:nvPr/>
+        </p:nvSpPr>
+        <p:spPr>
+          <a:xfrm>
+            <a:off x="3310128" y="3881628"/>
+            <a:ext cx="777240" cy="256032"/>
+          </a:xfrm>
+          <a:prstGeom prst="rect">
+            <a:avLst/>
+          </a:prstGeom>
+          <a:noFill/>
+        </p:spPr>
+        <p:txBody>
+          <a:bodyPr wrap="square">
+            <a:spAutoFit/>
+          </a:bodyPr>
+          <a:lstStyle/>
+          <a:p>
+            <a:pPr algn="r"/>
+            <a:r>
+              <a:rPr sz="1000" b="1">
+                <a:solidFill>
+                  <a:srgbClr val="10B981"/>
+                </a:solidFill>
+              </a:rPr>
+              <a:t>93.3%</a:t>
+            </a:r>
+          </a:p>
+        </p:txBody>
+      </p:sp>
+      <p:sp>
+        <p:nvSpPr>
+          <p:cNvPr id="95" name="Rectangle 94"/>
+          <p:cNvSpPr/>
+          <p:nvPr/>
+        </p:nvSpPr>
+        <p:spPr>
+          <a:xfrm>
+            <a:off x="4160520" y="3918204"/>
+            <a:ext cx="5029200" cy="123444"/>
+          </a:xfrm>
+          <a:prstGeom prst="rect">
+            <a:avLst/>
+          </a:prstGeom>
+          <a:solidFill>
+            <a:srgbClr val="252635"/>
+          </a:solidFill>
+          <a:ln>
+            <a:noFill/>
+          </a:ln>
+        </p:spPr>
+        <p:style>
+          <a:lnRef idx="1">
+            <a:schemeClr val="accent1"/>
+          </a:lnRef>
+          <a:fillRef idx="3">
+            <a:schemeClr val="accent1"/>
+          </a:fillRef>
+          <a:effectRef idx="2">
+            <a:schemeClr val="accent1"/>
+          </a:effectRef>
+          <a:fontRef idx="minor">
+            <a:schemeClr val="lt1"/>
+          </a:fontRef>
+        </p:style>
+        <p:txBody>
+          <a:bodyPr rtlCol="0" anchor="ctr"/>
+          <a:lstStyle/>
+          <a:p>
+            <a:pPr algn="ctr"/>
+          </a:p>
+        </p:txBody>
+      </p:sp>
+      <p:sp>
+        <p:nvSpPr>
+          <p:cNvPr id="96" name="Rectangle 95"/>
+          <p:cNvSpPr/>
+          <p:nvPr/>
+        </p:nvSpPr>
+        <p:spPr>
+          <a:xfrm>
+            <a:off x="4160520" y="3918204"/>
+            <a:ext cx="4693752" cy="123444"/>
+          </a:xfrm>
+          <a:prstGeom prst="rect">
+            <a:avLst/>
+          </a:prstGeom>
+          <a:solidFill>
+            <a:srgbClr val="10B981"/>
+          </a:solidFill>
+          <a:ln>
+            <a:noFill/>
+          </a:ln>
+        </p:spPr>
+        <p:style>
+          <a:lnRef idx="1">
+            <a:schemeClr val="accent1"/>
+          </a:lnRef>
+          <a:fillRef idx="3">
+            <a:schemeClr val="accent1"/>
+          </a:fillRef>
+          <a:effectRef idx="2">
+            <a:schemeClr val="accent1"/>
+          </a:effectRef>
+          <a:fontRef idx="minor">
+            <a:schemeClr val="lt1"/>
+          </a:fontRef>
+        </p:style>
+        <p:txBody>
+          <a:bodyPr rtlCol="0" anchor="ctr"/>
+          <a:lstStyle/>
+          <a:p>
+            <a:pPr algn="ctr"/>
+          </a:p>
+        </p:txBody>
+      </p:sp>
+      <p:sp>
+        <p:nvSpPr>
+          <p:cNvPr id="97" name="TextBox 96"/>
+          <p:cNvSpPr txBox="1"/>
+          <p:nvPr/>
+        </p:nvSpPr>
+        <p:spPr>
+          <a:xfrm>
+            <a:off x="8168472" y="3890772"/>
+            <a:ext cx="658368" cy="256032"/>
+          </a:xfrm>
+          <a:prstGeom prst="rect">
+            <a:avLst/>
+          </a:prstGeom>
+          <a:noFill/>
+        </p:spPr>
+        <p:txBody>
+          <a:bodyPr wrap="square">
+            <a:spAutoFit/>
+          </a:bodyPr>
+          <a:lstStyle/>
+          <a:p>
+            <a:pPr algn="r"/>
+            <a:r>
+              <a:rPr sz="900" b="1">
+                <a:solidFill>
+                  <a:srgbClr val="050508"/>
+                </a:solidFill>
+              </a:rPr>
+              <a:t>93.3%</a:t>
+            </a:r>
+          </a:p>
+        </p:txBody>
+      </p:sp>
+      <p:sp>
+        <p:nvSpPr>
+          <p:cNvPr id="98" name="TextBox 97"/>
+          <p:cNvSpPr txBox="1"/>
+          <p:nvPr/>
+        </p:nvSpPr>
+        <p:spPr>
+          <a:xfrm>
+            <a:off x="8979408" y="3890772"/>
+            <a:ext cx="365760" cy="256032"/>
+          </a:xfrm>
+          <a:prstGeom prst="rect">
+            <a:avLst/>
+          </a:prstGeom>
+          <a:noFill/>
+        </p:spPr>
+        <p:txBody>
+          <a:bodyPr wrap="square">
+            <a:spAutoFit/>
+          </a:bodyPr>
+          <a:lstStyle/>
+          <a:p>
+            <a:pPr algn="ctr"/>
+            <a:r>
+              <a:rPr sz="950" b="1">
+                <a:solidFill>
+                  <a:srgbClr val="10B981"/>
+                </a:solidFill>
+              </a:rPr>
+              <a:t>14</a:t>
+            </a:r>
+          </a:p>
+        </p:txBody>
+      </p:sp>
+      <p:sp>
+        <p:nvSpPr>
+          <p:cNvPr id="99" name="TextBox 98"/>
+          <p:cNvSpPr txBox="1"/>
+          <p:nvPr/>
+        </p:nvSpPr>
+        <p:spPr>
+          <a:xfrm>
+            <a:off x="9345168" y="3890772"/>
+            <a:ext cx="365760" cy="256032"/>
+          </a:xfrm>
+          <a:prstGeom prst="rect">
+            <a:avLst/>
+          </a:prstGeom>
+          <a:noFill/>
+        </p:spPr>
+        <p:txBody>
+          <a:bodyPr wrap="square">
+            <a:spAutoFit/>
+          </a:bodyPr>
+          <a:lstStyle/>
+          <a:p>
+            <a:pPr algn="ctr"/>
+            <a:r>
+              <a:rPr sz="950" b="0">
+                <a:solidFill>
+                  <a:srgbClr val="EF4444"/>
+                </a:solidFill>
+              </a:rPr>
+              <a:t>1</a:t>
+            </a:r>
+          </a:p>
+        </p:txBody>
+      </p:sp>
+      <p:sp>
+        <p:nvSpPr>
+          <p:cNvPr id="100" name="TextBox 99"/>
+          <p:cNvSpPr txBox="1"/>
+          <p:nvPr/>
+        </p:nvSpPr>
+        <p:spPr>
+          <a:xfrm>
+            <a:off x="9802368" y="3890772"/>
+            <a:ext cx="457200" cy="256032"/>
+          </a:xfrm>
+          <a:prstGeom prst="rect">
+            <a:avLst/>
+          </a:prstGeom>
+          <a:noFill/>
+        </p:spPr>
+        <p:txBody>
+          <a:bodyPr wrap="square">
+            <a:spAutoFit/>
+          </a:bodyPr>
+          <a:lstStyle/>
+          <a:p>
+            <a:pPr algn="ctr"/>
+            <a:r>
+              <a:rPr sz="900" b="0">
+                <a:solidFill>
+                  <a:srgbClr val="94A3B8"/>
+                </a:solidFill>
+              </a:rPr>
+              <a:t>0.966</a:t>
+            </a:r>
+          </a:p>
+        </p:txBody>
+      </p:sp>
+      <p:sp>
+        <p:nvSpPr>
+          <p:cNvPr id="101" name="TextBox 100"/>
+          <p:cNvSpPr txBox="1"/>
+          <p:nvPr/>
+        </p:nvSpPr>
+        <p:spPr>
+          <a:xfrm>
+            <a:off x="10314432" y="3890772"/>
+            <a:ext cx="822960" cy="256032"/>
+          </a:xfrm>
+          <a:prstGeom prst="rect">
+            <a:avLst/>
+          </a:prstGeom>
+          <a:noFill/>
+        </p:spPr>
+        <p:txBody>
+          <a:bodyPr wrap="square">
+            <a:spAutoFit/>
+          </a:bodyPr>
+          <a:lstStyle/>
+          <a:p>
+            <a:pPr algn="r"/>
+            <a:r>
+              <a:rPr sz="900" b="0">
+                <a:solidFill>
+                  <a:srgbClr val="94A3B8"/>
+                </a:solidFill>
+              </a:rPr>
+              <a:t>16.41ms</a:t>
+            </a:r>
+          </a:p>
+        </p:txBody>
+      </p:sp>
+      <p:sp>
+        <p:nvSpPr>
+          <p:cNvPr id="102" name="TextBox 101"/>
+          <p:cNvSpPr txBox="1"/>
+          <p:nvPr/>
+        </p:nvSpPr>
+        <p:spPr>
+          <a:xfrm>
+            <a:off x="11173968" y="3890772"/>
+            <a:ext cx="548640" cy="256032"/>
+          </a:xfrm>
+          <a:prstGeom prst="rect">
+            <a:avLst/>
+          </a:prstGeom>
+          <a:noFill/>
+        </p:spPr>
+        <p:txBody>
+          <a:bodyPr wrap="square">
+            <a:spAutoFit/>
+          </a:bodyPr>
+          <a:lstStyle/>
+          <a:p>
+            <a:pPr algn="ctr"/>
+            <a:r>
+              <a:rPr sz="850" b="1">
+                <a:solidFill>
+                  <a:srgbClr val="3B82F6"/>
+                </a:solidFill>
+              </a:rPr>
+              <a:t>T1</a:t>
+            </a:r>
+          </a:p>
+        </p:txBody>
+      </p:sp>
+      <p:sp>
+        <p:nvSpPr>
+          <p:cNvPr id="103" name="Rectangle 102"/>
+          <p:cNvSpPr/>
+          <p:nvPr/>
+        </p:nvSpPr>
+        <p:spPr>
+          <a:xfrm>
+            <a:off x="365760" y="4178808"/>
+            <a:ext cx="11430000" cy="342900"/>
+          </a:xfrm>
+          <a:prstGeom prst="rect">
+            <a:avLst/>
+          </a:prstGeom>
+          <a:solidFill>
+            <a:srgbClr val="1A1B23"/>
+          </a:solidFill>
+          <a:ln w="12700">
+            <a:noFill/>
+          </a:ln>
+        </p:spPr>
+        <p:style>
+          <a:lnRef idx="1">
+            <a:schemeClr val="accent1"/>
+          </a:lnRef>
+          <a:fillRef idx="3">
+            <a:schemeClr val="accent1"/>
+          </a:fillRef>
+          <a:effectRef idx="2">
+            <a:schemeClr val="accent1"/>
+          </a:effectRef>
+          <a:fontRef idx="minor">
+            <a:schemeClr val="lt1"/>
+          </a:fontRef>
+        </p:style>
+        <p:txBody>
+          <a:bodyPr rtlCol="0" anchor="ctr"/>
+          <a:lstStyle/>
+          <a:p>
+            <a:pPr algn="ctr"/>
+          </a:p>
+        </p:txBody>
+      </p:sp>
+      <p:sp>
+        <p:nvSpPr>
+          <p:cNvPr id="104" name="TextBox 103"/>
+          <p:cNvSpPr txBox="1"/>
+          <p:nvPr/>
+        </p:nvSpPr>
+        <p:spPr>
+          <a:xfrm>
+            <a:off x="438912" y="4242816"/>
+            <a:ext cx="2834640" cy="228600"/>
+          </a:xfrm>
+          <a:prstGeom prst="rect">
+            <a:avLst/>
+          </a:prstGeom>
+          <a:noFill/>
+        </p:spPr>
+        <p:txBody>
+          <a:bodyPr wrap="square">
+            <a:spAutoFit/>
+          </a:bodyPr>
+          <a:lstStyle/>
+          <a:p>
+            <a:pPr algn="l"/>
+            <a:r>
+              <a:rPr sz="900" b="0">
+                <a:solidFill>
+                  <a:srgbClr val="FFFFFF"/>
+                </a:solidFill>
+              </a:rPr>
+              <a:t>09  Credential Leak</a:t>
+            </a:r>
+          </a:p>
+        </p:txBody>
+      </p:sp>
+      <p:sp>
+        <p:nvSpPr>
+          <p:cNvPr id="105" name="TextBox 104"/>
+          <p:cNvSpPr txBox="1"/>
+          <p:nvPr/>
+        </p:nvSpPr>
+        <p:spPr>
+          <a:xfrm>
+            <a:off x="3310128" y="4233672"/>
+            <a:ext cx="777240" cy="256032"/>
+          </a:xfrm>
+          <a:prstGeom prst="rect">
+            <a:avLst/>
+          </a:prstGeom>
+          <a:noFill/>
+        </p:spPr>
+        <p:txBody>
+          <a:bodyPr wrap="square">
+            <a:spAutoFit/>
+          </a:bodyPr>
+          <a:lstStyle/>
+          <a:p>
+            <a:pPr algn="r"/>
+            <a:r>
+              <a:rPr sz="1000" b="1">
+                <a:solidFill>
+                  <a:srgbClr val="10B981"/>
+                </a:solidFill>
+              </a:rPr>
+              <a:t>66.7%</a:t>
+            </a:r>
+          </a:p>
+        </p:txBody>
+      </p:sp>
+      <p:sp>
+        <p:nvSpPr>
+          <p:cNvPr id="106" name="Rectangle 105"/>
+          <p:cNvSpPr/>
+          <p:nvPr/>
+        </p:nvSpPr>
+        <p:spPr>
+          <a:xfrm>
+            <a:off x="4160520" y="4270248"/>
+            <a:ext cx="5029200" cy="123444"/>
+          </a:xfrm>
+          <a:prstGeom prst="rect">
+            <a:avLst/>
+          </a:prstGeom>
+          <a:solidFill>
+            <a:srgbClr val="252635"/>
+          </a:solidFill>
+          <a:ln>
+            <a:noFill/>
+          </a:ln>
+        </p:spPr>
+        <p:style>
+          <a:lnRef idx="1">
+            <a:schemeClr val="accent1"/>
+          </a:lnRef>
+          <a:fillRef idx="3">
+            <a:schemeClr val="accent1"/>
+          </a:fillRef>
+          <a:effectRef idx="2">
+            <a:schemeClr val="accent1"/>
+          </a:effectRef>
+          <a:fontRef idx="minor">
+            <a:schemeClr val="lt1"/>
+          </a:fontRef>
+        </p:style>
+        <p:txBody>
+          <a:bodyPr rtlCol="0" anchor="ctr"/>
+          <a:lstStyle/>
+          <a:p>
+            <a:pPr algn="ctr"/>
+          </a:p>
+        </p:txBody>
+      </p:sp>
+      <p:sp>
+        <p:nvSpPr>
+          <p:cNvPr id="107" name="Rectangle 106"/>
+          <p:cNvSpPr/>
+          <p:nvPr/>
+        </p:nvSpPr>
+        <p:spPr>
+          <a:xfrm>
+            <a:off x="4160520" y="4270248"/>
+            <a:ext cx="3352967" cy="123444"/>
+          </a:xfrm>
+          <a:prstGeom prst="rect">
+            <a:avLst/>
+          </a:prstGeom>
+          <a:solidFill>
+            <a:srgbClr val="10B981"/>
+          </a:solidFill>
+          <a:ln>
+            <a:noFill/>
+          </a:ln>
+        </p:spPr>
+        <p:style>
+          <a:lnRef idx="1">
+            <a:schemeClr val="accent1"/>
+          </a:lnRef>
+          <a:fillRef idx="3">
+            <a:schemeClr val="accent1"/>
+          </a:fillRef>
+          <a:effectRef idx="2">
+            <a:schemeClr val="accent1"/>
+          </a:effectRef>
+          <a:fontRef idx="minor">
+            <a:schemeClr val="lt1"/>
+          </a:fontRef>
+        </p:style>
+        <p:txBody>
+          <a:bodyPr rtlCol="0" anchor="ctr"/>
+          <a:lstStyle/>
+          <a:p>
+            <a:pPr algn="ctr"/>
+          </a:p>
+        </p:txBody>
+      </p:sp>
+      <p:sp>
+        <p:nvSpPr>
+          <p:cNvPr id="108" name="TextBox 107"/>
+          <p:cNvSpPr txBox="1"/>
+          <p:nvPr/>
+        </p:nvSpPr>
+        <p:spPr>
+          <a:xfrm>
+            <a:off x="6827687" y="4242816"/>
+            <a:ext cx="658368" cy="256032"/>
+          </a:xfrm>
+          <a:prstGeom prst="rect">
+            <a:avLst/>
+          </a:prstGeom>
+          <a:noFill/>
+        </p:spPr>
+        <p:txBody>
+          <a:bodyPr wrap="square">
+            <a:spAutoFit/>
+          </a:bodyPr>
+          <a:lstStyle/>
+          <a:p>
+            <a:pPr algn="r"/>
+            <a:r>
+              <a:rPr sz="900" b="1">
+                <a:solidFill>
+                  <a:srgbClr val="050508"/>
+                </a:solidFill>
+              </a:rPr>
+              <a:t>66.7%</a:t>
+            </a:r>
+          </a:p>
+        </p:txBody>
+      </p:sp>
+      <p:sp>
+        <p:nvSpPr>
+          <p:cNvPr id="109" name="TextBox 108"/>
+          <p:cNvSpPr txBox="1"/>
+          <p:nvPr/>
+        </p:nvSpPr>
+        <p:spPr>
+          <a:xfrm>
+            <a:off x="8979408" y="4242816"/>
+            <a:ext cx="365760" cy="256032"/>
+          </a:xfrm>
+          <a:prstGeom prst="rect">
+            <a:avLst/>
+          </a:prstGeom>
+          <a:noFill/>
+        </p:spPr>
+        <p:txBody>
+          <a:bodyPr wrap="square">
+            <a:spAutoFit/>
+          </a:bodyPr>
+          <a:lstStyle/>
+          <a:p>
+            <a:pPr algn="ctr"/>
+            <a:r>
+              <a:rPr sz="950" b="1">
+                <a:solidFill>
+                  <a:srgbClr val="10B981"/>
+                </a:solidFill>
+              </a:rPr>
+              <a:t>10</a:t>
+            </a:r>
+          </a:p>
+        </p:txBody>
+      </p:sp>
+      <p:sp>
+        <p:nvSpPr>
+          <p:cNvPr id="110" name="TextBox 109"/>
+          <p:cNvSpPr txBox="1"/>
+          <p:nvPr/>
+        </p:nvSpPr>
+        <p:spPr>
+          <a:xfrm>
+            <a:off x="9345168" y="4242816"/>
+            <a:ext cx="365760" cy="256032"/>
+          </a:xfrm>
+          <a:prstGeom prst="rect">
+            <a:avLst/>
+          </a:prstGeom>
+          <a:noFill/>
+        </p:spPr>
+        <p:txBody>
+          <a:bodyPr wrap="square">
+            <a:spAutoFit/>
+          </a:bodyPr>
+          <a:lstStyle/>
+          <a:p>
+            <a:pPr algn="ctr"/>
+            <a:r>
+              <a:rPr sz="950" b="0">
+                <a:solidFill>
+                  <a:srgbClr val="EF4444"/>
+                </a:solidFill>
+              </a:rPr>
+              <a:t>5</a:t>
+            </a:r>
+          </a:p>
+        </p:txBody>
+      </p:sp>
+      <p:sp>
+        <p:nvSpPr>
+          <p:cNvPr id="111" name="TextBox 110"/>
+          <p:cNvSpPr txBox="1"/>
+          <p:nvPr/>
+        </p:nvSpPr>
+        <p:spPr>
+          <a:xfrm>
+            <a:off x="9802368" y="4242816"/>
+            <a:ext cx="457200" cy="256032"/>
+          </a:xfrm>
+          <a:prstGeom prst="rect">
+            <a:avLst/>
+          </a:prstGeom>
+          <a:noFill/>
+        </p:spPr>
+        <p:txBody>
+          <a:bodyPr wrap="square">
+            <a:spAutoFit/>
+          </a:bodyPr>
+          <a:lstStyle/>
+          <a:p>
+            <a:pPr algn="ctr"/>
+            <a:r>
+              <a:rPr sz="900" b="0">
+                <a:solidFill>
+                  <a:srgbClr val="94A3B8"/>
+                </a:solidFill>
+              </a:rPr>
+              <a:t>0.800</a:t>
+            </a:r>
+          </a:p>
+        </p:txBody>
+      </p:sp>
+      <p:sp>
+        <p:nvSpPr>
+          <p:cNvPr id="112" name="TextBox 111"/>
+          <p:cNvSpPr txBox="1"/>
+          <p:nvPr/>
+        </p:nvSpPr>
+        <p:spPr>
+          <a:xfrm>
+            <a:off x="10314432" y="4242816"/>
+            <a:ext cx="822960" cy="256032"/>
+          </a:xfrm>
+          <a:prstGeom prst="rect">
+            <a:avLst/>
+          </a:prstGeom>
+          <a:noFill/>
+        </p:spPr>
+        <p:txBody>
+          <a:bodyPr wrap="square">
+            <a:spAutoFit/>
+          </a:bodyPr>
+          <a:lstStyle/>
+          <a:p>
+            <a:pPr algn="r"/>
+            <a:r>
+              <a:rPr sz="900" b="0">
+                <a:solidFill>
+                  <a:srgbClr val="94A3B8"/>
+                </a:solidFill>
+              </a:rPr>
+              <a:t>16.41ms</a:t>
+            </a:r>
+          </a:p>
+        </p:txBody>
+      </p:sp>
+      <p:sp>
+        <p:nvSpPr>
+          <p:cNvPr id="113" name="TextBox 112"/>
+          <p:cNvSpPr txBox="1"/>
+          <p:nvPr/>
+        </p:nvSpPr>
+        <p:spPr>
+          <a:xfrm>
+            <a:off x="11173968" y="4242816"/>
+            <a:ext cx="548640" cy="256032"/>
+          </a:xfrm>
+          <a:prstGeom prst="rect">
+            <a:avLst/>
+          </a:prstGeom>
+          <a:noFill/>
+        </p:spPr>
+        <p:txBody>
+          <a:bodyPr wrap="square">
+            <a:spAutoFit/>
+          </a:bodyPr>
+          <a:lstStyle/>
+          <a:p>
+            <a:pPr algn="ctr"/>
+            <a:r>
+              <a:rPr sz="850" b="1">
+                <a:solidFill>
+                  <a:srgbClr val="3B82F6"/>
+                </a:solidFill>
+              </a:rPr>
+              <a:t>T1</a:t>
+            </a:r>
+          </a:p>
+        </p:txBody>
+      </p:sp>
+      <p:sp>
+        <p:nvSpPr>
+          <p:cNvPr id="114" name="Rectangle 113"/>
+          <p:cNvSpPr/>
+          <p:nvPr/>
+        </p:nvSpPr>
+        <p:spPr>
+          <a:xfrm>
+            <a:off x="365760" y="4530852"/>
+            <a:ext cx="11430000" cy="342900"/>
+          </a:xfrm>
+          <a:prstGeom prst="rect">
+            <a:avLst/>
+          </a:prstGeom>
+          <a:solidFill>
+            <a:srgbClr val="12131B"/>
+          </a:solidFill>
+          <a:ln w="12700">
+            <a:noFill/>
+          </a:ln>
+        </p:spPr>
+        <p:style>
+          <a:lnRef idx="1">
+            <a:schemeClr val="accent1"/>
+          </a:lnRef>
+          <a:fillRef idx="3">
+            <a:schemeClr val="accent1"/>
+          </a:fillRef>
+          <a:effectRef idx="2">
+            <a:schemeClr val="accent1"/>
+          </a:effectRef>
+          <a:fontRef idx="minor">
+            <a:schemeClr val="lt1"/>
+          </a:fontRef>
+        </p:style>
+        <p:txBody>
+          <a:bodyPr rtlCol="0" anchor="ctr"/>
+          <a:lstStyle/>
+          <a:p>
+            <a:pPr algn="ctr"/>
+          </a:p>
+        </p:txBody>
+      </p:sp>
+      <p:sp>
+        <p:nvSpPr>
+          <p:cNvPr id="115" name="TextBox 114"/>
+          <p:cNvSpPr txBox="1"/>
+          <p:nvPr/>
+        </p:nvSpPr>
+        <p:spPr>
+          <a:xfrm>
+            <a:off x="438912" y="4594860"/>
+            <a:ext cx="2834640" cy="228600"/>
+          </a:xfrm>
+          <a:prstGeom prst="rect">
+            <a:avLst/>
+          </a:prstGeom>
+          <a:noFill/>
+        </p:spPr>
+        <p:txBody>
+          <a:bodyPr wrap="square">
+            <a:spAutoFit/>
+          </a:bodyPr>
+          <a:lstStyle/>
+          <a:p>
+            <a:pPr algn="l"/>
+            <a:r>
+              <a:rPr sz="900" b="0">
+                <a:solidFill>
+                  <a:srgbClr val="FFFFFF"/>
+                </a:solidFill>
+              </a:rPr>
+              <a:t>10  Code Injection</a:t>
+            </a:r>
+          </a:p>
+        </p:txBody>
+      </p:sp>
+      <p:sp>
+        <p:nvSpPr>
+          <p:cNvPr id="116" name="TextBox 115"/>
+          <p:cNvSpPr txBox="1"/>
+          <p:nvPr/>
+        </p:nvSpPr>
+        <p:spPr>
+          <a:xfrm>
+            <a:off x="3310128" y="4585716"/>
+            <a:ext cx="777240" cy="256032"/>
+          </a:xfrm>
+          <a:prstGeom prst="rect">
+            <a:avLst/>
+          </a:prstGeom>
+          <a:noFill/>
+        </p:spPr>
+        <p:txBody>
+          <a:bodyPr wrap="square">
+            <a:spAutoFit/>
+          </a:bodyPr>
+          <a:lstStyle/>
+          <a:p>
+            <a:pPr algn="r"/>
+            <a:r>
+              <a:rPr sz="1000" b="1">
+                <a:solidFill>
+                  <a:srgbClr val="10B981"/>
+                </a:solidFill>
+              </a:rPr>
+              <a:t>93.3%</a:t>
+            </a:r>
+          </a:p>
+        </p:txBody>
+      </p:sp>
+      <p:sp>
+        <p:nvSpPr>
+          <p:cNvPr id="117" name="Rectangle 116"/>
+          <p:cNvSpPr/>
+          <p:nvPr/>
+        </p:nvSpPr>
+        <p:spPr>
+          <a:xfrm>
+            <a:off x="4160520" y="4622292"/>
+            <a:ext cx="5029200" cy="123444"/>
+          </a:xfrm>
+          <a:prstGeom prst="rect">
+            <a:avLst/>
+          </a:prstGeom>
+          <a:solidFill>
+            <a:srgbClr val="252635"/>
+          </a:solidFill>
+          <a:ln>
+            <a:noFill/>
+          </a:ln>
+        </p:spPr>
+        <p:style>
+          <a:lnRef idx="1">
+            <a:schemeClr val="accent1"/>
+          </a:lnRef>
+          <a:fillRef idx="3">
+            <a:schemeClr val="accent1"/>
+          </a:fillRef>
+          <a:effectRef idx="2">
+            <a:schemeClr val="accent1"/>
+          </a:effectRef>
+          <a:fontRef idx="minor">
+            <a:schemeClr val="lt1"/>
+          </a:fontRef>
+        </p:style>
+        <p:txBody>
+          <a:bodyPr rtlCol="0" anchor="ctr"/>
+          <a:lstStyle/>
+          <a:p>
+            <a:pPr algn="ctr"/>
+          </a:p>
+        </p:txBody>
+      </p:sp>
+      <p:sp>
+        <p:nvSpPr>
+          <p:cNvPr id="118" name="Rectangle 117"/>
+          <p:cNvSpPr/>
+          <p:nvPr/>
+        </p:nvSpPr>
+        <p:spPr>
+          <a:xfrm>
+            <a:off x="4160520" y="4622292"/>
+            <a:ext cx="4693752" cy="123444"/>
+          </a:xfrm>
+          <a:prstGeom prst="rect">
+            <a:avLst/>
+          </a:prstGeom>
+          <a:solidFill>
+            <a:srgbClr val="10B981"/>
+          </a:solidFill>
+          <a:ln>
+            <a:noFill/>
+          </a:ln>
+        </p:spPr>
+        <p:style>
+          <a:lnRef idx="1">
+            <a:schemeClr val="accent1"/>
+          </a:lnRef>
+          <a:fillRef idx="3">
+            <a:schemeClr val="accent1"/>
+          </a:fillRef>
+          <a:effectRef idx="2">
+            <a:schemeClr val="accent1"/>
+          </a:effectRef>
+          <a:fontRef idx="minor">
+            <a:schemeClr val="lt1"/>
+          </a:fontRef>
+        </p:style>
+        <p:txBody>
+          <a:bodyPr rtlCol="0" anchor="ctr"/>
+          <a:lstStyle/>
+          <a:p>
+            <a:pPr algn="ctr"/>
+          </a:p>
+        </p:txBody>
+      </p:sp>
+      <p:sp>
+        <p:nvSpPr>
+          <p:cNvPr id="119" name="TextBox 118"/>
+          <p:cNvSpPr txBox="1"/>
+          <p:nvPr/>
+        </p:nvSpPr>
+        <p:spPr>
+          <a:xfrm>
+            <a:off x="8168472" y="4594860"/>
+            <a:ext cx="658368" cy="256032"/>
+          </a:xfrm>
+          <a:prstGeom prst="rect">
+            <a:avLst/>
+          </a:prstGeom>
+          <a:noFill/>
+        </p:spPr>
+        <p:txBody>
+          <a:bodyPr wrap="square">
+            <a:spAutoFit/>
+          </a:bodyPr>
+          <a:lstStyle/>
+          <a:p>
+            <a:pPr algn="r"/>
+            <a:r>
+              <a:rPr sz="900" b="1">
+                <a:solidFill>
+                  <a:srgbClr val="050508"/>
+                </a:solidFill>
+              </a:rPr>
+              <a:t>93.3%</a:t>
+            </a:r>
+          </a:p>
+        </p:txBody>
+      </p:sp>
+      <p:sp>
+        <p:nvSpPr>
+          <p:cNvPr id="120" name="TextBox 119"/>
+          <p:cNvSpPr txBox="1"/>
+          <p:nvPr/>
+        </p:nvSpPr>
+        <p:spPr>
+          <a:xfrm>
+            <a:off x="8979408" y="4594860"/>
+            <a:ext cx="365760" cy="256032"/>
+          </a:xfrm>
+          <a:prstGeom prst="rect">
+            <a:avLst/>
+          </a:prstGeom>
+          <a:noFill/>
+        </p:spPr>
+        <p:txBody>
+          <a:bodyPr wrap="square">
+            <a:spAutoFit/>
+          </a:bodyPr>
+          <a:lstStyle/>
+          <a:p>
+            <a:pPr algn="ctr"/>
+            <a:r>
+              <a:rPr sz="950" b="1">
+                <a:solidFill>
+                  <a:srgbClr val="10B981"/>
+                </a:solidFill>
+              </a:rPr>
+              <a:t>14</a:t>
+            </a:r>
+          </a:p>
+        </p:txBody>
+      </p:sp>
+      <p:sp>
+        <p:nvSpPr>
+          <p:cNvPr id="121" name="TextBox 120"/>
+          <p:cNvSpPr txBox="1"/>
+          <p:nvPr/>
+        </p:nvSpPr>
+        <p:spPr>
+          <a:xfrm>
+            <a:off x="9345168" y="4594860"/>
+            <a:ext cx="365760" cy="256032"/>
+          </a:xfrm>
+          <a:prstGeom prst="rect">
+            <a:avLst/>
+          </a:prstGeom>
+          <a:noFill/>
+        </p:spPr>
+        <p:txBody>
+          <a:bodyPr wrap="square">
+            <a:spAutoFit/>
+          </a:bodyPr>
+          <a:lstStyle/>
+          <a:p>
+            <a:pPr algn="ctr"/>
+            <a:r>
+              <a:rPr sz="950" b="0">
+                <a:solidFill>
+                  <a:srgbClr val="EF4444"/>
+                </a:solidFill>
+              </a:rPr>
+              <a:t>1</a:t>
+            </a:r>
+          </a:p>
+        </p:txBody>
+      </p:sp>
+      <p:sp>
+        <p:nvSpPr>
+          <p:cNvPr id="122" name="TextBox 121"/>
+          <p:cNvSpPr txBox="1"/>
+          <p:nvPr/>
+        </p:nvSpPr>
+        <p:spPr>
+          <a:xfrm>
+            <a:off x="9802368" y="4594860"/>
+            <a:ext cx="457200" cy="256032"/>
+          </a:xfrm>
+          <a:prstGeom prst="rect">
+            <a:avLst/>
+          </a:prstGeom>
+          <a:noFill/>
+        </p:spPr>
+        <p:txBody>
+          <a:bodyPr wrap="square">
+            <a:spAutoFit/>
+          </a:bodyPr>
+          <a:lstStyle/>
+          <a:p>
+            <a:pPr algn="ctr"/>
+            <a:r>
+              <a:rPr sz="900" b="0">
+                <a:solidFill>
+                  <a:srgbClr val="94A3B8"/>
+                </a:solidFill>
+              </a:rPr>
+              <a:t>0.966</a:t>
+            </a:r>
+          </a:p>
+        </p:txBody>
+      </p:sp>
+      <p:sp>
+        <p:nvSpPr>
+          <p:cNvPr id="123" name="TextBox 122"/>
+          <p:cNvSpPr txBox="1"/>
+          <p:nvPr/>
+        </p:nvSpPr>
+        <p:spPr>
+          <a:xfrm>
+            <a:off x="10314432" y="4594860"/>
+            <a:ext cx="822960" cy="256032"/>
+          </a:xfrm>
+          <a:prstGeom prst="rect">
+            <a:avLst/>
+          </a:prstGeom>
+          <a:noFill/>
+        </p:spPr>
+        <p:txBody>
+          <a:bodyPr wrap="square">
+            <a:spAutoFit/>
+          </a:bodyPr>
+          <a:lstStyle/>
+          <a:p>
+            <a:pPr algn="r"/>
+            <a:r>
+              <a:rPr sz="900" b="0">
+                <a:solidFill>
+                  <a:srgbClr val="94A3B8"/>
+                </a:solidFill>
+              </a:rPr>
+              <a:t>16.41ms</a:t>
+            </a:r>
+          </a:p>
+        </p:txBody>
+      </p:sp>
+      <p:sp>
+        <p:nvSpPr>
+          <p:cNvPr id="124" name="TextBox 123"/>
+          <p:cNvSpPr txBox="1"/>
+          <p:nvPr/>
+        </p:nvSpPr>
+        <p:spPr>
+          <a:xfrm>
+            <a:off x="11173968" y="4594860"/>
+            <a:ext cx="548640" cy="256032"/>
+          </a:xfrm>
+          <a:prstGeom prst="rect">
+            <a:avLst/>
+          </a:prstGeom>
+          <a:noFill/>
+        </p:spPr>
+        <p:txBody>
+          <a:bodyPr wrap="square">
+            <a:spAutoFit/>
+          </a:bodyPr>
+          <a:lstStyle/>
+          <a:p>
+            <a:pPr algn="ctr"/>
+            <a:r>
+              <a:rPr sz="850" b="1">
+                <a:solidFill>
+                  <a:srgbClr val="3B82F6"/>
+                </a:solidFill>
+              </a:rPr>
+              <a:t>T1</a:t>
+            </a:r>
+          </a:p>
+        </p:txBody>
+      </p:sp>
+      <p:sp>
+        <p:nvSpPr>
+          <p:cNvPr id="125" name="Rectangle 124"/>
+          <p:cNvSpPr/>
+          <p:nvPr/>
+        </p:nvSpPr>
+        <p:spPr>
+          <a:xfrm>
+            <a:off x="365760" y="4882896"/>
+            <a:ext cx="11430000" cy="342900"/>
+          </a:xfrm>
+          <a:prstGeom prst="rect">
+            <a:avLst/>
+          </a:prstGeom>
+          <a:solidFill>
+            <a:srgbClr val="1A1B23"/>
+          </a:solidFill>
+          <a:ln w="12700">
+            <a:noFill/>
+          </a:ln>
+        </p:spPr>
+        <p:style>
+          <a:lnRef idx="1">
+            <a:schemeClr val="accent1"/>
+          </a:lnRef>
+          <a:fillRef idx="3">
+            <a:schemeClr val="accent1"/>
+          </a:fillRef>
+          <a:effectRef idx="2">
+            <a:schemeClr val="accent1"/>
+          </a:effectRef>
+          <a:fontRef idx="minor">
+            <a:schemeClr val="lt1"/>
+          </a:fontRef>
+        </p:style>
+        <p:txBody>
+          <a:bodyPr rtlCol="0" anchor="ctr"/>
+          <a:lstStyle/>
+          <a:p>
+            <a:pPr algn="ctr"/>
+          </a:p>
+        </p:txBody>
+      </p:sp>
+      <p:sp>
+        <p:nvSpPr>
+          <p:cNvPr id="126" name="TextBox 125"/>
+          <p:cNvSpPr txBox="1"/>
+          <p:nvPr/>
+        </p:nvSpPr>
+        <p:spPr>
+          <a:xfrm>
+            <a:off x="438912" y="4946904"/>
+            <a:ext cx="2834640" cy="228600"/>
+          </a:xfrm>
+          <a:prstGeom prst="rect">
+            <a:avLst/>
+          </a:prstGeom>
+          <a:noFill/>
+        </p:spPr>
+        <p:txBody>
+          <a:bodyPr wrap="square">
+            <a:spAutoFit/>
+          </a:bodyPr>
+          <a:lstStyle/>
+          <a:p>
+            <a:pPr algn="l"/>
+            <a:r>
+              <a:rPr sz="900" b="0">
+                <a:solidFill>
+                  <a:srgbClr val="FFFFFF"/>
+                </a:solidFill>
+              </a:rPr>
+              <a:t>11  Resource Exhaustion</a:t>
+            </a:r>
+          </a:p>
+        </p:txBody>
+      </p:sp>
+      <p:sp>
+        <p:nvSpPr>
+          <p:cNvPr id="127" name="TextBox 126"/>
+          <p:cNvSpPr txBox="1"/>
+          <p:nvPr/>
+        </p:nvSpPr>
+        <p:spPr>
+          <a:xfrm>
+            <a:off x="3310128" y="4937759"/>
+            <a:ext cx="777240" cy="256032"/>
+          </a:xfrm>
+          <a:prstGeom prst="rect">
+            <a:avLst/>
+          </a:prstGeom>
+          <a:noFill/>
+        </p:spPr>
+        <p:txBody>
+          <a:bodyPr wrap="square">
+            <a:spAutoFit/>
+          </a:bodyPr>
+          <a:lstStyle/>
+          <a:p>
+            <a:pPr algn="r"/>
+            <a:r>
+              <a:rPr sz="1000" b="1">
+                <a:solidFill>
+                  <a:srgbClr val="F59E0B"/>
+                </a:solidFill>
+              </a:rPr>
+              <a:t>20.0%</a:t>
+            </a:r>
+          </a:p>
+        </p:txBody>
+      </p:sp>
+      <p:sp>
+        <p:nvSpPr>
+          <p:cNvPr id="128" name="Rectangle 127"/>
+          <p:cNvSpPr/>
+          <p:nvPr/>
+        </p:nvSpPr>
+        <p:spPr>
+          <a:xfrm>
+            <a:off x="4160520" y="4974336"/>
+            <a:ext cx="5029200" cy="123444"/>
+          </a:xfrm>
+          <a:prstGeom prst="rect">
+            <a:avLst/>
+          </a:prstGeom>
+          <a:solidFill>
+            <a:srgbClr val="252635"/>
+          </a:solidFill>
+          <a:ln>
+            <a:noFill/>
+          </a:ln>
+        </p:spPr>
+        <p:style>
+          <a:lnRef idx="1">
+            <a:schemeClr val="accent1"/>
+          </a:lnRef>
+          <a:fillRef idx="3">
+            <a:schemeClr val="accent1"/>
+          </a:fillRef>
+          <a:effectRef idx="2">
+            <a:schemeClr val="accent1"/>
+          </a:effectRef>
+          <a:fontRef idx="minor">
+            <a:schemeClr val="lt1"/>
+          </a:fontRef>
+        </p:style>
+        <p:txBody>
+          <a:bodyPr rtlCol="0" anchor="ctr"/>
+          <a:lstStyle/>
+          <a:p>
+            <a:pPr algn="ctr"/>
+          </a:p>
+        </p:txBody>
+      </p:sp>
+      <p:sp>
+        <p:nvSpPr>
+          <p:cNvPr id="129" name="Rectangle 128"/>
+          <p:cNvSpPr/>
+          <p:nvPr/>
+        </p:nvSpPr>
+        <p:spPr>
+          <a:xfrm>
+            <a:off x="4160520" y="4974336"/>
+            <a:ext cx="1005840" cy="123444"/>
           </a:xfrm>
           <a:prstGeom prst="rect">
             <a:avLst/>
@@ -12029,13 +14914,13 @@
       </p:sp>
       <p:sp>
         <p:nvSpPr>
-          <p:cNvPr id="51" name="TextBox 50"/>
-          <p:cNvSpPr txBox="1"/>
-          <p:nvPr/>
-        </p:nvSpPr>
-        <p:spPr>
-          <a:xfrm>
-            <a:off x="7246148" y="2482596"/>
+          <p:cNvPr id="130" name="TextBox 129"/>
+          <p:cNvSpPr txBox="1"/>
+          <p:nvPr/>
+        </p:nvSpPr>
+        <p:spPr>
+          <a:xfrm>
+            <a:off x="4480560" y="4946904"/>
             <a:ext cx="658368" cy="256032"/>
           </a:xfrm>
           <a:prstGeom prst="rect">
@@ -12063,13 +14948,13 @@
       </p:sp>
       <p:sp>
         <p:nvSpPr>
-          <p:cNvPr id="52" name="TextBox 51"/>
-          <p:cNvSpPr txBox="1"/>
-          <p:nvPr/>
-        </p:nvSpPr>
-        <p:spPr>
-          <a:xfrm>
-            <a:off x="8979408" y="2482596"/>
+          <p:cNvPr id="131" name="TextBox 130"/>
+          <p:cNvSpPr txBox="1"/>
+          <p:nvPr/>
+        </p:nvSpPr>
+        <p:spPr>
+          <a:xfrm>
+            <a:off x="8979408" y="4946904"/>
             <a:ext cx="365760" cy="256032"/>
           </a:xfrm>
           <a:prstGeom prst="rect">
@@ -12097,13 +14982,13 @@
       </p:sp>
       <p:sp>
         <p:nvSpPr>
-          <p:cNvPr id="53" name="TextBox 52"/>
-          <p:cNvSpPr txBox="1"/>
-          <p:nvPr/>
-        </p:nvSpPr>
-        <p:spPr>
-          <a:xfrm>
-            <a:off x="9345168" y="2482596"/>
+          <p:cNvPr id="132" name="TextBox 131"/>
+          <p:cNvSpPr txBox="1"/>
+          <p:nvPr/>
+        </p:nvSpPr>
+        <p:spPr>
+          <a:xfrm>
+            <a:off x="9345168" y="4946904"/>
             <a:ext cx="365760" cy="256032"/>
           </a:xfrm>
           <a:prstGeom prst="rect">
@@ -12131,13 +15016,13 @@
       </p:sp>
       <p:sp>
         <p:nvSpPr>
-          <p:cNvPr id="54" name="TextBox 53"/>
-          <p:cNvSpPr txBox="1"/>
-          <p:nvPr/>
-        </p:nvSpPr>
-        <p:spPr>
-          <a:xfrm>
-            <a:off x="9802368" y="2482596"/>
+          <p:cNvPr id="133" name="TextBox 132"/>
+          <p:cNvSpPr txBox="1"/>
+          <p:nvPr/>
+        </p:nvSpPr>
+        <p:spPr>
+          <a:xfrm>
+            <a:off x="9802368" y="4946904"/>
             <a:ext cx="457200" cy="256032"/>
           </a:xfrm>
           <a:prstGeom prst="rect">
@@ -12165,13 +15050,13 @@
       </p:sp>
       <p:sp>
         <p:nvSpPr>
-          <p:cNvPr id="55" name="TextBox 54"/>
-          <p:cNvSpPr txBox="1"/>
-          <p:nvPr/>
-        </p:nvSpPr>
-        <p:spPr>
-          <a:xfrm>
-            <a:off x="10314432" y="2482596"/>
+          <p:cNvPr id="134" name="TextBox 133"/>
+          <p:cNvSpPr txBox="1"/>
+          <p:nvPr/>
+        </p:nvSpPr>
+        <p:spPr>
+          <a:xfrm>
+            <a:off x="10314432" y="4946904"/>
             <a:ext cx="822960" cy="256032"/>
           </a:xfrm>
           <a:prstGeom prst="rect">
@@ -12192,20 +15077,20 @@
                   <a:srgbClr val="94A3B8"/>
                 </a:solidFill>
               </a:rPr>
-              <a:t>0.2ms</a:t>
-            </a:r>
-          </a:p>
-        </p:txBody>
-      </p:sp>
-      <p:sp>
-        <p:nvSpPr>
-          <p:cNvPr id="56" name="TextBox 55"/>
-          <p:cNvSpPr txBox="1"/>
-          <p:nvPr/>
-        </p:nvSpPr>
-        <p:spPr>
-          <a:xfrm>
-            <a:off x="11173968" y="2482596"/>
+              <a:t>16.41ms</a:t>
+            </a:r>
+          </a:p>
+        </p:txBody>
+      </p:sp>
+      <p:sp>
+        <p:nvSpPr>
+          <p:cNvPr id="135" name="TextBox 134"/>
+          <p:cNvSpPr txBox="1"/>
+          <p:nvPr/>
+        </p:nvSpPr>
+        <p:spPr>
+          <a:xfrm>
+            <a:off x="11173968" y="4946904"/>
             <a:ext cx="548640" cy="256032"/>
           </a:xfrm>
           <a:prstGeom prst="rect">
@@ -12223,23 +15108,424 @@
             <a:r>
               <a:rPr sz="850" b="1">
                 <a:solidFill>
+                  <a:srgbClr val="3B82F6"/>
+                </a:solidFill>
+              </a:rPr>
+              <a:t>T1</a:t>
+            </a:r>
+          </a:p>
+        </p:txBody>
+      </p:sp>
+      <p:sp>
+        <p:nvSpPr>
+          <p:cNvPr id="136" name="Rectangle 135"/>
+          <p:cNvSpPr/>
+          <p:nvPr/>
+        </p:nvSpPr>
+        <p:spPr>
+          <a:xfrm>
+            <a:off x="365760" y="5234940"/>
+            <a:ext cx="11430000" cy="342900"/>
+          </a:xfrm>
+          <a:prstGeom prst="rect">
+            <a:avLst/>
+          </a:prstGeom>
+          <a:solidFill>
+            <a:srgbClr val="12131B"/>
+          </a:solidFill>
+          <a:ln w="12700">
+            <a:noFill/>
+          </a:ln>
+        </p:spPr>
+        <p:style>
+          <a:lnRef idx="1">
+            <a:schemeClr val="accent1"/>
+          </a:lnRef>
+          <a:fillRef idx="3">
+            <a:schemeClr val="accent1"/>
+          </a:fillRef>
+          <a:effectRef idx="2">
+            <a:schemeClr val="accent1"/>
+          </a:effectRef>
+          <a:fontRef idx="minor">
+            <a:schemeClr val="lt1"/>
+          </a:fontRef>
+        </p:style>
+        <p:txBody>
+          <a:bodyPr rtlCol="0" anchor="ctr"/>
+          <a:lstStyle/>
+          <a:p>
+            <a:pPr algn="ctr"/>
+          </a:p>
+        </p:txBody>
+      </p:sp>
+      <p:sp>
+        <p:nvSpPr>
+          <p:cNvPr id="137" name="TextBox 136"/>
+          <p:cNvSpPr txBox="1"/>
+          <p:nvPr/>
+        </p:nvSpPr>
+        <p:spPr>
+          <a:xfrm>
+            <a:off x="438912" y="5298948"/>
+            <a:ext cx="2834640" cy="228600"/>
+          </a:xfrm>
+          <a:prstGeom prst="rect">
+            <a:avLst/>
+          </a:prstGeom>
+          <a:noFill/>
+        </p:spPr>
+        <p:txBody>
+          <a:bodyPr wrap="square">
+            <a:spAutoFit/>
+          </a:bodyPr>
+          <a:lstStyle/>
+          <a:p>
+            <a:pPr algn="l"/>
+            <a:r>
+              <a:rPr sz="900" b="0">
+                <a:solidFill>
+                  <a:srgbClr val="FFFFFF"/>
+                </a:solidFill>
+              </a:rPr>
+              <a:t>12  Data Poisoning (RAG)</a:t>
+            </a:r>
+          </a:p>
+        </p:txBody>
+      </p:sp>
+      <p:sp>
+        <p:nvSpPr>
+          <p:cNvPr id="138" name="TextBox 137"/>
+          <p:cNvSpPr txBox="1"/>
+          <p:nvPr/>
+        </p:nvSpPr>
+        <p:spPr>
+          <a:xfrm>
+            <a:off x="3310128" y="5289804"/>
+            <a:ext cx="777240" cy="256032"/>
+          </a:xfrm>
+          <a:prstGeom prst="rect">
+            <a:avLst/>
+          </a:prstGeom>
+          <a:noFill/>
+        </p:spPr>
+        <p:txBody>
+          <a:bodyPr wrap="square">
+            <a:spAutoFit/>
+          </a:bodyPr>
+          <a:lstStyle/>
+          <a:p>
+            <a:pPr algn="r"/>
+            <a:r>
+              <a:rPr sz="1000" b="1">
+                <a:solidFill>
                   <a:srgbClr val="10B981"/>
                 </a:solidFill>
               </a:rPr>
-              <a:t>T0.5</a:t>
-            </a:r>
-          </a:p>
-        </p:txBody>
-      </p:sp>
-      <p:sp>
-        <p:nvSpPr>
-          <p:cNvPr id="57" name="Rectangle 56"/>
+              <a:t>86.7%</a:t>
+            </a:r>
+          </a:p>
+        </p:txBody>
+      </p:sp>
+      <p:sp>
+        <p:nvSpPr>
+          <p:cNvPr id="139" name="Rectangle 138"/>
           <p:cNvSpPr/>
           <p:nvPr/>
         </p:nvSpPr>
         <p:spPr>
           <a:xfrm>
-            <a:off x="365760" y="2770632"/>
+            <a:off x="4160520" y="5326380"/>
+            <a:ext cx="5029200" cy="123444"/>
+          </a:xfrm>
+          <a:prstGeom prst="rect">
+            <a:avLst/>
+          </a:prstGeom>
+          <a:solidFill>
+            <a:srgbClr val="252635"/>
+          </a:solidFill>
+          <a:ln>
+            <a:noFill/>
+          </a:ln>
+        </p:spPr>
+        <p:style>
+          <a:lnRef idx="1">
+            <a:schemeClr val="accent1"/>
+          </a:lnRef>
+          <a:fillRef idx="3">
+            <a:schemeClr val="accent1"/>
+          </a:fillRef>
+          <a:effectRef idx="2">
+            <a:schemeClr val="accent1"/>
+          </a:effectRef>
+          <a:fontRef idx="minor">
+            <a:schemeClr val="lt1"/>
+          </a:fontRef>
+        </p:style>
+        <p:txBody>
+          <a:bodyPr rtlCol="0" anchor="ctr"/>
+          <a:lstStyle/>
+          <a:p>
+            <a:pPr algn="ctr"/>
+          </a:p>
+        </p:txBody>
+      </p:sp>
+      <p:sp>
+        <p:nvSpPr>
+          <p:cNvPr id="140" name="Rectangle 139"/>
+          <p:cNvSpPr/>
+          <p:nvPr/>
+        </p:nvSpPr>
+        <p:spPr>
+          <a:xfrm>
+            <a:off x="4160520" y="5326380"/>
+            <a:ext cx="4358807" cy="123444"/>
+          </a:xfrm>
+          <a:prstGeom prst="rect">
+            <a:avLst/>
+          </a:prstGeom>
+          <a:solidFill>
+            <a:srgbClr val="10B981"/>
+          </a:solidFill>
+          <a:ln>
+            <a:noFill/>
+          </a:ln>
+        </p:spPr>
+        <p:style>
+          <a:lnRef idx="1">
+            <a:schemeClr val="accent1"/>
+          </a:lnRef>
+          <a:fillRef idx="3">
+            <a:schemeClr val="accent1"/>
+          </a:fillRef>
+          <a:effectRef idx="2">
+            <a:schemeClr val="accent1"/>
+          </a:effectRef>
+          <a:fontRef idx="minor">
+            <a:schemeClr val="lt1"/>
+          </a:fontRef>
+        </p:style>
+        <p:txBody>
+          <a:bodyPr rtlCol="0" anchor="ctr"/>
+          <a:lstStyle/>
+          <a:p>
+            <a:pPr algn="ctr"/>
+          </a:p>
+        </p:txBody>
+      </p:sp>
+      <p:sp>
+        <p:nvSpPr>
+          <p:cNvPr id="141" name="TextBox 140"/>
+          <p:cNvSpPr txBox="1"/>
+          <p:nvPr/>
+        </p:nvSpPr>
+        <p:spPr>
+          <a:xfrm>
+            <a:off x="7833527" y="5298948"/>
+            <a:ext cx="658368" cy="256032"/>
+          </a:xfrm>
+          <a:prstGeom prst="rect">
+            <a:avLst/>
+          </a:prstGeom>
+          <a:noFill/>
+        </p:spPr>
+        <p:txBody>
+          <a:bodyPr wrap="square">
+            <a:spAutoFit/>
+          </a:bodyPr>
+          <a:lstStyle/>
+          <a:p>
+            <a:pPr algn="r"/>
+            <a:r>
+              <a:rPr sz="900" b="1">
+                <a:solidFill>
+                  <a:srgbClr val="050508"/>
+                </a:solidFill>
+              </a:rPr>
+              <a:t>86.7%</a:t>
+            </a:r>
+          </a:p>
+        </p:txBody>
+      </p:sp>
+      <p:sp>
+        <p:nvSpPr>
+          <p:cNvPr id="142" name="TextBox 141"/>
+          <p:cNvSpPr txBox="1"/>
+          <p:nvPr/>
+        </p:nvSpPr>
+        <p:spPr>
+          <a:xfrm>
+            <a:off x="8979408" y="5298948"/>
+            <a:ext cx="365760" cy="256032"/>
+          </a:xfrm>
+          <a:prstGeom prst="rect">
+            <a:avLst/>
+          </a:prstGeom>
+          <a:noFill/>
+        </p:spPr>
+        <p:txBody>
+          <a:bodyPr wrap="square">
+            <a:spAutoFit/>
+          </a:bodyPr>
+          <a:lstStyle/>
+          <a:p>
+            <a:pPr algn="ctr"/>
+            <a:r>
+              <a:rPr sz="950" b="1">
+                <a:solidFill>
+                  <a:srgbClr val="10B981"/>
+                </a:solidFill>
+              </a:rPr>
+              <a:t>13</a:t>
+            </a:r>
+          </a:p>
+        </p:txBody>
+      </p:sp>
+      <p:sp>
+        <p:nvSpPr>
+          <p:cNvPr id="143" name="TextBox 142"/>
+          <p:cNvSpPr txBox="1"/>
+          <p:nvPr/>
+        </p:nvSpPr>
+        <p:spPr>
+          <a:xfrm>
+            <a:off x="9345168" y="5298948"/>
+            <a:ext cx="365760" cy="256032"/>
+          </a:xfrm>
+          <a:prstGeom prst="rect">
+            <a:avLst/>
+          </a:prstGeom>
+          <a:noFill/>
+        </p:spPr>
+        <p:txBody>
+          <a:bodyPr wrap="square">
+            <a:spAutoFit/>
+          </a:bodyPr>
+          <a:lstStyle/>
+          <a:p>
+            <a:pPr algn="ctr"/>
+            <a:r>
+              <a:rPr sz="950" b="0">
+                <a:solidFill>
+                  <a:srgbClr val="EF4444"/>
+                </a:solidFill>
+              </a:rPr>
+              <a:t>2</a:t>
+            </a:r>
+          </a:p>
+        </p:txBody>
+      </p:sp>
+      <p:sp>
+        <p:nvSpPr>
+          <p:cNvPr id="144" name="TextBox 143"/>
+          <p:cNvSpPr txBox="1"/>
+          <p:nvPr/>
+        </p:nvSpPr>
+        <p:spPr>
+          <a:xfrm>
+            <a:off x="9802368" y="5298948"/>
+            <a:ext cx="457200" cy="256032"/>
+          </a:xfrm>
+          <a:prstGeom prst="rect">
+            <a:avLst/>
+          </a:prstGeom>
+          <a:noFill/>
+        </p:spPr>
+        <p:txBody>
+          <a:bodyPr wrap="square">
+            <a:spAutoFit/>
+          </a:bodyPr>
+          <a:lstStyle/>
+          <a:p>
+            <a:pPr algn="ctr"/>
+            <a:r>
+              <a:rPr sz="900" b="0">
+                <a:solidFill>
+                  <a:srgbClr val="94A3B8"/>
+                </a:solidFill>
+              </a:rPr>
+              <a:t>0.929</a:t>
+            </a:r>
+          </a:p>
+        </p:txBody>
+      </p:sp>
+      <p:sp>
+        <p:nvSpPr>
+          <p:cNvPr id="145" name="TextBox 144"/>
+          <p:cNvSpPr txBox="1"/>
+          <p:nvPr/>
+        </p:nvSpPr>
+        <p:spPr>
+          <a:xfrm>
+            <a:off x="10314432" y="5298948"/>
+            <a:ext cx="822960" cy="256032"/>
+          </a:xfrm>
+          <a:prstGeom prst="rect">
+            <a:avLst/>
+          </a:prstGeom>
+          <a:noFill/>
+        </p:spPr>
+        <p:txBody>
+          <a:bodyPr wrap="square">
+            <a:spAutoFit/>
+          </a:bodyPr>
+          <a:lstStyle/>
+          <a:p>
+            <a:pPr algn="r"/>
+            <a:r>
+              <a:rPr sz="900" b="0">
+                <a:solidFill>
+                  <a:srgbClr val="94A3B8"/>
+                </a:solidFill>
+              </a:rPr>
+              <a:t>16.41ms</a:t>
+            </a:r>
+          </a:p>
+        </p:txBody>
+      </p:sp>
+      <p:sp>
+        <p:nvSpPr>
+          <p:cNvPr id="146" name="TextBox 145"/>
+          <p:cNvSpPr txBox="1"/>
+          <p:nvPr/>
+        </p:nvSpPr>
+        <p:spPr>
+          <a:xfrm>
+            <a:off x="11173968" y="5298948"/>
+            <a:ext cx="548640" cy="256032"/>
+          </a:xfrm>
+          <a:prstGeom prst="rect">
+            <a:avLst/>
+          </a:prstGeom>
+          <a:noFill/>
+        </p:spPr>
+        <p:txBody>
+          <a:bodyPr wrap="square">
+            <a:spAutoFit/>
+          </a:bodyPr>
+          <a:lstStyle/>
+          <a:p>
+            <a:pPr algn="ctr"/>
+            <a:r>
+              <a:rPr sz="850" b="1">
+                <a:solidFill>
+                  <a:srgbClr val="3B82F6"/>
+                </a:solidFill>
+              </a:rPr>
+              <a:t>T1</a:t>
+            </a:r>
+          </a:p>
+        </p:txBody>
+      </p:sp>
+      <p:sp>
+        <p:nvSpPr>
+          <p:cNvPr id="147" name="Rectangle 146"/>
+          <p:cNvSpPr/>
+          <p:nvPr/>
+        </p:nvSpPr>
+        <p:spPr>
+          <a:xfrm>
+            <a:off x="365760" y="5586984"/>
             <a:ext cx="11430000" cy="342900"/>
           </a:xfrm>
           <a:prstGeom prst="rect">
@@ -12276,13 +15562,13 @@
       </p:sp>
       <p:sp>
         <p:nvSpPr>
-          <p:cNvPr id="58" name="TextBox 57"/>
-          <p:cNvSpPr txBox="1"/>
-          <p:nvPr/>
-        </p:nvSpPr>
-        <p:spPr>
-          <a:xfrm>
-            <a:off x="438912" y="2834640"/>
+          <p:cNvPr id="148" name="TextBox 147"/>
+          <p:cNvSpPr txBox="1"/>
+          <p:nvPr/>
+        </p:nvSpPr>
+        <p:spPr>
+          <a:xfrm>
+            <a:off x="438912" y="5650992"/>
             <a:ext cx="2834640" cy="228600"/>
           </a:xfrm>
           <a:prstGeom prst="rect">
@@ -12298,25 +15584,25 @@
           <a:p>
             <a:pPr algn="l"/>
             <a:r>
-              <a:rPr sz="900" b="0">
-                <a:solidFill>
-                  <a:srgbClr val="FFFFFF"/>
-                </a:solidFill>
-              </a:rPr>
-              <a:t>05  Multi-Turn Adversarial</a:t>
-            </a:r>
-          </a:p>
-        </p:txBody>
-      </p:sp>
-      <p:sp>
-        <p:nvSpPr>
-          <p:cNvPr id="59" name="TextBox 58"/>
-          <p:cNvSpPr txBox="1"/>
-          <p:nvPr/>
-        </p:nvSpPr>
-        <p:spPr>
-          <a:xfrm>
-            <a:off x="3310128" y="2825496"/>
+              <a:rPr sz="900" b="1">
+                <a:solidFill>
+                  <a:srgbClr val="10B981"/>
+                </a:solidFill>
+              </a:rPr>
+              <a:t>13  Benign Control ✓</a:t>
+            </a:r>
+          </a:p>
+        </p:txBody>
+      </p:sp>
+      <p:sp>
+        <p:nvSpPr>
+          <p:cNvPr id="149" name="TextBox 148"/>
+          <p:cNvSpPr txBox="1"/>
+          <p:nvPr/>
+        </p:nvSpPr>
+        <p:spPr>
+          <a:xfrm>
+            <a:off x="3310128" y="5641848"/>
             <a:ext cx="777240" cy="256032"/>
           </a:xfrm>
           <a:prstGeom prst="rect">
@@ -12334,7 +15620,7 @@
             <a:r>
               <a:rPr sz="1000" b="1">
                 <a:solidFill>
-                  <a:srgbClr val="EF4444"/>
+                  <a:srgbClr val="10B981"/>
                 </a:solidFill>
               </a:rPr>
               <a:t>0.0%</a:t>
@@ -12344,20 +15630,20 @@
       </p:sp>
       <p:sp>
         <p:nvSpPr>
-          <p:cNvPr id="60" name="Rectangle 59"/>
+          <p:cNvPr id="150" name="Rectangle 149"/>
           <p:cNvSpPr/>
           <p:nvPr/>
         </p:nvSpPr>
         <p:spPr>
           <a:xfrm>
-            <a:off x="4160520" y="2862072"/>
+            <a:off x="4160520" y="5678424"/>
             <a:ext cx="5029200" cy="123444"/>
           </a:xfrm>
           <a:prstGeom prst="rect">
             <a:avLst/>
           </a:prstGeom>
           <a:solidFill>
-            <a:srgbClr val="252635"/>
+            <a:srgbClr val="06463A"/>
           </a:solidFill>
           <a:ln>
             <a:noFill/>
@@ -12387,190 +15673,54 @@
       </p:sp>
       <p:sp>
         <p:nvSpPr>
-          <p:cNvPr id="61" name="TextBox 60"/>
-          <p:cNvSpPr txBox="1"/>
-          <p:nvPr/>
-        </p:nvSpPr>
-        <p:spPr>
-          <a:xfrm>
-            <a:off x="8979408" y="2834640"/>
-            <a:ext cx="365760" cy="256032"/>
-          </a:xfrm>
-          <a:prstGeom prst="rect">
-            <a:avLst/>
-          </a:prstGeom>
-          <a:noFill/>
-        </p:spPr>
-        <p:txBody>
-          <a:bodyPr wrap="square">
-            <a:spAutoFit/>
-          </a:bodyPr>
-          <a:lstStyle/>
-          <a:p>
-            <a:pPr algn="ctr"/>
-            <a:r>
-              <a:rPr sz="950" b="1">
-                <a:solidFill>
-                  <a:srgbClr val="EF4444"/>
-                </a:solidFill>
-              </a:rPr>
-              <a:t>0</a:t>
-            </a:r>
-          </a:p>
-        </p:txBody>
-      </p:sp>
-      <p:sp>
-        <p:nvSpPr>
-          <p:cNvPr id="62" name="TextBox 61"/>
-          <p:cNvSpPr txBox="1"/>
-          <p:nvPr/>
-        </p:nvSpPr>
-        <p:spPr>
-          <a:xfrm>
-            <a:off x="9345168" y="2834640"/>
-            <a:ext cx="365760" cy="256032"/>
-          </a:xfrm>
-          <a:prstGeom prst="rect">
-            <a:avLst/>
-          </a:prstGeom>
-          <a:noFill/>
-        </p:spPr>
-        <p:txBody>
-          <a:bodyPr wrap="square">
-            <a:spAutoFit/>
-          </a:bodyPr>
-          <a:lstStyle/>
-          <a:p>
-            <a:pPr algn="ctr"/>
-            <a:r>
-              <a:rPr sz="950" b="0">
-                <a:solidFill>
-                  <a:srgbClr val="EF4444"/>
-                </a:solidFill>
-              </a:rPr>
-              <a:t>15</a:t>
-            </a:r>
-          </a:p>
-        </p:txBody>
-      </p:sp>
-      <p:sp>
-        <p:nvSpPr>
-          <p:cNvPr id="63" name="TextBox 62"/>
-          <p:cNvSpPr txBox="1"/>
-          <p:nvPr/>
-        </p:nvSpPr>
-        <p:spPr>
-          <a:xfrm>
-            <a:off x="9802368" y="2834640"/>
-            <a:ext cx="457200" cy="256032"/>
-          </a:xfrm>
-          <a:prstGeom prst="rect">
-            <a:avLst/>
-          </a:prstGeom>
-          <a:noFill/>
-        </p:spPr>
-        <p:txBody>
-          <a:bodyPr wrap="square">
-            <a:spAutoFit/>
-          </a:bodyPr>
-          <a:lstStyle/>
-          <a:p>
-            <a:pPr algn="ctr"/>
-            <a:r>
-              <a:rPr sz="900" b="0">
-                <a:solidFill>
-                  <a:srgbClr val="94A3B8"/>
-                </a:solidFill>
-              </a:rPr>
-              <a:t>—</a:t>
-            </a:r>
-          </a:p>
-        </p:txBody>
-      </p:sp>
-      <p:sp>
-        <p:nvSpPr>
-          <p:cNvPr id="64" name="TextBox 63"/>
-          <p:cNvSpPr txBox="1"/>
-          <p:nvPr/>
-        </p:nvSpPr>
-        <p:spPr>
-          <a:xfrm>
-            <a:off x="10314432" y="2834640"/>
-            <a:ext cx="822960" cy="256032"/>
-          </a:xfrm>
-          <a:prstGeom prst="rect">
-            <a:avLst/>
-          </a:prstGeom>
-          <a:noFill/>
-        </p:spPr>
-        <p:txBody>
-          <a:bodyPr wrap="square">
-            <a:spAutoFit/>
-          </a:bodyPr>
-          <a:lstStyle/>
-          <a:p>
-            <a:pPr algn="r"/>
-            <a:r>
-              <a:rPr sz="900" b="0">
-                <a:solidFill>
-                  <a:srgbClr val="94A3B8"/>
-                </a:solidFill>
-              </a:rPr>
-              <a:t>0.11ms</a:t>
-            </a:r>
-          </a:p>
-        </p:txBody>
-      </p:sp>
-      <p:sp>
-        <p:nvSpPr>
-          <p:cNvPr id="65" name="TextBox 64"/>
-          <p:cNvSpPr txBox="1"/>
-          <p:nvPr/>
-        </p:nvSpPr>
-        <p:spPr>
-          <a:xfrm>
-            <a:off x="11173968" y="2834640"/>
-            <a:ext cx="548640" cy="256032"/>
-          </a:xfrm>
-          <a:prstGeom prst="rect">
-            <a:avLst/>
-          </a:prstGeom>
-          <a:noFill/>
-        </p:spPr>
-        <p:txBody>
-          <a:bodyPr wrap="square">
-            <a:spAutoFit/>
-          </a:bodyPr>
-          <a:lstStyle/>
-          <a:p>
-            <a:pPr algn="ctr"/>
+          <p:cNvPr id="151" name="TextBox 150"/>
+          <p:cNvSpPr txBox="1"/>
+          <p:nvPr/>
+        </p:nvSpPr>
+        <p:spPr>
+          <a:xfrm>
+            <a:off x="4251959" y="5650992"/>
+            <a:ext cx="4754880" cy="256032"/>
+          </a:xfrm>
+          <a:prstGeom prst="rect">
+            <a:avLst/>
+          </a:prstGeom>
+          <a:noFill/>
+        </p:spPr>
+        <p:txBody>
+          <a:bodyPr wrap="square">
+            <a:spAutoFit/>
+          </a:bodyPr>
+          <a:lstStyle/>
+          <a:p>
+            <a:pPr algn="l"/>
             <a:r>
               <a:rPr sz="850" b="1">
                 <a:solidFill>
-                  <a:srgbClr val="3B82F6"/>
-                </a:solidFill>
-              </a:rPr>
-              <a:t>T1</a:t>
-            </a:r>
-          </a:p>
-        </p:txBody>
-      </p:sp>
-      <p:sp>
-        <p:nvSpPr>
-          <p:cNvPr id="66" name="Rectangle 65"/>
+                  <a:srgbClr val="10B981"/>
+                </a:solidFill>
+              </a:rPr>
+              <a:t>30/30 TRUE NEGATIVES — Perfect specificity</a:t>
+            </a:r>
+          </a:p>
+        </p:txBody>
+      </p:sp>
+      <p:sp>
+        <p:nvSpPr>
+          <p:cNvPr id="152" name="Rectangle 151"/>
           <p:cNvSpPr/>
           <p:nvPr/>
         </p:nvSpPr>
         <p:spPr>
           <a:xfrm>
-            <a:off x="365760" y="3122676"/>
-            <a:ext cx="11430000" cy="342900"/>
+            <a:off x="365760" y="5980176"/>
+            <a:ext cx="11430000" cy="749808"/>
           </a:xfrm>
           <a:prstGeom prst="rect">
             <a:avLst/>
           </a:prstGeom>
           <a:solidFill>
-            <a:srgbClr val="12131B"/>
+            <a:srgbClr val="0A0B10"/>
           </a:solidFill>
           <a:ln w="12700">
             <a:noFill/>
@@ -12600,1575 +15750,14 @@
       </p:sp>
       <p:sp>
         <p:nvSpPr>
-          <p:cNvPr id="67" name="TextBox 66"/>
-          <p:cNvSpPr txBox="1"/>
-          <p:nvPr/>
-        </p:nvSpPr>
-        <p:spPr>
-          <a:xfrm>
-            <a:off x="438912" y="3186684"/>
-            <a:ext cx="2834640" cy="228600"/>
-          </a:xfrm>
-          <a:prstGeom prst="rect">
-            <a:avLst/>
-          </a:prstGeom>
-          <a:noFill/>
-        </p:spPr>
-        <p:txBody>
-          <a:bodyPr wrap="square">
-            <a:spAutoFit/>
-          </a:bodyPr>
-          <a:lstStyle/>
-          <a:p>
-            <a:pPr algn="l"/>
-            <a:r>
-              <a:rPr sz="900" b="0">
-                <a:solidFill>
-                  <a:srgbClr val="FFFFFF"/>
-                </a:solidFill>
-              </a:rPr>
-              <a:t>06  Tool Call Injection</a:t>
-            </a:r>
-          </a:p>
-        </p:txBody>
-      </p:sp>
-      <p:sp>
-        <p:nvSpPr>
-          <p:cNvPr id="68" name="TextBox 67"/>
-          <p:cNvSpPr txBox="1"/>
-          <p:nvPr/>
-        </p:nvSpPr>
-        <p:spPr>
-          <a:xfrm>
-            <a:off x="3310128" y="3177540"/>
-            <a:ext cx="777240" cy="256032"/>
-          </a:xfrm>
-          <a:prstGeom prst="rect">
-            <a:avLst/>
-          </a:prstGeom>
-          <a:noFill/>
-        </p:spPr>
-        <p:txBody>
-          <a:bodyPr wrap="square">
-            <a:spAutoFit/>
-          </a:bodyPr>
-          <a:lstStyle/>
-          <a:p>
-            <a:pPr algn="r"/>
-            <a:r>
-              <a:rPr sz="1000" b="1">
-                <a:solidFill>
-                  <a:srgbClr val="F59E0B"/>
-                </a:solidFill>
-              </a:rPr>
-              <a:t>20.0%</a:t>
-            </a:r>
-          </a:p>
-        </p:txBody>
-      </p:sp>
-      <p:sp>
-        <p:nvSpPr>
-          <p:cNvPr id="69" name="Rectangle 68"/>
+          <p:cNvPr id="153" name="Rectangle 152"/>
           <p:cNvSpPr/>
           <p:nvPr/>
         </p:nvSpPr>
         <p:spPr>
           <a:xfrm>
-            <a:off x="4160520" y="3214116"/>
-            <a:ext cx="5029200" cy="123444"/>
-          </a:xfrm>
-          <a:prstGeom prst="rect">
-            <a:avLst/>
-          </a:prstGeom>
-          <a:solidFill>
-            <a:srgbClr val="252635"/>
-          </a:solidFill>
-          <a:ln>
-            <a:noFill/>
-          </a:ln>
-        </p:spPr>
-        <p:style>
-          <a:lnRef idx="1">
-            <a:schemeClr val="accent1"/>
-          </a:lnRef>
-          <a:fillRef idx="3">
-            <a:schemeClr val="accent1"/>
-          </a:fillRef>
-          <a:effectRef idx="2">
-            <a:schemeClr val="accent1"/>
-          </a:effectRef>
-          <a:fontRef idx="minor">
-            <a:schemeClr val="lt1"/>
-          </a:fontRef>
-        </p:style>
-        <p:txBody>
-          <a:bodyPr rtlCol="0" anchor="ctr"/>
-          <a:lstStyle/>
-          <a:p>
-            <a:pPr algn="ctr"/>
-          </a:p>
-        </p:txBody>
-      </p:sp>
-      <p:sp>
-        <p:nvSpPr>
-          <p:cNvPr id="70" name="Rectangle 69"/>
-          <p:cNvSpPr/>
-          <p:nvPr/>
-        </p:nvSpPr>
-        <p:spPr>
-          <a:xfrm>
-            <a:off x="4160520" y="3214116"/>
-            <a:ext cx="3771428" cy="123444"/>
-          </a:xfrm>
-          <a:prstGeom prst="rect">
-            <a:avLst/>
-          </a:prstGeom>
-          <a:solidFill>
-            <a:srgbClr val="F59E0B"/>
-          </a:solidFill>
-          <a:ln>
-            <a:noFill/>
-          </a:ln>
-        </p:spPr>
-        <p:style>
-          <a:lnRef idx="1">
-            <a:schemeClr val="accent1"/>
-          </a:lnRef>
-          <a:fillRef idx="3">
-            <a:schemeClr val="accent1"/>
-          </a:fillRef>
-          <a:effectRef idx="2">
-            <a:schemeClr val="accent1"/>
-          </a:effectRef>
-          <a:fontRef idx="minor">
-            <a:schemeClr val="lt1"/>
-          </a:fontRef>
-        </p:style>
-        <p:txBody>
-          <a:bodyPr rtlCol="0" anchor="ctr"/>
-          <a:lstStyle/>
-          <a:p>
-            <a:pPr algn="ctr"/>
-          </a:p>
-        </p:txBody>
-      </p:sp>
-      <p:sp>
-        <p:nvSpPr>
-          <p:cNvPr id="71" name="TextBox 70"/>
-          <p:cNvSpPr txBox="1"/>
-          <p:nvPr/>
-        </p:nvSpPr>
-        <p:spPr>
-          <a:xfrm>
-            <a:off x="7246148" y="3186684"/>
-            <a:ext cx="658368" cy="256032"/>
-          </a:xfrm>
-          <a:prstGeom prst="rect">
-            <a:avLst/>
-          </a:prstGeom>
-          <a:noFill/>
-        </p:spPr>
-        <p:txBody>
-          <a:bodyPr wrap="square">
-            <a:spAutoFit/>
-          </a:bodyPr>
-          <a:lstStyle/>
-          <a:p>
-            <a:pPr algn="r"/>
-            <a:r>
-              <a:rPr sz="900" b="1">
-                <a:solidFill>
-                  <a:srgbClr val="050508"/>
-                </a:solidFill>
-              </a:rPr>
-              <a:t>20.0%</a:t>
-            </a:r>
-          </a:p>
-        </p:txBody>
-      </p:sp>
-      <p:sp>
-        <p:nvSpPr>
-          <p:cNvPr id="72" name="TextBox 71"/>
-          <p:cNvSpPr txBox="1"/>
-          <p:nvPr/>
-        </p:nvSpPr>
-        <p:spPr>
-          <a:xfrm>
-            <a:off x="8979408" y="3186684"/>
-            <a:ext cx="365760" cy="256032"/>
-          </a:xfrm>
-          <a:prstGeom prst="rect">
-            <a:avLst/>
-          </a:prstGeom>
-          <a:noFill/>
-        </p:spPr>
-        <p:txBody>
-          <a:bodyPr wrap="square">
-            <a:spAutoFit/>
-          </a:bodyPr>
-          <a:lstStyle/>
-          <a:p>
-            <a:pPr algn="ctr"/>
-            <a:r>
-              <a:rPr sz="950" b="1">
-                <a:solidFill>
-                  <a:srgbClr val="10B981"/>
-                </a:solidFill>
-              </a:rPr>
-              <a:t>3</a:t>
-            </a:r>
-          </a:p>
-        </p:txBody>
-      </p:sp>
-      <p:sp>
-        <p:nvSpPr>
-          <p:cNvPr id="73" name="TextBox 72"/>
-          <p:cNvSpPr txBox="1"/>
-          <p:nvPr/>
-        </p:nvSpPr>
-        <p:spPr>
-          <a:xfrm>
-            <a:off x="9345168" y="3186684"/>
-            <a:ext cx="365760" cy="256032"/>
-          </a:xfrm>
-          <a:prstGeom prst="rect">
-            <a:avLst/>
-          </a:prstGeom>
-          <a:noFill/>
-        </p:spPr>
-        <p:txBody>
-          <a:bodyPr wrap="square">
-            <a:spAutoFit/>
-          </a:bodyPr>
-          <a:lstStyle/>
-          <a:p>
-            <a:pPr algn="ctr"/>
-            <a:r>
-              <a:rPr sz="950" b="0">
-                <a:solidFill>
-                  <a:srgbClr val="EF4444"/>
-                </a:solidFill>
-              </a:rPr>
-              <a:t>12</a:t>
-            </a:r>
-          </a:p>
-        </p:txBody>
-      </p:sp>
-      <p:sp>
-        <p:nvSpPr>
-          <p:cNvPr id="74" name="TextBox 73"/>
-          <p:cNvSpPr txBox="1"/>
-          <p:nvPr/>
-        </p:nvSpPr>
-        <p:spPr>
-          <a:xfrm>
-            <a:off x="9802368" y="3186684"/>
-            <a:ext cx="457200" cy="256032"/>
-          </a:xfrm>
-          <a:prstGeom prst="rect">
-            <a:avLst/>
-          </a:prstGeom>
-          <a:noFill/>
-        </p:spPr>
-        <p:txBody>
-          <a:bodyPr wrap="square">
-            <a:spAutoFit/>
-          </a:bodyPr>
-          <a:lstStyle/>
-          <a:p>
-            <a:pPr algn="ctr"/>
-            <a:r>
-              <a:rPr sz="900" b="0">
-                <a:solidFill>
-                  <a:srgbClr val="94A3B8"/>
-                </a:solidFill>
-              </a:rPr>
-              <a:t>0.333</a:t>
-            </a:r>
-          </a:p>
-        </p:txBody>
-      </p:sp>
-      <p:sp>
-        <p:nvSpPr>
-          <p:cNvPr id="75" name="TextBox 74"/>
-          <p:cNvSpPr txBox="1"/>
-          <p:nvPr/>
-        </p:nvSpPr>
-        <p:spPr>
-          <a:xfrm>
-            <a:off x="10314432" y="3186684"/>
-            <a:ext cx="822960" cy="256032"/>
-          </a:xfrm>
-          <a:prstGeom prst="rect">
-            <a:avLst/>
-          </a:prstGeom>
-          <a:noFill/>
-        </p:spPr>
-        <p:txBody>
-          <a:bodyPr wrap="square">
-            <a:spAutoFit/>
-          </a:bodyPr>
-          <a:lstStyle/>
-          <a:p>
-            <a:pPr algn="r"/>
-            <a:r>
-              <a:rPr sz="900" b="0">
-                <a:solidFill>
-                  <a:srgbClr val="94A3B8"/>
-                </a:solidFill>
-              </a:rPr>
-              <a:t>0.09ms</a:t>
-            </a:r>
-          </a:p>
-        </p:txBody>
-      </p:sp>
-      <p:sp>
-        <p:nvSpPr>
-          <p:cNvPr id="76" name="TextBox 75"/>
-          <p:cNvSpPr txBox="1"/>
-          <p:nvPr/>
-        </p:nvSpPr>
-        <p:spPr>
-          <a:xfrm>
-            <a:off x="11173968" y="3186684"/>
-            <a:ext cx="548640" cy="256032"/>
-          </a:xfrm>
-          <a:prstGeom prst="rect">
-            <a:avLst/>
-          </a:prstGeom>
-          <a:noFill/>
-        </p:spPr>
-        <p:txBody>
-          <a:bodyPr wrap="square">
-            <a:spAutoFit/>
-          </a:bodyPr>
-          <a:lstStyle/>
-          <a:p>
-            <a:pPr algn="ctr"/>
-            <a:r>
-              <a:rPr sz="850" b="1">
-                <a:solidFill>
-                  <a:srgbClr val="10B981"/>
-                </a:solidFill>
-              </a:rPr>
-              <a:t>T0</a:t>
-            </a:r>
-          </a:p>
-        </p:txBody>
-      </p:sp>
-      <p:sp>
-        <p:nvSpPr>
-          <p:cNvPr id="77" name="Rectangle 76"/>
-          <p:cNvSpPr/>
-          <p:nvPr/>
-        </p:nvSpPr>
-        <p:spPr>
-          <a:xfrm>
-            <a:off x="365760" y="3474720"/>
-            <a:ext cx="11430000" cy="342900"/>
-          </a:xfrm>
-          <a:prstGeom prst="rect">
-            <a:avLst/>
-          </a:prstGeom>
-          <a:solidFill>
-            <a:srgbClr val="1A1B23"/>
-          </a:solidFill>
-          <a:ln w="12700">
-            <a:noFill/>
-          </a:ln>
-        </p:spPr>
-        <p:style>
-          <a:lnRef idx="1">
-            <a:schemeClr val="accent1"/>
-          </a:lnRef>
-          <a:fillRef idx="3">
-            <a:schemeClr val="accent1"/>
-          </a:fillRef>
-          <a:effectRef idx="2">
-            <a:schemeClr val="accent1"/>
-          </a:effectRef>
-          <a:fontRef idx="minor">
-            <a:schemeClr val="lt1"/>
-          </a:fontRef>
-        </p:style>
-        <p:txBody>
-          <a:bodyPr rtlCol="0" anchor="ctr"/>
-          <a:lstStyle/>
-          <a:p>
-            <a:pPr algn="ctr"/>
-          </a:p>
-        </p:txBody>
-      </p:sp>
-      <p:sp>
-        <p:nvSpPr>
-          <p:cNvPr id="78" name="TextBox 77"/>
-          <p:cNvSpPr txBox="1"/>
-          <p:nvPr/>
-        </p:nvSpPr>
-        <p:spPr>
-          <a:xfrm>
-            <a:off x="438912" y="3538727"/>
-            <a:ext cx="2834640" cy="228600"/>
-          </a:xfrm>
-          <a:prstGeom prst="rect">
-            <a:avLst/>
-          </a:prstGeom>
-          <a:noFill/>
-        </p:spPr>
-        <p:txBody>
-          <a:bodyPr wrap="square">
-            <a:spAutoFit/>
-          </a:bodyPr>
-          <a:lstStyle/>
-          <a:p>
-            <a:pPr algn="l"/>
-            <a:r>
-              <a:rPr sz="900" b="0">
-                <a:solidFill>
-                  <a:srgbClr val="FFFFFF"/>
-                </a:solidFill>
-              </a:rPr>
-              <a:t>07  Payload In Data</a:t>
-            </a:r>
-          </a:p>
-        </p:txBody>
-      </p:sp>
-      <p:sp>
-        <p:nvSpPr>
-          <p:cNvPr id="79" name="TextBox 78"/>
-          <p:cNvSpPr txBox="1"/>
-          <p:nvPr/>
-        </p:nvSpPr>
-        <p:spPr>
-          <a:xfrm>
-            <a:off x="3310128" y="3529584"/>
-            <a:ext cx="777240" cy="256032"/>
-          </a:xfrm>
-          <a:prstGeom prst="rect">
-            <a:avLst/>
-          </a:prstGeom>
-          <a:noFill/>
-        </p:spPr>
-        <p:txBody>
-          <a:bodyPr wrap="square">
-            <a:spAutoFit/>
-          </a:bodyPr>
-          <a:lstStyle/>
-          <a:p>
-            <a:pPr algn="r"/>
-            <a:r>
-              <a:rPr sz="1000" b="1">
-                <a:solidFill>
-                  <a:srgbClr val="F59E0B"/>
-                </a:solidFill>
-              </a:rPr>
-              <a:t>20.0%</a:t>
-            </a:r>
-          </a:p>
-        </p:txBody>
-      </p:sp>
-      <p:sp>
-        <p:nvSpPr>
-          <p:cNvPr id="80" name="Rectangle 79"/>
-          <p:cNvSpPr/>
-          <p:nvPr/>
-        </p:nvSpPr>
-        <p:spPr>
-          <a:xfrm>
-            <a:off x="4160520" y="3566160"/>
-            <a:ext cx="5029200" cy="123444"/>
-          </a:xfrm>
-          <a:prstGeom prst="rect">
-            <a:avLst/>
-          </a:prstGeom>
-          <a:solidFill>
-            <a:srgbClr val="252635"/>
-          </a:solidFill>
-          <a:ln>
-            <a:noFill/>
-          </a:ln>
-        </p:spPr>
-        <p:style>
-          <a:lnRef idx="1">
-            <a:schemeClr val="accent1"/>
-          </a:lnRef>
-          <a:fillRef idx="3">
-            <a:schemeClr val="accent1"/>
-          </a:fillRef>
-          <a:effectRef idx="2">
-            <a:schemeClr val="accent1"/>
-          </a:effectRef>
-          <a:fontRef idx="minor">
-            <a:schemeClr val="lt1"/>
-          </a:fontRef>
-        </p:style>
-        <p:txBody>
-          <a:bodyPr rtlCol="0" anchor="ctr"/>
-          <a:lstStyle/>
-          <a:p>
-            <a:pPr algn="ctr"/>
-          </a:p>
-        </p:txBody>
-      </p:sp>
-      <p:sp>
-        <p:nvSpPr>
-          <p:cNvPr id="81" name="Rectangle 80"/>
-          <p:cNvSpPr/>
-          <p:nvPr/>
-        </p:nvSpPr>
-        <p:spPr>
-          <a:xfrm>
-            <a:off x="4160520" y="3566160"/>
-            <a:ext cx="3771428" cy="123444"/>
-          </a:xfrm>
-          <a:prstGeom prst="rect">
-            <a:avLst/>
-          </a:prstGeom>
-          <a:solidFill>
-            <a:srgbClr val="F59E0B"/>
-          </a:solidFill>
-          <a:ln>
-            <a:noFill/>
-          </a:ln>
-        </p:spPr>
-        <p:style>
-          <a:lnRef idx="1">
-            <a:schemeClr val="accent1"/>
-          </a:lnRef>
-          <a:fillRef idx="3">
-            <a:schemeClr val="accent1"/>
-          </a:fillRef>
-          <a:effectRef idx="2">
-            <a:schemeClr val="accent1"/>
-          </a:effectRef>
-          <a:fontRef idx="minor">
-            <a:schemeClr val="lt1"/>
-          </a:fontRef>
-        </p:style>
-        <p:txBody>
-          <a:bodyPr rtlCol="0" anchor="ctr"/>
-          <a:lstStyle/>
-          <a:p>
-            <a:pPr algn="ctr"/>
-          </a:p>
-        </p:txBody>
-      </p:sp>
-      <p:sp>
-        <p:nvSpPr>
-          <p:cNvPr id="82" name="TextBox 81"/>
-          <p:cNvSpPr txBox="1"/>
-          <p:nvPr/>
-        </p:nvSpPr>
-        <p:spPr>
-          <a:xfrm>
-            <a:off x="7246148" y="3538727"/>
-            <a:ext cx="658368" cy="256032"/>
-          </a:xfrm>
-          <a:prstGeom prst="rect">
-            <a:avLst/>
-          </a:prstGeom>
-          <a:noFill/>
-        </p:spPr>
-        <p:txBody>
-          <a:bodyPr wrap="square">
-            <a:spAutoFit/>
-          </a:bodyPr>
-          <a:lstStyle/>
-          <a:p>
-            <a:pPr algn="r"/>
-            <a:r>
-              <a:rPr sz="900" b="1">
-                <a:solidFill>
-                  <a:srgbClr val="050508"/>
-                </a:solidFill>
-              </a:rPr>
-              <a:t>20.0%</a:t>
-            </a:r>
-          </a:p>
-        </p:txBody>
-      </p:sp>
-      <p:sp>
-        <p:nvSpPr>
-          <p:cNvPr id="83" name="TextBox 82"/>
-          <p:cNvSpPr txBox="1"/>
-          <p:nvPr/>
-        </p:nvSpPr>
-        <p:spPr>
-          <a:xfrm>
-            <a:off x="8979408" y="3538727"/>
-            <a:ext cx="365760" cy="256032"/>
-          </a:xfrm>
-          <a:prstGeom prst="rect">
-            <a:avLst/>
-          </a:prstGeom>
-          <a:noFill/>
-        </p:spPr>
-        <p:txBody>
-          <a:bodyPr wrap="square">
-            <a:spAutoFit/>
-          </a:bodyPr>
-          <a:lstStyle/>
-          <a:p>
-            <a:pPr algn="ctr"/>
-            <a:r>
-              <a:rPr sz="950" b="1">
-                <a:solidFill>
-                  <a:srgbClr val="10B981"/>
-                </a:solidFill>
-              </a:rPr>
-              <a:t>3</a:t>
-            </a:r>
-          </a:p>
-        </p:txBody>
-      </p:sp>
-      <p:sp>
-        <p:nvSpPr>
-          <p:cNvPr id="84" name="TextBox 83"/>
-          <p:cNvSpPr txBox="1"/>
-          <p:nvPr/>
-        </p:nvSpPr>
-        <p:spPr>
-          <a:xfrm>
-            <a:off x="9345168" y="3538727"/>
-            <a:ext cx="365760" cy="256032"/>
-          </a:xfrm>
-          <a:prstGeom prst="rect">
-            <a:avLst/>
-          </a:prstGeom>
-          <a:noFill/>
-        </p:spPr>
-        <p:txBody>
-          <a:bodyPr wrap="square">
-            <a:spAutoFit/>
-          </a:bodyPr>
-          <a:lstStyle/>
-          <a:p>
-            <a:pPr algn="ctr"/>
-            <a:r>
-              <a:rPr sz="950" b="0">
-                <a:solidFill>
-                  <a:srgbClr val="EF4444"/>
-                </a:solidFill>
-              </a:rPr>
-              <a:t>12</a:t>
-            </a:r>
-          </a:p>
-        </p:txBody>
-      </p:sp>
-      <p:sp>
-        <p:nvSpPr>
-          <p:cNvPr id="85" name="TextBox 84"/>
-          <p:cNvSpPr txBox="1"/>
-          <p:nvPr/>
-        </p:nvSpPr>
-        <p:spPr>
-          <a:xfrm>
-            <a:off x="9802368" y="3538727"/>
-            <a:ext cx="457200" cy="256032"/>
-          </a:xfrm>
-          <a:prstGeom prst="rect">
-            <a:avLst/>
-          </a:prstGeom>
-          <a:noFill/>
-        </p:spPr>
-        <p:txBody>
-          <a:bodyPr wrap="square">
-            <a:spAutoFit/>
-          </a:bodyPr>
-          <a:lstStyle/>
-          <a:p>
-            <a:pPr algn="ctr"/>
-            <a:r>
-              <a:rPr sz="900" b="0">
-                <a:solidFill>
-                  <a:srgbClr val="94A3B8"/>
-                </a:solidFill>
-              </a:rPr>
-              <a:t>0.333</a:t>
-            </a:r>
-          </a:p>
-        </p:txBody>
-      </p:sp>
-      <p:sp>
-        <p:nvSpPr>
-          <p:cNvPr id="86" name="TextBox 85"/>
-          <p:cNvSpPr txBox="1"/>
-          <p:nvPr/>
-        </p:nvSpPr>
-        <p:spPr>
-          <a:xfrm>
-            <a:off x="10314432" y="3538727"/>
-            <a:ext cx="822960" cy="256032"/>
-          </a:xfrm>
-          <a:prstGeom prst="rect">
-            <a:avLst/>
-          </a:prstGeom>
-          <a:noFill/>
-        </p:spPr>
-        <p:txBody>
-          <a:bodyPr wrap="square">
-            <a:spAutoFit/>
-          </a:bodyPr>
-          <a:lstStyle/>
-          <a:p>
-            <a:pPr algn="r"/>
-            <a:r>
-              <a:rPr sz="900" b="0">
-                <a:solidFill>
-                  <a:srgbClr val="94A3B8"/>
-                </a:solidFill>
-              </a:rPr>
-              <a:t>0.16ms</a:t>
-            </a:r>
-          </a:p>
-        </p:txBody>
-      </p:sp>
-      <p:sp>
-        <p:nvSpPr>
-          <p:cNvPr id="87" name="TextBox 86"/>
-          <p:cNvSpPr txBox="1"/>
-          <p:nvPr/>
-        </p:nvSpPr>
-        <p:spPr>
-          <a:xfrm>
-            <a:off x="11173968" y="3538727"/>
-            <a:ext cx="548640" cy="256032"/>
-          </a:xfrm>
-          <a:prstGeom prst="rect">
-            <a:avLst/>
-          </a:prstGeom>
-          <a:noFill/>
-        </p:spPr>
-        <p:txBody>
-          <a:bodyPr wrap="square">
-            <a:spAutoFit/>
-          </a:bodyPr>
-          <a:lstStyle/>
-          <a:p>
-            <a:pPr algn="ctr"/>
-            <a:r>
-              <a:rPr sz="850" b="1">
-                <a:solidFill>
-                  <a:srgbClr val="3B82F6"/>
-                </a:solidFill>
-              </a:rPr>
-              <a:t>T1</a:t>
-            </a:r>
-          </a:p>
-        </p:txBody>
-      </p:sp>
-      <p:sp>
-        <p:nvSpPr>
-          <p:cNvPr id="88" name="Rectangle 87"/>
-          <p:cNvSpPr/>
-          <p:nvPr/>
-        </p:nvSpPr>
-        <p:spPr>
-          <a:xfrm>
-            <a:off x="365760" y="3826764"/>
-            <a:ext cx="11430000" cy="342900"/>
-          </a:xfrm>
-          <a:prstGeom prst="rect">
-            <a:avLst/>
-          </a:prstGeom>
-          <a:solidFill>
-            <a:srgbClr val="12131B"/>
-          </a:solidFill>
-          <a:ln w="12700">
-            <a:noFill/>
-          </a:ln>
-        </p:spPr>
-        <p:style>
-          <a:lnRef idx="1">
-            <a:schemeClr val="accent1"/>
-          </a:lnRef>
-          <a:fillRef idx="3">
-            <a:schemeClr val="accent1"/>
-          </a:fillRef>
-          <a:effectRef idx="2">
-            <a:schemeClr val="accent1"/>
-          </a:effectRef>
-          <a:fontRef idx="minor">
-            <a:schemeClr val="lt1"/>
-          </a:fontRef>
-        </p:style>
-        <p:txBody>
-          <a:bodyPr rtlCol="0" anchor="ctr"/>
-          <a:lstStyle/>
-          <a:p>
-            <a:pPr algn="ctr"/>
-          </a:p>
-        </p:txBody>
-      </p:sp>
-      <p:sp>
-        <p:nvSpPr>
-          <p:cNvPr id="89" name="TextBox 88"/>
-          <p:cNvSpPr txBox="1"/>
-          <p:nvPr/>
-        </p:nvSpPr>
-        <p:spPr>
-          <a:xfrm>
-            <a:off x="438912" y="3890772"/>
-            <a:ext cx="2834640" cy="228600"/>
-          </a:xfrm>
-          <a:prstGeom prst="rect">
-            <a:avLst/>
-          </a:prstGeom>
-          <a:noFill/>
-        </p:spPr>
-        <p:txBody>
-          <a:bodyPr wrap="square">
-            <a:spAutoFit/>
-          </a:bodyPr>
-          <a:lstStyle/>
-          <a:p>
-            <a:pPr algn="l"/>
-            <a:r>
-              <a:rPr sz="900" b="0">
-                <a:solidFill>
-                  <a:srgbClr val="FFFFFF"/>
-                </a:solidFill>
-              </a:rPr>
-              <a:t>08  Secret Extraction</a:t>
-            </a:r>
-          </a:p>
-        </p:txBody>
-      </p:sp>
-      <p:sp>
-        <p:nvSpPr>
-          <p:cNvPr id="90" name="TextBox 89"/>
-          <p:cNvSpPr txBox="1"/>
-          <p:nvPr/>
-        </p:nvSpPr>
-        <p:spPr>
-          <a:xfrm>
-            <a:off x="3310128" y="3881628"/>
-            <a:ext cx="777240" cy="256032"/>
-          </a:xfrm>
-          <a:prstGeom prst="rect">
-            <a:avLst/>
-          </a:prstGeom>
-          <a:noFill/>
-        </p:spPr>
-        <p:txBody>
-          <a:bodyPr wrap="square">
-            <a:spAutoFit/>
-          </a:bodyPr>
-          <a:lstStyle/>
-          <a:p>
-            <a:pPr algn="r"/>
-            <a:r>
-              <a:rPr sz="1000" b="1">
-                <a:solidFill>
-                  <a:srgbClr val="EF4444"/>
-                </a:solidFill>
-              </a:rPr>
-              <a:t>0.0%</a:t>
-            </a:r>
-          </a:p>
-        </p:txBody>
-      </p:sp>
-      <p:sp>
-        <p:nvSpPr>
-          <p:cNvPr id="91" name="Rectangle 90"/>
-          <p:cNvSpPr/>
-          <p:nvPr/>
-        </p:nvSpPr>
-        <p:spPr>
-          <a:xfrm>
-            <a:off x="4160520" y="3918204"/>
-            <a:ext cx="5029200" cy="123444"/>
-          </a:xfrm>
-          <a:prstGeom prst="rect">
-            <a:avLst/>
-          </a:prstGeom>
-          <a:solidFill>
-            <a:srgbClr val="252635"/>
-          </a:solidFill>
-          <a:ln>
-            <a:noFill/>
-          </a:ln>
-        </p:spPr>
-        <p:style>
-          <a:lnRef idx="1">
-            <a:schemeClr val="accent1"/>
-          </a:lnRef>
-          <a:fillRef idx="3">
-            <a:schemeClr val="accent1"/>
-          </a:fillRef>
-          <a:effectRef idx="2">
-            <a:schemeClr val="accent1"/>
-          </a:effectRef>
-          <a:fontRef idx="minor">
-            <a:schemeClr val="lt1"/>
-          </a:fontRef>
-        </p:style>
-        <p:txBody>
-          <a:bodyPr rtlCol="0" anchor="ctr"/>
-          <a:lstStyle/>
-          <a:p>
-            <a:pPr algn="ctr"/>
-          </a:p>
-        </p:txBody>
-      </p:sp>
-      <p:sp>
-        <p:nvSpPr>
-          <p:cNvPr id="92" name="TextBox 91"/>
-          <p:cNvSpPr txBox="1"/>
-          <p:nvPr/>
-        </p:nvSpPr>
-        <p:spPr>
-          <a:xfrm>
-            <a:off x="8979408" y="3890772"/>
-            <a:ext cx="365760" cy="256032"/>
-          </a:xfrm>
-          <a:prstGeom prst="rect">
-            <a:avLst/>
-          </a:prstGeom>
-          <a:noFill/>
-        </p:spPr>
-        <p:txBody>
-          <a:bodyPr wrap="square">
-            <a:spAutoFit/>
-          </a:bodyPr>
-          <a:lstStyle/>
-          <a:p>
-            <a:pPr algn="ctr"/>
-            <a:r>
-              <a:rPr sz="950" b="1">
-                <a:solidFill>
-                  <a:srgbClr val="EF4444"/>
-                </a:solidFill>
-              </a:rPr>
-              <a:t>0</a:t>
-            </a:r>
-          </a:p>
-        </p:txBody>
-      </p:sp>
-      <p:sp>
-        <p:nvSpPr>
-          <p:cNvPr id="93" name="TextBox 92"/>
-          <p:cNvSpPr txBox="1"/>
-          <p:nvPr/>
-        </p:nvSpPr>
-        <p:spPr>
-          <a:xfrm>
-            <a:off x="9345168" y="3890772"/>
-            <a:ext cx="365760" cy="256032"/>
-          </a:xfrm>
-          <a:prstGeom prst="rect">
-            <a:avLst/>
-          </a:prstGeom>
-          <a:noFill/>
-        </p:spPr>
-        <p:txBody>
-          <a:bodyPr wrap="square">
-            <a:spAutoFit/>
-          </a:bodyPr>
-          <a:lstStyle/>
-          <a:p>
-            <a:pPr algn="ctr"/>
-            <a:r>
-              <a:rPr sz="950" b="0">
-                <a:solidFill>
-                  <a:srgbClr val="EF4444"/>
-                </a:solidFill>
-              </a:rPr>
-              <a:t>15</a:t>
-            </a:r>
-          </a:p>
-        </p:txBody>
-      </p:sp>
-      <p:sp>
-        <p:nvSpPr>
-          <p:cNvPr id="94" name="TextBox 93"/>
-          <p:cNvSpPr txBox="1"/>
-          <p:nvPr/>
-        </p:nvSpPr>
-        <p:spPr>
-          <a:xfrm>
-            <a:off x="9802368" y="3890772"/>
-            <a:ext cx="457200" cy="256032"/>
-          </a:xfrm>
-          <a:prstGeom prst="rect">
-            <a:avLst/>
-          </a:prstGeom>
-          <a:noFill/>
-        </p:spPr>
-        <p:txBody>
-          <a:bodyPr wrap="square">
-            <a:spAutoFit/>
-          </a:bodyPr>
-          <a:lstStyle/>
-          <a:p>
-            <a:pPr algn="ctr"/>
-            <a:r>
-              <a:rPr sz="900" b="0">
-                <a:solidFill>
-                  <a:srgbClr val="94A3B8"/>
-                </a:solidFill>
-              </a:rPr>
-              <a:t>—</a:t>
-            </a:r>
-          </a:p>
-        </p:txBody>
-      </p:sp>
-      <p:sp>
-        <p:nvSpPr>
-          <p:cNvPr id="95" name="TextBox 94"/>
-          <p:cNvSpPr txBox="1"/>
-          <p:nvPr/>
-        </p:nvSpPr>
-        <p:spPr>
-          <a:xfrm>
-            <a:off x="10314432" y="3890772"/>
-            <a:ext cx="822960" cy="256032"/>
-          </a:xfrm>
-          <a:prstGeom prst="rect">
-            <a:avLst/>
-          </a:prstGeom>
-          <a:noFill/>
-        </p:spPr>
-        <p:txBody>
-          <a:bodyPr wrap="square">
-            <a:spAutoFit/>
-          </a:bodyPr>
-          <a:lstStyle/>
-          <a:p>
-            <a:pPr algn="r"/>
-            <a:r>
-              <a:rPr sz="900" b="0">
-                <a:solidFill>
-                  <a:srgbClr val="94A3B8"/>
-                </a:solidFill>
-              </a:rPr>
-              <a:t>0.08ms</a:t>
-            </a:r>
-          </a:p>
-        </p:txBody>
-      </p:sp>
-      <p:sp>
-        <p:nvSpPr>
-          <p:cNvPr id="96" name="TextBox 95"/>
-          <p:cNvSpPr txBox="1"/>
-          <p:nvPr/>
-        </p:nvSpPr>
-        <p:spPr>
-          <a:xfrm>
-            <a:off x="11173968" y="3890772"/>
-            <a:ext cx="548640" cy="256032"/>
-          </a:xfrm>
-          <a:prstGeom prst="rect">
-            <a:avLst/>
-          </a:prstGeom>
-          <a:noFill/>
-        </p:spPr>
-        <p:txBody>
-          <a:bodyPr wrap="square">
-            <a:spAutoFit/>
-          </a:bodyPr>
-          <a:lstStyle/>
-          <a:p>
-            <a:pPr algn="ctr"/>
-            <a:r>
-              <a:rPr sz="850" b="1">
-                <a:solidFill>
-                  <a:srgbClr val="3B82F6"/>
-                </a:solidFill>
-              </a:rPr>
-              <a:t>T1</a:t>
-            </a:r>
-          </a:p>
-        </p:txBody>
-      </p:sp>
-      <p:sp>
-        <p:nvSpPr>
-          <p:cNvPr id="97" name="Rectangle 96"/>
-          <p:cNvSpPr/>
-          <p:nvPr/>
-        </p:nvSpPr>
-        <p:spPr>
-          <a:xfrm>
-            <a:off x="365760" y="4178808"/>
-            <a:ext cx="11430000" cy="342900"/>
-          </a:xfrm>
-          <a:prstGeom prst="rect">
-            <a:avLst/>
-          </a:prstGeom>
-          <a:solidFill>
-            <a:srgbClr val="1A1B23"/>
-          </a:solidFill>
-          <a:ln w="12700">
-            <a:noFill/>
-          </a:ln>
-        </p:spPr>
-        <p:style>
-          <a:lnRef idx="1">
-            <a:schemeClr val="accent1"/>
-          </a:lnRef>
-          <a:fillRef idx="3">
-            <a:schemeClr val="accent1"/>
-          </a:fillRef>
-          <a:effectRef idx="2">
-            <a:schemeClr val="accent1"/>
-          </a:effectRef>
-          <a:fontRef idx="minor">
-            <a:schemeClr val="lt1"/>
-          </a:fontRef>
-        </p:style>
-        <p:txBody>
-          <a:bodyPr rtlCol="0" anchor="ctr"/>
-          <a:lstStyle/>
-          <a:p>
-            <a:pPr algn="ctr"/>
-          </a:p>
-        </p:txBody>
-      </p:sp>
-      <p:sp>
-        <p:nvSpPr>
-          <p:cNvPr id="98" name="TextBox 97"/>
-          <p:cNvSpPr txBox="1"/>
-          <p:nvPr/>
-        </p:nvSpPr>
-        <p:spPr>
-          <a:xfrm>
-            <a:off x="438912" y="4242816"/>
-            <a:ext cx="2834640" cy="228600"/>
-          </a:xfrm>
-          <a:prstGeom prst="rect">
-            <a:avLst/>
-          </a:prstGeom>
-          <a:noFill/>
-        </p:spPr>
-        <p:txBody>
-          <a:bodyPr wrap="square">
-            <a:spAutoFit/>
-          </a:bodyPr>
-          <a:lstStyle/>
-          <a:p>
-            <a:pPr algn="l"/>
-            <a:r>
-              <a:rPr sz="900" b="0">
-                <a:solidFill>
-                  <a:srgbClr val="FFFFFF"/>
-                </a:solidFill>
-              </a:rPr>
-              <a:t>09  Credential Leak</a:t>
-            </a:r>
-          </a:p>
-        </p:txBody>
-      </p:sp>
-      <p:sp>
-        <p:nvSpPr>
-          <p:cNvPr id="99" name="TextBox 98"/>
-          <p:cNvSpPr txBox="1"/>
-          <p:nvPr/>
-        </p:nvSpPr>
-        <p:spPr>
-          <a:xfrm>
-            <a:off x="3310128" y="4233672"/>
-            <a:ext cx="777240" cy="256032"/>
-          </a:xfrm>
-          <a:prstGeom prst="rect">
-            <a:avLst/>
-          </a:prstGeom>
-          <a:noFill/>
-        </p:spPr>
-        <p:txBody>
-          <a:bodyPr wrap="square">
-            <a:spAutoFit/>
-          </a:bodyPr>
-          <a:lstStyle/>
-          <a:p>
-            <a:pPr algn="r"/>
-            <a:r>
-              <a:rPr sz="1000" b="1">
-                <a:solidFill>
-                  <a:srgbClr val="EF4444"/>
-                </a:solidFill>
-              </a:rPr>
-              <a:t>0.0%</a:t>
-            </a:r>
-          </a:p>
-        </p:txBody>
-      </p:sp>
-      <p:sp>
-        <p:nvSpPr>
-          <p:cNvPr id="100" name="Rectangle 99"/>
-          <p:cNvSpPr/>
-          <p:nvPr/>
-        </p:nvSpPr>
-        <p:spPr>
-          <a:xfrm>
-            <a:off x="4160520" y="4270248"/>
-            <a:ext cx="5029200" cy="123444"/>
-          </a:xfrm>
-          <a:prstGeom prst="rect">
-            <a:avLst/>
-          </a:prstGeom>
-          <a:solidFill>
-            <a:srgbClr val="252635"/>
-          </a:solidFill>
-          <a:ln>
-            <a:noFill/>
-          </a:ln>
-        </p:spPr>
-        <p:style>
-          <a:lnRef idx="1">
-            <a:schemeClr val="accent1"/>
-          </a:lnRef>
-          <a:fillRef idx="3">
-            <a:schemeClr val="accent1"/>
-          </a:fillRef>
-          <a:effectRef idx="2">
-            <a:schemeClr val="accent1"/>
-          </a:effectRef>
-          <a:fontRef idx="minor">
-            <a:schemeClr val="lt1"/>
-          </a:fontRef>
-        </p:style>
-        <p:txBody>
-          <a:bodyPr rtlCol="0" anchor="ctr"/>
-          <a:lstStyle/>
-          <a:p>
-            <a:pPr algn="ctr"/>
-          </a:p>
-        </p:txBody>
-      </p:sp>
-      <p:sp>
-        <p:nvSpPr>
-          <p:cNvPr id="101" name="TextBox 100"/>
-          <p:cNvSpPr txBox="1"/>
-          <p:nvPr/>
-        </p:nvSpPr>
-        <p:spPr>
-          <a:xfrm>
-            <a:off x="8979408" y="4242816"/>
-            <a:ext cx="365760" cy="256032"/>
-          </a:xfrm>
-          <a:prstGeom prst="rect">
-            <a:avLst/>
-          </a:prstGeom>
-          <a:noFill/>
-        </p:spPr>
-        <p:txBody>
-          <a:bodyPr wrap="square">
-            <a:spAutoFit/>
-          </a:bodyPr>
-          <a:lstStyle/>
-          <a:p>
-            <a:pPr algn="ctr"/>
-            <a:r>
-              <a:rPr sz="950" b="1">
-                <a:solidFill>
-                  <a:srgbClr val="EF4444"/>
-                </a:solidFill>
-              </a:rPr>
-              <a:t>0</a:t>
-            </a:r>
-          </a:p>
-        </p:txBody>
-      </p:sp>
-      <p:sp>
-        <p:nvSpPr>
-          <p:cNvPr id="102" name="TextBox 101"/>
-          <p:cNvSpPr txBox="1"/>
-          <p:nvPr/>
-        </p:nvSpPr>
-        <p:spPr>
-          <a:xfrm>
-            <a:off x="9345168" y="4242816"/>
-            <a:ext cx="365760" cy="256032"/>
-          </a:xfrm>
-          <a:prstGeom prst="rect">
-            <a:avLst/>
-          </a:prstGeom>
-          <a:noFill/>
-        </p:spPr>
-        <p:txBody>
-          <a:bodyPr wrap="square">
-            <a:spAutoFit/>
-          </a:bodyPr>
-          <a:lstStyle/>
-          <a:p>
-            <a:pPr algn="ctr"/>
-            <a:r>
-              <a:rPr sz="950" b="0">
-                <a:solidFill>
-                  <a:srgbClr val="EF4444"/>
-                </a:solidFill>
-              </a:rPr>
-              <a:t>15</a:t>
-            </a:r>
-          </a:p>
-        </p:txBody>
-      </p:sp>
-      <p:sp>
-        <p:nvSpPr>
-          <p:cNvPr id="103" name="TextBox 102"/>
-          <p:cNvSpPr txBox="1"/>
-          <p:nvPr/>
-        </p:nvSpPr>
-        <p:spPr>
-          <a:xfrm>
-            <a:off x="9802368" y="4242816"/>
-            <a:ext cx="457200" cy="256032"/>
-          </a:xfrm>
-          <a:prstGeom prst="rect">
-            <a:avLst/>
-          </a:prstGeom>
-          <a:noFill/>
-        </p:spPr>
-        <p:txBody>
-          <a:bodyPr wrap="square">
-            <a:spAutoFit/>
-          </a:bodyPr>
-          <a:lstStyle/>
-          <a:p>
-            <a:pPr algn="ctr"/>
-            <a:r>
-              <a:rPr sz="900" b="0">
-                <a:solidFill>
-                  <a:srgbClr val="94A3B8"/>
-                </a:solidFill>
-              </a:rPr>
-              <a:t>—</a:t>
-            </a:r>
-          </a:p>
-        </p:txBody>
-      </p:sp>
-      <p:sp>
-        <p:nvSpPr>
-          <p:cNvPr id="104" name="TextBox 103"/>
-          <p:cNvSpPr txBox="1"/>
-          <p:nvPr/>
-        </p:nvSpPr>
-        <p:spPr>
-          <a:xfrm>
-            <a:off x="10314432" y="4242816"/>
-            <a:ext cx="822960" cy="256032"/>
-          </a:xfrm>
-          <a:prstGeom prst="rect">
-            <a:avLst/>
-          </a:prstGeom>
-          <a:noFill/>
-        </p:spPr>
-        <p:txBody>
-          <a:bodyPr wrap="square">
-            <a:spAutoFit/>
-          </a:bodyPr>
-          <a:lstStyle/>
-          <a:p>
-            <a:pPr algn="r"/>
-            <a:r>
-              <a:rPr sz="900" b="0">
-                <a:solidFill>
-                  <a:srgbClr val="94A3B8"/>
-                </a:solidFill>
-              </a:rPr>
-              <a:t>0.1ms</a:t>
-            </a:r>
-          </a:p>
-        </p:txBody>
-      </p:sp>
-      <p:sp>
-        <p:nvSpPr>
-          <p:cNvPr id="105" name="TextBox 104"/>
-          <p:cNvSpPr txBox="1"/>
-          <p:nvPr/>
-        </p:nvSpPr>
-        <p:spPr>
-          <a:xfrm>
-            <a:off x="11173968" y="4242816"/>
-            <a:ext cx="548640" cy="256032"/>
-          </a:xfrm>
-          <a:prstGeom prst="rect">
-            <a:avLst/>
-          </a:prstGeom>
-          <a:noFill/>
-        </p:spPr>
-        <p:txBody>
-          <a:bodyPr wrap="square">
-            <a:spAutoFit/>
-          </a:bodyPr>
-          <a:lstStyle/>
-          <a:p>
-            <a:pPr algn="ctr"/>
-            <a:r>
-              <a:rPr sz="850" b="1">
-                <a:solidFill>
-                  <a:srgbClr val="3B82F6"/>
-                </a:solidFill>
-              </a:rPr>
-              <a:t>T1</a:t>
-            </a:r>
-          </a:p>
-        </p:txBody>
-      </p:sp>
-      <p:sp>
-        <p:nvSpPr>
-          <p:cNvPr id="106" name="Rectangle 105"/>
-          <p:cNvSpPr/>
-          <p:nvPr/>
-        </p:nvSpPr>
-        <p:spPr>
-          <a:xfrm>
-            <a:off x="365760" y="4530852"/>
-            <a:ext cx="11430000" cy="342900"/>
-          </a:xfrm>
-          <a:prstGeom prst="rect">
-            <a:avLst/>
-          </a:prstGeom>
-          <a:solidFill>
-            <a:srgbClr val="12131B"/>
-          </a:solidFill>
-          <a:ln w="12700">
-            <a:noFill/>
-          </a:ln>
-        </p:spPr>
-        <p:style>
-          <a:lnRef idx="1">
-            <a:schemeClr val="accent1"/>
-          </a:lnRef>
-          <a:fillRef idx="3">
-            <a:schemeClr val="accent1"/>
-          </a:fillRef>
-          <a:effectRef idx="2">
-            <a:schemeClr val="accent1"/>
-          </a:effectRef>
-          <a:fontRef idx="minor">
-            <a:schemeClr val="lt1"/>
-          </a:fontRef>
-        </p:style>
-        <p:txBody>
-          <a:bodyPr rtlCol="0" anchor="ctr"/>
-          <a:lstStyle/>
-          <a:p>
-            <a:pPr algn="ctr"/>
-          </a:p>
-        </p:txBody>
-      </p:sp>
-      <p:sp>
-        <p:nvSpPr>
-          <p:cNvPr id="107" name="TextBox 106"/>
-          <p:cNvSpPr txBox="1"/>
-          <p:nvPr/>
-        </p:nvSpPr>
-        <p:spPr>
-          <a:xfrm>
-            <a:off x="438912" y="4594860"/>
-            <a:ext cx="2834640" cy="228600"/>
-          </a:xfrm>
-          <a:prstGeom prst="rect">
-            <a:avLst/>
-          </a:prstGeom>
-          <a:noFill/>
-        </p:spPr>
-        <p:txBody>
-          <a:bodyPr wrap="square">
-            <a:spAutoFit/>
-          </a:bodyPr>
-          <a:lstStyle/>
-          <a:p>
-            <a:pPr algn="l"/>
-            <a:r>
-              <a:rPr sz="900" b="0">
-                <a:solidFill>
-                  <a:srgbClr val="FFFFFF"/>
-                </a:solidFill>
-              </a:rPr>
-              <a:t>10  Code Injection</a:t>
-            </a:r>
-          </a:p>
-        </p:txBody>
-      </p:sp>
-      <p:sp>
-        <p:nvSpPr>
-          <p:cNvPr id="108" name="TextBox 107"/>
-          <p:cNvSpPr txBox="1"/>
-          <p:nvPr/>
-        </p:nvSpPr>
-        <p:spPr>
-          <a:xfrm>
-            <a:off x="3310128" y="4585716"/>
-            <a:ext cx="777240" cy="256032"/>
-          </a:xfrm>
-          <a:prstGeom prst="rect">
-            <a:avLst/>
-          </a:prstGeom>
-          <a:noFill/>
-        </p:spPr>
-        <p:txBody>
-          <a:bodyPr wrap="square">
-            <a:spAutoFit/>
-          </a:bodyPr>
-          <a:lstStyle/>
-          <a:p>
-            <a:pPr algn="r"/>
-            <a:r>
-              <a:rPr sz="1000" b="1">
-                <a:solidFill>
-                  <a:srgbClr val="10B981"/>
-                </a:solidFill>
-              </a:rPr>
-              <a:t>26.7%</a:t>
-            </a:r>
-          </a:p>
-        </p:txBody>
-      </p:sp>
-      <p:sp>
-        <p:nvSpPr>
-          <p:cNvPr id="109" name="Rectangle 108"/>
-          <p:cNvSpPr/>
-          <p:nvPr/>
-        </p:nvSpPr>
-        <p:spPr>
-          <a:xfrm>
-            <a:off x="4160520" y="4622292"/>
-            <a:ext cx="5029200" cy="123444"/>
-          </a:xfrm>
-          <a:prstGeom prst="rect">
-            <a:avLst/>
-          </a:prstGeom>
-          <a:solidFill>
-            <a:srgbClr val="252635"/>
-          </a:solidFill>
-          <a:ln>
-            <a:noFill/>
-          </a:ln>
-        </p:spPr>
-        <p:style>
-          <a:lnRef idx="1">
-            <a:schemeClr val="accent1"/>
-          </a:lnRef>
-          <a:fillRef idx="3">
-            <a:schemeClr val="accent1"/>
-          </a:fillRef>
-          <a:effectRef idx="2">
-            <a:schemeClr val="accent1"/>
-          </a:effectRef>
-          <a:fontRef idx="minor">
-            <a:schemeClr val="lt1"/>
-          </a:fontRef>
-        </p:style>
-        <p:txBody>
-          <a:bodyPr rtlCol="0" anchor="ctr"/>
-          <a:lstStyle/>
-          <a:p>
-            <a:pPr algn="ctr"/>
-          </a:p>
-        </p:txBody>
-      </p:sp>
-      <p:sp>
-        <p:nvSpPr>
-          <p:cNvPr id="110" name="Rectangle 109"/>
-          <p:cNvSpPr/>
-          <p:nvPr/>
-        </p:nvSpPr>
-        <p:spPr>
-          <a:xfrm>
-            <a:off x="4160520" y="4622292"/>
-            <a:ext cx="5029200" cy="123444"/>
+            <a:off x="365760" y="5980176"/>
+            <a:ext cx="11430000" cy="38100"/>
           </a:xfrm>
           <a:prstGeom prst="rect">
             <a:avLst/>
@@ -14204,1210 +15793,7 @@
       </p:sp>
       <p:sp>
         <p:nvSpPr>
-          <p:cNvPr id="111" name="TextBox 110"/>
-          <p:cNvSpPr txBox="1"/>
-          <p:nvPr/>
-        </p:nvSpPr>
-        <p:spPr>
-          <a:xfrm>
-            <a:off x="8503920" y="4594860"/>
-            <a:ext cx="658368" cy="256032"/>
-          </a:xfrm>
-          <a:prstGeom prst="rect">
-            <a:avLst/>
-          </a:prstGeom>
-          <a:noFill/>
-        </p:spPr>
-        <p:txBody>
-          <a:bodyPr wrap="square">
-            <a:spAutoFit/>
-          </a:bodyPr>
-          <a:lstStyle/>
-          <a:p>
-            <a:pPr algn="r"/>
-            <a:r>
-              <a:rPr sz="900" b="1">
-                <a:solidFill>
-                  <a:srgbClr val="050508"/>
-                </a:solidFill>
-              </a:rPr>
-              <a:t>26.7%</a:t>
-            </a:r>
-          </a:p>
-        </p:txBody>
-      </p:sp>
-      <p:sp>
-        <p:nvSpPr>
-          <p:cNvPr id="112" name="TextBox 111"/>
-          <p:cNvSpPr txBox="1"/>
-          <p:nvPr/>
-        </p:nvSpPr>
-        <p:spPr>
-          <a:xfrm>
-            <a:off x="8979408" y="4594860"/>
-            <a:ext cx="365760" cy="256032"/>
-          </a:xfrm>
-          <a:prstGeom prst="rect">
-            <a:avLst/>
-          </a:prstGeom>
-          <a:noFill/>
-        </p:spPr>
-        <p:txBody>
-          <a:bodyPr wrap="square">
-            <a:spAutoFit/>
-          </a:bodyPr>
-          <a:lstStyle/>
-          <a:p>
-            <a:pPr algn="ctr"/>
-            <a:r>
-              <a:rPr sz="950" b="1">
-                <a:solidFill>
-                  <a:srgbClr val="10B981"/>
-                </a:solidFill>
-              </a:rPr>
-              <a:t>4</a:t>
-            </a:r>
-          </a:p>
-        </p:txBody>
-      </p:sp>
-      <p:sp>
-        <p:nvSpPr>
-          <p:cNvPr id="113" name="TextBox 112"/>
-          <p:cNvSpPr txBox="1"/>
-          <p:nvPr/>
-        </p:nvSpPr>
-        <p:spPr>
-          <a:xfrm>
-            <a:off x="9345168" y="4594860"/>
-            <a:ext cx="365760" cy="256032"/>
-          </a:xfrm>
-          <a:prstGeom prst="rect">
-            <a:avLst/>
-          </a:prstGeom>
-          <a:noFill/>
-        </p:spPr>
-        <p:txBody>
-          <a:bodyPr wrap="square">
-            <a:spAutoFit/>
-          </a:bodyPr>
-          <a:lstStyle/>
-          <a:p>
-            <a:pPr algn="ctr"/>
-            <a:r>
-              <a:rPr sz="950" b="0">
-                <a:solidFill>
-                  <a:srgbClr val="EF4444"/>
-                </a:solidFill>
-              </a:rPr>
-              <a:t>11</a:t>
-            </a:r>
-          </a:p>
-        </p:txBody>
-      </p:sp>
-      <p:sp>
-        <p:nvSpPr>
-          <p:cNvPr id="114" name="TextBox 113"/>
-          <p:cNvSpPr txBox="1"/>
-          <p:nvPr/>
-        </p:nvSpPr>
-        <p:spPr>
-          <a:xfrm>
-            <a:off x="9802368" y="4594860"/>
-            <a:ext cx="457200" cy="256032"/>
-          </a:xfrm>
-          <a:prstGeom prst="rect">
-            <a:avLst/>
-          </a:prstGeom>
-          <a:noFill/>
-        </p:spPr>
-        <p:txBody>
-          <a:bodyPr wrap="square">
-            <a:spAutoFit/>
-          </a:bodyPr>
-          <a:lstStyle/>
-          <a:p>
-            <a:pPr algn="ctr"/>
-            <a:r>
-              <a:rPr sz="900" b="0">
-                <a:solidFill>
-                  <a:srgbClr val="94A3B8"/>
-                </a:solidFill>
-              </a:rPr>
-              <a:t>0.421</a:t>
-            </a:r>
-          </a:p>
-        </p:txBody>
-      </p:sp>
-      <p:sp>
-        <p:nvSpPr>
-          <p:cNvPr id="115" name="TextBox 114"/>
-          <p:cNvSpPr txBox="1"/>
-          <p:nvPr/>
-        </p:nvSpPr>
-        <p:spPr>
-          <a:xfrm>
-            <a:off x="10314432" y="4594860"/>
-            <a:ext cx="822960" cy="256032"/>
-          </a:xfrm>
-          <a:prstGeom prst="rect">
-            <a:avLst/>
-          </a:prstGeom>
-          <a:noFill/>
-        </p:spPr>
-        <p:txBody>
-          <a:bodyPr wrap="square">
-            <a:spAutoFit/>
-          </a:bodyPr>
-          <a:lstStyle/>
-          <a:p>
-            <a:pPr algn="r"/>
-            <a:r>
-              <a:rPr sz="900" b="0">
-                <a:solidFill>
-                  <a:srgbClr val="94A3B8"/>
-                </a:solidFill>
-              </a:rPr>
-              <a:t>16.21ms</a:t>
-            </a:r>
-          </a:p>
-        </p:txBody>
-      </p:sp>
-      <p:sp>
-        <p:nvSpPr>
-          <p:cNvPr id="116" name="TextBox 115"/>
-          <p:cNvSpPr txBox="1"/>
-          <p:nvPr/>
-        </p:nvSpPr>
-        <p:spPr>
-          <a:xfrm>
-            <a:off x="11173968" y="4594860"/>
-            <a:ext cx="548640" cy="256032"/>
-          </a:xfrm>
-          <a:prstGeom prst="rect">
-            <a:avLst/>
-          </a:prstGeom>
-          <a:noFill/>
-        </p:spPr>
-        <p:txBody>
-          <a:bodyPr wrap="square">
-            <a:spAutoFit/>
-          </a:bodyPr>
-          <a:lstStyle/>
-          <a:p>
-            <a:pPr algn="ctr"/>
-            <a:r>
-              <a:rPr sz="850" b="1">
-                <a:solidFill>
-                  <a:srgbClr val="10B981"/>
-                </a:solidFill>
-              </a:rPr>
-              <a:t>T0+T1</a:t>
-            </a:r>
-          </a:p>
-        </p:txBody>
-      </p:sp>
-      <p:sp>
-        <p:nvSpPr>
-          <p:cNvPr id="117" name="Rectangle 116"/>
-          <p:cNvSpPr/>
-          <p:nvPr/>
-        </p:nvSpPr>
-        <p:spPr>
-          <a:xfrm>
-            <a:off x="365760" y="4882896"/>
-            <a:ext cx="11430000" cy="342900"/>
-          </a:xfrm>
-          <a:prstGeom prst="rect">
-            <a:avLst/>
-          </a:prstGeom>
-          <a:solidFill>
-            <a:srgbClr val="1A1B23"/>
-          </a:solidFill>
-          <a:ln w="12700">
-            <a:noFill/>
-          </a:ln>
-        </p:spPr>
-        <p:style>
-          <a:lnRef idx="1">
-            <a:schemeClr val="accent1"/>
-          </a:lnRef>
-          <a:fillRef idx="3">
-            <a:schemeClr val="accent1"/>
-          </a:fillRef>
-          <a:effectRef idx="2">
-            <a:schemeClr val="accent1"/>
-          </a:effectRef>
-          <a:fontRef idx="minor">
-            <a:schemeClr val="lt1"/>
-          </a:fontRef>
-        </p:style>
-        <p:txBody>
-          <a:bodyPr rtlCol="0" anchor="ctr"/>
-          <a:lstStyle/>
-          <a:p>
-            <a:pPr algn="ctr"/>
-          </a:p>
-        </p:txBody>
-      </p:sp>
-      <p:sp>
-        <p:nvSpPr>
-          <p:cNvPr id="118" name="TextBox 117"/>
-          <p:cNvSpPr txBox="1"/>
-          <p:nvPr/>
-        </p:nvSpPr>
-        <p:spPr>
-          <a:xfrm>
-            <a:off x="438912" y="4946904"/>
-            <a:ext cx="2834640" cy="228600"/>
-          </a:xfrm>
-          <a:prstGeom prst="rect">
-            <a:avLst/>
-          </a:prstGeom>
-          <a:noFill/>
-        </p:spPr>
-        <p:txBody>
-          <a:bodyPr wrap="square">
-            <a:spAutoFit/>
-          </a:bodyPr>
-          <a:lstStyle/>
-          <a:p>
-            <a:pPr algn="l"/>
-            <a:r>
-              <a:rPr sz="900" b="0">
-                <a:solidFill>
-                  <a:srgbClr val="FFFFFF"/>
-                </a:solidFill>
-              </a:rPr>
-              <a:t>11  Resource Exhaustion</a:t>
-            </a:r>
-          </a:p>
-        </p:txBody>
-      </p:sp>
-      <p:sp>
-        <p:nvSpPr>
-          <p:cNvPr id="119" name="TextBox 118"/>
-          <p:cNvSpPr txBox="1"/>
-          <p:nvPr/>
-        </p:nvSpPr>
-        <p:spPr>
-          <a:xfrm>
-            <a:off x="3310128" y="4937759"/>
-            <a:ext cx="777240" cy="256032"/>
-          </a:xfrm>
-          <a:prstGeom prst="rect">
-            <a:avLst/>
-          </a:prstGeom>
-          <a:noFill/>
-        </p:spPr>
-        <p:txBody>
-          <a:bodyPr wrap="square">
-            <a:spAutoFit/>
-          </a:bodyPr>
-          <a:lstStyle/>
-          <a:p>
-            <a:pPr algn="r"/>
-            <a:r>
-              <a:rPr sz="1000" b="1">
-                <a:solidFill>
-                  <a:srgbClr val="EF4444"/>
-                </a:solidFill>
-              </a:rPr>
-              <a:t>0.0%</a:t>
-            </a:r>
-          </a:p>
-        </p:txBody>
-      </p:sp>
-      <p:sp>
-        <p:nvSpPr>
-          <p:cNvPr id="120" name="Rectangle 119"/>
-          <p:cNvSpPr/>
-          <p:nvPr/>
-        </p:nvSpPr>
-        <p:spPr>
-          <a:xfrm>
-            <a:off x="4160520" y="4974336"/>
-            <a:ext cx="5029200" cy="123444"/>
-          </a:xfrm>
-          <a:prstGeom prst="rect">
-            <a:avLst/>
-          </a:prstGeom>
-          <a:solidFill>
-            <a:srgbClr val="252635"/>
-          </a:solidFill>
-          <a:ln>
-            <a:noFill/>
-          </a:ln>
-        </p:spPr>
-        <p:style>
-          <a:lnRef idx="1">
-            <a:schemeClr val="accent1"/>
-          </a:lnRef>
-          <a:fillRef idx="3">
-            <a:schemeClr val="accent1"/>
-          </a:fillRef>
-          <a:effectRef idx="2">
-            <a:schemeClr val="accent1"/>
-          </a:effectRef>
-          <a:fontRef idx="minor">
-            <a:schemeClr val="lt1"/>
-          </a:fontRef>
-        </p:style>
-        <p:txBody>
-          <a:bodyPr rtlCol="0" anchor="ctr"/>
-          <a:lstStyle/>
-          <a:p>
-            <a:pPr algn="ctr"/>
-          </a:p>
-        </p:txBody>
-      </p:sp>
-      <p:sp>
-        <p:nvSpPr>
-          <p:cNvPr id="121" name="TextBox 120"/>
-          <p:cNvSpPr txBox="1"/>
-          <p:nvPr/>
-        </p:nvSpPr>
-        <p:spPr>
-          <a:xfrm>
-            <a:off x="8979408" y="4946904"/>
-            <a:ext cx="365760" cy="256032"/>
-          </a:xfrm>
-          <a:prstGeom prst="rect">
-            <a:avLst/>
-          </a:prstGeom>
-          <a:noFill/>
-        </p:spPr>
-        <p:txBody>
-          <a:bodyPr wrap="square">
-            <a:spAutoFit/>
-          </a:bodyPr>
-          <a:lstStyle/>
-          <a:p>
-            <a:pPr algn="ctr"/>
-            <a:r>
-              <a:rPr sz="950" b="1">
-                <a:solidFill>
-                  <a:srgbClr val="EF4444"/>
-                </a:solidFill>
-              </a:rPr>
-              <a:t>0</a:t>
-            </a:r>
-          </a:p>
-        </p:txBody>
-      </p:sp>
-      <p:sp>
-        <p:nvSpPr>
-          <p:cNvPr id="122" name="TextBox 121"/>
-          <p:cNvSpPr txBox="1"/>
-          <p:nvPr/>
-        </p:nvSpPr>
-        <p:spPr>
-          <a:xfrm>
-            <a:off x="9345168" y="4946904"/>
-            <a:ext cx="365760" cy="256032"/>
-          </a:xfrm>
-          <a:prstGeom prst="rect">
-            <a:avLst/>
-          </a:prstGeom>
-          <a:noFill/>
-        </p:spPr>
-        <p:txBody>
-          <a:bodyPr wrap="square">
-            <a:spAutoFit/>
-          </a:bodyPr>
-          <a:lstStyle/>
-          <a:p>
-            <a:pPr algn="ctr"/>
-            <a:r>
-              <a:rPr sz="950" b="0">
-                <a:solidFill>
-                  <a:srgbClr val="EF4444"/>
-                </a:solidFill>
-              </a:rPr>
-              <a:t>15</a:t>
-            </a:r>
-          </a:p>
-        </p:txBody>
-      </p:sp>
-      <p:sp>
-        <p:nvSpPr>
-          <p:cNvPr id="123" name="TextBox 122"/>
-          <p:cNvSpPr txBox="1"/>
-          <p:nvPr/>
-        </p:nvSpPr>
-        <p:spPr>
-          <a:xfrm>
-            <a:off x="9802368" y="4946904"/>
-            <a:ext cx="457200" cy="256032"/>
-          </a:xfrm>
-          <a:prstGeom prst="rect">
-            <a:avLst/>
-          </a:prstGeom>
-          <a:noFill/>
-        </p:spPr>
-        <p:txBody>
-          <a:bodyPr wrap="square">
-            <a:spAutoFit/>
-          </a:bodyPr>
-          <a:lstStyle/>
-          <a:p>
-            <a:pPr algn="ctr"/>
-            <a:r>
-              <a:rPr sz="900" b="0">
-                <a:solidFill>
-                  <a:srgbClr val="94A3B8"/>
-                </a:solidFill>
-              </a:rPr>
-              <a:t>—</a:t>
-            </a:r>
-          </a:p>
-        </p:txBody>
-      </p:sp>
-      <p:sp>
-        <p:nvSpPr>
-          <p:cNvPr id="124" name="TextBox 123"/>
-          <p:cNvSpPr txBox="1"/>
-          <p:nvPr/>
-        </p:nvSpPr>
-        <p:spPr>
-          <a:xfrm>
-            <a:off x="10314432" y="4946904"/>
-            <a:ext cx="822960" cy="256032"/>
-          </a:xfrm>
-          <a:prstGeom prst="rect">
-            <a:avLst/>
-          </a:prstGeom>
-          <a:noFill/>
-        </p:spPr>
-        <p:txBody>
-          <a:bodyPr wrap="square">
-            <a:spAutoFit/>
-          </a:bodyPr>
-          <a:lstStyle/>
-          <a:p>
-            <a:pPr algn="r"/>
-            <a:r>
-              <a:rPr sz="900" b="0">
-                <a:solidFill>
-                  <a:srgbClr val="94A3B8"/>
-                </a:solidFill>
-              </a:rPr>
-              <a:t>0.1ms</a:t>
-            </a:r>
-          </a:p>
-        </p:txBody>
-      </p:sp>
-      <p:sp>
-        <p:nvSpPr>
-          <p:cNvPr id="125" name="TextBox 124"/>
-          <p:cNvSpPr txBox="1"/>
-          <p:nvPr/>
-        </p:nvSpPr>
-        <p:spPr>
-          <a:xfrm>
-            <a:off x="11173968" y="4946904"/>
-            <a:ext cx="548640" cy="256032"/>
-          </a:xfrm>
-          <a:prstGeom prst="rect">
-            <a:avLst/>
-          </a:prstGeom>
-          <a:noFill/>
-        </p:spPr>
-        <p:txBody>
-          <a:bodyPr wrap="square">
-            <a:spAutoFit/>
-          </a:bodyPr>
-          <a:lstStyle/>
-          <a:p>
-            <a:pPr algn="ctr"/>
-            <a:r>
-              <a:rPr sz="850" b="1">
-                <a:solidFill>
-                  <a:srgbClr val="3B82F6"/>
-                </a:solidFill>
-              </a:rPr>
-              <a:t>T1</a:t>
-            </a:r>
-          </a:p>
-        </p:txBody>
-      </p:sp>
-      <p:sp>
-        <p:nvSpPr>
-          <p:cNvPr id="126" name="Rectangle 125"/>
-          <p:cNvSpPr/>
-          <p:nvPr/>
-        </p:nvSpPr>
-        <p:spPr>
-          <a:xfrm>
-            <a:off x="365760" y="5234940"/>
-            <a:ext cx="11430000" cy="342900"/>
-          </a:xfrm>
-          <a:prstGeom prst="rect">
-            <a:avLst/>
-          </a:prstGeom>
-          <a:solidFill>
-            <a:srgbClr val="12131B"/>
-          </a:solidFill>
-          <a:ln w="12700">
-            <a:noFill/>
-          </a:ln>
-        </p:spPr>
-        <p:style>
-          <a:lnRef idx="1">
-            <a:schemeClr val="accent1"/>
-          </a:lnRef>
-          <a:fillRef idx="3">
-            <a:schemeClr val="accent1"/>
-          </a:fillRef>
-          <a:effectRef idx="2">
-            <a:schemeClr val="accent1"/>
-          </a:effectRef>
-          <a:fontRef idx="minor">
-            <a:schemeClr val="lt1"/>
-          </a:fontRef>
-        </p:style>
-        <p:txBody>
-          <a:bodyPr rtlCol="0" anchor="ctr"/>
-          <a:lstStyle/>
-          <a:p>
-            <a:pPr algn="ctr"/>
-          </a:p>
-        </p:txBody>
-      </p:sp>
-      <p:sp>
-        <p:nvSpPr>
-          <p:cNvPr id="127" name="TextBox 126"/>
-          <p:cNvSpPr txBox="1"/>
-          <p:nvPr/>
-        </p:nvSpPr>
-        <p:spPr>
-          <a:xfrm>
-            <a:off x="438912" y="5298948"/>
-            <a:ext cx="2834640" cy="228600"/>
-          </a:xfrm>
-          <a:prstGeom prst="rect">
-            <a:avLst/>
-          </a:prstGeom>
-          <a:noFill/>
-        </p:spPr>
-        <p:txBody>
-          <a:bodyPr wrap="square">
-            <a:spAutoFit/>
-          </a:bodyPr>
-          <a:lstStyle/>
-          <a:p>
-            <a:pPr algn="l"/>
-            <a:r>
-              <a:rPr sz="900" b="0">
-                <a:solidFill>
-                  <a:srgbClr val="FFFFFF"/>
-                </a:solidFill>
-              </a:rPr>
-              <a:t>12  Data Poisoning (RAG)</a:t>
-            </a:r>
-          </a:p>
-        </p:txBody>
-      </p:sp>
-      <p:sp>
-        <p:nvSpPr>
-          <p:cNvPr id="128" name="TextBox 127"/>
-          <p:cNvSpPr txBox="1"/>
-          <p:nvPr/>
-        </p:nvSpPr>
-        <p:spPr>
-          <a:xfrm>
-            <a:off x="3310128" y="5289804"/>
-            <a:ext cx="777240" cy="256032"/>
-          </a:xfrm>
-          <a:prstGeom prst="rect">
-            <a:avLst/>
-          </a:prstGeom>
-          <a:noFill/>
-        </p:spPr>
-        <p:txBody>
-          <a:bodyPr wrap="square">
-            <a:spAutoFit/>
-          </a:bodyPr>
-          <a:lstStyle/>
-          <a:p>
-            <a:pPr algn="r"/>
-            <a:r>
-              <a:rPr sz="1000" b="1">
-                <a:solidFill>
-                  <a:srgbClr val="F59E0B"/>
-                </a:solidFill>
-              </a:rPr>
-              <a:t>13.3%</a:t>
-            </a:r>
-          </a:p>
-        </p:txBody>
-      </p:sp>
-      <p:sp>
-        <p:nvSpPr>
-          <p:cNvPr id="129" name="Rectangle 128"/>
-          <p:cNvSpPr/>
-          <p:nvPr/>
-        </p:nvSpPr>
-        <p:spPr>
-          <a:xfrm>
-            <a:off x="4160520" y="5326380"/>
-            <a:ext cx="5029200" cy="123444"/>
-          </a:xfrm>
-          <a:prstGeom prst="rect">
-            <a:avLst/>
-          </a:prstGeom>
-          <a:solidFill>
-            <a:srgbClr val="252635"/>
-          </a:solidFill>
-          <a:ln>
-            <a:noFill/>
-          </a:ln>
-        </p:spPr>
-        <p:style>
-          <a:lnRef idx="1">
-            <a:schemeClr val="accent1"/>
-          </a:lnRef>
-          <a:fillRef idx="3">
-            <a:schemeClr val="accent1"/>
-          </a:fillRef>
-          <a:effectRef idx="2">
-            <a:schemeClr val="accent1"/>
-          </a:effectRef>
-          <a:fontRef idx="minor">
-            <a:schemeClr val="lt1"/>
-          </a:fontRef>
-        </p:style>
-        <p:txBody>
-          <a:bodyPr rtlCol="0" anchor="ctr"/>
-          <a:lstStyle/>
-          <a:p>
-            <a:pPr algn="ctr"/>
-          </a:p>
-        </p:txBody>
-      </p:sp>
-      <p:sp>
-        <p:nvSpPr>
-          <p:cNvPr id="130" name="Rectangle 129"/>
-          <p:cNvSpPr/>
-          <p:nvPr/>
-        </p:nvSpPr>
-        <p:spPr>
-          <a:xfrm>
-            <a:off x="4160520" y="5326380"/>
-            <a:ext cx="2513657" cy="123444"/>
-          </a:xfrm>
-          <a:prstGeom prst="rect">
-            <a:avLst/>
-          </a:prstGeom>
-          <a:solidFill>
-            <a:srgbClr val="F59E0B"/>
-          </a:solidFill>
-          <a:ln>
-            <a:noFill/>
-          </a:ln>
-        </p:spPr>
-        <p:style>
-          <a:lnRef idx="1">
-            <a:schemeClr val="accent1"/>
-          </a:lnRef>
-          <a:fillRef idx="3">
-            <a:schemeClr val="accent1"/>
-          </a:fillRef>
-          <a:effectRef idx="2">
-            <a:schemeClr val="accent1"/>
-          </a:effectRef>
-          <a:fontRef idx="minor">
-            <a:schemeClr val="lt1"/>
-          </a:fontRef>
-        </p:style>
-        <p:txBody>
-          <a:bodyPr rtlCol="0" anchor="ctr"/>
-          <a:lstStyle/>
-          <a:p>
-            <a:pPr algn="ctr"/>
-          </a:p>
-        </p:txBody>
-      </p:sp>
-      <p:sp>
-        <p:nvSpPr>
-          <p:cNvPr id="131" name="TextBox 130"/>
-          <p:cNvSpPr txBox="1"/>
-          <p:nvPr/>
-        </p:nvSpPr>
-        <p:spPr>
-          <a:xfrm>
-            <a:off x="5988377" y="5298948"/>
-            <a:ext cx="658368" cy="256032"/>
-          </a:xfrm>
-          <a:prstGeom prst="rect">
-            <a:avLst/>
-          </a:prstGeom>
-          <a:noFill/>
-        </p:spPr>
-        <p:txBody>
-          <a:bodyPr wrap="square">
-            <a:spAutoFit/>
-          </a:bodyPr>
-          <a:lstStyle/>
-          <a:p>
-            <a:pPr algn="r"/>
-            <a:r>
-              <a:rPr sz="900" b="1">
-                <a:solidFill>
-                  <a:srgbClr val="050508"/>
-                </a:solidFill>
-              </a:rPr>
-              <a:t>13.3%</a:t>
-            </a:r>
-          </a:p>
-        </p:txBody>
-      </p:sp>
-      <p:sp>
-        <p:nvSpPr>
-          <p:cNvPr id="132" name="TextBox 131"/>
-          <p:cNvSpPr txBox="1"/>
-          <p:nvPr/>
-        </p:nvSpPr>
-        <p:spPr>
-          <a:xfrm>
-            <a:off x="8979408" y="5298948"/>
-            <a:ext cx="365760" cy="256032"/>
-          </a:xfrm>
-          <a:prstGeom prst="rect">
-            <a:avLst/>
-          </a:prstGeom>
-          <a:noFill/>
-        </p:spPr>
-        <p:txBody>
-          <a:bodyPr wrap="square">
-            <a:spAutoFit/>
-          </a:bodyPr>
-          <a:lstStyle/>
-          <a:p>
-            <a:pPr algn="ctr"/>
-            <a:r>
-              <a:rPr sz="950" b="1">
-                <a:solidFill>
-                  <a:srgbClr val="10B981"/>
-                </a:solidFill>
-              </a:rPr>
-              <a:t>2</a:t>
-            </a:r>
-          </a:p>
-        </p:txBody>
-      </p:sp>
-      <p:sp>
-        <p:nvSpPr>
-          <p:cNvPr id="133" name="TextBox 132"/>
-          <p:cNvSpPr txBox="1"/>
-          <p:nvPr/>
-        </p:nvSpPr>
-        <p:spPr>
-          <a:xfrm>
-            <a:off x="9345168" y="5298948"/>
-            <a:ext cx="365760" cy="256032"/>
-          </a:xfrm>
-          <a:prstGeom prst="rect">
-            <a:avLst/>
-          </a:prstGeom>
-          <a:noFill/>
-        </p:spPr>
-        <p:txBody>
-          <a:bodyPr wrap="square">
-            <a:spAutoFit/>
-          </a:bodyPr>
-          <a:lstStyle/>
-          <a:p>
-            <a:pPr algn="ctr"/>
-            <a:r>
-              <a:rPr sz="950" b="0">
-                <a:solidFill>
-                  <a:srgbClr val="EF4444"/>
-                </a:solidFill>
-              </a:rPr>
-              <a:t>13</a:t>
-            </a:r>
-          </a:p>
-        </p:txBody>
-      </p:sp>
-      <p:sp>
-        <p:nvSpPr>
-          <p:cNvPr id="134" name="TextBox 133"/>
-          <p:cNvSpPr txBox="1"/>
-          <p:nvPr/>
-        </p:nvSpPr>
-        <p:spPr>
-          <a:xfrm>
-            <a:off x="9802368" y="5298948"/>
-            <a:ext cx="457200" cy="256032"/>
-          </a:xfrm>
-          <a:prstGeom prst="rect">
-            <a:avLst/>
-          </a:prstGeom>
-          <a:noFill/>
-        </p:spPr>
-        <p:txBody>
-          <a:bodyPr wrap="square">
-            <a:spAutoFit/>
-          </a:bodyPr>
-          <a:lstStyle/>
-          <a:p>
-            <a:pPr algn="ctr"/>
-            <a:r>
-              <a:rPr sz="900" b="0">
-                <a:solidFill>
-                  <a:srgbClr val="94A3B8"/>
-                </a:solidFill>
-              </a:rPr>
-              <a:t>0.235</a:t>
-            </a:r>
-          </a:p>
-        </p:txBody>
-      </p:sp>
-      <p:sp>
-        <p:nvSpPr>
-          <p:cNvPr id="135" name="TextBox 134"/>
-          <p:cNvSpPr txBox="1"/>
-          <p:nvPr/>
-        </p:nvSpPr>
-        <p:spPr>
-          <a:xfrm>
-            <a:off x="10314432" y="5298948"/>
-            <a:ext cx="822960" cy="256032"/>
-          </a:xfrm>
-          <a:prstGeom prst="rect">
-            <a:avLst/>
-          </a:prstGeom>
-          <a:noFill/>
-        </p:spPr>
-        <p:txBody>
-          <a:bodyPr wrap="square">
-            <a:spAutoFit/>
-          </a:bodyPr>
-          <a:lstStyle/>
-          <a:p>
-            <a:pPr algn="r"/>
-            <a:r>
-              <a:rPr sz="900" b="0">
-                <a:solidFill>
-                  <a:srgbClr val="94A3B8"/>
-                </a:solidFill>
-              </a:rPr>
-              <a:t>0.11ms</a:t>
-            </a:r>
-          </a:p>
-        </p:txBody>
-      </p:sp>
-      <p:sp>
-        <p:nvSpPr>
-          <p:cNvPr id="136" name="TextBox 135"/>
-          <p:cNvSpPr txBox="1"/>
-          <p:nvPr/>
-        </p:nvSpPr>
-        <p:spPr>
-          <a:xfrm>
-            <a:off x="11173968" y="5298948"/>
-            <a:ext cx="548640" cy="256032"/>
-          </a:xfrm>
-          <a:prstGeom prst="rect">
-            <a:avLst/>
-          </a:prstGeom>
-          <a:noFill/>
-        </p:spPr>
-        <p:txBody>
-          <a:bodyPr wrap="square">
-            <a:spAutoFit/>
-          </a:bodyPr>
-          <a:lstStyle/>
-          <a:p>
-            <a:pPr algn="ctr"/>
-            <a:r>
-              <a:rPr sz="850" b="1">
-                <a:solidFill>
-                  <a:srgbClr val="3B82F6"/>
-                </a:solidFill>
-              </a:rPr>
-              <a:t>T1</a:t>
-            </a:r>
-          </a:p>
-        </p:txBody>
-      </p:sp>
-      <p:sp>
-        <p:nvSpPr>
-          <p:cNvPr id="137" name="Rectangle 136"/>
-          <p:cNvSpPr/>
-          <p:nvPr/>
-        </p:nvSpPr>
-        <p:spPr>
-          <a:xfrm>
-            <a:off x="365760" y="5586984"/>
-            <a:ext cx="11430000" cy="342900"/>
-          </a:xfrm>
-          <a:prstGeom prst="rect">
-            <a:avLst/>
-          </a:prstGeom>
-          <a:solidFill>
-            <a:srgbClr val="1A1B23"/>
-          </a:solidFill>
-          <a:ln w="12700">
-            <a:noFill/>
-          </a:ln>
-        </p:spPr>
-        <p:style>
-          <a:lnRef idx="1">
-            <a:schemeClr val="accent1"/>
-          </a:lnRef>
-          <a:fillRef idx="3">
-            <a:schemeClr val="accent1"/>
-          </a:fillRef>
-          <a:effectRef idx="2">
-            <a:schemeClr val="accent1"/>
-          </a:effectRef>
-          <a:fontRef idx="minor">
-            <a:schemeClr val="lt1"/>
-          </a:fontRef>
-        </p:style>
-        <p:txBody>
-          <a:bodyPr rtlCol="0" anchor="ctr"/>
-          <a:lstStyle/>
-          <a:p>
-            <a:pPr algn="ctr"/>
-          </a:p>
-        </p:txBody>
-      </p:sp>
-      <p:sp>
-        <p:nvSpPr>
-          <p:cNvPr id="138" name="TextBox 137"/>
-          <p:cNvSpPr txBox="1"/>
-          <p:nvPr/>
-        </p:nvSpPr>
-        <p:spPr>
-          <a:xfrm>
-            <a:off x="438912" y="5650992"/>
-            <a:ext cx="2834640" cy="228600"/>
-          </a:xfrm>
-          <a:prstGeom prst="rect">
-            <a:avLst/>
-          </a:prstGeom>
-          <a:noFill/>
-        </p:spPr>
-        <p:txBody>
-          <a:bodyPr wrap="square">
-            <a:spAutoFit/>
-          </a:bodyPr>
-          <a:lstStyle/>
-          <a:p>
-            <a:pPr algn="l"/>
-            <a:r>
-              <a:rPr sz="900" b="1">
-                <a:solidFill>
-                  <a:srgbClr val="10B981"/>
-                </a:solidFill>
-              </a:rPr>
-              <a:t>13  Benign Control ✓</a:t>
-            </a:r>
-          </a:p>
-        </p:txBody>
-      </p:sp>
-      <p:sp>
-        <p:nvSpPr>
-          <p:cNvPr id="139" name="TextBox 138"/>
-          <p:cNvSpPr txBox="1"/>
-          <p:nvPr/>
-        </p:nvSpPr>
-        <p:spPr>
-          <a:xfrm>
-            <a:off x="3310128" y="5641848"/>
-            <a:ext cx="777240" cy="256032"/>
-          </a:xfrm>
-          <a:prstGeom prst="rect">
-            <a:avLst/>
-          </a:prstGeom>
-          <a:noFill/>
-        </p:spPr>
-        <p:txBody>
-          <a:bodyPr wrap="square">
-            <a:spAutoFit/>
-          </a:bodyPr>
-          <a:lstStyle/>
-          <a:p>
-            <a:pPr algn="r"/>
-            <a:r>
-              <a:rPr sz="1000" b="1">
-                <a:solidFill>
-                  <a:srgbClr val="10B981"/>
-                </a:solidFill>
-              </a:rPr>
-              <a:t>100.0%</a:t>
-            </a:r>
-          </a:p>
-        </p:txBody>
-      </p:sp>
-      <p:sp>
-        <p:nvSpPr>
-          <p:cNvPr id="140" name="Rectangle 139"/>
-          <p:cNvSpPr/>
-          <p:nvPr/>
-        </p:nvSpPr>
-        <p:spPr>
-          <a:xfrm>
-            <a:off x="4160520" y="5678424"/>
-            <a:ext cx="5029200" cy="123444"/>
-          </a:xfrm>
-          <a:prstGeom prst="rect">
-            <a:avLst/>
-          </a:prstGeom>
-          <a:solidFill>
-            <a:srgbClr val="06463A"/>
-          </a:solidFill>
-          <a:ln>
-            <a:noFill/>
-          </a:ln>
-        </p:spPr>
-        <p:style>
-          <a:lnRef idx="1">
-            <a:schemeClr val="accent1"/>
-          </a:lnRef>
-          <a:fillRef idx="3">
-            <a:schemeClr val="accent1"/>
-          </a:fillRef>
-          <a:effectRef idx="2">
-            <a:schemeClr val="accent1"/>
-          </a:effectRef>
-          <a:fontRef idx="minor">
-            <a:schemeClr val="lt1"/>
-          </a:fontRef>
-        </p:style>
-        <p:txBody>
-          <a:bodyPr rtlCol="0" anchor="ctr"/>
-          <a:lstStyle/>
-          <a:p>
-            <a:pPr algn="ctr"/>
-          </a:p>
-        </p:txBody>
-      </p:sp>
-      <p:sp>
-        <p:nvSpPr>
-          <p:cNvPr id="141" name="TextBox 140"/>
-          <p:cNvSpPr txBox="1"/>
-          <p:nvPr/>
-        </p:nvSpPr>
-        <p:spPr>
-          <a:xfrm>
-            <a:off x="4251959" y="5650992"/>
-            <a:ext cx="4754880" cy="256032"/>
-          </a:xfrm>
-          <a:prstGeom prst="rect">
-            <a:avLst/>
-          </a:prstGeom>
-          <a:noFill/>
-        </p:spPr>
-        <p:txBody>
-          <a:bodyPr wrap="square">
-            <a:spAutoFit/>
-          </a:bodyPr>
-          <a:lstStyle/>
-          <a:p>
-            <a:pPr algn="l"/>
-            <a:r>
-              <a:rPr sz="850" b="1">
-                <a:solidFill>
-                  <a:srgbClr val="10B981"/>
-                </a:solidFill>
-              </a:rPr>
-              <a:t>30/30 TRUE NEGATIVES — Perfect specificity</a:t>
-            </a:r>
-          </a:p>
-        </p:txBody>
-      </p:sp>
-      <p:sp>
-        <p:nvSpPr>
-          <p:cNvPr id="142" name="Rectangle 141"/>
-          <p:cNvSpPr/>
-          <p:nvPr/>
-        </p:nvSpPr>
-        <p:spPr>
-          <a:xfrm>
-            <a:off x="365760" y="5980176"/>
-            <a:ext cx="11430000" cy="749808"/>
-          </a:xfrm>
-          <a:prstGeom prst="rect">
-            <a:avLst/>
-          </a:prstGeom>
-          <a:solidFill>
-            <a:srgbClr val="0A0B10"/>
-          </a:solidFill>
-          <a:ln w="12700">
-            <a:noFill/>
-          </a:ln>
-        </p:spPr>
-        <p:style>
-          <a:lnRef idx="1">
-            <a:schemeClr val="accent1"/>
-          </a:lnRef>
-          <a:fillRef idx="3">
-            <a:schemeClr val="accent1"/>
-          </a:fillRef>
-          <a:effectRef idx="2">
-            <a:schemeClr val="accent1"/>
-          </a:effectRef>
-          <a:fontRef idx="minor">
-            <a:schemeClr val="lt1"/>
-          </a:fontRef>
-        </p:style>
-        <p:txBody>
-          <a:bodyPr rtlCol="0" anchor="ctr"/>
-          <a:lstStyle/>
-          <a:p>
-            <a:pPr algn="ctr"/>
-          </a:p>
-        </p:txBody>
-      </p:sp>
-      <p:sp>
-        <p:nvSpPr>
-          <p:cNvPr id="143" name="Rectangle 142"/>
-          <p:cNvSpPr/>
-          <p:nvPr/>
-        </p:nvSpPr>
-        <p:spPr>
-          <a:xfrm>
-            <a:off x="365760" y="5980176"/>
-            <a:ext cx="11430000" cy="38100"/>
-          </a:xfrm>
-          <a:prstGeom prst="rect">
-            <a:avLst/>
-          </a:prstGeom>
-          <a:solidFill>
-            <a:srgbClr val="10B981"/>
-          </a:solidFill>
-          <a:ln>
-            <a:noFill/>
-          </a:ln>
-        </p:spPr>
-        <p:style>
-          <a:lnRef idx="1">
-            <a:schemeClr val="accent1"/>
-          </a:lnRef>
-          <a:fillRef idx="3">
-            <a:schemeClr val="accent1"/>
-          </a:fillRef>
-          <a:effectRef idx="2">
-            <a:schemeClr val="accent1"/>
-          </a:effectRef>
-          <a:fontRef idx="minor">
-            <a:schemeClr val="lt1"/>
-          </a:fontRef>
-        </p:style>
-        <p:txBody>
-          <a:bodyPr rtlCol="0" anchor="ctr"/>
-          <a:lstStyle/>
-          <a:p>
-            <a:pPr algn="ctr"/>
-          </a:p>
-        </p:txBody>
-      </p:sp>
-      <p:sp>
-        <p:nvSpPr>
-          <p:cNvPr id="144" name="TextBox 143"/>
+          <p:cNvPr id="154" name="TextBox 153"/>
           <p:cNvSpPr txBox="1"/>
           <p:nvPr/>
         </p:nvSpPr>
@@ -15441,7 +15827,7 @@
       </p:sp>
       <p:sp>
         <p:nvSpPr>
-          <p:cNvPr id="145" name="TextBox 144"/>
+          <p:cNvPr id="155" name="TextBox 154"/>
           <p:cNvSpPr txBox="1"/>
           <p:nvPr/>
         </p:nvSpPr>
@@ -15475,7 +15861,7 @@
       </p:sp>
       <p:sp>
         <p:nvSpPr>
-          <p:cNvPr id="146" name="TextBox 145"/>
+          <p:cNvPr id="156" name="TextBox 155"/>
           <p:cNvSpPr txBox="1"/>
           <p:nvPr/>
         </p:nvSpPr>
@@ -15509,7 +15895,7 @@
       </p:sp>
       <p:sp>
         <p:nvSpPr>
-          <p:cNvPr id="147" name="TextBox 146"/>
+          <p:cNvPr id="157" name="TextBox 156"/>
           <p:cNvSpPr txBox="1"/>
           <p:nvPr/>
         </p:nvSpPr>
@@ -20279,7 +20665,7 @@
                   <a:srgbClr val="94A3B8"/>
                 </a:solidFill>
               </a:rPr>
-              <a:t>Prompt leaks · Roleplay jailbreaks · Confidence threshold sensitivity sweep (0.60/0.05)</a:t>
+              <a:t>Prompt leaks · Roleplay jailbreaks · 18–136 ms on ROCm GPU (OPT-4) vs 210 ms CPU</a:t>
             </a:r>
           </a:p>
         </p:txBody>
@@ -20313,7 +20699,7 @@
                   <a:srgbClr val="3B82F6"/>
                 </a:solidFill>
               </a:rPr>
-              <a:t>210 ms</a:t>
+              <a:t>18–136 ms</a:t>
             </a:r>
           </a:p>
         </p:txBody>
@@ -20347,7 +20733,7 @@
                   <a:srgbClr val="94A3B8"/>
                 </a:solidFill>
               </a:rPr>
-              <a:t>5.0 W CPU</a:t>
+              <a:t>GPU (OPT-4)</a:t>
             </a:r>
           </a:p>
         </p:txBody>
@@ -21286,7 +21672,7 @@
                   <a:srgbClr val="10B981"/>
                 </a:solidFill>
               </a:rPr>
-              <a:t>73.7%</a:t>
+              <a:t>80.0%</a:t>
             </a:r>
           </a:p>
         </p:txBody>
@@ -21320,8 +21706,8 @@
                   <a:srgbClr val="94A3B8"/>
                 </a:solidFill>
               </a:rPr>
-              <a:t>Base64 Evasion
-Catch Rate (T0.5)</a:t>
+              <a:t>Total Attack
+Catch Rate (Recall)</a:t>
             </a:r>
           </a:p>
         </p:txBody>
@@ -21400,7 +21786,7 @@
                   <a:srgbClr val="10B981"/>
                 </a:solidFill>
               </a:rPr>
-              <a:t>-15.2%</a:t>
+              <a:t>19.8 W</a:t>
             </a:r>
           </a:p>
         </p:txBody>
@@ -21434,8 +21820,8 @@
                   <a:srgbClr val="94A3B8"/>
                 </a:solidFill>
               </a:rPr>
-              <a:t>Red-Team Drift
-(Improved via Norm)</a:t>
+              <a:t>Average Power
+During Load</a:t>
             </a:r>
           </a:p>
         </p:txBody>
@@ -25950,7 +26336,7 @@
                   <a:srgbClr val="10B981"/>
                 </a:solidFill>
               </a:rPr>
-              <a:t>0.11 ms - 210 ms (99.9% Latency Reduction)</a:t>
+              <a:t>0.04 ms - 136 ms (99.9% Latency Reduction)</a:t>
             </a:r>
           </a:p>
         </p:txBody>
@@ -26061,7 +26447,7 @@
                   <a:srgbClr val="10B981"/>
                 </a:solidFill>
               </a:rPr>
-              <a:t>14.1 W Average (265.9 W Power Saved)</a:t>
+              <a:t>19.8 W Average Measured (260.2 W Power Saved)</a:t>
             </a:r>
           </a:p>
         </p:txBody>
@@ -27953,7 +28339,7 @@
                   <a:srgbClr val="FFFFFF"/>
                 </a:solidFill>
               </a:rPr>
-              <a:t>Average power drops from 280W to 14.1W -&gt; Saves ~266W per request</a:t>
+              <a:t>Average power drops from 280W to 19.8W -&gt; Saves ~260W per request</a:t>
             </a:r>
           </a:p>
         </p:txBody>

--- a/presentation/warden.pptx
+++ b/presentation/warden.pptx
@@ -5,24 +5,25 @@
     <p:sldMasterId id="2147483648" r:id="rId1"/>
   </p:sldMasterIdLst>
   <p:sldIdLst>
-    <p:sldId id="256" r:id="rId7"/>
-    <p:sldId id="257" r:id="rId8"/>
-    <p:sldId id="258" r:id="rId9"/>
-    <p:sldId id="259" r:id="rId10"/>
-    <p:sldId id="260" r:id="rId11"/>
-    <p:sldId id="261" r:id="rId12"/>
-    <p:sldId id="262" r:id="rId13"/>
-    <p:sldId id="263" r:id="rId14"/>
-    <p:sldId id="264" r:id="rId15"/>
-    <p:sldId id="265" r:id="rId16"/>
-    <p:sldId id="266" r:id="rId17"/>
-    <p:sldId id="267" r:id="rId18"/>
-    <p:sldId id="268" r:id="rId19"/>
-    <p:sldId id="269" r:id="rId20"/>
-    <p:sldId id="270" r:id="rId21"/>
-    <p:sldId id="271" r:id="rId22"/>
+    <p:sldId id="256" r:id="rId2"/>
+    <p:sldId id="257" r:id="rId3"/>
+    <p:sldId id="258" r:id="rId4"/>
+    <p:sldId id="259" r:id="rId5"/>
+    <p:sldId id="260" r:id="rId6"/>
+    <p:sldId id="261" r:id="rId7"/>
+    <p:sldId id="262" r:id="rId8"/>
+    <p:sldId id="263" r:id="rId9"/>
+    <p:sldId id="264" r:id="rId10"/>
+    <p:sldId id="265" r:id="rId11"/>
+    <p:sldId id="266" r:id="rId12"/>
+    <p:sldId id="267" r:id="rId13"/>
+    <p:sldId id="268" r:id="rId14"/>
+    <p:sldId id="269" r:id="rId15"/>
+    <p:sldId id="270" r:id="rId16"/>
+    <p:sldId id="271" r:id="rId17"/>
+    <p:sldId id="272" r:id="rId18"/>
   </p:sldIdLst>
-  <p:sldSz cx="12188952" cy="6858000" type="screen4x3"/>
+  <p:sldSz cx="12188825" cy="6858000"/>
   <p:notesSz cx="6858000" cy="9144000"/>
   <p:defaultTextStyle>
     <a:defPPr>
@@ -119,6 +120,22 @@
       </a:defRPr>
     </a:lvl9pPr>
   </p:defaultTextStyle>
+  <p:extLst>
+    <p:ext uri="{EFAFB233-063F-42B5-8137-9DF3F51BA10A}">
+      <p15:sldGuideLst xmlns:p15="http://schemas.microsoft.com/office/powerpoint/2012/main">
+        <p15:guide id="1" orient="horz" pos="2160">
+          <p15:clr>
+            <a:srgbClr val="A4A3A4"/>
+          </p15:clr>
+        </p15:guide>
+        <p15:guide id="2" pos="2880">
+          <p15:clr>
+            <a:srgbClr val="A4A3A4"/>
+          </p15:clr>
+        </p15:guide>
+      </p15:sldGuideLst>
+    </p:ext>
+  </p:extLst>
 </p:presentation>
 </file>
 
@@ -160,10 +177,9 @@
           <a:lstStyle/>
           <a:p>
             <a:r>
-              <a:rPr lang="en-US" smtClean="0"/>
+              <a:rPr lang="en-US"/>
               <a:t>Click to edit Master title style</a:t>
             </a:r>
-            <a:endParaRPr lang="en-US"/>
           </a:p>
         </p:txBody>
       </p:sp>
@@ -279,10 +295,9 @@
           </a:lstStyle>
           <a:p>
             <a:r>
-              <a:rPr lang="en-US" smtClean="0"/>
+              <a:rPr lang="en-US"/>
               <a:t>Click to edit Master subtitle style</a:t>
             </a:r>
-            <a:endParaRPr lang="en-US"/>
           </a:p>
         </p:txBody>
       </p:sp>
@@ -303,7 +318,7 @@
           <a:p>
             <a:fld id="{5BCAD085-E8A6-8845-BD4E-CB4CCA059FC4}" type="datetimeFigureOut">
               <a:rPr lang="en-US" smtClean="0"/>
-              <a:t>1/27/13</a:t>
+              <a:t>8/6/2026</a:t>
             </a:fld>
             <a:endParaRPr lang="en-US"/>
           </a:p>
@@ -397,10 +412,9 @@
           <a:lstStyle/>
           <a:p>
             <a:r>
-              <a:rPr lang="en-US" smtClean="0"/>
+              <a:rPr lang="en-US"/>
               <a:t>Click to edit Master title style</a:t>
             </a:r>
-            <a:endParaRPr lang="en-US"/>
           </a:p>
         </p:txBody>
       </p:sp>
@@ -421,38 +435,37 @@
           <a:p>
             <a:pPr lvl="0"/>
             <a:r>
-              <a:rPr lang="en-US" smtClean="0"/>
+              <a:rPr lang="en-US"/>
               <a:t>Click to edit Master text styles</a:t>
             </a:r>
           </a:p>
           <a:p>
             <a:pPr lvl="1"/>
             <a:r>
-              <a:rPr lang="en-US" smtClean="0"/>
+              <a:rPr lang="en-US"/>
               <a:t>Second level</a:t>
             </a:r>
           </a:p>
           <a:p>
             <a:pPr lvl="2"/>
             <a:r>
-              <a:rPr lang="en-US" smtClean="0"/>
+              <a:rPr lang="en-US"/>
               <a:t>Third level</a:t>
             </a:r>
           </a:p>
           <a:p>
             <a:pPr lvl="3"/>
             <a:r>
-              <a:rPr lang="en-US" smtClean="0"/>
+              <a:rPr lang="en-US"/>
               <a:t>Fourth level</a:t>
             </a:r>
           </a:p>
           <a:p>
             <a:pPr lvl="4"/>
             <a:r>
-              <a:rPr lang="en-US" smtClean="0"/>
+              <a:rPr lang="en-US"/>
               <a:t>Fifth level</a:t>
             </a:r>
-            <a:endParaRPr lang="en-US"/>
           </a:p>
         </p:txBody>
       </p:sp>
@@ -473,7 +486,7 @@
           <a:p>
             <a:fld id="{5BCAD085-E8A6-8845-BD4E-CB4CCA059FC4}" type="datetimeFigureOut">
               <a:rPr lang="en-US" smtClean="0"/>
-              <a:t>1/27/13</a:t>
+              <a:t>8/6/2026</a:t>
             </a:fld>
             <a:endParaRPr lang="en-US"/>
           </a:p>
@@ -572,10 +585,9 @@
           <a:lstStyle/>
           <a:p>
             <a:r>
-              <a:rPr lang="en-US" smtClean="0"/>
+              <a:rPr lang="en-US"/>
               <a:t>Click to edit Master title style</a:t>
             </a:r>
-            <a:endParaRPr lang="en-US"/>
           </a:p>
         </p:txBody>
       </p:sp>
@@ -601,38 +613,37 @@
           <a:p>
             <a:pPr lvl="0"/>
             <a:r>
-              <a:rPr lang="en-US" smtClean="0"/>
+              <a:rPr lang="en-US"/>
               <a:t>Click to edit Master text styles</a:t>
             </a:r>
           </a:p>
           <a:p>
             <a:pPr lvl="1"/>
             <a:r>
-              <a:rPr lang="en-US" smtClean="0"/>
+              <a:rPr lang="en-US"/>
               <a:t>Second level</a:t>
             </a:r>
           </a:p>
           <a:p>
             <a:pPr lvl="2"/>
             <a:r>
-              <a:rPr lang="en-US" smtClean="0"/>
+              <a:rPr lang="en-US"/>
               <a:t>Third level</a:t>
             </a:r>
           </a:p>
           <a:p>
             <a:pPr lvl="3"/>
             <a:r>
-              <a:rPr lang="en-US" smtClean="0"/>
+              <a:rPr lang="en-US"/>
               <a:t>Fourth level</a:t>
             </a:r>
           </a:p>
           <a:p>
             <a:pPr lvl="4"/>
             <a:r>
-              <a:rPr lang="en-US" smtClean="0"/>
+              <a:rPr lang="en-US"/>
               <a:t>Fifth level</a:t>
             </a:r>
-            <a:endParaRPr lang="en-US"/>
           </a:p>
         </p:txBody>
       </p:sp>
@@ -653,7 +664,7 @@
           <a:p>
             <a:fld id="{5BCAD085-E8A6-8845-BD4E-CB4CCA059FC4}" type="datetimeFigureOut">
               <a:rPr lang="en-US" smtClean="0"/>
-              <a:t>1/27/13</a:t>
+              <a:t>8/6/2026</a:t>
             </a:fld>
             <a:endParaRPr lang="en-US"/>
           </a:p>
@@ -747,10 +758,9 @@
           <a:lstStyle/>
           <a:p>
             <a:r>
-              <a:rPr lang="en-US" smtClean="0"/>
+              <a:rPr lang="en-US"/>
               <a:t>Click to edit Master title style</a:t>
             </a:r>
-            <a:endParaRPr lang="en-US"/>
           </a:p>
         </p:txBody>
       </p:sp>
@@ -771,38 +781,37 @@
           <a:p>
             <a:pPr lvl="0"/>
             <a:r>
-              <a:rPr lang="en-US" smtClean="0"/>
+              <a:rPr lang="en-US"/>
               <a:t>Click to edit Master text styles</a:t>
             </a:r>
           </a:p>
           <a:p>
             <a:pPr lvl="1"/>
             <a:r>
-              <a:rPr lang="en-US" smtClean="0"/>
+              <a:rPr lang="en-US"/>
               <a:t>Second level</a:t>
             </a:r>
           </a:p>
           <a:p>
             <a:pPr lvl="2"/>
             <a:r>
-              <a:rPr lang="en-US" smtClean="0"/>
+              <a:rPr lang="en-US"/>
               <a:t>Third level</a:t>
             </a:r>
           </a:p>
           <a:p>
             <a:pPr lvl="3"/>
             <a:r>
-              <a:rPr lang="en-US" smtClean="0"/>
+              <a:rPr lang="en-US"/>
               <a:t>Fourth level</a:t>
             </a:r>
           </a:p>
           <a:p>
             <a:pPr lvl="4"/>
             <a:r>
-              <a:rPr lang="en-US" smtClean="0"/>
+              <a:rPr lang="en-US"/>
               <a:t>Fifth level</a:t>
             </a:r>
-            <a:endParaRPr lang="en-US"/>
           </a:p>
         </p:txBody>
       </p:sp>
@@ -823,7 +832,7 @@
           <a:p>
             <a:fld id="{5BCAD085-E8A6-8845-BD4E-CB4CCA059FC4}" type="datetimeFigureOut">
               <a:rPr lang="en-US" smtClean="0"/>
-              <a:t>1/27/13</a:t>
+              <a:t>8/6/2026</a:t>
             </a:fld>
             <a:endParaRPr lang="en-US"/>
           </a:p>
@@ -926,10 +935,9 @@
           </a:lstStyle>
           <a:p>
             <a:r>
-              <a:rPr lang="en-US" smtClean="0"/>
+              <a:rPr lang="en-US"/>
               <a:t>Click to edit Master title style</a:t>
             </a:r>
-            <a:endParaRPr lang="en-US"/>
           </a:p>
         </p:txBody>
       </p:sp>
@@ -1046,7 +1054,7 @@
           <a:p>
             <a:pPr lvl="0"/>
             <a:r>
-              <a:rPr lang="en-US" smtClean="0"/>
+              <a:rPr lang="en-US"/>
               <a:t>Click to edit Master text styles</a:t>
             </a:r>
           </a:p>
@@ -1069,7 +1077,7 @@
           <a:p>
             <a:fld id="{5BCAD085-E8A6-8845-BD4E-CB4CCA059FC4}" type="datetimeFigureOut">
               <a:rPr lang="en-US" smtClean="0"/>
-              <a:t>1/27/13</a:t>
+              <a:t>8/6/2026</a:t>
             </a:fld>
             <a:endParaRPr lang="en-US"/>
           </a:p>
@@ -1163,10 +1171,9 @@
           <a:lstStyle/>
           <a:p>
             <a:r>
-              <a:rPr lang="en-US" smtClean="0"/>
+              <a:rPr lang="en-US"/>
               <a:t>Click to edit Master title style</a:t>
             </a:r>
-            <a:endParaRPr lang="en-US"/>
           </a:p>
         </p:txBody>
       </p:sp>
@@ -1220,38 +1227,37 @@
           <a:p>
             <a:pPr lvl="0"/>
             <a:r>
-              <a:rPr lang="en-US" smtClean="0"/>
+              <a:rPr lang="en-US"/>
               <a:t>Click to edit Master text styles</a:t>
             </a:r>
           </a:p>
           <a:p>
             <a:pPr lvl="1"/>
             <a:r>
-              <a:rPr lang="en-US" smtClean="0"/>
+              <a:rPr lang="en-US"/>
               <a:t>Second level</a:t>
             </a:r>
           </a:p>
           <a:p>
             <a:pPr lvl="2"/>
             <a:r>
-              <a:rPr lang="en-US" smtClean="0"/>
+              <a:rPr lang="en-US"/>
               <a:t>Third level</a:t>
             </a:r>
           </a:p>
           <a:p>
             <a:pPr lvl="3"/>
             <a:r>
-              <a:rPr lang="en-US" smtClean="0"/>
+              <a:rPr lang="en-US"/>
               <a:t>Fourth level</a:t>
             </a:r>
           </a:p>
           <a:p>
             <a:pPr lvl="4"/>
             <a:r>
-              <a:rPr lang="en-US" smtClean="0"/>
+              <a:rPr lang="en-US"/>
               <a:t>Fifth level</a:t>
             </a:r>
-            <a:endParaRPr lang="en-US"/>
           </a:p>
         </p:txBody>
       </p:sp>
@@ -1305,38 +1311,37 @@
           <a:p>
             <a:pPr lvl="0"/>
             <a:r>
-              <a:rPr lang="en-US" smtClean="0"/>
+              <a:rPr lang="en-US"/>
               <a:t>Click to edit Master text styles</a:t>
             </a:r>
           </a:p>
           <a:p>
             <a:pPr lvl="1"/>
             <a:r>
-              <a:rPr lang="en-US" smtClean="0"/>
+              <a:rPr lang="en-US"/>
               <a:t>Second level</a:t>
             </a:r>
           </a:p>
           <a:p>
             <a:pPr lvl="2"/>
             <a:r>
-              <a:rPr lang="en-US" smtClean="0"/>
+              <a:rPr lang="en-US"/>
               <a:t>Third level</a:t>
             </a:r>
           </a:p>
           <a:p>
             <a:pPr lvl="3"/>
             <a:r>
-              <a:rPr lang="en-US" smtClean="0"/>
+              <a:rPr lang="en-US"/>
               <a:t>Fourth level</a:t>
             </a:r>
           </a:p>
           <a:p>
             <a:pPr lvl="4"/>
             <a:r>
-              <a:rPr lang="en-US" smtClean="0"/>
+              <a:rPr lang="en-US"/>
               <a:t>Fifth level</a:t>
             </a:r>
-            <a:endParaRPr lang="en-US"/>
           </a:p>
         </p:txBody>
       </p:sp>
@@ -1357,7 +1362,7 @@
           <a:p>
             <a:fld id="{5BCAD085-E8A6-8845-BD4E-CB4CCA059FC4}" type="datetimeFigureOut">
               <a:rPr lang="en-US" smtClean="0"/>
-              <a:t>1/27/13</a:t>
+              <a:t>8/6/2026</a:t>
             </a:fld>
             <a:endParaRPr lang="en-US"/>
           </a:p>
@@ -1455,10 +1460,9 @@
           </a:lstStyle>
           <a:p>
             <a:r>
-              <a:rPr lang="en-US" smtClean="0"/>
+              <a:rPr lang="en-US"/>
               <a:t>Click to edit Master title style</a:t>
             </a:r>
-            <a:endParaRPr lang="en-US"/>
           </a:p>
         </p:txBody>
       </p:sp>
@@ -1521,7 +1525,7 @@
           <a:p>
             <a:pPr lvl="0"/>
             <a:r>
-              <a:rPr lang="en-US" smtClean="0"/>
+              <a:rPr lang="en-US"/>
               <a:t>Click to edit Master text styles</a:t>
             </a:r>
           </a:p>
@@ -1577,38 +1581,37 @@
           <a:p>
             <a:pPr lvl="0"/>
             <a:r>
-              <a:rPr lang="en-US" smtClean="0"/>
+              <a:rPr lang="en-US"/>
               <a:t>Click to edit Master text styles</a:t>
             </a:r>
           </a:p>
           <a:p>
             <a:pPr lvl="1"/>
             <a:r>
-              <a:rPr lang="en-US" smtClean="0"/>
+              <a:rPr lang="en-US"/>
               <a:t>Second level</a:t>
             </a:r>
           </a:p>
           <a:p>
             <a:pPr lvl="2"/>
             <a:r>
-              <a:rPr lang="en-US" smtClean="0"/>
+              <a:rPr lang="en-US"/>
               <a:t>Third level</a:t>
             </a:r>
           </a:p>
           <a:p>
             <a:pPr lvl="3"/>
             <a:r>
-              <a:rPr lang="en-US" smtClean="0"/>
+              <a:rPr lang="en-US"/>
               <a:t>Fourth level</a:t>
             </a:r>
           </a:p>
           <a:p>
             <a:pPr lvl="4"/>
             <a:r>
-              <a:rPr lang="en-US" smtClean="0"/>
+              <a:rPr lang="en-US"/>
               <a:t>Fifth level</a:t>
             </a:r>
-            <a:endParaRPr lang="en-US"/>
           </a:p>
         </p:txBody>
       </p:sp>
@@ -1671,7 +1674,7 @@
           <a:p>
             <a:pPr lvl="0"/>
             <a:r>
-              <a:rPr lang="en-US" smtClean="0"/>
+              <a:rPr lang="en-US"/>
               <a:t>Click to edit Master text styles</a:t>
             </a:r>
           </a:p>
@@ -1727,38 +1730,37 @@
           <a:p>
             <a:pPr lvl="0"/>
             <a:r>
-              <a:rPr lang="en-US" smtClean="0"/>
+              <a:rPr lang="en-US"/>
               <a:t>Click to edit Master text styles</a:t>
             </a:r>
           </a:p>
           <a:p>
             <a:pPr lvl="1"/>
             <a:r>
-              <a:rPr lang="en-US" smtClean="0"/>
+              <a:rPr lang="en-US"/>
               <a:t>Second level</a:t>
             </a:r>
           </a:p>
           <a:p>
             <a:pPr lvl="2"/>
             <a:r>
-              <a:rPr lang="en-US" smtClean="0"/>
+              <a:rPr lang="en-US"/>
               <a:t>Third level</a:t>
             </a:r>
           </a:p>
           <a:p>
             <a:pPr lvl="3"/>
             <a:r>
-              <a:rPr lang="en-US" smtClean="0"/>
+              <a:rPr lang="en-US"/>
               <a:t>Fourth level</a:t>
             </a:r>
           </a:p>
           <a:p>
             <a:pPr lvl="4"/>
             <a:r>
-              <a:rPr lang="en-US" smtClean="0"/>
+              <a:rPr lang="en-US"/>
               <a:t>Fifth level</a:t>
             </a:r>
-            <a:endParaRPr lang="en-US"/>
           </a:p>
         </p:txBody>
       </p:sp>
@@ -1779,7 +1781,7 @@
           <a:p>
             <a:fld id="{5BCAD085-E8A6-8845-BD4E-CB4CCA059FC4}" type="datetimeFigureOut">
               <a:rPr lang="en-US" smtClean="0"/>
-              <a:t>1/27/13</a:t>
+              <a:t>8/6/2026</a:t>
             </a:fld>
             <a:endParaRPr lang="en-US"/>
           </a:p>
@@ -1873,10 +1875,9 @@
           <a:lstStyle/>
           <a:p>
             <a:r>
-              <a:rPr lang="en-US" smtClean="0"/>
+              <a:rPr lang="en-US"/>
               <a:t>Click to edit Master title style</a:t>
             </a:r>
-            <a:endParaRPr lang="en-US"/>
           </a:p>
         </p:txBody>
       </p:sp>
@@ -1897,7 +1898,7 @@
           <a:p>
             <a:fld id="{5BCAD085-E8A6-8845-BD4E-CB4CCA059FC4}" type="datetimeFigureOut">
               <a:rPr lang="en-US" smtClean="0"/>
-              <a:t>1/27/13</a:t>
+              <a:t>8/6/2026</a:t>
             </a:fld>
             <a:endParaRPr lang="en-US"/>
           </a:p>
@@ -1992,7 +1993,7 @@
           <a:p>
             <a:fld id="{5BCAD085-E8A6-8845-BD4E-CB4CCA059FC4}" type="datetimeFigureOut">
               <a:rPr lang="en-US" smtClean="0"/>
-              <a:t>1/27/13</a:t>
+              <a:t>8/6/2026</a:t>
             </a:fld>
             <a:endParaRPr lang="en-US"/>
           </a:p>
@@ -2095,10 +2096,9 @@
           </a:lstStyle>
           <a:p>
             <a:r>
-              <a:rPr lang="en-US" smtClean="0"/>
+              <a:rPr lang="en-US"/>
               <a:t>Click to edit Master title style</a:t>
             </a:r>
-            <a:endParaRPr lang="en-US"/>
           </a:p>
         </p:txBody>
       </p:sp>
@@ -2152,38 +2152,37 @@
           <a:p>
             <a:pPr lvl="0"/>
             <a:r>
-              <a:rPr lang="en-US" smtClean="0"/>
+              <a:rPr lang="en-US"/>
               <a:t>Click to edit Master text styles</a:t>
             </a:r>
           </a:p>
           <a:p>
             <a:pPr lvl="1"/>
             <a:r>
-              <a:rPr lang="en-US" smtClean="0"/>
+              <a:rPr lang="en-US"/>
               <a:t>Second level</a:t>
             </a:r>
           </a:p>
           <a:p>
             <a:pPr lvl="2"/>
             <a:r>
-              <a:rPr lang="en-US" smtClean="0"/>
+              <a:rPr lang="en-US"/>
               <a:t>Third level</a:t>
             </a:r>
           </a:p>
           <a:p>
             <a:pPr lvl="3"/>
             <a:r>
-              <a:rPr lang="en-US" smtClean="0"/>
+              <a:rPr lang="en-US"/>
               <a:t>Fourth level</a:t>
             </a:r>
           </a:p>
           <a:p>
             <a:pPr lvl="4"/>
             <a:r>
-              <a:rPr lang="en-US" smtClean="0"/>
+              <a:rPr lang="en-US"/>
               <a:t>Fifth level</a:t>
             </a:r>
-            <a:endParaRPr lang="en-US"/>
           </a:p>
         </p:txBody>
       </p:sp>
@@ -2246,7 +2245,7 @@
           <a:p>
             <a:pPr lvl="0"/>
             <a:r>
-              <a:rPr lang="en-US" smtClean="0"/>
+              <a:rPr lang="en-US"/>
               <a:t>Click to edit Master text styles</a:t>
             </a:r>
           </a:p>
@@ -2269,7 +2268,7 @@
           <a:p>
             <a:fld id="{5BCAD085-E8A6-8845-BD4E-CB4CCA059FC4}" type="datetimeFigureOut">
               <a:rPr lang="en-US" smtClean="0"/>
-              <a:t>1/27/13</a:t>
+              <a:t>8/6/2026</a:t>
             </a:fld>
             <a:endParaRPr lang="en-US"/>
           </a:p>
@@ -2372,10 +2371,9 @@
           </a:lstStyle>
           <a:p>
             <a:r>
-              <a:rPr lang="en-US" smtClean="0"/>
+              <a:rPr lang="en-US"/>
               <a:t>Click to edit Master title style</a:t>
             </a:r>
-            <a:endParaRPr lang="en-US"/>
           </a:p>
         </p:txBody>
       </p:sp>
@@ -2499,7 +2497,7 @@
           <a:p>
             <a:pPr lvl="0"/>
             <a:r>
-              <a:rPr lang="en-US" smtClean="0"/>
+              <a:rPr lang="en-US"/>
               <a:t>Click to edit Master text styles</a:t>
             </a:r>
           </a:p>
@@ -2522,7 +2520,7 @@
           <a:p>
             <a:fld id="{5BCAD085-E8A6-8845-BD4E-CB4CCA059FC4}" type="datetimeFigureOut">
               <a:rPr lang="en-US" smtClean="0"/>
-              <a:t>1/27/13</a:t>
+              <a:t>8/6/2026</a:t>
             </a:fld>
             <a:endParaRPr lang="en-US"/>
           </a:p>
@@ -2631,10 +2629,9 @@
           <a:lstStyle/>
           <a:p>
             <a:r>
-              <a:rPr lang="en-US" smtClean="0"/>
+              <a:rPr lang="en-US"/>
               <a:t>Click to edit Master title style</a:t>
             </a:r>
-            <a:endParaRPr lang="en-US"/>
           </a:p>
         </p:txBody>
       </p:sp>
@@ -2665,38 +2662,37 @@
           <a:p>
             <a:pPr lvl="0"/>
             <a:r>
-              <a:rPr lang="en-US" smtClean="0"/>
+              <a:rPr lang="en-US"/>
               <a:t>Click to edit Master text styles</a:t>
             </a:r>
           </a:p>
           <a:p>
             <a:pPr lvl="1"/>
             <a:r>
-              <a:rPr lang="en-US" smtClean="0"/>
+              <a:rPr lang="en-US"/>
               <a:t>Second level</a:t>
             </a:r>
           </a:p>
           <a:p>
             <a:pPr lvl="2"/>
             <a:r>
-              <a:rPr lang="en-US" smtClean="0"/>
+              <a:rPr lang="en-US"/>
               <a:t>Third level</a:t>
             </a:r>
           </a:p>
           <a:p>
             <a:pPr lvl="3"/>
             <a:r>
-              <a:rPr lang="en-US" smtClean="0"/>
+              <a:rPr lang="en-US"/>
               <a:t>Fourth level</a:t>
             </a:r>
           </a:p>
           <a:p>
             <a:pPr lvl="4"/>
             <a:r>
-              <a:rPr lang="en-US" smtClean="0"/>
+              <a:rPr lang="en-US"/>
               <a:t>Fifth level</a:t>
             </a:r>
-            <a:endParaRPr lang="en-US"/>
           </a:p>
         </p:txBody>
       </p:sp>
@@ -2735,7 +2731,7 @@
           <a:p>
             <a:fld id="{5BCAD085-E8A6-8845-BD4E-CB4CCA059FC4}" type="datetimeFigureOut">
               <a:rPr lang="en-US" smtClean="0"/>
-              <a:t>1/27/13</a:t>
+              <a:t>8/6/2026</a:t>
             </a:fld>
             <a:endParaRPr lang="en-US"/>
           </a:p>
@@ -3094,7 +3090,7 @@
 </file>
 
 <file path=ppt/slides/slide1.xml><?xml version="1.0" encoding="utf-8"?>
-<p:sld xmlns:a="http://schemas.openxmlformats.org/drawingml/2006/main" xmlns:p="http://schemas.openxmlformats.org/presentationml/2006/main" xmlns:r="http://schemas.openxmlformats.org/officeDocument/2006/relationships">
+<p:sld xmlns:a="http://schemas.openxmlformats.org/drawingml/2006/main" xmlns:r="http://schemas.openxmlformats.org/officeDocument/2006/relationships" xmlns:p="http://schemas.openxmlformats.org/presentationml/2006/main">
   <p:cSld>
     <p:bg>
       <p:bgPr>
@@ -3110,7 +3106,14 @@
         <p:cNvGrpSpPr/>
         <p:nvPr/>
       </p:nvGrpSpPr>
-      <p:grpSpPr/>
+      <p:grpSpPr>
+        <a:xfrm>
+          <a:off x="0" y="0"/>
+          <a:ext cx="0" cy="0"/>
+          <a:chOff x="0" y="0"/>
+          <a:chExt cx="0" cy="0"/>
+        </a:xfrm>
+      </p:grpSpPr>
       <p:sp>
         <p:nvSpPr>
           <p:cNvPr id="2" name="Rectangle 1"/>
@@ -3151,6 +3154,7 @@
           <a:lstStyle/>
           <a:p>
             <a:pPr algn="ctr"/>
+            <a:endParaRPr/>
           </a:p>
         </p:txBody>
       </p:sp>
@@ -3178,7 +3182,7 @@
           <a:p>
             <a:pPr algn="l"/>
             <a:r>
-              <a:rPr sz="8000" b="1">
+              <a:rPr sz="8000" b="1" dirty="0">
                 <a:solidFill>
                   <a:srgbClr val="FFFFFF"/>
                 </a:solidFill>
@@ -3296,6 +3300,7 @@
           <a:lstStyle/>
           <a:p>
             <a:pPr algn="ctr"/>
+            <a:endParaRPr/>
           </a:p>
         </p:txBody>
       </p:sp>
@@ -3376,6 +3381,7 @@
           <a:lstStyle/>
           <a:p>
             <a:pPr algn="ctr"/>
+            <a:endParaRPr/>
           </a:p>
         </p:txBody>
       </p:sp>
@@ -3489,6 +3495,7 @@
           <a:lstStyle/>
           <a:p>
             <a:pPr algn="ctr"/>
+            <a:endParaRPr/>
           </a:p>
         </p:txBody>
       </p:sp>
@@ -3603,6 +3610,7 @@
           <a:lstStyle/>
           <a:p>
             <a:pPr algn="ctr"/>
+            <a:endParaRPr/>
           </a:p>
         </p:txBody>
       </p:sp>
@@ -3716,6 +3724,7 @@
           <a:lstStyle/>
           <a:p>
             <a:pPr algn="ctr"/>
+            <a:endParaRPr/>
           </a:p>
         </p:txBody>
       </p:sp>
@@ -3827,6 +3836,7 @@
           <a:lstStyle/>
           <a:p>
             <a:pPr algn="ctr"/>
+            <a:endParaRPr/>
           </a:p>
         </p:txBody>
       </p:sp>
@@ -3873,7 +3883,7 @@
 </file>
 
 <file path=ppt/slides/slide10.xml><?xml version="1.0" encoding="utf-8"?>
-<p:sld xmlns:a="http://schemas.openxmlformats.org/drawingml/2006/main" xmlns:p="http://schemas.openxmlformats.org/presentationml/2006/main" xmlns:r="http://schemas.openxmlformats.org/officeDocument/2006/relationships">
+<p:sld xmlns:a="http://schemas.openxmlformats.org/drawingml/2006/main" xmlns:r="http://schemas.openxmlformats.org/officeDocument/2006/relationships" xmlns:p="http://schemas.openxmlformats.org/presentationml/2006/main">
   <p:cSld>
     <p:bg>
       <p:bgPr>
@@ -3889,7 +3899,14 @@
         <p:cNvGrpSpPr/>
         <p:nvPr/>
       </p:nvGrpSpPr>
-      <p:grpSpPr/>
+      <p:grpSpPr>
+        <a:xfrm>
+          <a:off x="0" y="0"/>
+          <a:ext cx="0" cy="0"/>
+          <a:chOff x="0" y="0"/>
+          <a:chExt cx="0" cy="0"/>
+        </a:xfrm>
+      </p:grpSpPr>
       <p:sp>
         <p:nvSpPr>
           <p:cNvPr id="2" name="Rectangle 1"/>
@@ -3930,6 +3947,7 @@
           <a:lstStyle/>
           <a:p>
             <a:pPr algn="ctr"/>
+            <a:endParaRPr/>
           </a:p>
         </p:txBody>
       </p:sp>
@@ -4007,6 +4025,7 @@
           <a:lstStyle/>
           <a:p>
             <a:pPr algn="ctr"/>
+            <a:endParaRPr/>
           </a:p>
         </p:txBody>
       </p:sp>
@@ -4084,6 +4103,7 @@
           <a:lstStyle/>
           <a:p>
             <a:pPr algn="ctr"/>
+            <a:endParaRPr/>
           </a:p>
         </p:txBody>
       </p:sp>
@@ -4331,6 +4351,7 @@
           <a:lstStyle/>
           <a:p>
             <a:pPr algn="ctr"/>
+            <a:endParaRPr/>
           </a:p>
         </p:txBody>
       </p:sp>
@@ -4578,6 +4599,7 @@
           <a:lstStyle/>
           <a:p>
             <a:pPr algn="ctr"/>
+            <a:endParaRPr/>
           </a:p>
         </p:txBody>
       </p:sp>
@@ -4825,6 +4847,7 @@
           <a:lstStyle/>
           <a:p>
             <a:pPr algn="ctr"/>
+            <a:endParaRPr/>
           </a:p>
         </p:txBody>
       </p:sp>
@@ -5072,6 +5095,7 @@
           <a:lstStyle/>
           <a:p>
             <a:pPr algn="ctr"/>
+            <a:endParaRPr/>
           </a:p>
         </p:txBody>
       </p:sp>
@@ -5319,6 +5343,7 @@
           <a:lstStyle/>
           <a:p>
             <a:pPr algn="ctr"/>
+            <a:endParaRPr/>
           </a:p>
         </p:txBody>
       </p:sp>
@@ -5603,7 +5628,7 @@
 </file>
 
 <file path=ppt/slides/slide11.xml><?xml version="1.0" encoding="utf-8"?>
-<p:sld xmlns:a="http://schemas.openxmlformats.org/drawingml/2006/main" xmlns:p="http://schemas.openxmlformats.org/presentationml/2006/main" xmlns:r="http://schemas.openxmlformats.org/officeDocument/2006/relationships">
+<p:sld xmlns:a="http://schemas.openxmlformats.org/drawingml/2006/main" xmlns:r="http://schemas.openxmlformats.org/officeDocument/2006/relationships" xmlns:p="http://schemas.openxmlformats.org/presentationml/2006/main">
   <p:cSld>
     <p:bg>
       <p:bgPr>
@@ -5619,7 +5644,14 @@
         <p:cNvGrpSpPr/>
         <p:nvPr/>
       </p:nvGrpSpPr>
-      <p:grpSpPr/>
+      <p:grpSpPr>
+        <a:xfrm>
+          <a:off x="0" y="0"/>
+          <a:ext cx="0" cy="0"/>
+          <a:chOff x="0" y="0"/>
+          <a:chExt cx="0" cy="0"/>
+        </a:xfrm>
+      </p:grpSpPr>
       <p:sp>
         <p:nvSpPr>
           <p:cNvPr id="2" name="Rectangle 1"/>
@@ -5660,6 +5692,7 @@
           <a:lstStyle/>
           <a:p>
             <a:pPr algn="ctr"/>
+            <a:endParaRPr/>
           </a:p>
         </p:txBody>
       </p:sp>
@@ -5737,6 +5770,7 @@
           <a:lstStyle/>
           <a:p>
             <a:pPr algn="ctr"/>
+            <a:endParaRPr/>
           </a:p>
         </p:txBody>
       </p:sp>
@@ -5816,6 +5850,7 @@
           <a:lstStyle/>
           <a:p>
             <a:pPr algn="ctr"/>
+            <a:endParaRPr/>
           </a:p>
         </p:txBody>
       </p:sp>
@@ -5964,6 +5999,7 @@
           <a:lstStyle/>
           <a:p>
             <a:pPr algn="ctr"/>
+            <a:endParaRPr/>
           </a:p>
         </p:txBody>
       </p:sp>
@@ -6112,6 +6148,7 @@
           <a:lstStyle/>
           <a:p>
             <a:pPr algn="ctr"/>
+            <a:endParaRPr/>
           </a:p>
         </p:txBody>
       </p:sp>
@@ -6362,7 +6399,7 @@
 </file>
 
 <file path=ppt/slides/slide12.xml><?xml version="1.0" encoding="utf-8"?>
-<p:sld xmlns:a="http://schemas.openxmlformats.org/drawingml/2006/main" xmlns:p="http://schemas.openxmlformats.org/presentationml/2006/main" xmlns:r="http://schemas.openxmlformats.org/officeDocument/2006/relationships">
+<p:sld xmlns:a="http://schemas.openxmlformats.org/drawingml/2006/main" xmlns:r="http://schemas.openxmlformats.org/officeDocument/2006/relationships" xmlns:p="http://schemas.openxmlformats.org/presentationml/2006/main">
   <p:cSld>
     <p:bg>
       <p:bgPr>
@@ -6378,7 +6415,14 @@
         <p:cNvGrpSpPr/>
         <p:nvPr/>
       </p:nvGrpSpPr>
-      <p:grpSpPr/>
+      <p:grpSpPr>
+        <a:xfrm>
+          <a:off x="0" y="0"/>
+          <a:ext cx="0" cy="0"/>
+          <a:chOff x="0" y="0"/>
+          <a:chExt cx="0" cy="0"/>
+        </a:xfrm>
+      </p:grpSpPr>
       <p:sp>
         <p:nvSpPr>
           <p:cNvPr id="2" name="Rectangle 1"/>
@@ -6419,6 +6463,7 @@
           <a:lstStyle/>
           <a:p>
             <a:pPr algn="ctr"/>
+            <a:endParaRPr/>
           </a:p>
         </p:txBody>
       </p:sp>
@@ -6496,6 +6541,7 @@
           <a:lstStyle/>
           <a:p>
             <a:pPr algn="ctr"/>
+            <a:endParaRPr/>
           </a:p>
         </p:txBody>
       </p:sp>
@@ -6539,6 +6585,7 @@
           <a:lstStyle/>
           <a:p>
             <a:pPr algn="ctr"/>
+            <a:endParaRPr/>
           </a:p>
         </p:txBody>
       </p:sp>
@@ -6718,6 +6765,7 @@
           <a:lstStyle/>
           <a:p>
             <a:pPr algn="ctr"/>
+            <a:endParaRPr/>
           </a:p>
         </p:txBody>
       </p:sp>
@@ -6897,6 +6945,7 @@
           <a:lstStyle/>
           <a:p>
             <a:pPr algn="ctr"/>
+            <a:endParaRPr/>
           </a:p>
         </p:txBody>
       </p:sp>
@@ -7076,6 +7125,7 @@
           <a:lstStyle/>
           <a:p>
             <a:pPr algn="ctr"/>
+            <a:endParaRPr/>
           </a:p>
         </p:txBody>
       </p:sp>
@@ -7255,6 +7305,7 @@
           <a:lstStyle/>
           <a:p>
             <a:pPr algn="ctr"/>
+            <a:endParaRPr/>
           </a:p>
         </p:txBody>
       </p:sp>
@@ -7434,6 +7485,7 @@
           <a:lstStyle/>
           <a:p>
             <a:pPr algn="ctr"/>
+            <a:endParaRPr/>
           </a:p>
         </p:txBody>
       </p:sp>
@@ -7613,6 +7665,7 @@
           <a:lstStyle/>
           <a:p>
             <a:pPr algn="ctr"/>
+            <a:endParaRPr/>
           </a:p>
         </p:txBody>
       </p:sp>
@@ -7792,6 +7845,7 @@
           <a:lstStyle/>
           <a:p>
             <a:pPr algn="ctr"/>
+            <a:endParaRPr/>
           </a:p>
         </p:txBody>
       </p:sp>
@@ -7971,6 +8025,7 @@
           <a:lstStyle/>
           <a:p>
             <a:pPr algn="ctr"/>
+            <a:endParaRPr/>
           </a:p>
         </p:txBody>
       </p:sp>
@@ -8150,6 +8205,7 @@
           <a:lstStyle/>
           <a:p>
             <a:pPr algn="ctr"/>
+            <a:endParaRPr/>
           </a:p>
         </p:txBody>
       </p:sp>
@@ -8329,6 +8385,7 @@
           <a:lstStyle/>
           <a:p>
             <a:pPr algn="ctr"/>
+            <a:endParaRPr/>
           </a:p>
         </p:txBody>
       </p:sp>
@@ -8511,7 +8568,7 @@
 </file>
 
 <file path=ppt/slides/slide13.xml><?xml version="1.0" encoding="utf-8"?>
-<p:sld xmlns:a="http://schemas.openxmlformats.org/drawingml/2006/main" xmlns:p="http://schemas.openxmlformats.org/presentationml/2006/main" xmlns:r="http://schemas.openxmlformats.org/officeDocument/2006/relationships">
+<p:sld xmlns:a="http://schemas.openxmlformats.org/drawingml/2006/main" xmlns:r="http://schemas.openxmlformats.org/officeDocument/2006/relationships" xmlns:p="http://schemas.openxmlformats.org/presentationml/2006/main">
   <p:cSld>
     <p:bg>
       <p:bgPr>
@@ -8527,7 +8584,14 @@
         <p:cNvGrpSpPr/>
         <p:nvPr/>
       </p:nvGrpSpPr>
-      <p:grpSpPr/>
+      <p:grpSpPr>
+        <a:xfrm>
+          <a:off x="0" y="0"/>
+          <a:ext cx="0" cy="0"/>
+          <a:chOff x="0" y="0"/>
+          <a:chExt cx="0" cy="0"/>
+        </a:xfrm>
+      </p:grpSpPr>
       <p:sp>
         <p:nvSpPr>
           <p:cNvPr id="2" name="Rectangle 1"/>
@@ -8568,6 +8632,7 @@
           <a:lstStyle/>
           <a:p>
             <a:pPr algn="ctr"/>
+            <a:endParaRPr/>
           </a:p>
         </p:txBody>
       </p:sp>
@@ -8645,6 +8710,7 @@
           <a:lstStyle/>
           <a:p>
             <a:pPr algn="ctr"/>
+            <a:endParaRPr/>
           </a:p>
         </p:txBody>
       </p:sp>
@@ -8962,6 +9028,7 @@
           <a:lstStyle/>
           <a:p>
             <a:pPr algn="ctr"/>
+            <a:endParaRPr/>
           </a:p>
         </p:txBody>
       </p:sp>
@@ -9005,6 +9072,7 @@
           <a:lstStyle/>
           <a:p>
             <a:pPr algn="ctr"/>
+            <a:endParaRPr/>
           </a:p>
         </p:txBody>
       </p:sp>
@@ -9167,14 +9235,7 @@
           <a:lstStyle/>
           <a:p>
             <a:pPr algn="l"/>
-            <a:r>
-              <a:rPr sz="1000" b="0">
-                <a:solidFill>
-                  <a:srgbClr val="FFFFFF"/>
-                </a:solidFill>
-              </a:rPr>
-              <a:t/>
-            </a:r>
+            <a:endParaRPr/>
           </a:p>
         </p:txBody>
       </p:sp>
@@ -9391,7 +9452,7 @@
 </file>
 
 <file path=ppt/slides/slide14.xml><?xml version="1.0" encoding="utf-8"?>
-<p:sld xmlns:a="http://schemas.openxmlformats.org/drawingml/2006/main" xmlns:p="http://schemas.openxmlformats.org/presentationml/2006/main" xmlns:r="http://schemas.openxmlformats.org/officeDocument/2006/relationships">
+<p:sld xmlns:a="http://schemas.openxmlformats.org/drawingml/2006/main" xmlns:r="http://schemas.openxmlformats.org/officeDocument/2006/relationships" xmlns:p="http://schemas.openxmlformats.org/presentationml/2006/main">
   <p:cSld>
     <p:bg>
       <p:bgPr>
@@ -9407,7 +9468,14 @@
         <p:cNvGrpSpPr/>
         <p:nvPr/>
       </p:nvGrpSpPr>
-      <p:grpSpPr/>
+      <p:grpSpPr>
+        <a:xfrm>
+          <a:off x="0" y="0"/>
+          <a:ext cx="0" cy="0"/>
+          <a:chOff x="0" y="0"/>
+          <a:chExt cx="0" cy="0"/>
+        </a:xfrm>
+      </p:grpSpPr>
       <p:sp>
         <p:nvSpPr>
           <p:cNvPr id="2" name="Rectangle 1"/>
@@ -9448,6 +9516,7 @@
           <a:lstStyle/>
           <a:p>
             <a:pPr algn="ctr"/>
+            <a:endParaRPr/>
           </a:p>
         </p:txBody>
       </p:sp>
@@ -9525,6 +9594,7 @@
           <a:lstStyle/>
           <a:p>
             <a:pPr algn="ctr"/>
+            <a:endParaRPr/>
           </a:p>
         </p:txBody>
       </p:sp>
@@ -9570,6 +9640,7 @@
           <a:lstStyle/>
           <a:p>
             <a:pPr algn="ctr"/>
+            <a:endParaRPr/>
           </a:p>
         </p:txBody>
       </p:sp>
@@ -9921,6 +9992,7 @@
           <a:lstStyle/>
           <a:p>
             <a:pPr algn="ctr"/>
+            <a:endParaRPr/>
           </a:p>
         </p:txBody>
       </p:sp>
@@ -10173,6 +10245,7 @@
           <a:lstStyle/>
           <a:p>
             <a:pPr algn="ctr"/>
+            <a:endParaRPr/>
           </a:p>
         </p:txBody>
       </p:sp>
@@ -10219,7 +10292,7 @@
 </file>
 
 <file path=ppt/slides/slide15.xml><?xml version="1.0" encoding="utf-8"?>
-<p:sld xmlns:a="http://schemas.openxmlformats.org/drawingml/2006/main" xmlns:p="http://schemas.openxmlformats.org/presentationml/2006/main" xmlns:r="http://schemas.openxmlformats.org/officeDocument/2006/relationships">
+<p:sld xmlns:a="http://schemas.openxmlformats.org/drawingml/2006/main" xmlns:r="http://schemas.openxmlformats.org/officeDocument/2006/relationships" xmlns:p="http://schemas.openxmlformats.org/presentationml/2006/main">
   <p:cSld>
     <p:bg>
       <p:bgPr>
@@ -10235,7 +10308,14 @@
         <p:cNvGrpSpPr/>
         <p:nvPr/>
       </p:nvGrpSpPr>
-      <p:grpSpPr/>
+      <p:grpSpPr>
+        <a:xfrm>
+          <a:off x="0" y="0"/>
+          <a:ext cx="0" cy="0"/>
+          <a:chOff x="0" y="0"/>
+          <a:chExt cx="0" cy="0"/>
+        </a:xfrm>
+      </p:grpSpPr>
       <p:sp>
         <p:nvSpPr>
           <p:cNvPr id="2" name="Rectangle 1"/>
@@ -10276,6 +10356,7 @@
           <a:lstStyle/>
           <a:p>
             <a:pPr algn="ctr"/>
+            <a:endParaRPr/>
           </a:p>
         </p:txBody>
       </p:sp>
@@ -10387,6 +10468,7 @@
           <a:lstStyle/>
           <a:p>
             <a:pPr algn="ctr"/>
+            <a:endParaRPr/>
           </a:p>
         </p:txBody>
       </p:sp>
@@ -10430,6 +10512,7 @@
           <a:lstStyle/>
           <a:p>
             <a:pPr algn="ctr"/>
+            <a:endParaRPr/>
           </a:p>
         </p:txBody>
       </p:sp>
@@ -10745,6 +10828,7 @@
           <a:lstStyle/>
           <a:p>
             <a:pPr algn="ctr"/>
+            <a:endParaRPr/>
           </a:p>
         </p:txBody>
       </p:sp>
@@ -10856,6 +10940,7 @@
           <a:lstStyle/>
           <a:p>
             <a:pPr algn="ctr"/>
+            <a:endParaRPr/>
           </a:p>
         </p:txBody>
       </p:sp>
@@ -10899,6 +10984,7 @@
           <a:lstStyle/>
           <a:p>
             <a:pPr algn="ctr"/>
+            <a:endParaRPr/>
           </a:p>
         </p:txBody>
       </p:sp>
@@ -11146,6 +11232,7 @@
           <a:lstStyle/>
           <a:p>
             <a:pPr algn="ctr"/>
+            <a:endParaRPr/>
           </a:p>
         </p:txBody>
       </p:sp>
@@ -11257,6 +11344,7 @@
           <a:lstStyle/>
           <a:p>
             <a:pPr algn="ctr"/>
+            <a:endParaRPr/>
           </a:p>
         </p:txBody>
       </p:sp>
@@ -11300,6 +11388,7 @@
           <a:lstStyle/>
           <a:p>
             <a:pPr algn="ctr"/>
+            <a:endParaRPr/>
           </a:p>
         </p:txBody>
       </p:sp>
@@ -11547,6 +11636,7 @@
           <a:lstStyle/>
           <a:p>
             <a:pPr algn="ctr"/>
+            <a:endParaRPr/>
           </a:p>
         </p:txBody>
       </p:sp>
@@ -11658,6 +11748,7 @@
           <a:lstStyle/>
           <a:p>
             <a:pPr algn="ctr"/>
+            <a:endParaRPr/>
           </a:p>
         </p:txBody>
       </p:sp>
@@ -11701,6 +11792,7 @@
           <a:lstStyle/>
           <a:p>
             <a:pPr algn="ctr"/>
+            <a:endParaRPr/>
           </a:p>
         </p:txBody>
       </p:sp>
@@ -11948,6 +12040,7 @@
           <a:lstStyle/>
           <a:p>
             <a:pPr algn="ctr"/>
+            <a:endParaRPr/>
           </a:p>
         </p:txBody>
       </p:sp>
@@ -12059,6 +12152,7 @@
           <a:lstStyle/>
           <a:p>
             <a:pPr algn="ctr"/>
+            <a:endParaRPr/>
           </a:p>
         </p:txBody>
       </p:sp>
@@ -12102,6 +12196,7 @@
           <a:lstStyle/>
           <a:p>
             <a:pPr algn="ctr"/>
+            <a:endParaRPr/>
           </a:p>
         </p:txBody>
       </p:sp>
@@ -12349,6 +12444,7 @@
           <a:lstStyle/>
           <a:p>
             <a:pPr algn="ctr"/>
+            <a:endParaRPr/>
           </a:p>
         </p:txBody>
       </p:sp>
@@ -12460,6 +12556,7 @@
           <a:lstStyle/>
           <a:p>
             <a:pPr algn="ctr"/>
+            <a:endParaRPr/>
           </a:p>
         </p:txBody>
       </p:sp>
@@ -12503,6 +12600,7 @@
           <a:lstStyle/>
           <a:p>
             <a:pPr algn="ctr"/>
+            <a:endParaRPr/>
           </a:p>
         </p:txBody>
       </p:sp>
@@ -12750,6 +12848,7 @@
           <a:lstStyle/>
           <a:p>
             <a:pPr algn="ctr"/>
+            <a:endParaRPr/>
           </a:p>
         </p:txBody>
       </p:sp>
@@ -12861,6 +12960,7 @@
           <a:lstStyle/>
           <a:p>
             <a:pPr algn="ctr"/>
+            <a:endParaRPr/>
           </a:p>
         </p:txBody>
       </p:sp>
@@ -12904,6 +13004,7 @@
           <a:lstStyle/>
           <a:p>
             <a:pPr algn="ctr"/>
+            <a:endParaRPr/>
           </a:p>
         </p:txBody>
       </p:sp>
@@ -13151,6 +13252,7 @@
           <a:lstStyle/>
           <a:p>
             <a:pPr algn="ctr"/>
+            <a:endParaRPr/>
           </a:p>
         </p:txBody>
       </p:sp>
@@ -13262,6 +13364,7 @@
           <a:lstStyle/>
           <a:p>
             <a:pPr algn="ctr"/>
+            <a:endParaRPr/>
           </a:p>
         </p:txBody>
       </p:sp>
@@ -13305,6 +13408,7 @@
           <a:lstStyle/>
           <a:p>
             <a:pPr algn="ctr"/>
+            <a:endParaRPr/>
           </a:p>
         </p:txBody>
       </p:sp>
@@ -13552,6 +13656,7 @@
           <a:lstStyle/>
           <a:p>
             <a:pPr algn="ctr"/>
+            <a:endParaRPr/>
           </a:p>
         </p:txBody>
       </p:sp>
@@ -13663,6 +13768,7 @@
           <a:lstStyle/>
           <a:p>
             <a:pPr algn="ctr"/>
+            <a:endParaRPr/>
           </a:p>
         </p:txBody>
       </p:sp>
@@ -13706,6 +13812,7 @@
           <a:lstStyle/>
           <a:p>
             <a:pPr algn="ctr"/>
+            <a:endParaRPr/>
           </a:p>
         </p:txBody>
       </p:sp>
@@ -13953,6 +14060,7 @@
           <a:lstStyle/>
           <a:p>
             <a:pPr algn="ctr"/>
+            <a:endParaRPr/>
           </a:p>
         </p:txBody>
       </p:sp>
@@ -14064,6 +14172,7 @@
           <a:lstStyle/>
           <a:p>
             <a:pPr algn="ctr"/>
+            <a:endParaRPr/>
           </a:p>
         </p:txBody>
       </p:sp>
@@ -14107,6 +14216,7 @@
           <a:lstStyle/>
           <a:p>
             <a:pPr algn="ctr"/>
+            <a:endParaRPr/>
           </a:p>
         </p:txBody>
       </p:sp>
@@ -14354,6 +14464,7 @@
           <a:lstStyle/>
           <a:p>
             <a:pPr algn="ctr"/>
+            <a:endParaRPr/>
           </a:p>
         </p:txBody>
       </p:sp>
@@ -14465,6 +14576,7 @@
           <a:lstStyle/>
           <a:p>
             <a:pPr algn="ctr"/>
+            <a:endParaRPr/>
           </a:p>
         </p:txBody>
       </p:sp>
@@ -14508,6 +14620,7 @@
           <a:lstStyle/>
           <a:p>
             <a:pPr algn="ctr"/>
+            <a:endParaRPr/>
           </a:p>
         </p:txBody>
       </p:sp>
@@ -14755,6 +14868,7 @@
           <a:lstStyle/>
           <a:p>
             <a:pPr algn="ctr"/>
+            <a:endParaRPr/>
           </a:p>
         </p:txBody>
       </p:sp>
@@ -14866,6 +14980,7 @@
           <a:lstStyle/>
           <a:p>
             <a:pPr algn="ctr"/>
+            <a:endParaRPr/>
           </a:p>
         </p:txBody>
       </p:sp>
@@ -14909,6 +15024,7 @@
           <a:lstStyle/>
           <a:p>
             <a:pPr algn="ctr"/>
+            <a:endParaRPr/>
           </a:p>
         </p:txBody>
       </p:sp>
@@ -15156,6 +15272,7 @@
           <a:lstStyle/>
           <a:p>
             <a:pPr algn="ctr"/>
+            <a:endParaRPr/>
           </a:p>
         </p:txBody>
       </p:sp>
@@ -15267,6 +15384,7 @@
           <a:lstStyle/>
           <a:p>
             <a:pPr algn="ctr"/>
+            <a:endParaRPr/>
           </a:p>
         </p:txBody>
       </p:sp>
@@ -15310,6 +15428,7 @@
           <a:lstStyle/>
           <a:p>
             <a:pPr algn="ctr"/>
+            <a:endParaRPr/>
           </a:p>
         </p:txBody>
       </p:sp>
@@ -15557,6 +15676,7 @@
           <a:lstStyle/>
           <a:p>
             <a:pPr algn="ctr"/>
+            <a:endParaRPr/>
           </a:p>
         </p:txBody>
       </p:sp>
@@ -15668,6 +15788,7 @@
           <a:lstStyle/>
           <a:p>
             <a:pPr algn="ctr"/>
+            <a:endParaRPr/>
           </a:p>
         </p:txBody>
       </p:sp>
@@ -15745,6 +15866,7 @@
           <a:lstStyle/>
           <a:p>
             <a:pPr algn="ctr"/>
+            <a:endParaRPr/>
           </a:p>
         </p:txBody>
       </p:sp>
@@ -15788,6 +15910,7 @@
           <a:lstStyle/>
           <a:p>
             <a:pPr algn="ctr"/>
+            <a:endParaRPr/>
           </a:p>
         </p:txBody>
       </p:sp>
@@ -15936,7 +16059,7 @@
 </file>
 
 <file path=ppt/slides/slide16.xml><?xml version="1.0" encoding="utf-8"?>
-<p:sld xmlns:a="http://schemas.openxmlformats.org/drawingml/2006/main" xmlns:p="http://schemas.openxmlformats.org/presentationml/2006/main" xmlns:r="http://schemas.openxmlformats.org/officeDocument/2006/relationships">
+<p:sld xmlns:a="http://schemas.openxmlformats.org/drawingml/2006/main" xmlns:r="http://schemas.openxmlformats.org/officeDocument/2006/relationships" xmlns:p="http://schemas.openxmlformats.org/presentationml/2006/main">
   <p:cSld>
     <p:bg>
       <p:bgPr>
@@ -15952,7 +16075,14 @@
         <p:cNvGrpSpPr/>
         <p:nvPr/>
       </p:nvGrpSpPr>
-      <p:grpSpPr/>
+      <p:grpSpPr>
+        <a:xfrm>
+          <a:off x="0" y="0"/>
+          <a:ext cx="0" cy="0"/>
+          <a:chOff x="0" y="0"/>
+          <a:chExt cx="0" cy="0"/>
+        </a:xfrm>
+      </p:grpSpPr>
       <p:sp>
         <p:nvSpPr>
           <p:cNvPr id="2" name="Rectangle 1"/>
@@ -15993,6 +16123,7 @@
           <a:lstStyle/>
           <a:p>
             <a:pPr algn="ctr"/>
+            <a:endParaRPr/>
           </a:p>
         </p:txBody>
       </p:sp>
@@ -16104,6 +16235,7 @@
           <a:lstStyle/>
           <a:p>
             <a:pPr algn="ctr"/>
+            <a:endParaRPr/>
           </a:p>
         </p:txBody>
       </p:sp>
@@ -16149,6 +16281,7 @@
           <a:lstStyle/>
           <a:p>
             <a:pPr algn="ctr"/>
+            <a:endParaRPr/>
           </a:p>
         </p:txBody>
       </p:sp>
@@ -16328,6 +16461,7 @@
           <a:lstStyle/>
           <a:p>
             <a:pPr algn="ctr"/>
+            <a:endParaRPr/>
           </a:p>
         </p:txBody>
       </p:sp>
@@ -16541,6 +16675,7 @@
           <a:lstStyle/>
           <a:p>
             <a:pPr algn="ctr"/>
+            <a:endParaRPr/>
           </a:p>
         </p:txBody>
       </p:sp>
@@ -16652,6 +16787,7 @@
           <a:lstStyle/>
           <a:p>
             <a:pPr algn="ctr"/>
+            <a:endParaRPr/>
           </a:p>
         </p:txBody>
       </p:sp>
@@ -16695,6 +16831,7 @@
           <a:lstStyle/>
           <a:p>
             <a:pPr algn="ctr"/>
+            <a:endParaRPr/>
           </a:p>
         </p:txBody>
       </p:sp>
@@ -16738,6 +16875,7 @@
           <a:lstStyle/>
           <a:p>
             <a:pPr algn="ctr"/>
+            <a:endParaRPr/>
           </a:p>
         </p:txBody>
       </p:sp>
@@ -16849,6 +16987,7 @@
           <a:lstStyle/>
           <a:p>
             <a:pPr algn="ctr"/>
+            <a:endParaRPr/>
           </a:p>
         </p:txBody>
       </p:sp>
@@ -16960,6 +17099,7 @@
           <a:lstStyle/>
           <a:p>
             <a:pPr algn="ctr"/>
+            <a:endParaRPr/>
           </a:p>
         </p:txBody>
       </p:sp>
@@ -17003,6 +17143,7 @@
           <a:lstStyle/>
           <a:p>
             <a:pPr algn="ctr"/>
+            <a:endParaRPr/>
           </a:p>
         </p:txBody>
       </p:sp>
@@ -17046,6 +17187,7 @@
           <a:lstStyle/>
           <a:p>
             <a:pPr algn="ctr"/>
+            <a:endParaRPr/>
           </a:p>
         </p:txBody>
       </p:sp>
@@ -17157,6 +17299,7 @@
           <a:lstStyle/>
           <a:p>
             <a:pPr algn="ctr"/>
+            <a:endParaRPr/>
           </a:p>
         </p:txBody>
       </p:sp>
@@ -17268,6 +17411,7 @@
           <a:lstStyle/>
           <a:p>
             <a:pPr algn="ctr"/>
+            <a:endParaRPr/>
           </a:p>
         </p:txBody>
       </p:sp>
@@ -17311,6 +17455,7 @@
           <a:lstStyle/>
           <a:p>
             <a:pPr algn="ctr"/>
+            <a:endParaRPr/>
           </a:p>
         </p:txBody>
       </p:sp>
@@ -17354,6 +17499,7 @@
           <a:lstStyle/>
           <a:p>
             <a:pPr algn="ctr"/>
+            <a:endParaRPr/>
           </a:p>
         </p:txBody>
       </p:sp>
@@ -17465,6 +17611,7 @@
           <a:lstStyle/>
           <a:p>
             <a:pPr algn="ctr"/>
+            <a:endParaRPr/>
           </a:p>
         </p:txBody>
       </p:sp>
@@ -17576,6 +17723,7 @@
           <a:lstStyle/>
           <a:p>
             <a:pPr algn="ctr"/>
+            <a:endParaRPr/>
           </a:p>
         </p:txBody>
       </p:sp>
@@ -17619,6 +17767,7 @@
           <a:lstStyle/>
           <a:p>
             <a:pPr algn="ctr"/>
+            <a:endParaRPr/>
           </a:p>
         </p:txBody>
       </p:sp>
@@ -17662,6 +17811,7 @@
           <a:lstStyle/>
           <a:p>
             <a:pPr algn="ctr"/>
+            <a:endParaRPr/>
           </a:p>
         </p:txBody>
       </p:sp>
@@ -17773,6 +17923,7 @@
           <a:lstStyle/>
           <a:p>
             <a:pPr algn="ctr"/>
+            <a:endParaRPr/>
           </a:p>
         </p:txBody>
       </p:sp>
@@ -17884,6 +18035,7 @@
           <a:lstStyle/>
           <a:p>
             <a:pPr algn="ctr"/>
+            <a:endParaRPr/>
           </a:p>
         </p:txBody>
       </p:sp>
@@ -17927,6 +18079,7 @@
           <a:lstStyle/>
           <a:p>
             <a:pPr algn="ctr"/>
+            <a:endParaRPr/>
           </a:p>
         </p:txBody>
       </p:sp>
@@ -17970,6 +18123,7 @@
           <a:lstStyle/>
           <a:p>
             <a:pPr algn="ctr"/>
+            <a:endParaRPr/>
           </a:p>
         </p:txBody>
       </p:sp>
@@ -18081,6 +18235,7 @@
           <a:lstStyle/>
           <a:p>
             <a:pPr algn="ctr"/>
+            <a:endParaRPr/>
           </a:p>
         </p:txBody>
       </p:sp>
@@ -18192,6 +18347,7 @@
           <a:lstStyle/>
           <a:p>
             <a:pPr algn="ctr"/>
+            <a:endParaRPr/>
           </a:p>
         </p:txBody>
       </p:sp>
@@ -18235,6 +18391,7 @@
           <a:lstStyle/>
           <a:p>
             <a:pPr algn="ctr"/>
+            <a:endParaRPr/>
           </a:p>
         </p:txBody>
       </p:sp>
@@ -18278,6 +18435,7 @@
           <a:lstStyle/>
           <a:p>
             <a:pPr algn="ctr"/>
+            <a:endParaRPr/>
           </a:p>
         </p:txBody>
       </p:sp>
@@ -18389,6 +18547,7 @@
           <a:lstStyle/>
           <a:p>
             <a:pPr algn="ctr"/>
+            <a:endParaRPr/>
           </a:p>
         </p:txBody>
       </p:sp>
@@ -18500,6 +18659,7 @@
           <a:lstStyle/>
           <a:p>
             <a:pPr algn="ctr"/>
+            <a:endParaRPr/>
           </a:p>
         </p:txBody>
       </p:sp>
@@ -18543,6 +18703,7 @@
           <a:lstStyle/>
           <a:p>
             <a:pPr algn="ctr"/>
+            <a:endParaRPr/>
           </a:p>
         </p:txBody>
       </p:sp>
@@ -18586,6 +18747,7 @@
           <a:lstStyle/>
           <a:p>
             <a:pPr algn="ctr"/>
+            <a:endParaRPr/>
           </a:p>
         </p:txBody>
       </p:sp>
@@ -18697,6 +18859,7 @@
           <a:lstStyle/>
           <a:p>
             <a:pPr algn="ctr"/>
+            <a:endParaRPr/>
           </a:p>
         </p:txBody>
       </p:sp>
@@ -18808,6 +18971,7 @@
           <a:lstStyle/>
           <a:p>
             <a:pPr algn="ctr"/>
+            <a:endParaRPr/>
           </a:p>
         </p:txBody>
       </p:sp>
@@ -18851,6 +19015,7 @@
           <a:lstStyle/>
           <a:p>
             <a:pPr algn="ctr"/>
+            <a:endParaRPr/>
           </a:p>
         </p:txBody>
       </p:sp>
@@ -18962,6 +19127,7 @@
           <a:lstStyle/>
           <a:p>
             <a:pPr algn="ctr"/>
+            <a:endParaRPr/>
           </a:p>
         </p:txBody>
       </p:sp>
@@ -19005,6 +19171,7 @@
           <a:lstStyle/>
           <a:p>
             <a:pPr algn="ctr"/>
+            <a:endParaRPr/>
           </a:p>
         </p:txBody>
       </p:sp>
@@ -19153,8 +19320,453 @@
 </p:sld>
 </file>
 
+<file path=ppt/slides/slide17.xml><?xml version="1.0" encoding="utf-8"?>
+<p:sld xmlns:a="http://schemas.openxmlformats.org/drawingml/2006/main" xmlns:r="http://schemas.openxmlformats.org/officeDocument/2006/relationships" xmlns:p="http://schemas.openxmlformats.org/presentationml/2006/main">
+  <p:cSld>
+    <p:bg>
+      <p:bgPr>
+        <a:solidFill>
+          <a:srgbClr val="050508"/>
+        </a:solidFill>
+        <a:effectLst/>
+      </p:bgPr>
+    </p:bg>
+    <p:spTree>
+      <p:nvGrpSpPr>
+        <p:cNvPr id="1" name="">
+          <a:extLst>
+            <a:ext uri="{FF2B5EF4-FFF2-40B4-BE49-F238E27FC236}">
+              <a16:creationId xmlns:a16="http://schemas.microsoft.com/office/drawing/2014/main" id="{D714D126-023E-5857-4C18-F9A3168A316C}"/>
+            </a:ext>
+          </a:extLst>
+        </p:cNvPr>
+        <p:cNvGrpSpPr/>
+        <p:nvPr/>
+      </p:nvGrpSpPr>
+      <p:grpSpPr>
+        <a:xfrm>
+          <a:off x="0" y="0"/>
+          <a:ext cx="0" cy="0"/>
+          <a:chOff x="0" y="0"/>
+          <a:chExt cx="0" cy="0"/>
+        </a:xfrm>
+      </p:grpSpPr>
+      <p:sp>
+        <p:nvSpPr>
+          <p:cNvPr id="2" name="Rectangle 1">
+            <a:extLst>
+              <a:ext uri="{FF2B5EF4-FFF2-40B4-BE49-F238E27FC236}">
+                <a16:creationId xmlns:a16="http://schemas.microsoft.com/office/drawing/2014/main" id="{CD4179A2-42A5-8AF3-67E4-E8AFD0BFC629}"/>
+              </a:ext>
+            </a:extLst>
+          </p:cNvPr>
+          <p:cNvSpPr/>
+          <p:nvPr/>
+        </p:nvSpPr>
+        <p:spPr>
+          <a:xfrm>
+            <a:off x="0" y="0"/>
+            <a:ext cx="73152" cy="6858000"/>
+          </a:xfrm>
+          <a:prstGeom prst="rect">
+            <a:avLst/>
+          </a:prstGeom>
+          <a:solidFill>
+            <a:srgbClr val="10B981"/>
+          </a:solidFill>
+          <a:ln w="12700">
+            <a:noFill/>
+          </a:ln>
+        </p:spPr>
+        <p:style>
+          <a:lnRef idx="1">
+            <a:schemeClr val="accent1"/>
+          </a:lnRef>
+          <a:fillRef idx="3">
+            <a:schemeClr val="accent1"/>
+          </a:fillRef>
+          <a:effectRef idx="2">
+            <a:schemeClr val="accent1"/>
+          </a:effectRef>
+          <a:fontRef idx="minor">
+            <a:schemeClr val="lt1"/>
+          </a:fontRef>
+        </p:style>
+        <p:txBody>
+          <a:bodyPr rtlCol="0" anchor="ctr"/>
+          <a:lstStyle/>
+          <a:p>
+            <a:pPr algn="ctr"/>
+            <a:endParaRPr/>
+          </a:p>
+        </p:txBody>
+      </p:sp>
+      <p:sp>
+        <p:nvSpPr>
+          <p:cNvPr id="3" name="TextBox 2">
+            <a:extLst>
+              <a:ext uri="{FF2B5EF4-FFF2-40B4-BE49-F238E27FC236}">
+                <a16:creationId xmlns:a16="http://schemas.microsoft.com/office/drawing/2014/main" id="{50479D4B-8548-8D7B-5AD7-47EA5671424A}"/>
+              </a:ext>
+            </a:extLst>
+          </p:cNvPr>
+          <p:cNvSpPr txBox="1"/>
+          <p:nvPr/>
+        </p:nvSpPr>
+        <p:spPr>
+          <a:xfrm>
+            <a:off x="365760" y="731520"/>
+            <a:ext cx="8229600" cy="1371600"/>
+          </a:xfrm>
+          <a:prstGeom prst="rect">
+            <a:avLst/>
+          </a:prstGeom>
+          <a:noFill/>
+        </p:spPr>
+        <p:txBody>
+          <a:bodyPr wrap="square">
+            <a:spAutoFit/>
+          </a:bodyPr>
+          <a:lstStyle/>
+          <a:p>
+            <a:pPr algn="l"/>
+            <a:r>
+              <a:rPr lang="en-IN" sz="8000" b="1" dirty="0">
+                <a:solidFill>
+                  <a:srgbClr val="FFFFFF"/>
+                </a:solidFill>
+              </a:rPr>
+              <a:t>WARDEN</a:t>
+            </a:r>
+            <a:endParaRPr sz="8000" b="1" dirty="0">
+              <a:solidFill>
+                <a:srgbClr val="FFFFFF"/>
+              </a:solidFill>
+            </a:endParaRPr>
+          </a:p>
+        </p:txBody>
+      </p:sp>
+      <p:sp>
+        <p:nvSpPr>
+          <p:cNvPr id="4" name="TextBox 3">
+            <a:extLst>
+              <a:ext uri="{FF2B5EF4-FFF2-40B4-BE49-F238E27FC236}">
+                <a16:creationId xmlns:a16="http://schemas.microsoft.com/office/drawing/2014/main" id="{A5D7B107-E19C-8E3B-2EFA-49AFB3BA2A28}"/>
+              </a:ext>
+            </a:extLst>
+          </p:cNvPr>
+          <p:cNvSpPr txBox="1"/>
+          <p:nvPr/>
+        </p:nvSpPr>
+        <p:spPr>
+          <a:xfrm>
+            <a:off x="365760" y="2148840"/>
+            <a:ext cx="9144000" cy="548640"/>
+          </a:xfrm>
+          <a:prstGeom prst="rect">
+            <a:avLst/>
+          </a:prstGeom>
+          <a:noFill/>
+        </p:spPr>
+        <p:txBody>
+          <a:bodyPr wrap="square">
+            <a:spAutoFit/>
+          </a:bodyPr>
+          <a:lstStyle/>
+          <a:p>
+            <a:pPr algn="l"/>
+            <a:r>
+              <a:rPr sz="2400" b="0">
+                <a:solidFill>
+                  <a:srgbClr val="10B981"/>
+                </a:solidFill>
+              </a:rPr>
+              <a:t>Adaptive-Compute Neural Routing Engine</a:t>
+            </a:r>
+          </a:p>
+        </p:txBody>
+      </p:sp>
+      <p:sp>
+        <p:nvSpPr>
+          <p:cNvPr id="5" name="TextBox 4">
+            <a:extLst>
+              <a:ext uri="{FF2B5EF4-FFF2-40B4-BE49-F238E27FC236}">
+                <a16:creationId xmlns:a16="http://schemas.microsoft.com/office/drawing/2014/main" id="{C4A7B680-8A90-1DFD-A659-9DD6726AA925}"/>
+              </a:ext>
+            </a:extLst>
+          </p:cNvPr>
+          <p:cNvSpPr txBox="1"/>
+          <p:nvPr/>
+        </p:nvSpPr>
+        <p:spPr>
+          <a:xfrm>
+            <a:off x="365760" y="2697480"/>
+            <a:ext cx="9144000" cy="457200"/>
+          </a:xfrm>
+          <a:prstGeom prst="rect">
+            <a:avLst/>
+          </a:prstGeom>
+          <a:noFill/>
+        </p:spPr>
+        <p:txBody>
+          <a:bodyPr wrap="square">
+            <a:spAutoFit/>
+          </a:bodyPr>
+          <a:lstStyle/>
+          <a:p>
+            <a:pPr algn="l"/>
+            <a:r>
+              <a:rPr sz="2000" b="0">
+                <a:solidFill>
+                  <a:srgbClr val="94A3B8"/>
+                </a:solidFill>
+              </a:rPr>
+              <a:t>for Enterprise LLMs on AMD ROCm™</a:t>
+            </a:r>
+          </a:p>
+        </p:txBody>
+      </p:sp>
+      <p:sp>
+        <p:nvSpPr>
+          <p:cNvPr id="6" name="Rectangle 5">
+            <a:extLst>
+              <a:ext uri="{FF2B5EF4-FFF2-40B4-BE49-F238E27FC236}">
+                <a16:creationId xmlns:a16="http://schemas.microsoft.com/office/drawing/2014/main" id="{430E5A0A-1F54-3CDE-6C54-C837EBD21B28}"/>
+              </a:ext>
+            </a:extLst>
+          </p:cNvPr>
+          <p:cNvSpPr/>
+          <p:nvPr/>
+        </p:nvSpPr>
+        <p:spPr>
+          <a:xfrm>
+            <a:off x="365760" y="3291840"/>
+            <a:ext cx="6400800" cy="38100"/>
+          </a:xfrm>
+          <a:prstGeom prst="rect">
+            <a:avLst/>
+          </a:prstGeom>
+          <a:solidFill>
+            <a:srgbClr val="10B981"/>
+          </a:solidFill>
+          <a:ln>
+            <a:noFill/>
+          </a:ln>
+        </p:spPr>
+        <p:style>
+          <a:lnRef idx="1">
+            <a:schemeClr val="accent1"/>
+          </a:lnRef>
+          <a:fillRef idx="3">
+            <a:schemeClr val="accent1"/>
+          </a:fillRef>
+          <a:effectRef idx="2">
+            <a:schemeClr val="accent1"/>
+          </a:effectRef>
+          <a:fontRef idx="minor">
+            <a:schemeClr val="lt1"/>
+          </a:fontRef>
+        </p:style>
+        <p:txBody>
+          <a:bodyPr rtlCol="0" anchor="ctr"/>
+          <a:lstStyle/>
+          <a:p>
+            <a:pPr algn="ctr"/>
+            <a:endParaRPr/>
+          </a:p>
+        </p:txBody>
+      </p:sp>
+      <p:sp>
+        <p:nvSpPr>
+          <p:cNvPr id="7" name="TextBox 6">
+            <a:extLst>
+              <a:ext uri="{FF2B5EF4-FFF2-40B4-BE49-F238E27FC236}">
+                <a16:creationId xmlns:a16="http://schemas.microsoft.com/office/drawing/2014/main" id="{8DC28172-530D-1EB5-6E3D-0DB4B4C13C1B}"/>
+              </a:ext>
+            </a:extLst>
+          </p:cNvPr>
+          <p:cNvSpPr txBox="1"/>
+          <p:nvPr/>
+        </p:nvSpPr>
+        <p:spPr>
+          <a:xfrm>
+            <a:off x="365760" y="3474720"/>
+            <a:ext cx="8229600" cy="914400"/>
+          </a:xfrm>
+          <a:prstGeom prst="rect">
+            <a:avLst/>
+          </a:prstGeom>
+          <a:noFill/>
+        </p:spPr>
+        <p:txBody>
+          <a:bodyPr wrap="square">
+            <a:spAutoFit/>
+          </a:bodyPr>
+          <a:lstStyle/>
+          <a:p>
+            <a:pPr algn="l"/>
+            <a:r>
+              <a:rPr sz="1400" b="0">
+                <a:solidFill>
+                  <a:srgbClr val="94A3B8"/>
+                </a:solidFill>
+              </a:rPr>
+              <a:t>Stops adversarial LLM traffic before it reaches your GPU.
+Five cascading security tiers. Zero false positives. Real hardware validation.</a:t>
+            </a:r>
+          </a:p>
+        </p:txBody>
+      </p:sp>
+      <p:sp>
+        <p:nvSpPr>
+          <p:cNvPr id="20" name="Rectangle 19">
+            <a:extLst>
+              <a:ext uri="{FF2B5EF4-FFF2-40B4-BE49-F238E27FC236}">
+                <a16:creationId xmlns:a16="http://schemas.microsoft.com/office/drawing/2014/main" id="{0F23005E-FDDB-1740-4B79-7E0116C47A00}"/>
+              </a:ext>
+            </a:extLst>
+          </p:cNvPr>
+          <p:cNvSpPr/>
+          <p:nvPr/>
+        </p:nvSpPr>
+        <p:spPr>
+          <a:xfrm>
+            <a:off x="9875520" y="182880"/>
+            <a:ext cx="2103120" cy="548640"/>
+          </a:xfrm>
+          <a:prstGeom prst="rect">
+            <a:avLst/>
+          </a:prstGeom>
+          <a:solidFill>
+            <a:srgbClr val="ED1C24"/>
+          </a:solidFill>
+          <a:ln w="12700">
+            <a:noFill/>
+          </a:ln>
+        </p:spPr>
+        <p:style>
+          <a:lnRef idx="1">
+            <a:schemeClr val="accent1"/>
+          </a:lnRef>
+          <a:fillRef idx="3">
+            <a:schemeClr val="accent1"/>
+          </a:fillRef>
+          <a:effectRef idx="2">
+            <a:schemeClr val="accent1"/>
+          </a:effectRef>
+          <a:fontRef idx="minor">
+            <a:schemeClr val="lt1"/>
+          </a:fontRef>
+        </p:style>
+        <p:txBody>
+          <a:bodyPr rtlCol="0" anchor="ctr"/>
+          <a:lstStyle/>
+          <a:p>
+            <a:pPr algn="ctr"/>
+            <a:endParaRPr/>
+          </a:p>
+        </p:txBody>
+      </p:sp>
+      <p:sp>
+        <p:nvSpPr>
+          <p:cNvPr id="21" name="TextBox 20">
+            <a:extLst>
+              <a:ext uri="{FF2B5EF4-FFF2-40B4-BE49-F238E27FC236}">
+                <a16:creationId xmlns:a16="http://schemas.microsoft.com/office/drawing/2014/main" id="{DB4A704F-D535-BC7B-1015-985CE29C6100}"/>
+              </a:ext>
+            </a:extLst>
+          </p:cNvPr>
+          <p:cNvSpPr txBox="1"/>
+          <p:nvPr/>
+        </p:nvSpPr>
+        <p:spPr>
+          <a:xfrm>
+            <a:off x="9921240" y="246888"/>
+            <a:ext cx="2011680" cy="411480"/>
+          </a:xfrm>
+          <a:prstGeom prst="rect">
+            <a:avLst/>
+          </a:prstGeom>
+          <a:noFill/>
+        </p:spPr>
+        <p:txBody>
+          <a:bodyPr wrap="square">
+            <a:spAutoFit/>
+          </a:bodyPr>
+          <a:lstStyle/>
+          <a:p>
+            <a:pPr algn="ctr"/>
+            <a:r>
+              <a:rPr sz="900" b="1">
+                <a:solidFill>
+                  <a:srgbClr val="FFFFFF"/>
+                </a:solidFill>
+              </a:rPr>
+              <a:t>AMD Developer Hackathon 2026</a:t>
+            </a:r>
+          </a:p>
+        </p:txBody>
+      </p:sp>
+      <p:sp>
+        <p:nvSpPr>
+          <p:cNvPr id="24" name="TextBox 23">
+            <a:extLst>
+              <a:ext uri="{FF2B5EF4-FFF2-40B4-BE49-F238E27FC236}">
+                <a16:creationId xmlns:a16="http://schemas.microsoft.com/office/drawing/2014/main" id="{9F84F0FB-A007-846E-D9B0-3D4AC4A8D7D6}"/>
+              </a:ext>
+            </a:extLst>
+          </p:cNvPr>
+          <p:cNvSpPr txBox="1"/>
+          <p:nvPr/>
+        </p:nvSpPr>
+        <p:spPr>
+          <a:xfrm>
+            <a:off x="1979612" y="4754880"/>
+            <a:ext cx="8229600" cy="1371600"/>
+          </a:xfrm>
+          <a:prstGeom prst="rect">
+            <a:avLst/>
+          </a:prstGeom>
+          <a:noFill/>
+        </p:spPr>
+        <p:txBody>
+          <a:bodyPr wrap="square">
+            <a:spAutoFit/>
+          </a:bodyPr>
+          <a:lstStyle/>
+          <a:p>
+            <a:pPr algn="ctr"/>
+            <a:r>
+              <a:rPr lang="en-US" sz="8000" b="1" dirty="0">
+                <a:solidFill>
+                  <a:srgbClr val="FFFFFF"/>
+                </a:solidFill>
+              </a:rPr>
+              <a:t>THANKYOU</a:t>
+            </a:r>
+            <a:endParaRPr sz="8000" b="1" dirty="0">
+              <a:solidFill>
+                <a:srgbClr val="FFFFFF"/>
+              </a:solidFill>
+            </a:endParaRPr>
+          </a:p>
+        </p:txBody>
+      </p:sp>
+    </p:spTree>
+    <p:extLst>
+      <p:ext uri="{BB962C8B-B14F-4D97-AF65-F5344CB8AC3E}">
+        <p14:creationId xmlns:p14="http://schemas.microsoft.com/office/powerpoint/2010/main" val="898858043"/>
+      </p:ext>
+    </p:extLst>
+  </p:cSld>
+  <p:clrMapOvr>
+    <a:masterClrMapping/>
+  </p:clrMapOvr>
+</p:sld>
+</file>
+
 <file path=ppt/slides/slide2.xml><?xml version="1.0" encoding="utf-8"?>
-<p:sld xmlns:a="http://schemas.openxmlformats.org/drawingml/2006/main" xmlns:p="http://schemas.openxmlformats.org/presentationml/2006/main" xmlns:r="http://schemas.openxmlformats.org/officeDocument/2006/relationships">
+<p:sld xmlns:a="http://schemas.openxmlformats.org/drawingml/2006/main" xmlns:r="http://schemas.openxmlformats.org/officeDocument/2006/relationships" xmlns:p="http://schemas.openxmlformats.org/presentationml/2006/main">
   <p:cSld>
     <p:bg>
       <p:bgPr>
@@ -19170,7 +19782,14 @@
         <p:cNvGrpSpPr/>
         <p:nvPr/>
       </p:nvGrpSpPr>
-      <p:grpSpPr/>
+      <p:grpSpPr>
+        <a:xfrm>
+          <a:off x="0" y="0"/>
+          <a:ext cx="0" cy="0"/>
+          <a:chOff x="0" y="0"/>
+          <a:chExt cx="0" cy="0"/>
+        </a:xfrm>
+      </p:grpSpPr>
       <p:sp>
         <p:nvSpPr>
           <p:cNvPr id="2" name="Rectangle 1"/>
@@ -19211,6 +19830,7 @@
           <a:lstStyle/>
           <a:p>
             <a:pPr algn="ctr"/>
+            <a:endParaRPr/>
           </a:p>
         </p:txBody>
       </p:sp>
@@ -19288,6 +19908,7 @@
           <a:lstStyle/>
           <a:p>
             <a:pPr algn="ctr"/>
+            <a:endParaRPr/>
           </a:p>
         </p:txBody>
       </p:sp>
@@ -19367,6 +19988,7 @@
           <a:lstStyle/>
           <a:p>
             <a:pPr algn="ctr"/>
+            <a:endParaRPr/>
           </a:p>
         </p:txBody>
       </p:sp>
@@ -19480,6 +20102,7 @@
           <a:lstStyle/>
           <a:p>
             <a:pPr algn="ctr"/>
+            <a:endParaRPr/>
           </a:p>
         </p:txBody>
       </p:sp>
@@ -19593,6 +20216,7 @@
           <a:lstStyle/>
           <a:p>
             <a:pPr algn="ctr"/>
+            <a:endParaRPr/>
           </a:p>
         </p:txBody>
       </p:sp>
@@ -19706,6 +20330,7 @@
           <a:lstStyle/>
           <a:p>
             <a:pPr algn="ctr"/>
+            <a:endParaRPr/>
           </a:p>
         </p:txBody>
       </p:sp>
@@ -19820,7 +20445,7 @@
 </file>
 
 <file path=ppt/slides/slide3.xml><?xml version="1.0" encoding="utf-8"?>
-<p:sld xmlns:a="http://schemas.openxmlformats.org/drawingml/2006/main" xmlns:p="http://schemas.openxmlformats.org/presentationml/2006/main" xmlns:r="http://schemas.openxmlformats.org/officeDocument/2006/relationships">
+<p:sld xmlns:a="http://schemas.openxmlformats.org/drawingml/2006/main" xmlns:r="http://schemas.openxmlformats.org/officeDocument/2006/relationships" xmlns:p="http://schemas.openxmlformats.org/presentationml/2006/main">
   <p:cSld>
     <p:bg>
       <p:bgPr>
@@ -19836,7 +20461,14 @@
         <p:cNvGrpSpPr/>
         <p:nvPr/>
       </p:nvGrpSpPr>
-      <p:grpSpPr/>
+      <p:grpSpPr>
+        <a:xfrm>
+          <a:off x="0" y="0"/>
+          <a:ext cx="0" cy="0"/>
+          <a:chOff x="0" y="0"/>
+          <a:chExt cx="0" cy="0"/>
+        </a:xfrm>
+      </p:grpSpPr>
       <p:sp>
         <p:nvSpPr>
           <p:cNvPr id="2" name="Rectangle 1"/>
@@ -19877,6 +20509,7 @@
           <a:lstStyle/>
           <a:p>
             <a:pPr algn="ctr"/>
+            <a:endParaRPr/>
           </a:p>
         </p:txBody>
       </p:sp>
@@ -19954,6 +20587,7 @@
           <a:lstStyle/>
           <a:p>
             <a:pPr algn="ctr"/>
+            <a:endParaRPr/>
           </a:p>
         </p:txBody>
       </p:sp>
@@ -20067,6 +20701,7 @@
           <a:lstStyle/>
           <a:p>
             <a:pPr algn="ctr"/>
+            <a:endParaRPr/>
           </a:p>
         </p:txBody>
       </p:sp>
@@ -20316,6 +20951,7 @@
           <a:lstStyle/>
           <a:p>
             <a:pPr algn="ctr"/>
+            <a:endParaRPr/>
           </a:p>
         </p:txBody>
       </p:sp>
@@ -20565,6 +21201,7 @@
           <a:lstStyle/>
           <a:p>
             <a:pPr algn="ctr"/>
+            <a:endParaRPr/>
           </a:p>
         </p:txBody>
       </p:sp>
@@ -20814,6 +21451,7 @@
           <a:lstStyle/>
           <a:p>
             <a:pPr algn="ctr"/>
+            <a:endParaRPr/>
           </a:p>
         </p:txBody>
       </p:sp>
@@ -21063,6 +21701,7 @@
           <a:lstStyle/>
           <a:p>
             <a:pPr algn="ctr"/>
+            <a:endParaRPr/>
           </a:p>
         </p:txBody>
       </p:sp>
@@ -21313,7 +21952,7 @@
 </file>
 
 <file path=ppt/slides/slide4.xml><?xml version="1.0" encoding="utf-8"?>
-<p:sld xmlns:a="http://schemas.openxmlformats.org/drawingml/2006/main" xmlns:p="http://schemas.openxmlformats.org/presentationml/2006/main" xmlns:r="http://schemas.openxmlformats.org/officeDocument/2006/relationships">
+<p:sld xmlns:a="http://schemas.openxmlformats.org/drawingml/2006/main" xmlns:r="http://schemas.openxmlformats.org/officeDocument/2006/relationships" xmlns:p="http://schemas.openxmlformats.org/presentationml/2006/main">
   <p:cSld>
     <p:bg>
       <p:bgPr>
@@ -21329,7 +21968,14 @@
         <p:cNvGrpSpPr/>
         <p:nvPr/>
       </p:nvGrpSpPr>
-      <p:grpSpPr/>
+      <p:grpSpPr>
+        <a:xfrm>
+          <a:off x="0" y="0"/>
+          <a:ext cx="0" cy="0"/>
+          <a:chOff x="0" y="0"/>
+          <a:chExt cx="0" cy="0"/>
+        </a:xfrm>
+      </p:grpSpPr>
       <p:sp>
         <p:nvSpPr>
           <p:cNvPr id="2" name="Rectangle 1"/>
@@ -21370,6 +22016,7 @@
           <a:lstStyle/>
           <a:p>
             <a:pPr algn="ctr"/>
+            <a:endParaRPr/>
           </a:p>
         </p:txBody>
       </p:sp>
@@ -21447,6 +22094,7 @@
           <a:lstStyle/>
           <a:p>
             <a:pPr algn="ctr"/>
+            <a:endParaRPr/>
           </a:p>
         </p:txBody>
       </p:sp>
@@ -21526,6 +22174,7 @@
           <a:lstStyle/>
           <a:p>
             <a:pPr algn="ctr"/>
+            <a:endParaRPr/>
           </a:p>
         </p:txBody>
       </p:sp>
@@ -21640,6 +22289,7 @@
           <a:lstStyle/>
           <a:p>
             <a:pPr algn="ctr"/>
+            <a:endParaRPr/>
           </a:p>
         </p:txBody>
       </p:sp>
@@ -21754,6 +22404,7 @@
           <a:lstStyle/>
           <a:p>
             <a:pPr algn="ctr"/>
+            <a:endParaRPr/>
           </a:p>
         </p:txBody>
       </p:sp>
@@ -21868,6 +22519,7 @@
           <a:lstStyle/>
           <a:p>
             <a:pPr algn="ctr"/>
+            <a:endParaRPr/>
           </a:p>
         </p:txBody>
       </p:sp>
@@ -22014,6 +22666,7 @@
           <a:lstStyle/>
           <a:p>
             <a:pPr algn="ctr"/>
+            <a:endParaRPr/>
           </a:p>
         </p:txBody>
       </p:sp>
@@ -22159,6 +22812,7 @@
           <a:lstStyle/>
           <a:p>
             <a:pPr algn="ctr"/>
+            <a:endParaRPr/>
           </a:p>
         </p:txBody>
       </p:sp>
@@ -22304,6 +22958,7 @@
           <a:lstStyle/>
           <a:p>
             <a:pPr algn="ctr"/>
+            <a:endParaRPr/>
           </a:p>
         </p:txBody>
       </p:sp>
@@ -22449,6 +23104,7 @@
           <a:lstStyle/>
           <a:p>
             <a:pPr algn="ctr"/>
+            <a:endParaRPr/>
           </a:p>
         </p:txBody>
       </p:sp>
@@ -22594,6 +23250,7 @@
           <a:lstStyle/>
           <a:p>
             <a:pPr algn="ctr"/>
+            <a:endParaRPr/>
           </a:p>
         </p:txBody>
       </p:sp>
@@ -22739,6 +23396,7 @@
           <a:lstStyle/>
           <a:p>
             <a:pPr algn="ctr"/>
+            <a:endParaRPr/>
           </a:p>
         </p:txBody>
       </p:sp>
@@ -22884,6 +23542,7 @@
           <a:lstStyle/>
           <a:p>
             <a:pPr algn="ctr"/>
+            <a:endParaRPr/>
           </a:p>
         </p:txBody>
       </p:sp>
@@ -23029,6 +23688,7 @@
           <a:lstStyle/>
           <a:p>
             <a:pPr algn="ctr"/>
+            <a:endParaRPr/>
           </a:p>
         </p:txBody>
       </p:sp>
@@ -23174,6 +23834,7 @@
           <a:lstStyle/>
           <a:p>
             <a:pPr algn="ctr"/>
+            <a:endParaRPr/>
           </a:p>
         </p:txBody>
       </p:sp>
@@ -23319,6 +23980,7 @@
           <a:lstStyle/>
           <a:p>
             <a:pPr algn="ctr"/>
+            <a:endParaRPr/>
           </a:p>
         </p:txBody>
       </p:sp>
@@ -23535,7 +24197,7 @@
 </file>
 
 <file path=ppt/slides/slide5.xml><?xml version="1.0" encoding="utf-8"?>
-<p:sld xmlns:a="http://schemas.openxmlformats.org/drawingml/2006/main" xmlns:p="http://schemas.openxmlformats.org/presentationml/2006/main" xmlns:r="http://schemas.openxmlformats.org/officeDocument/2006/relationships">
+<p:sld xmlns:a="http://schemas.openxmlformats.org/drawingml/2006/main" xmlns:r="http://schemas.openxmlformats.org/officeDocument/2006/relationships" xmlns:p="http://schemas.openxmlformats.org/presentationml/2006/main">
   <p:cSld>
     <p:bg>
       <p:bgPr>
@@ -23551,7 +24213,14 @@
         <p:cNvGrpSpPr/>
         <p:nvPr/>
       </p:nvGrpSpPr>
-      <p:grpSpPr/>
+      <p:grpSpPr>
+        <a:xfrm>
+          <a:off x="0" y="0"/>
+          <a:ext cx="0" cy="0"/>
+          <a:chOff x="0" y="0"/>
+          <a:chExt cx="0" cy="0"/>
+        </a:xfrm>
+      </p:grpSpPr>
       <p:sp>
         <p:nvSpPr>
           <p:cNvPr id="2" name="Rectangle 1"/>
@@ -23592,6 +24261,7 @@
           <a:lstStyle/>
           <a:p>
             <a:pPr algn="ctr"/>
+            <a:endParaRPr/>
           </a:p>
         </p:txBody>
       </p:sp>
@@ -23669,6 +24339,7 @@
           <a:lstStyle/>
           <a:p>
             <a:pPr algn="ctr"/>
+            <a:endParaRPr/>
           </a:p>
         </p:txBody>
       </p:sp>
@@ -23748,6 +24419,7 @@
           <a:lstStyle/>
           <a:p>
             <a:pPr algn="ctr"/>
+            <a:endParaRPr/>
           </a:p>
         </p:txBody>
       </p:sp>
@@ -23791,6 +24463,7 @@
           <a:lstStyle/>
           <a:p>
             <a:pPr algn="ctr"/>
+            <a:endParaRPr/>
           </a:p>
         </p:txBody>
       </p:sp>
@@ -23938,6 +24611,7 @@
           <a:lstStyle/>
           <a:p>
             <a:pPr algn="ctr"/>
+            <a:endParaRPr/>
           </a:p>
         </p:txBody>
       </p:sp>
@@ -23981,6 +24655,7 @@
           <a:lstStyle/>
           <a:p>
             <a:pPr algn="ctr"/>
+            <a:endParaRPr/>
           </a:p>
         </p:txBody>
       </p:sp>
@@ -24128,6 +24803,7 @@
           <a:lstStyle/>
           <a:p>
             <a:pPr algn="ctr"/>
+            <a:endParaRPr/>
           </a:p>
         </p:txBody>
       </p:sp>
@@ -24171,6 +24847,7 @@
           <a:lstStyle/>
           <a:p>
             <a:pPr algn="ctr"/>
+            <a:endParaRPr/>
           </a:p>
         </p:txBody>
       </p:sp>
@@ -24318,6 +24995,7 @@
           <a:lstStyle/>
           <a:p>
             <a:pPr algn="ctr"/>
+            <a:endParaRPr/>
           </a:p>
         </p:txBody>
       </p:sp>
@@ -24361,6 +25039,7 @@
           <a:lstStyle/>
           <a:p>
             <a:pPr algn="ctr"/>
+            <a:endParaRPr/>
           </a:p>
         </p:txBody>
       </p:sp>
@@ -24508,6 +25187,7 @@
           <a:lstStyle/>
           <a:p>
             <a:pPr algn="ctr"/>
+            <a:endParaRPr/>
           </a:p>
         </p:txBody>
       </p:sp>
@@ -24551,6 +25231,7 @@
           <a:lstStyle/>
           <a:p>
             <a:pPr algn="ctr"/>
+            <a:endParaRPr/>
           </a:p>
         </p:txBody>
       </p:sp>
@@ -24698,6 +25379,7 @@
           <a:lstStyle/>
           <a:p>
             <a:pPr algn="ctr"/>
+            <a:endParaRPr/>
           </a:p>
         </p:txBody>
       </p:sp>
@@ -24741,6 +25423,7 @@
           <a:lstStyle/>
           <a:p>
             <a:pPr algn="ctr"/>
+            <a:endParaRPr/>
           </a:p>
         </p:txBody>
       </p:sp>
@@ -24888,6 +25571,7 @@
           <a:lstStyle/>
           <a:p>
             <a:pPr algn="ctr"/>
+            <a:endParaRPr/>
           </a:p>
         </p:txBody>
       </p:sp>
@@ -24931,6 +25615,7 @@
           <a:lstStyle/>
           <a:p>
             <a:pPr algn="ctr"/>
+            <a:endParaRPr/>
           </a:p>
         </p:txBody>
       </p:sp>
@@ -25078,6 +25763,7 @@
           <a:lstStyle/>
           <a:p>
             <a:pPr algn="ctr"/>
+            <a:endParaRPr/>
           </a:p>
         </p:txBody>
       </p:sp>
@@ -25121,6 +25807,7 @@
           <a:lstStyle/>
           <a:p>
             <a:pPr algn="ctr"/>
+            <a:endParaRPr/>
           </a:p>
         </p:txBody>
       </p:sp>
@@ -25235,7 +25922,7 @@
 </file>
 
 <file path=ppt/slides/slide6.xml><?xml version="1.0" encoding="utf-8"?>
-<p:sld xmlns:a="http://schemas.openxmlformats.org/drawingml/2006/main" xmlns:p="http://schemas.openxmlformats.org/presentationml/2006/main" xmlns:r="http://schemas.openxmlformats.org/officeDocument/2006/relationships">
+<p:sld xmlns:a="http://schemas.openxmlformats.org/drawingml/2006/main" xmlns:r="http://schemas.openxmlformats.org/officeDocument/2006/relationships" xmlns:p="http://schemas.openxmlformats.org/presentationml/2006/main">
   <p:cSld>
     <p:bg>
       <p:bgPr>
@@ -25251,7 +25938,14 @@
         <p:cNvGrpSpPr/>
         <p:nvPr/>
       </p:nvGrpSpPr>
-      <p:grpSpPr/>
+      <p:grpSpPr>
+        <a:xfrm>
+          <a:off x="0" y="0"/>
+          <a:ext cx="0" cy="0"/>
+          <a:chOff x="0" y="0"/>
+          <a:chExt cx="0" cy="0"/>
+        </a:xfrm>
+      </p:grpSpPr>
       <p:sp>
         <p:nvSpPr>
           <p:cNvPr id="2" name="Rectangle 1"/>
@@ -25292,6 +25986,7 @@
           <a:lstStyle/>
           <a:p>
             <a:pPr algn="ctr"/>
+            <a:endParaRPr/>
           </a:p>
         </p:txBody>
       </p:sp>
@@ -25369,6 +26064,7 @@
           <a:lstStyle/>
           <a:p>
             <a:pPr algn="ctr"/>
+            <a:endParaRPr/>
           </a:p>
         </p:txBody>
       </p:sp>
@@ -25448,6 +26144,7 @@
           <a:lstStyle/>
           <a:p>
             <a:pPr algn="ctr"/>
+            <a:endParaRPr/>
           </a:p>
         </p:txBody>
       </p:sp>
@@ -25525,6 +26222,7 @@
           <a:lstStyle/>
           <a:p>
             <a:pPr algn="ctr"/>
+            <a:endParaRPr/>
           </a:p>
         </p:txBody>
       </p:sp>
@@ -25636,6 +26334,7 @@
           <a:lstStyle/>
           <a:p>
             <a:pPr algn="ctr"/>
+            <a:endParaRPr/>
           </a:p>
         </p:txBody>
       </p:sp>
@@ -25747,6 +26446,7 @@
           <a:lstStyle/>
           <a:p>
             <a:pPr algn="ctr"/>
+            <a:endParaRPr/>
           </a:p>
         </p:txBody>
       </p:sp>
@@ -25858,6 +26558,7 @@
           <a:lstStyle/>
           <a:p>
             <a:pPr algn="ctr"/>
+            <a:endParaRPr/>
           </a:p>
         </p:txBody>
       </p:sp>
@@ -25969,6 +26670,7 @@
           <a:lstStyle/>
           <a:p>
             <a:pPr algn="ctr"/>
+            <a:endParaRPr/>
           </a:p>
         </p:txBody>
       </p:sp>
@@ -26080,6 +26782,7 @@
           <a:lstStyle/>
           <a:p>
             <a:pPr algn="ctr"/>
+            <a:endParaRPr/>
           </a:p>
         </p:txBody>
       </p:sp>
@@ -26193,6 +26896,7 @@
           <a:lstStyle/>
           <a:p>
             <a:pPr algn="ctr"/>
+            <a:endParaRPr/>
           </a:p>
         </p:txBody>
       </p:sp>
@@ -26270,6 +26974,7 @@
           <a:lstStyle/>
           <a:p>
             <a:pPr algn="ctr"/>
+            <a:endParaRPr/>
           </a:p>
         </p:txBody>
       </p:sp>
@@ -26381,6 +27086,7 @@
           <a:lstStyle/>
           <a:p>
             <a:pPr algn="ctr"/>
+            <a:endParaRPr/>
           </a:p>
         </p:txBody>
       </p:sp>
@@ -26492,6 +27198,7 @@
           <a:lstStyle/>
           <a:p>
             <a:pPr algn="ctr"/>
+            <a:endParaRPr/>
           </a:p>
         </p:txBody>
       </p:sp>
@@ -26603,6 +27310,7 @@
           <a:lstStyle/>
           <a:p>
             <a:pPr algn="ctr"/>
+            <a:endParaRPr/>
           </a:p>
         </p:txBody>
       </p:sp>
@@ -26714,6 +27422,7 @@
           <a:lstStyle/>
           <a:p>
             <a:pPr algn="ctr"/>
+            <a:endParaRPr/>
           </a:p>
         </p:txBody>
       </p:sp>
@@ -26825,6 +27534,7 @@
           <a:lstStyle/>
           <a:p>
             <a:pPr algn="ctr"/>
+            <a:endParaRPr/>
           </a:p>
         </p:txBody>
       </p:sp>
@@ -26905,7 +27615,7 @@
 </file>
 
 <file path=ppt/slides/slide7.xml><?xml version="1.0" encoding="utf-8"?>
-<p:sld xmlns:a="http://schemas.openxmlformats.org/drawingml/2006/main" xmlns:p="http://schemas.openxmlformats.org/presentationml/2006/main" xmlns:r="http://schemas.openxmlformats.org/officeDocument/2006/relationships">
+<p:sld xmlns:a="http://schemas.openxmlformats.org/drawingml/2006/main" xmlns:r="http://schemas.openxmlformats.org/officeDocument/2006/relationships" xmlns:p="http://schemas.openxmlformats.org/presentationml/2006/main">
   <p:cSld>
     <p:bg>
       <p:bgPr>
@@ -26921,7 +27631,14 @@
         <p:cNvGrpSpPr/>
         <p:nvPr/>
       </p:nvGrpSpPr>
-      <p:grpSpPr/>
+      <p:grpSpPr>
+        <a:xfrm>
+          <a:off x="0" y="0"/>
+          <a:ext cx="0" cy="0"/>
+          <a:chOff x="0" y="0"/>
+          <a:chExt cx="0" cy="0"/>
+        </a:xfrm>
+      </p:grpSpPr>
       <p:sp>
         <p:nvSpPr>
           <p:cNvPr id="2" name="Rectangle 1"/>
@@ -26962,6 +27679,7 @@
           <a:lstStyle/>
           <a:p>
             <a:pPr algn="ctr"/>
+            <a:endParaRPr/>
           </a:p>
         </p:txBody>
       </p:sp>
@@ -27039,6 +27757,7 @@
           <a:lstStyle/>
           <a:p>
             <a:pPr algn="ctr"/>
+            <a:endParaRPr/>
           </a:p>
         </p:txBody>
       </p:sp>
@@ -27118,6 +27837,7 @@
           <a:lstStyle/>
           <a:p>
             <a:pPr algn="ctr"/>
+            <a:endParaRPr/>
           </a:p>
         </p:txBody>
       </p:sp>
@@ -27195,6 +27915,7 @@
           <a:lstStyle/>
           <a:p>
             <a:pPr algn="ctr"/>
+            <a:endParaRPr/>
           </a:p>
         </p:txBody>
       </p:sp>
@@ -27306,6 +28027,7 @@
           <a:lstStyle/>
           <a:p>
             <a:pPr algn="ctr"/>
+            <a:endParaRPr/>
           </a:p>
         </p:txBody>
       </p:sp>
@@ -27417,6 +28139,7 @@
           <a:lstStyle/>
           <a:p>
             <a:pPr algn="ctr"/>
+            <a:endParaRPr/>
           </a:p>
         </p:txBody>
       </p:sp>
@@ -27528,6 +28251,7 @@
           <a:lstStyle/>
           <a:p>
             <a:pPr algn="ctr"/>
+            <a:endParaRPr/>
           </a:p>
         </p:txBody>
       </p:sp>
@@ -27639,6 +28363,7 @@
           <a:lstStyle/>
           <a:p>
             <a:pPr algn="ctr"/>
+            <a:endParaRPr/>
           </a:p>
         </p:txBody>
       </p:sp>
@@ -27752,6 +28477,7 @@
           <a:lstStyle/>
           <a:p>
             <a:pPr algn="ctr"/>
+            <a:endParaRPr/>
           </a:p>
         </p:txBody>
       </p:sp>
@@ -27829,6 +28555,7 @@
           <a:lstStyle/>
           <a:p>
             <a:pPr algn="ctr"/>
+            <a:endParaRPr/>
           </a:p>
         </p:txBody>
       </p:sp>
@@ -27940,6 +28667,7 @@
           <a:lstStyle/>
           <a:p>
             <a:pPr algn="ctr"/>
+            <a:endParaRPr/>
           </a:p>
         </p:txBody>
       </p:sp>
@@ -28051,6 +28779,7 @@
           <a:lstStyle/>
           <a:p>
             <a:pPr algn="ctr"/>
+            <a:endParaRPr/>
           </a:p>
         </p:txBody>
       </p:sp>
@@ -28162,6 +28891,7 @@
           <a:lstStyle/>
           <a:p>
             <a:pPr algn="ctr"/>
+            <a:endParaRPr/>
           </a:p>
         </p:txBody>
       </p:sp>
@@ -28273,6 +29003,7 @@
           <a:lstStyle/>
           <a:p>
             <a:pPr algn="ctr"/>
+            <a:endParaRPr/>
           </a:p>
         </p:txBody>
       </p:sp>
@@ -28353,7 +29084,7 @@
 </file>
 
 <file path=ppt/slides/slide8.xml><?xml version="1.0" encoding="utf-8"?>
-<p:sld xmlns:a="http://schemas.openxmlformats.org/drawingml/2006/main" xmlns:p="http://schemas.openxmlformats.org/presentationml/2006/main" xmlns:r="http://schemas.openxmlformats.org/officeDocument/2006/relationships">
+<p:sld xmlns:a="http://schemas.openxmlformats.org/drawingml/2006/main" xmlns:r="http://schemas.openxmlformats.org/officeDocument/2006/relationships" xmlns:p="http://schemas.openxmlformats.org/presentationml/2006/main">
   <p:cSld>
     <p:bg>
       <p:bgPr>
@@ -28369,7 +29100,14 @@
         <p:cNvGrpSpPr/>
         <p:nvPr/>
       </p:nvGrpSpPr>
-      <p:grpSpPr/>
+      <p:grpSpPr>
+        <a:xfrm>
+          <a:off x="0" y="0"/>
+          <a:ext cx="0" cy="0"/>
+          <a:chOff x="0" y="0"/>
+          <a:chExt cx="0" cy="0"/>
+        </a:xfrm>
+      </p:grpSpPr>
       <p:sp>
         <p:nvSpPr>
           <p:cNvPr id="2" name="Rectangle 1"/>
@@ -28410,6 +29148,7 @@
           <a:lstStyle/>
           <a:p>
             <a:pPr algn="ctr"/>
+            <a:endParaRPr/>
           </a:p>
         </p:txBody>
       </p:sp>
@@ -28487,6 +29226,7 @@
           <a:lstStyle/>
           <a:p>
             <a:pPr algn="ctr"/>
+            <a:endParaRPr/>
           </a:p>
         </p:txBody>
       </p:sp>
@@ -28566,6 +29306,7 @@
           <a:lstStyle/>
           <a:p>
             <a:pPr algn="ctr"/>
+            <a:endParaRPr/>
           </a:p>
         </p:txBody>
       </p:sp>
@@ -28679,6 +29420,7 @@
           <a:lstStyle/>
           <a:p>
             <a:pPr algn="ctr"/>
+            <a:endParaRPr/>
           </a:p>
         </p:txBody>
       </p:sp>
@@ -28792,6 +29534,7 @@
           <a:lstStyle/>
           <a:p>
             <a:pPr algn="ctr"/>
+            <a:endParaRPr/>
           </a:p>
         </p:txBody>
       </p:sp>
@@ -28905,6 +29648,7 @@
           <a:lstStyle/>
           <a:p>
             <a:pPr algn="ctr"/>
+            <a:endParaRPr/>
           </a:p>
         </p:txBody>
       </p:sp>
@@ -29018,6 +29762,7 @@
           <a:lstStyle/>
           <a:p>
             <a:pPr algn="ctr"/>
+            <a:endParaRPr/>
           </a:p>
         </p:txBody>
       </p:sp>
@@ -29131,6 +29876,7 @@
           <a:lstStyle/>
           <a:p>
             <a:pPr algn="ctr"/>
+            <a:endParaRPr/>
           </a:p>
         </p:txBody>
       </p:sp>
@@ -29244,6 +29990,7 @@
           <a:lstStyle/>
           <a:p>
             <a:pPr algn="ctr"/>
+            <a:endParaRPr/>
           </a:p>
         </p:txBody>
       </p:sp>
@@ -29357,6 +30104,7 @@
           <a:lstStyle/>
           <a:p>
             <a:pPr algn="ctr"/>
+            <a:endParaRPr/>
           </a:p>
         </p:txBody>
       </p:sp>
@@ -29470,6 +30218,7 @@
           <a:lstStyle/>
           <a:p>
             <a:pPr algn="ctr"/>
+            <a:endParaRPr/>
           </a:p>
         </p:txBody>
       </p:sp>
@@ -29583,6 +30332,7 @@
           <a:lstStyle/>
           <a:p>
             <a:pPr algn="ctr"/>
+            <a:endParaRPr/>
           </a:p>
         </p:txBody>
       </p:sp>
@@ -29663,7 +30413,7 @@
 </file>
 
 <file path=ppt/slides/slide9.xml><?xml version="1.0" encoding="utf-8"?>
-<p:sld xmlns:a="http://schemas.openxmlformats.org/drawingml/2006/main" xmlns:p="http://schemas.openxmlformats.org/presentationml/2006/main" xmlns:r="http://schemas.openxmlformats.org/officeDocument/2006/relationships">
+<p:sld xmlns:a="http://schemas.openxmlformats.org/drawingml/2006/main" xmlns:r="http://schemas.openxmlformats.org/officeDocument/2006/relationships" xmlns:p="http://schemas.openxmlformats.org/presentationml/2006/main">
   <p:cSld>
     <p:bg>
       <p:bgPr>
@@ -29679,7 +30429,14 @@
         <p:cNvGrpSpPr/>
         <p:nvPr/>
       </p:nvGrpSpPr>
-      <p:grpSpPr/>
+      <p:grpSpPr>
+        <a:xfrm>
+          <a:off x="0" y="0"/>
+          <a:ext cx="0" cy="0"/>
+          <a:chOff x="0" y="0"/>
+          <a:chExt cx="0" cy="0"/>
+        </a:xfrm>
+      </p:grpSpPr>
       <p:sp>
         <p:nvSpPr>
           <p:cNvPr id="2" name="Rectangle 1"/>
@@ -29720,6 +30477,7 @@
           <a:lstStyle/>
           <a:p>
             <a:pPr algn="ctr"/>
+            <a:endParaRPr/>
           </a:p>
         </p:txBody>
       </p:sp>
@@ -29797,6 +30555,7 @@
           <a:lstStyle/>
           <a:p>
             <a:pPr algn="ctr"/>
+            <a:endParaRPr/>
           </a:p>
         </p:txBody>
       </p:sp>
@@ -29876,6 +30635,7 @@
           <a:lstStyle/>
           <a:p>
             <a:pPr algn="ctr"/>
+            <a:endParaRPr/>
           </a:p>
         </p:txBody>
       </p:sp>
@@ -29955,6 +30715,7 @@
           <a:lstStyle/>
           <a:p>
             <a:pPr algn="ctr"/>
+            <a:endParaRPr/>
           </a:p>
         </p:txBody>
       </p:sp>
@@ -30034,6 +30795,7 @@
           <a:lstStyle/>
           <a:p>
             <a:pPr algn="ctr"/>
+            <a:endParaRPr/>
           </a:p>
         </p:txBody>
       </p:sp>
@@ -30113,6 +30875,7 @@
           <a:lstStyle/>
           <a:p>
             <a:pPr algn="ctr"/>
+            <a:endParaRPr/>
           </a:p>
         </p:txBody>
       </p:sp>
@@ -30192,6 +30955,7 @@
           <a:lstStyle/>
           <a:p>
             <a:pPr algn="ctr"/>
+            <a:endParaRPr/>
           </a:p>
         </p:txBody>
       </p:sp>
@@ -30271,6 +31035,7 @@
           <a:lstStyle/>
           <a:p>
             <a:pPr algn="ctr"/>
+            <a:endParaRPr/>
           </a:p>
         </p:txBody>
       </p:sp>
@@ -30350,6 +31115,7 @@
           <a:lstStyle/>
           <a:p>
             <a:pPr algn="ctr"/>
+            <a:endParaRPr/>
           </a:p>
         </p:txBody>
       </p:sp>
@@ -30429,6 +31195,7 @@
           <a:lstStyle/>
           <a:p>
             <a:pPr algn="ctr"/>
+            <a:endParaRPr/>
           </a:p>
         </p:txBody>
       </p:sp>
@@ -30508,6 +31275,7 @@
           <a:lstStyle/>
           <a:p>
             <a:pPr algn="ctr"/>
+            <a:endParaRPr/>
           </a:p>
         </p:txBody>
       </p:sp>
@@ -30587,6 +31355,7 @@
           <a:lstStyle/>
           <a:p>
             <a:pPr algn="ctr"/>
+            <a:endParaRPr/>
           </a:p>
         </p:txBody>
       </p:sp>
@@ -30666,6 +31435,7 @@
           <a:lstStyle/>
           <a:p>
             <a:pPr algn="ctr"/>
+            <a:endParaRPr/>
           </a:p>
         </p:txBody>
       </p:sp>
@@ -30745,6 +31515,7 @@
           <a:lstStyle/>
           <a:p>
             <a:pPr algn="ctr"/>
+            <a:endParaRPr/>
           </a:p>
         </p:txBody>
       </p:sp>
